--- a/docs/slides/capstone-final.pptx
+++ b/docs/slides/capstone-final.pptx
@@ -4,6 +4,9 @@
   <p:sldMasterIdLst>
     <p:sldMasterId id="2147483648" r:id="rId1"/>
   </p:sldMasterIdLst>
+  <p:notesMasterIdLst>
+    <p:notesMasterId r:id="rId16"/>
+  </p:notesMasterIdLst>
   <p:sldIdLst>
     <p:sldId id="256" r:id="rId2"/>
     <p:sldId id="257" r:id="rId3"/>
@@ -20,9 +23,6 @@
     <p:sldId id="268" r:id="rId14"/>
     <p:sldId id="269" r:id="rId15"/>
   </p:sldIdLst>
-  <p:notesMasterIdLst>
-    <p:notesMasterId r:id="rId16"/>
-  </p:notesMasterIdLst>
   <p:sldSz cx="12192000" cy="6858000"/>
   <p:notesSz cx="6858000" cy="12192000"/>
   <p:defaultTextStyle>
@@ -120,12 +120,12 @@
   <p:extLst>
     <p:ext uri="{521415D9-36F7-43E2-AB2F-B90AF26B5E84}">
       <p14:sectionLst xmlns:p14="http://schemas.microsoft.com/office/powerpoint/2010/main">
-        <p14:section name="Opening" id="{e38108a2-d61f-dfe6-9545-102a5d462d0a}">
+        <p14:section name="Opening" id="{E38108A2-D61F-DFE6-9545-102A5D462D0A}">
           <p14:sldIdLst>
             <p14:sldId id="256"/>
           </p14:sldIdLst>
         </p14:section>
-        <p14:section name="Architecture" id="{f76b243d-7286-25ec-9d04-2559ecb70dd9}">
+        <p14:section name="Architecture" id="{F76B243D-7286-25EC-9D04-2559ECB70DD9}">
           <p14:sldIdLst>
             <p14:sldId id="257"/>
             <p14:sldId id="258"/>
@@ -134,7 +134,7 @@
             <p14:sldId id="261"/>
           </p14:sldIdLst>
         </p14:section>
-        <p14:section name="Implementation" id="{b2434c25-559c-09cb-1ebb-ec62f51f9b9b}">
+        <p14:section name="Implementation" id="{B2434C25-559C-09CB-1EBB-EC62F51F9B9B}">
           <p14:sldIdLst>
             <p14:sldId id="262"/>
             <p14:sldId id="263"/>
@@ -143,7 +143,7 @@
             <p14:sldId id="266"/>
           </p14:sldIdLst>
         </p14:section>
-        <p14:section name="Lessons" id="{1765c54b-27d1-6378-4a08-435ade8d6a4a}">
+        <p14:section name="Lessons" id="{1765C54B-27D1-6378-4A08-435ADE8D6A4A}">
           <p14:sldIdLst>
             <p14:sldId id="267"/>
             <p14:sldId id="268"/>
@@ -160,9 +160,11 @@
 </file>
 
 <file path=ppt/charts/chart1.xml><?xml version="1.0" encoding="utf-8"?>
-<c:chartSpace xmlns:c="http://schemas.openxmlformats.org/drawingml/2006/chart" xmlns:a="http://schemas.openxmlformats.org/drawingml/2006/main" xmlns:r="http://schemas.openxmlformats.org/officeDocument/2006/relationships">
+<c:chartSpace xmlns:c="http://schemas.openxmlformats.org/drawingml/2006/chart" xmlns:a="http://schemas.openxmlformats.org/drawingml/2006/main" xmlns:r="http://schemas.openxmlformats.org/officeDocument/2006/relationships" xmlns:c16r2="http://schemas.microsoft.com/office/drawing/2015/06/chart">
   <c:date1904 val="0"/>
+  <c:lang val="en-US"/>
   <c:roundedCorners val="1"/>
+  <c:style val="2"/>
   <c:chart>
     <c:title>
       <c:tx>
@@ -179,18 +181,17 @@
               </a:defRPr>
             </a:pPr>
             <a:r>
-              <a:rPr sz="1400" b="0" i="0" u="none" strike="noStrike">
+              <a:rPr lang="en-US" sz="1400" b="0" i="0" u="none" strike="noStrike">
                 <a:solidFill>
                   <a:srgbClr val="0B3C49"/>
                 </a:solidFill>
                 <a:latin typeface="+mn-lt"/>
               </a:rPr>
-              <a:t>276 tests per module (mvn verify)</a:t>
+              <a:t>331 tests per module (mvn verify)</a:t>
             </a:r>
           </a:p>
         </c:rich>
       </c:tx>
-      <c:layout/>
       <c:overlay val="0"/>
     </c:title>
     <c:autoTitleDeleted val="0"/>
@@ -223,18 +224,26 @@
           <c:invertIfNegative val="0"/>
           <c:dLbls>
             <c:numFmt formatCode="#,##0" sourceLinked="0"/>
+            <c:spPr>
+              <a:noFill/>
+              <a:ln>
+                <a:noFill/>
+              </a:ln>
+              <a:effectLst/>
+            </c:spPr>
             <c:txPr>
               <a:bodyPr/>
               <a:lstStyle/>
               <a:p>
                 <a:pPr>
-                  <a:defRPr b="0" i="0" strike="noStrike" sz="1200" u="none">
+                  <a:defRPr sz="1200" b="0" i="0" u="none" strike="noStrike">
                     <a:solidFill>
                       <a:srgbClr val="1B2A30"/>
                     </a:solidFill>
                     <a:latin typeface="+mn-lt"/>
                   </a:defRPr>
                 </a:pPr>
+                <a:endParaRPr lang="en-US"/>
               </a:p>
             </c:txPr>
             <c:showLegendKey val="0"/>
@@ -244,104 +253,100 @@
             <c:showPercent val="0"/>
             <c:showBubbleSize val="0"/>
             <c:showLeaderLines val="0"/>
+            <c:extLst>
+              <c:ext xmlns:c15="http://schemas.microsoft.com/office/drawing/2012/chart" uri="{CE6537A1-D6FC-4f65-9D91-7224C49458BB}">
+                <c15:showLeaderLines val="0"/>
+              </c:ext>
+            </c:extLst>
           </c:dLbls>
           <c:cat>
-            <c:multiLvlStrRef>
-              <c:f>Sheet1!$A$2:$A$9</c:f>
-              <c:multiLvlStrCache>
-                <c:ptCount val="8"/>
-                <c:lvl>
-                  <c:pt idx="0">
-                    <c:v>payment-service</c:v>
-                  </c:pt>
-                  <c:pt idx="1">
-                    <c:v>order-service</c:v>
-                  </c:pt>
-                  <c:pt idx="2">
-                    <c:v>inventory-service</c:v>
-                  </c:pt>
-                  <c:pt idx="3">
-                    <c:v>api-gateway</c:v>
-                  </c:pt>
-                  <c:pt idx="4">
-                    <c:v>product-service</c:v>
-                  </c:pt>
-                  <c:pt idx="5">
-                    <c:v>notification-service</c:v>
-                  </c:pt>
-                  <c:pt idx="6">
-                    <c:v>config-server</c:v>
-                  </c:pt>
-                  <c:pt idx="7">
-                    <c:v>eureka-server</c:v>
-                  </c:pt>
-                </c:lvl>
-              </c:multiLvlStrCache>
-            </c:multiLvlStrRef>
+            <c:strRef>
+              <c:f>Sheet1!$A$2:$A$10</c:f>
+              <c:strCache>
+                <c:ptCount val="9"/>
+                <c:pt idx="0">
+                  <c:v>payment-service</c:v>
+                </c:pt>
+                <c:pt idx="1">
+                  <c:v>order-service</c:v>
+                </c:pt>
+                <c:pt idx="2">
+                  <c:v>inventory-service</c:v>
+                </c:pt>
+                <c:pt idx="3">
+                  <c:v>api-gateway</c:v>
+                </c:pt>
+                <c:pt idx="4">
+                  <c:v>product-service</c:v>
+                </c:pt>
+                <c:pt idx="5">
+                  <c:v>notification-service</c:v>
+                </c:pt>
+                <c:pt idx="6">
+                  <c:v>review-service</c:v>
+                </c:pt>
+                <c:pt idx="7">
+                  <c:v>config-server</c:v>
+                </c:pt>
+                <c:pt idx="8">
+                  <c:v>eureka-server</c:v>
+                </c:pt>
+              </c:strCache>
+            </c:strRef>
           </c:cat>
           <c:val>
             <c:numRef>
-              <c:f>Sheet1!$B$2:$B$9</c:f>
+              <c:f>Sheet1!$B$2:$B$10</c:f>
               <c:numCache>
                 <c:formatCode>General</c:formatCode>
-                <c:ptCount val="8"/>
+                <c:ptCount val="9"/>
                 <c:pt idx="0">
                   <c:v>74</c:v>
                 </c:pt>
                 <c:pt idx="1">
-                  <c:v>69</c:v>
+                  <c:v>71</c:v>
                 </c:pt>
                 <c:pt idx="2">
-                  <c:v>45</c:v>
+                  <c:v>54</c:v>
                 </c:pt>
                 <c:pt idx="3">
-                  <c:v>32</c:v>
+                  <c:v>47</c:v>
                 </c:pt>
                 <c:pt idx="4">
-                  <c:v>32</c:v>
+                  <c:v>46</c:v>
                 </c:pt>
                 <c:pt idx="5">
-                  <c:v>18</c:v>
+                  <c:v>24</c:v>
                 </c:pt>
                 <c:pt idx="6">
+                  <c:v>9</c:v>
+                </c:pt>
+                <c:pt idx="7">
                   <c:v>3</c:v>
                 </c:pt>
-                <c:pt idx="7">
+                <c:pt idx="8">
                   <c:v>3</c:v>
                 </c:pt>
               </c:numCache>
             </c:numRef>
           </c:val>
+          <c:extLst>
+            <c:ext xmlns:c16="http://schemas.microsoft.com/office/drawing/2014/chart" uri="{C3380CC4-5D6E-409C-BE32-E72D297353CC}">
+              <c16:uniqueId val="{00000000-38BE-463A-860E-502A698A08D6}"/>
+            </c:ext>
+          </c:extLst>
         </c:ser>
         <c:dLbls>
-          <c:numFmt formatCode="#,##0" sourceLinked="0"/>
-          <c:txPr>
-            <a:bodyPr/>
-            <a:lstStyle/>
-            <a:p>
-              <a:pPr>
-                <a:defRPr b="0" i="0" strike="noStrike" sz="1200" u="none">
-                  <a:solidFill>
-                    <a:srgbClr val="1B2A30"/>
-                  </a:solidFill>
-                  <a:latin typeface="+mn-lt"/>
-                </a:defRPr>
-              </a:pPr>
-            </a:p>
-          </c:txPr>
           <c:showLegendKey val="0"/>
           <c:showVal val="1"/>
           <c:showCatName val="0"/>
           <c:showSerName val="0"/>
           <c:showPercent val="0"/>
           <c:showBubbleSize val="0"/>
-          <c:showLeaderLines val="0"/>
         </c:dLbls>
         <c:gapWidth val="150"/>
-        <c:overlap val="0"/>
         <c:axId val="2094734554"/>
         <c:axId val="2094734552"/>
-        <c:axId val="2094734556"/>
       </c:barChart>
       <c:catAx>
         <c:axId val="2094734554"/>
@@ -382,6 +387,7 @@
         <c:crosses val="autoZero"/>
         <c:auto val="1"/>
         <c:lblAlgn val="ctr"/>
+        <c:lblOffset val="100"/>
         <c:noMultiLvlLbl val="1"/>
       </c:catAx>
       <c:valAx>
@@ -395,30 +401,6 @@
         <c:majorTickMark val="out"/>
         <c:minorTickMark val="none"/>
         <c:tickLblPos val="low"/>
-        <c:spPr>
-          <a:ln w="12700" cap="flat">
-            <a:solidFill>
-              <a:srgbClr val="888888"/>
-            </a:solidFill>
-            <a:prstDash val="solid"/>
-            <a:round/>
-          </a:ln>
-        </c:spPr>
-        <c:txPr>
-          <a:bodyPr/>
-          <a:lstStyle/>
-          <a:p>
-            <a:pPr>
-              <a:defRPr sz="1200" b="0" i="0" u="none" strike="noStrike">
-                <a:solidFill>
-                  <a:srgbClr val="000000"/>
-                </a:solidFill>
-                <a:latin typeface="Arial"/>
-              </a:defRPr>
-            </a:pPr>
-            <a:endParaRPr lang="en-US"/>
-          </a:p>
-        </c:txPr>
         <c:crossAx val="2094734554"/>
         <c:crosses val="autoZero"/>
         <c:crossBetween val="between"/>
@@ -433,6 +415,7 @@
     </c:plotArea>
     <c:plotVisOnly val="1"/>
     <c:dispBlanksAs val="span"/>
+    <c:showDLblsOverMax val="1"/>
   </c:chart>
   <c:spPr>
     <a:noFill/>
@@ -448,9 +431,11 @@
 </file>
 
 <file path=ppt/charts/chart2.xml><?xml version="1.0" encoding="utf-8"?>
-<c:chartSpace xmlns:c="http://schemas.openxmlformats.org/drawingml/2006/chart" xmlns:a="http://schemas.openxmlformats.org/drawingml/2006/main" xmlns:r="http://schemas.openxmlformats.org/officeDocument/2006/relationships">
+<c:chartSpace xmlns:c="http://schemas.openxmlformats.org/drawingml/2006/chart" xmlns:a="http://schemas.openxmlformats.org/drawingml/2006/main" xmlns:r="http://schemas.openxmlformats.org/officeDocument/2006/relationships" xmlns:c16r2="http://schemas.microsoft.com/office/drawing/2015/06/chart">
   <c:date1904 val="0"/>
+  <c:lang val="en-US"/>
   <c:roundedCorners val="1"/>
+  <c:style val="2"/>
   <c:chart>
     <c:title>
       <c:tx>
@@ -478,7 +463,6 @@
           </a:p>
         </c:rich>
       </c:tx>
-      <c:layout/>
       <c:overlay val="0"/>
     </c:title>
     <c:autoTitleDeleted val="0"/>
@@ -511,18 +495,26 @@
           <c:invertIfNegative val="0"/>
           <c:dLbls>
             <c:numFmt formatCode="0&quot; ms&quot;" sourceLinked="0"/>
+            <c:spPr>
+              <a:noFill/>
+              <a:ln>
+                <a:noFill/>
+              </a:ln>
+              <a:effectLst/>
+            </c:spPr>
             <c:txPr>
               <a:bodyPr/>
               <a:lstStyle/>
               <a:p>
                 <a:pPr>
-                  <a:defRPr b="0" i="0" strike="noStrike" sz="1200" u="none">
+                  <a:defRPr sz="1200" b="0" i="0" u="none" strike="noStrike">
                     <a:solidFill>
                       <a:srgbClr val="1B2A30"/>
                     </a:solidFill>
                     <a:latin typeface="+mn-lt"/>
                   </a:defRPr>
                 </a:pPr>
+                <a:endParaRPr lang="en-US"/>
               </a:p>
             </c:txPr>
             <c:showLegendKey val="0"/>
@@ -532,22 +524,25 @@
             <c:showPercent val="0"/>
             <c:showBubbleSize val="0"/>
             <c:showLeaderLines val="0"/>
+            <c:extLst>
+              <c:ext xmlns:c15="http://schemas.microsoft.com/office/drawing/2012/chart" uri="{CE6537A1-D6FC-4f65-9D91-7224C49458BB}">
+                <c15:showLeaderLines val="0"/>
+              </c:ext>
+            </c:extLst>
           </c:dLbls>
           <c:cat>
-            <c:multiLvlStrRef>
+            <c:strRef>
               <c:f>Sheet1!$A$2:$A$3</c:f>
-              <c:multiLvlStrCache>
+              <c:strCache>
                 <c:ptCount val="2"/>
-                <c:lvl>
-                  <c:pt idx="0">
-                    <c:v>GET /products p95</c:v>
-                  </c:pt>
-                  <c:pt idx="1">
-                    <c:v>POST /orders p95</c:v>
-                  </c:pt>
-                </c:lvl>
-              </c:multiLvlStrCache>
-            </c:multiLvlStrRef>
+                <c:pt idx="0">
+                  <c:v>GET /products p95</c:v>
+                </c:pt>
+                <c:pt idx="1">
+                  <c:v>POST /orders p95</c:v>
+                </c:pt>
+              </c:strCache>
+            </c:strRef>
           </c:cat>
           <c:val>
             <c:numRef>
@@ -564,6 +559,11 @@
               </c:numCache>
             </c:numRef>
           </c:val>
+          <c:extLst>
+            <c:ext xmlns:c16="http://schemas.microsoft.com/office/drawing/2014/chart" uri="{C3380CC4-5D6E-409C-BE32-E72D297353CC}">
+              <c16:uniqueId val="{00000000-9E18-4939-8855-48FA13B18EB6}"/>
+            </c:ext>
+          </c:extLst>
         </c:ser>
         <c:ser>
           <c:idx val="1"/>
@@ -588,18 +588,26 @@
           <c:invertIfNegative val="0"/>
           <c:dLbls>
             <c:numFmt formatCode="0&quot; ms&quot;" sourceLinked="0"/>
+            <c:spPr>
+              <a:noFill/>
+              <a:ln>
+                <a:noFill/>
+              </a:ln>
+              <a:effectLst/>
+            </c:spPr>
             <c:txPr>
               <a:bodyPr/>
               <a:lstStyle/>
               <a:p>
                 <a:pPr>
-                  <a:defRPr b="0" i="0" strike="noStrike" sz="1200" u="none">
+                  <a:defRPr sz="1200" b="0" i="0" u="none" strike="noStrike">
                     <a:solidFill>
                       <a:srgbClr val="1B2A30"/>
                     </a:solidFill>
                     <a:latin typeface="+mn-lt"/>
                   </a:defRPr>
                 </a:pPr>
+                <a:endParaRPr lang="en-US"/>
               </a:p>
             </c:txPr>
             <c:showLegendKey val="0"/>
@@ -609,22 +617,25 @@
             <c:showPercent val="0"/>
             <c:showBubbleSize val="0"/>
             <c:showLeaderLines val="0"/>
+            <c:extLst>
+              <c:ext xmlns:c15="http://schemas.microsoft.com/office/drawing/2012/chart" uri="{CE6537A1-D6FC-4f65-9D91-7224C49458BB}">
+                <c15:showLeaderLines val="0"/>
+              </c:ext>
+            </c:extLst>
           </c:dLbls>
           <c:cat>
-            <c:multiLvlStrRef>
+            <c:strRef>
               <c:f>Sheet1!$A$2:$A$3</c:f>
-              <c:multiLvlStrCache>
+              <c:strCache>
                 <c:ptCount val="2"/>
-                <c:lvl>
-                  <c:pt idx="0">
-                    <c:v>GET /products p95</c:v>
-                  </c:pt>
-                  <c:pt idx="1">
-                    <c:v>POST /orders p95</c:v>
-                  </c:pt>
-                </c:lvl>
-              </c:multiLvlStrCache>
-            </c:multiLvlStrRef>
+                <c:pt idx="0">
+                  <c:v>GET /products p95</c:v>
+                </c:pt>
+                <c:pt idx="1">
+                  <c:v>POST /orders p95</c:v>
+                </c:pt>
+              </c:strCache>
+            </c:strRef>
           </c:cat>
           <c:val>
             <c:numRef>
@@ -633,44 +644,31 @@
                 <c:formatCode>General</c:formatCode>
                 <c:ptCount val="2"/>
                 <c:pt idx="0">
-                  <c:v>61</c:v>
+                  <c:v>475</c:v>
                 </c:pt>
                 <c:pt idx="1">
-                  <c:v>182</c:v>
+                  <c:v>487</c:v>
                 </c:pt>
               </c:numCache>
             </c:numRef>
           </c:val>
+          <c:extLst>
+            <c:ext xmlns:c16="http://schemas.microsoft.com/office/drawing/2014/chart" uri="{C3380CC4-5D6E-409C-BE32-E72D297353CC}">
+              <c16:uniqueId val="{00000001-9E18-4939-8855-48FA13B18EB6}"/>
+            </c:ext>
+          </c:extLst>
         </c:ser>
         <c:dLbls>
-          <c:numFmt formatCode="0&quot; ms&quot;" sourceLinked="0"/>
-          <c:txPr>
-            <a:bodyPr/>
-            <a:lstStyle/>
-            <a:p>
-              <a:pPr>
-                <a:defRPr b="0" i="0" strike="noStrike" sz="1200" u="none">
-                  <a:solidFill>
-                    <a:srgbClr val="1B2A30"/>
-                  </a:solidFill>
-                  <a:latin typeface="+mn-lt"/>
-                </a:defRPr>
-              </a:pPr>
-            </a:p>
-          </c:txPr>
           <c:showLegendKey val="0"/>
           <c:showVal val="1"/>
           <c:showCatName val="0"/>
           <c:showSerName val="0"/>
           <c:showPercent val="0"/>
           <c:showBubbleSize val="0"/>
-          <c:showLeaderLines val="0"/>
         </c:dLbls>
         <c:gapWidth val="150"/>
-        <c:overlap val="0"/>
         <c:axId val="2094734554"/>
         <c:axId val="2094734552"/>
-        <c:axId val="2094734556"/>
       </c:barChart>
       <c:catAx>
         <c:axId val="2094734554"/>
@@ -711,6 +709,7 @@
         <c:crosses val="autoZero"/>
         <c:auto val="1"/>
         <c:lblAlgn val="ctr"/>
+        <c:lblOffset val="100"/>
         <c:noMultiLvlLbl val="1"/>
       </c:catAx>
       <c:valAx>
@@ -724,30 +723,6 @@
         <c:majorTickMark val="out"/>
         <c:minorTickMark val="none"/>
         <c:tickLblPos val="nextTo"/>
-        <c:spPr>
-          <a:ln w="12700" cap="flat">
-            <a:solidFill>
-              <a:srgbClr val="888888"/>
-            </a:solidFill>
-            <a:prstDash val="solid"/>
-            <a:round/>
-          </a:ln>
-        </c:spPr>
-        <c:txPr>
-          <a:bodyPr/>
-          <a:lstStyle/>
-          <a:p>
-            <a:pPr>
-              <a:defRPr sz="1200" b="0" i="0" u="none" strike="noStrike">
-                <a:solidFill>
-                  <a:srgbClr val="000000"/>
-                </a:solidFill>
-                <a:latin typeface="Arial"/>
-              </a:defRPr>
-            </a:pPr>
-            <a:endParaRPr lang="en-US"/>
-          </a:p>
-        </c:txPr>
         <c:crossAx val="2094734554"/>
         <c:crosses val="autoZero"/>
         <c:crossBetween val="between"/>
@@ -779,6 +754,7 @@
     </c:legend>
     <c:plotVisOnly val="1"/>
     <c:dispBlanksAs val="span"/>
+    <c:showDLblsOverMax val="1"/>
   </c:chart>
   <c:spPr>
     <a:noFill/>
@@ -815,234 +791,10 @@
           <a:chExt cx="0" cy="0"/>
         </a:xfrm>
       </p:grpSpPr>
-      <p:sp>
-        <p:nvSpPr>
-          <p:cNvPr id="2" name="Header Placeholder 1"/>
-          <p:cNvSpPr>
-            <a:spLocks noGrp="1"/>
-          </p:cNvSpPr>
-          <p:nvPr>
-            <p:ph type="hdr" sz="quarter"/>
-          </p:nvPr>
-        </p:nvSpPr>
-        <p:spPr>
-          <a:xfrm>
-            <a:off x="0" y="0"/>
-            <a:ext cx="2971800" cy="458788"/>
-          </a:xfrm>
-          <a:prstGeom prst="rect">
-            <a:avLst/>
-          </a:prstGeom>
-        </p:spPr>
-        <p:txBody>
-          <a:bodyPr vert="horz" lIns="91440" tIns="45720" rIns="91440" bIns="45720" rtlCol="0"/>
-          <a:lstStyle>
-            <a:lvl1pPr algn="l">
-              <a:defRPr sz="1200"/>
-            </a:lvl1pPr>
-          </a:lstStyle>
-          <a:p>
-            <a:endParaRPr lang="en-US"/>
-          </a:p>
-        </p:txBody>
-      </p:sp>
-      <p:sp>
-        <p:nvSpPr>
-          <p:cNvPr id="3" name="Date Placeholder 2"/>
-          <p:cNvSpPr>
-            <a:spLocks noGrp="1"/>
-          </p:cNvSpPr>
-          <p:nvPr>
-            <p:ph type="dt" idx="1"/>
-          </p:nvPr>
-        </p:nvSpPr>
-        <p:spPr>
-          <a:xfrm>
-            <a:off x="3884613" y="0"/>
-            <a:ext cx="2971800" cy="458788"/>
-          </a:xfrm>
-          <a:prstGeom prst="rect">
-            <a:avLst/>
-          </a:prstGeom>
-        </p:spPr>
-        <p:txBody>
-          <a:bodyPr vert="horz" lIns="91440" tIns="45720" rIns="91440" bIns="45720" rtlCol="0"/>
-          <a:lstStyle>
-            <a:lvl1pPr algn="r">
-              <a:defRPr sz="1200"/>
-            </a:lvl1pPr>
-          </a:lstStyle>
-          <a:p>
-            <a:fld id="{5282F153-3F37-0F45-9E97-73ACFA13230C}" type="datetimeFigureOut">
-              <a:rPr lang="en-US"/>
-              <a:t>7/23/19</a:t>
-            </a:fld>
-            <a:endParaRPr lang="en-US"/>
-          </a:p>
-        </p:txBody>
-      </p:sp>
-      <p:sp>
-        <p:nvSpPr>
-          <p:cNvPr id="4" name="Slide Image Placeholder 3"/>
-          <p:cNvSpPr>
-            <a:spLocks noGrp="1" noRot="1" noChangeAspect="1"/>
-          </p:cNvSpPr>
-          <p:nvPr>
-            <p:ph type="sldImg" idx="2"/>
-          </p:nvPr>
-        </p:nvSpPr>
-        <p:spPr>
-          <a:xfrm>
-            <a:off x="685800" y="1143000"/>
-            <a:ext cx="5486400" cy="3086100"/>
-          </a:xfrm>
-          <a:prstGeom prst="rect">
-            <a:avLst/>
-          </a:prstGeom>
-          <a:noFill/>
-          <a:ln w="12700">
-            <a:solidFill>
-              <a:prstClr val="black"/>
-            </a:solidFill>
-          </a:ln>
-        </p:spPr>
-        <p:txBody>
-          <a:bodyPr vert="horz" lIns="91440" tIns="45720" rIns="91440" bIns="45720" rtlCol="0" anchor="ctr"/>
-          <a:lstStyle/>
-          <a:p>
-            <a:endParaRPr lang="en-US"/>
-          </a:p>
-        </p:txBody>
-      </p:sp>
-      <p:sp>
-        <p:nvSpPr>
-          <p:cNvPr id="5" name="Notes Placeholder 4"/>
-          <p:cNvSpPr>
-            <a:spLocks noGrp="1"/>
-          </p:cNvSpPr>
-          <p:nvPr>
-            <p:ph type="body" sz="quarter" idx="3"/>
-          </p:nvPr>
-        </p:nvSpPr>
-        <p:spPr>
-          <a:xfrm>
-            <a:off x="685800" y="4400550"/>
-            <a:ext cx="5486400" cy="3600450"/>
-          </a:xfrm>
-          <a:prstGeom prst="rect">
-            <a:avLst/>
-          </a:prstGeom>
-        </p:spPr>
-        <p:txBody>
-          <a:bodyPr vert="horz" lIns="91440" tIns="45720" rIns="91440" bIns="45720" rtlCol="0"/>
-          <a:lstStyle/>
-          <a:p>
-            <a:pPr lvl="0"/>
-            <a:r>
-              <a:rPr lang="en-US"/>
-              <a:t>Click to edit Master text styles</a:t>
-            </a:r>
-          </a:p>
-          <a:p>
-            <a:pPr lvl="1"/>
-            <a:r>
-              <a:rPr lang="en-US"/>
-              <a:t>Second level</a:t>
-            </a:r>
-          </a:p>
-          <a:p>
-            <a:pPr lvl="2"/>
-            <a:r>
-              <a:rPr lang="en-US"/>
-              <a:t>Third level</a:t>
-            </a:r>
-          </a:p>
-          <a:p>
-            <a:pPr lvl="3"/>
-            <a:r>
-              <a:rPr lang="en-US"/>
-              <a:t>Fourth level</a:t>
-            </a:r>
-          </a:p>
-          <a:p>
-            <a:pPr lvl="4"/>
-            <a:r>
-              <a:rPr lang="en-US"/>
-              <a:t>Fifth level</a:t>
-            </a:r>
-          </a:p>
-        </p:txBody>
-      </p:sp>
-      <p:sp>
-        <p:nvSpPr>
-          <p:cNvPr id="6" name="Footer Placeholder 5"/>
-          <p:cNvSpPr>
-            <a:spLocks noGrp="1"/>
-          </p:cNvSpPr>
-          <p:nvPr>
-            <p:ph type="ftr" sz="quarter" idx="4"/>
-          </p:nvPr>
-        </p:nvSpPr>
-        <p:spPr>
-          <a:xfrm>
-            <a:off x="0" y="8685213"/>
-            <a:ext cx="2971800" cy="458787"/>
-          </a:xfrm>
-          <a:prstGeom prst="rect">
-            <a:avLst/>
-          </a:prstGeom>
-        </p:spPr>
-        <p:txBody>
-          <a:bodyPr vert="horz" lIns="91440" tIns="45720" rIns="91440" bIns="45720" rtlCol="0" anchor="b"/>
-          <a:lstStyle>
-            <a:lvl1pPr algn="l">
-              <a:defRPr sz="1200"/>
-            </a:lvl1pPr>
-          </a:lstStyle>
-          <a:p>
-            <a:endParaRPr lang="en-US"/>
-          </a:p>
-        </p:txBody>
-      </p:sp>
-      <p:sp>
-        <p:nvSpPr>
-          <p:cNvPr id="7" name="Slide Number Placeholder 6"/>
-          <p:cNvSpPr>
-            <a:spLocks noGrp="1"/>
-          </p:cNvSpPr>
-          <p:nvPr>
-            <p:ph type="sldNum" sz="quarter" idx="5"/>
-          </p:nvPr>
-        </p:nvSpPr>
-        <p:spPr>
-          <a:xfrm>
-            <a:off x="3884613" y="8685213"/>
-            <a:ext cx="2971800" cy="458787"/>
-          </a:xfrm>
-          <a:prstGeom prst="rect">
-            <a:avLst/>
-          </a:prstGeom>
-        </p:spPr>
-        <p:txBody>
-          <a:bodyPr vert="horz" lIns="91440" tIns="45720" rIns="91440" bIns="45720" rtlCol="0" anchor="b"/>
-          <a:lstStyle>
-            <a:lvl1pPr algn="r">
-              <a:defRPr sz="1200"/>
-            </a:lvl1pPr>
-          </a:lstStyle>
-          <a:p>
-            <a:fld id="{CE5E9CC1-C706-0F49-92D6-E571CC5EEA8F}" type="slidenum">
-              <a:rPr lang="en-US"/>
-              <a:t>‹#›</a:t>
-            </a:fld>
-            <a:endParaRPr lang="en-US"/>
-          </a:p>
-        </p:txBody>
-      </p:sp>
     </p:spTree>
     <p:extLst>
       <p:ext uri="{BB962C8B-B14F-4D97-AF65-F5344CB8AC3E}">
-        <p14:creationId xmlns:p14="http://schemas.microsoft.com/office/powerpoint/2010/main" val="1024086991"/>
+        <p14:creationId xmlns:p14="http://schemas.microsoft.com/office/powerpoint/2010/main" val="2385344647"/>
       </p:ext>
     </p:extLst>
   </p:cSld>
@@ -1190,7 +942,6 @@
               <a:rPr lang="en-US" dirty="0"/>
               <a:t>Introduce the team and the one-line promise: an order is never lost and never charged twice, and a stranger can run, deploy and load-test it.</a:t>
             </a:r>
-            <a:endParaRPr lang="en-US" dirty="0"/>
           </a:p>
         </p:txBody>
       </p:sp>
@@ -1274,10 +1025,6 @@
           <a:bodyPr/>
           <a:lstStyle/>
           <a:p>
-            <a:r>
-              <a:rPr lang="en-US" dirty="0"/>
-              <a:t/>
-            </a:r>
             <a:endParaRPr lang="en-US" dirty="0"/>
           </a:p>
         </p:txBody>
@@ -1362,10 +1109,6 @@
           <a:bodyPr/>
           <a:lstStyle/>
           <a:p>
-            <a:r>
-              <a:rPr lang="en-US" dirty="0"/>
-              <a:t/>
-            </a:r>
             <a:endParaRPr lang="en-US" dirty="0"/>
           </a:p>
         </p:txBody>
@@ -1450,10 +1193,6 @@
           <a:bodyPr/>
           <a:lstStyle/>
           <a:p>
-            <a:r>
-              <a:rPr lang="en-US" dirty="0"/>
-              <a:t/>
-            </a:r>
             <a:endParaRPr lang="en-US" dirty="0"/>
           </a:p>
         </p:txBody>
@@ -1538,10 +1277,6 @@
           <a:bodyPr/>
           <a:lstStyle/>
           <a:p>
-            <a:r>
-              <a:rPr lang="en-US" dirty="0"/>
-              <a:t/>
-            </a:r>
             <a:endParaRPr lang="en-US" dirty="0"/>
           </a:p>
         </p:txBody>
@@ -1626,10 +1361,6 @@
           <a:bodyPr/>
           <a:lstStyle/>
           <a:p>
-            <a:r>
-              <a:rPr lang="en-US" dirty="0"/>
-              <a:t/>
-            </a:r>
             <a:endParaRPr lang="en-US" dirty="0"/>
           </a:p>
         </p:txBody>
@@ -1718,7 +1449,6 @@
               <a:rPr lang="en-US" dirty="0"/>
               <a:t>Every number here is reproducible: mvn verify, scripts/e2e-check.sh, k6/load-test.js.</a:t>
             </a:r>
-            <a:endParaRPr lang="en-US" dirty="0"/>
           </a:p>
         </p:txBody>
       </p:sp>
@@ -1806,7 +1536,6 @@
               <a:rPr lang="en-US" dirty="0"/>
               <a:t>PostgreSQL database per service, Flyway only. Observability: Zipkin, Prometheus, Grafana, JSON logs with traceId.</a:t>
             </a:r>
-            <a:endParaRPr lang="en-US" dirty="0"/>
           </a:p>
         </p:txBody>
       </p:sp>
@@ -1894,7 +1623,6 @@
               <a:rPr lang="en-US" dirty="0"/>
               <a:t>traceparent is stored on every outbox row, so one trace spans HTTP and Kafka.</a:t>
             </a:r>
-            <a:endParaRPr lang="en-US" dirty="0"/>
           </a:p>
         </p:txBody>
       </p:sp>
@@ -1982,7 +1710,6 @@
               <a:rPr lang="en-US" dirty="0"/>
               <a:t>16 failure modes in ADD §6, each with detection, what the customer sees, mitigation and the test that proves it.</a:t>
             </a:r>
-            <a:endParaRPr lang="en-US" dirty="0"/>
           </a:p>
         </p:txBody>
       </p:sp>
@@ -2070,7 +1797,6 @@
               <a:rPr lang="en-US" dirty="0"/>
               <a:t>Each row is a DECISION · OPTIONS · REASON · TRADE-OFF · REVISIT entry in the ADD. Replaced Defaults: none.</a:t>
             </a:r>
-            <a:endParaRPr lang="en-US" dirty="0"/>
           </a:p>
         </p:txBody>
       </p:sp>
@@ -2158,7 +1884,6 @@
               <a:rPr lang="en-US" dirty="0"/>
               <a:t>Rate limit: Redis token bucket per user or IP (FR-13); fails open if Redis is down — availability over protection.</a:t>
             </a:r>
-            <a:endParaRPr lang="en-US" dirty="0"/>
           </a:p>
         </p:txBody>
       </p:sp>
@@ -2242,10 +1967,6 @@
           <a:bodyPr/>
           <a:lstStyle/>
           <a:p>
-            <a:r>
-              <a:rPr lang="en-US" dirty="0"/>
-              <a:t/>
-            </a:r>
             <a:endParaRPr lang="en-US" dirty="0"/>
           </a:p>
         </p:txBody>
@@ -2332,9 +2053,26 @@
           <a:p>
             <a:r>
               <a:rPr lang="en-US" dirty="0"/>
-              <a:t/>
-            </a:r>
-            <a:endParaRPr lang="en-US" dirty="0"/>
+              <a:t>Measured on the merged branch, i5-1335U laptop, k6 on the same machine (Performance Report 8.2).</a:t>
+            </a:r>
+          </a:p>
+          <a:p>
+            <a:r>
+              <a:rPr lang="en-US" dirty="0"/>
+              <a:t>Met: throughput 59 req/s (target 50) and errors 0.00 % under load, 0.07 % under stress.</a:t>
+            </a:r>
+          </a:p>
+          <a:p>
+            <a:r>
+              <a:rPr lang="en-US" dirty="0"/>
+              <a:t>Not met here: GET /products p95 below 200 ms. Identical runs gave 475 and 932 ms because the Docker VM is 88 % CPU-busy under the mixed load; the catalogue alone gives 74 to 94 ms.</a:t>
+            </a:r>
+          </a:p>
+          <a:p>
+            <a:r>
+              <a:rPr lang="en-US" dirty="0"/>
+              <a:t>How we found the bottleneck: Zipkin showed 700 ms inside the gateway before forwarding; Java Flight Recorder showed threads waiting on SecureRandom. A session-backed request cache created a WebSession on every request.</a:t>
+            </a:r>
           </a:p>
         </p:txBody>
       </p:sp>
@@ -2412,6 +2150,7 @@
         <a:solidFill>
           <a:schemeClr val="tx2"/>
         </a:solidFill>
+        <a:effectLst/>
       </p:bgPr>
     </p:bg>
     <p:spTree>
@@ -2431,9 +2170,11 @@
       <p:sp>
         <p:nvSpPr>
           <p:cNvPr id="2" name="Text 0"/>
-          <p:cNvSpPr/>
+          <p:cNvSpPr>
+            <a:spLocks noGrp="1"/>
+          </p:cNvSpPr>
           <p:nvPr>
-            <p:ph idx="100" type="title" hasCustomPrompt="1"/>
+            <p:ph type="title" idx="100" hasCustomPrompt="1"/>
           </p:nvPr>
         </p:nvSpPr>
         <p:spPr>
@@ -2450,7 +2191,7 @@
         <p:txBody>
           <a:bodyPr wrap="square" rtlCol="0"/>
           <a:lstStyle>
-            <a:lvl1pPr indent="0" marL="0">
+            <a:lvl1pPr marL="0" indent="0">
               <a:buNone/>
               <a:defRPr lang="en-US" sz="4400" b="1" dirty="0">
                 <a:solidFill>
@@ -2460,7 +2201,7 @@
             </a:lvl1pPr>
           </a:lstStyle>
           <a:p>
-            <a:pPr indent="0" marL="0">
+            <a:pPr marL="0" indent="0">
               <a:buNone/>
             </a:pPr>
             <a:endParaRPr lang="en-US" sz="4400" dirty="0"/>
@@ -2470,9 +2211,11 @@
       <p:sp>
         <p:nvSpPr>
           <p:cNvPr id="3" name="Text 0"/>
-          <p:cNvSpPr/>
+          <p:cNvSpPr>
+            <a:spLocks noGrp="1"/>
+          </p:cNvSpPr>
           <p:nvPr>
-            <p:ph idx="101" type="body" hasCustomPrompt="1"/>
+            <p:ph type="body" idx="101" hasCustomPrompt="1"/>
           </p:nvPr>
         </p:nvSpPr>
         <p:spPr>
@@ -2489,7 +2232,7 @@
         <p:txBody>
           <a:bodyPr wrap="square" rtlCol="0"/>
           <a:lstStyle>
-            <a:lvl1pPr indent="0" marL="0">
+            <a:lvl1pPr marL="0" indent="0">
               <a:buNone/>
               <a:defRPr lang="en-US" sz="2000" dirty="0">
                 <a:solidFill>
@@ -2499,7 +2242,7 @@
             </a:lvl1pPr>
           </a:lstStyle>
           <a:p>
-            <a:pPr indent="0" marL="0">
+            <a:pPr marL="0" indent="0">
               <a:buNone/>
             </a:pPr>
             <a:endParaRPr lang="en-US" sz="2000" dirty="0"/>
@@ -2522,6 +2265,7 @@
         <a:solidFill>
           <a:schemeClr val="bg1"/>
         </a:solidFill>
+        <a:effectLst/>
       </p:bgPr>
     </p:bg>
     <p:spTree>
@@ -2541,9 +2285,11 @@
       <p:sp>
         <p:nvSpPr>
           <p:cNvPr id="2" name="Text 0"/>
-          <p:cNvSpPr/>
+          <p:cNvSpPr>
+            <a:spLocks noGrp="1"/>
+          </p:cNvSpPr>
           <p:nvPr>
-            <p:ph idx="100" type="title" hasCustomPrompt="1"/>
+            <p:ph type="title" idx="100" hasCustomPrompt="1"/>
           </p:nvPr>
         </p:nvSpPr>
         <p:spPr>
@@ -2560,7 +2306,7 @@
         <p:txBody>
           <a:bodyPr wrap="square" rtlCol="0"/>
           <a:lstStyle>
-            <a:lvl1pPr indent="0" marL="0">
+            <a:lvl1pPr marL="0" indent="0">
               <a:buNone/>
               <a:defRPr lang="en-US" sz="3200" b="1" dirty="0">
                 <a:solidFill>
@@ -2570,7 +2316,7 @@
             </a:lvl1pPr>
           </a:lstStyle>
           <a:p>
-            <a:pPr indent="0" marL="0">
+            <a:pPr marL="0" indent="0">
               <a:buNone/>
             </a:pPr>
             <a:endParaRPr lang="en-US" sz="3200" dirty="0"/>
@@ -2598,7 +2344,7 @@
           <a:bodyPr wrap="square" rtlCol="0" anchor="ctr"/>
           <a:lstStyle/>
           <a:p>
-            <a:pPr indent="0" marL="0">
+            <a:pPr marL="0" indent="0">
               <a:buNone/>
             </a:pPr>
             <a:r>
@@ -2633,7 +2379,7 @@
           </a:prstGeom>
           <a:extLst>
             <a:ext uri="{C572A759-6A51-4108-AA02-DFA0A04FC94B}">
-              <ma14:wrappingTextBoxFlag xmlns:ma14="http://schemas.microsoft.com/office/mac/drawingml/2011/main" val="0"/>
+              <ma14:wrappingTextBoxFlag xmlns:ma14="http://schemas.microsoft.com/office/mac/drawingml/2011/main" xmlns="" val="0"/>
             </a:ext>
           </a:extLst>
         </p:spPr>
@@ -2651,8 +2397,8 @@
           <a:p>
             <a:pPr algn="r"/>
             <a:fld id="{F7021451-1387-4CA6-816F-3879F97B5CBC}" type="slidenum">
-              <a:rPr b="0" lang="en-US"/>
-              <a:t>1003</a:t>
+              <a:rPr lang="en-US" b="0"/>
+              <a:t>‹#›</a:t>
             </a:fld>
             <a:endParaRPr lang="en-US"/>
           </a:p>
@@ -2669,6 +2415,11 @@
 <file path=ppt/slideMasters/slideMaster1.xml><?xml version="1.0" encoding="utf-8"?>
 <p:sldMaster xmlns:a="http://schemas.openxmlformats.org/drawingml/2006/main" xmlns:r="http://schemas.openxmlformats.org/officeDocument/2006/relationships" xmlns:p="http://schemas.openxmlformats.org/presentationml/2006/main">
   <p:cSld>
+    <p:bg>
+      <p:bgRef idx="1001">
+        <a:schemeClr val="bg1"/>
+      </p:bgRef>
+    </p:bg>
     <p:spTree>
       <p:nvGrpSpPr>
         <p:cNvPr id="1" name=""/>
@@ -2703,7 +2454,7 @@
           </a:prstGeom>
           <a:extLst>
             <a:ext uri="{C572A759-6A51-4108-AA02-DFA0A04FC94B}">
-              <ma14:wrappingTextBoxFlag xmlns:ma14="http://schemas.microsoft.com/office/mac/drawingml/2011/main" val="0"/>
+              <ma14:wrappingTextBoxFlag xmlns:ma14="http://schemas.microsoft.com/office/mac/drawingml/2011/main" xmlns="" val="0"/>
             </a:ext>
           </a:extLst>
         </p:spPr>
@@ -2721,8 +2472,8 @@
           <a:p>
             <a:pPr algn="r"/>
             <a:fld id="{F7021451-1387-4CA6-816F-3879F97B5CBC}" type="slidenum">
-              <a:rPr b="0" lang="en-US"/>
-              <a:t>null</a:t>
+              <a:rPr lang="en-US" b="0"/>
+              <a:t>‹#›</a:t>
             </a:fld>
             <a:endParaRPr lang="en-US"/>
           </a:p>
@@ -3010,9 +2761,11 @@
       <p:sp>
         <p:nvSpPr>
           <p:cNvPr id="2" name="Text 0"/>
-          <p:cNvSpPr/>
+          <p:cNvSpPr>
+            <a:spLocks noGrp="1"/>
+          </p:cNvSpPr>
           <p:nvPr>
-            <p:ph idx="100" type="title" hasCustomPrompt="1"/>
+            <p:ph type="title" idx="100" hasCustomPrompt="1"/>
           </p:nvPr>
         </p:nvSpPr>
         <p:spPr>
@@ -3030,7 +2783,7 @@
           <a:bodyPr wrap="square" rtlCol="0" anchor="b"/>
           <a:lstStyle/>
           <a:p>
-            <a:pPr indent="0" marL="0">
+            <a:pPr marL="0" indent="0">
               <a:buNone/>
             </a:pPr>
             <a:r>
@@ -3048,9 +2801,11 @@
       <p:sp>
         <p:nvSpPr>
           <p:cNvPr id="3" name="Text 0"/>
-          <p:cNvSpPr/>
+          <p:cNvSpPr>
+            <a:spLocks noGrp="1"/>
+          </p:cNvSpPr>
           <p:nvPr>
-            <p:ph idx="101" type="body" hasCustomPrompt="1"/>
+            <p:ph type="body" idx="101" hasCustomPrompt="1"/>
           </p:nvPr>
         </p:nvSpPr>
         <p:spPr>
@@ -3068,7 +2823,7 @@
           <a:bodyPr wrap="square" rtlCol="0" anchor="t"/>
           <a:lstStyle/>
           <a:p>
-            <a:pPr indent="0" marL="0">
+            <a:pPr marL="0" indent="0">
               <a:buNone/>
             </a:pPr>
             <a:r>
@@ -3082,7 +2837,7 @@
             <a:endParaRPr lang="en-US" sz="2000" dirty="0"/>
           </a:p>
           <a:p>
-            <a:pPr indent="0" marL="0">
+            <a:pPr marL="0" indent="0">
               <a:buNone/>
             </a:pPr>
             <a:r>
@@ -3125,9 +2880,11 @@
       <p:sp>
         <p:nvSpPr>
           <p:cNvPr id="2" name="Text 0"/>
-          <p:cNvSpPr/>
+          <p:cNvSpPr>
+            <a:spLocks noGrp="1"/>
+          </p:cNvSpPr>
           <p:nvPr>
-            <p:ph idx="100" type="title" hasCustomPrompt="1"/>
+            <p:ph type="title" idx="100" hasCustomPrompt="1"/>
           </p:nvPr>
         </p:nvSpPr>
         <p:spPr>
@@ -3145,7 +2902,7 @@
           <a:bodyPr wrap="square" rtlCol="0" anchor="ctr"/>
           <a:lstStyle/>
           <a:p>
-            <a:pPr indent="0" marL="0">
+            <a:pPr marL="0" indent="0">
               <a:buNone/>
             </a:pPr>
             <a:r>
@@ -3208,7 +2965,7 @@
           <a:bodyPr wrap="square" lIns="0" tIns="0" rIns="0" bIns="0" rtlCol="0" anchor="t"/>
           <a:lstStyle/>
           <a:p>
-            <a:pPr indent="0" marL="0">
+            <a:pPr marL="0" indent="0">
               <a:buNone/>
             </a:pPr>
             <a:r>
@@ -3365,7 +3122,7 @@
           <a:bodyPr wrap="square" lIns="0" tIns="0" rIns="0" bIns="0" rtlCol="0" anchor="ctr"/>
           <a:lstStyle/>
           <a:p>
-            <a:pPr indent="0" marL="0">
+            <a:pPr marL="0" indent="0">
               <a:buNone/>
             </a:pPr>
             <a:r>
@@ -3401,7 +3158,7 @@
           <a:bodyPr wrap="square" lIns="0" tIns="0" rIns="0" bIns="0" rtlCol="0" anchor="ctr"/>
           <a:lstStyle/>
           <a:p>
-            <a:pPr indent="0" marL="0">
+            <a:pPr marL="0" indent="0">
               <a:buNone/>
             </a:pPr>
             <a:r>
@@ -3464,7 +3221,7 @@
           <a:bodyPr wrap="square" lIns="0" tIns="0" rIns="0" bIns="0" rtlCol="0" anchor="ctr"/>
           <a:lstStyle/>
           <a:p>
-            <a:pPr indent="0" marL="0">
+            <a:pPr marL="0" indent="0">
               <a:buNone/>
             </a:pPr>
             <a:r>
@@ -3500,7 +3257,7 @@
           <a:bodyPr wrap="square" lIns="0" tIns="0" rIns="0" bIns="0" rtlCol="0" anchor="ctr"/>
           <a:lstStyle/>
           <a:p>
-            <a:pPr indent="0" marL="0">
+            <a:pPr marL="0" indent="0">
               <a:buNone/>
             </a:pPr>
             <a:r>
@@ -3563,7 +3320,7 @@
           <a:bodyPr wrap="square" lIns="0" tIns="0" rIns="0" bIns="0" rtlCol="0" anchor="ctr"/>
           <a:lstStyle/>
           <a:p>
-            <a:pPr indent="0" marL="0">
+            <a:pPr marL="0" indent="0">
               <a:buNone/>
             </a:pPr>
             <a:r>
@@ -3599,7 +3356,7 @@
           <a:bodyPr wrap="square" lIns="0" tIns="0" rIns="0" bIns="0" rtlCol="0" anchor="ctr"/>
           <a:lstStyle/>
           <a:p>
-            <a:pPr indent="0" marL="0">
+            <a:pPr marL="0" indent="0">
               <a:buNone/>
             </a:pPr>
             <a:r>
@@ -3634,7 +3391,7 @@
           </a:prstGeom>
           <a:extLst>
             <a:ext uri="{C572A759-6A51-4108-AA02-DFA0A04FC94B}">
-              <ma14:wrappingTextBoxFlag xmlns:ma14="http://schemas.microsoft.com/office/mac/drawingml/2011/main" val="0"/>
+              <ma14:wrappingTextBoxFlag xmlns:ma14="http://schemas.microsoft.com/office/mac/drawingml/2011/main" xmlns="" val="0"/>
             </a:ext>
           </a:extLst>
         </p:spPr>
@@ -3652,7 +3409,7 @@
           <a:p>
             <a:pPr algn="r"/>
             <a:fld id="{F7021451-1387-4CA6-816F-3879F97B5CBC}" type="slidenum">
-              <a:rPr b="0" lang="en-US"/>
+              <a:rPr lang="en-US" b="0"/>
               <a:t>10</a:t>
             </a:fld>
             <a:endParaRPr lang="en-US"/>
@@ -3687,9 +3444,11 @@
       <p:sp>
         <p:nvSpPr>
           <p:cNvPr id="2" name="Text 0"/>
-          <p:cNvSpPr/>
+          <p:cNvSpPr>
+            <a:spLocks noGrp="1"/>
+          </p:cNvSpPr>
           <p:nvPr>
-            <p:ph idx="100" type="title" hasCustomPrompt="1"/>
+            <p:ph type="title" idx="100" hasCustomPrompt="1"/>
           </p:nvPr>
         </p:nvSpPr>
         <p:spPr>
@@ -3707,7 +3466,7 @@
           <a:bodyPr wrap="square" rtlCol="0" anchor="ctr"/>
           <a:lstStyle/>
           <a:p>
-            <a:pPr indent="0" marL="0">
+            <a:pPr marL="0" indent="0">
               <a:buNone/>
             </a:pPr>
             <a:r>
@@ -3768,7 +3527,7 @@
           <a:bodyPr wrap="square" lIns="0" tIns="0" rIns="0" bIns="0" rtlCol="0" anchor="ctr"/>
           <a:lstStyle/>
           <a:p>
-            <a:pPr algn="ctr" indent="0" marL="0">
+            <a:pPr marL="0" indent="0" algn="ctr">
               <a:buNone/>
             </a:pPr>
             <a:r>
@@ -3804,7 +3563,7 @@
           <a:bodyPr wrap="square" lIns="0" tIns="0" rIns="0" bIns="0" rtlCol="0" anchor="t"/>
           <a:lstStyle/>
           <a:p>
-            <a:pPr indent="0" marL="0">
+            <a:pPr marL="0" indent="0">
               <a:buNone/>
             </a:pPr>
             <a:r>
@@ -3840,7 +3599,7 @@
           <a:bodyPr wrap="square" lIns="0" tIns="0" rIns="0" bIns="0" rtlCol="0" anchor="t"/>
           <a:lstStyle/>
           <a:p>
-            <a:pPr indent="0" marL="0">
+            <a:pPr marL="0" indent="0">
               <a:buNone/>
             </a:pPr>
             <a:r>
@@ -3849,7 +3608,7 @@
                   <a:schemeClr val="tx1"/>
                 </a:solidFill>
               </a:rPr>
-              <a:t>16 containers healthy; scripts/verify-l0.sh checks infra, config-server and Eureka registration</a:t>
+              <a:t>17 containers healthy; scripts/verify-l0.sh checks infra, config-server and Eureka registration</a:t>
             </a:r>
             <a:endParaRPr lang="en-US" sz="1500" dirty="0"/>
           </a:p>
@@ -3901,7 +3660,7 @@
           <a:bodyPr wrap="square" lIns="0" tIns="0" rIns="0" bIns="0" rtlCol="0" anchor="ctr"/>
           <a:lstStyle/>
           <a:p>
-            <a:pPr algn="ctr" indent="0" marL="0">
+            <a:pPr marL="0" indent="0" algn="ctr">
               <a:buNone/>
             </a:pPr>
             <a:r>
@@ -3937,7 +3696,7 @@
           <a:bodyPr wrap="square" lIns="0" tIns="0" rIns="0" bIns="0" rtlCol="0" anchor="t"/>
           <a:lstStyle/>
           <a:p>
-            <a:pPr indent="0" marL="0">
+            <a:pPr marL="0" indent="0">
               <a:buNone/>
             </a:pPr>
             <a:r>
@@ -3973,7 +3732,7 @@
           <a:bodyPr wrap="square" lIns="0" tIns="0" rIns="0" bIns="0" rtlCol="0" anchor="t"/>
           <a:lstStyle/>
           <a:p>
-            <a:pPr indent="0" marL="0">
+            <a:pPr marL="0" indent="0">
               <a:buNone/>
             </a:pPr>
             <a:r>
@@ -4034,7 +3793,7 @@
           <a:bodyPr wrap="square" lIns="0" tIns="0" rIns="0" bIns="0" rtlCol="0" anchor="ctr"/>
           <a:lstStyle/>
           <a:p>
-            <a:pPr algn="ctr" indent="0" marL="0">
+            <a:pPr marL="0" indent="0" algn="ctr">
               <a:buNone/>
             </a:pPr>
             <a:r>
@@ -4070,7 +3829,7 @@
           <a:bodyPr wrap="square" lIns="0" tIns="0" rIns="0" bIns="0" rtlCol="0" anchor="t"/>
           <a:lstStyle/>
           <a:p>
-            <a:pPr indent="0" marL="0">
+            <a:pPr marL="0" indent="0">
               <a:buNone/>
             </a:pPr>
             <a:r>
@@ -4106,7 +3865,7 @@
           <a:bodyPr wrap="square" lIns="0" tIns="0" rIns="0" bIns="0" rtlCol="0" anchor="t"/>
           <a:lstStyle/>
           <a:p>
-            <a:pPr indent="0" marL="0">
+            <a:pPr marL="0" indent="0">
               <a:buNone/>
             </a:pPr>
             <a:r>
@@ -4167,7 +3926,7 @@
           <a:bodyPr wrap="square" lIns="0" tIns="0" rIns="0" bIns="0" rtlCol="0" anchor="ctr"/>
           <a:lstStyle/>
           <a:p>
-            <a:pPr algn="ctr" indent="0" marL="0">
+            <a:pPr marL="0" indent="0" algn="ctr">
               <a:buNone/>
             </a:pPr>
             <a:r>
@@ -4203,7 +3962,7 @@
           <a:bodyPr wrap="square" lIns="0" tIns="0" rIns="0" bIns="0" rtlCol="0" anchor="t"/>
           <a:lstStyle/>
           <a:p>
-            <a:pPr indent="0" marL="0">
+            <a:pPr marL="0" indent="0">
               <a:buNone/>
             </a:pPr>
             <a:r>
@@ -4239,7 +3998,7 @@
           <a:bodyPr wrap="square" lIns="0" tIns="0" rIns="0" bIns="0" rtlCol="0" anchor="t"/>
           <a:lstStyle/>
           <a:p>
-            <a:pPr indent="0" marL="0">
+            <a:pPr marL="0" indent="0">
               <a:buNone/>
             </a:pPr>
             <a:r>
@@ -4274,7 +4033,7 @@
           </a:prstGeom>
           <a:extLst>
             <a:ext uri="{C572A759-6A51-4108-AA02-DFA0A04FC94B}">
-              <ma14:wrappingTextBoxFlag xmlns:ma14="http://schemas.microsoft.com/office/mac/drawingml/2011/main" val="0"/>
+              <ma14:wrappingTextBoxFlag xmlns:ma14="http://schemas.microsoft.com/office/mac/drawingml/2011/main" xmlns="" val="0"/>
             </a:ext>
           </a:extLst>
         </p:spPr>
@@ -4292,7 +4051,7 @@
           <a:p>
             <a:pPr algn="r"/>
             <a:fld id="{F7021451-1387-4CA6-816F-3879F97B5CBC}" type="slidenum">
-              <a:rPr b="0" lang="en-US"/>
+              <a:rPr lang="en-US" b="0"/>
               <a:t>11</a:t>
             </a:fld>
             <a:endParaRPr lang="en-US"/>
@@ -4327,9 +4086,11 @@
       <p:sp>
         <p:nvSpPr>
           <p:cNvPr id="2" name="Text 0"/>
-          <p:cNvSpPr/>
+          <p:cNvSpPr>
+            <a:spLocks noGrp="1"/>
+          </p:cNvSpPr>
           <p:nvPr>
-            <p:ph idx="100" type="title" hasCustomPrompt="1"/>
+            <p:ph type="title" idx="100" hasCustomPrompt="1"/>
           </p:nvPr>
         </p:nvSpPr>
         <p:spPr>
@@ -4347,7 +4108,7 @@
           <a:bodyPr wrap="square" rtlCol="0" anchor="ctr"/>
           <a:lstStyle/>
           <a:p>
-            <a:pPr indent="0" marL="0">
+            <a:pPr marL="0" indent="0">
               <a:buNone/>
             </a:pPr>
             <a:r>
@@ -4435,7 +4196,7 @@
           <a:bodyPr wrap="square" lIns="0" tIns="0" rIns="0" bIns="0" rtlCol="0" anchor="ctr"/>
           <a:lstStyle/>
           <a:p>
-            <a:pPr algn="ctr" indent="0" marL="0">
+            <a:pPr marL="0" indent="0" algn="ctr">
               <a:buNone/>
             </a:pPr>
             <a:r>
@@ -4471,7 +4232,7 @@
           <a:bodyPr wrap="square" lIns="0" tIns="0" rIns="0" bIns="0" rtlCol="0" anchor="t"/>
           <a:lstStyle/>
           <a:p>
-            <a:pPr indent="0" marL="0">
+            <a:pPr marL="0" indent="0">
               <a:buNone/>
             </a:pPr>
             <a:r>
@@ -4507,7 +4268,7 @@
           <a:bodyPr wrap="square" lIns="0" tIns="0" rIns="0" bIns="0" rtlCol="0" anchor="t"/>
           <a:lstStyle/>
           <a:p>
-            <a:pPr indent="0" marL="0">
+            <a:pPr marL="0" indent="0">
               <a:buNone/>
             </a:pPr>
             <a:r>
@@ -4595,7 +4356,7 @@
           <a:bodyPr wrap="square" lIns="0" tIns="0" rIns="0" bIns="0" rtlCol="0" anchor="ctr"/>
           <a:lstStyle/>
           <a:p>
-            <a:pPr algn="ctr" indent="0" marL="0">
+            <a:pPr marL="0" indent="0" algn="ctr">
               <a:buNone/>
             </a:pPr>
             <a:r>
@@ -4631,7 +4392,7 @@
           <a:bodyPr wrap="square" lIns="0" tIns="0" rIns="0" bIns="0" rtlCol="0" anchor="t"/>
           <a:lstStyle/>
           <a:p>
-            <a:pPr indent="0" marL="0">
+            <a:pPr marL="0" indent="0">
               <a:buNone/>
             </a:pPr>
             <a:r>
@@ -4667,7 +4428,7 @@
           <a:bodyPr wrap="square" lIns="0" tIns="0" rIns="0" bIns="0" rtlCol="0" anchor="t"/>
           <a:lstStyle/>
           <a:p>
-            <a:pPr indent="0" marL="0">
+            <a:pPr marL="0" indent="0">
               <a:buNone/>
             </a:pPr>
             <a:r>
@@ -4755,7 +4516,7 @@
           <a:bodyPr wrap="square" lIns="0" tIns="0" rIns="0" bIns="0" rtlCol="0" anchor="ctr"/>
           <a:lstStyle/>
           <a:p>
-            <a:pPr algn="ctr" indent="0" marL="0">
+            <a:pPr marL="0" indent="0" algn="ctr">
               <a:buNone/>
             </a:pPr>
             <a:r>
@@ -4791,7 +4552,7 @@
           <a:bodyPr wrap="square" lIns="0" tIns="0" rIns="0" bIns="0" rtlCol="0" anchor="t"/>
           <a:lstStyle/>
           <a:p>
-            <a:pPr indent="0" marL="0">
+            <a:pPr marL="0" indent="0">
               <a:buNone/>
             </a:pPr>
             <a:r>
@@ -4827,7 +4588,7 @@
           <a:bodyPr wrap="square" lIns="0" tIns="0" rIns="0" bIns="0" rtlCol="0" anchor="t"/>
           <a:lstStyle/>
           <a:p>
-            <a:pPr indent="0" marL="0">
+            <a:pPr marL="0" indent="0">
               <a:buNone/>
             </a:pPr>
             <a:r>
@@ -4915,7 +4676,7 @@
           <a:bodyPr wrap="square" lIns="0" tIns="0" rIns="0" bIns="0" rtlCol="0" anchor="ctr"/>
           <a:lstStyle/>
           <a:p>
-            <a:pPr algn="ctr" indent="0" marL="0">
+            <a:pPr marL="0" indent="0" algn="ctr">
               <a:buNone/>
             </a:pPr>
             <a:r>
@@ -4951,7 +4712,7 @@
           <a:bodyPr wrap="square" lIns="0" tIns="0" rIns="0" bIns="0" rtlCol="0" anchor="t"/>
           <a:lstStyle/>
           <a:p>
-            <a:pPr indent="0" marL="0">
+            <a:pPr marL="0" indent="0">
               <a:buNone/>
             </a:pPr>
             <a:r>
@@ -4987,7 +4748,7 @@
           <a:bodyPr wrap="square" lIns="0" tIns="0" rIns="0" bIns="0" rtlCol="0" anchor="t"/>
           <a:lstStyle/>
           <a:p>
-            <a:pPr indent="0" marL="0">
+            <a:pPr marL="0" indent="0">
               <a:buNone/>
             </a:pPr>
             <a:r>
@@ -5022,7 +4783,7 @@
           </a:prstGeom>
           <a:extLst>
             <a:ext uri="{C572A759-6A51-4108-AA02-DFA0A04FC94B}">
-              <ma14:wrappingTextBoxFlag xmlns:ma14="http://schemas.microsoft.com/office/mac/drawingml/2011/main" val="0"/>
+              <ma14:wrappingTextBoxFlag xmlns:ma14="http://schemas.microsoft.com/office/mac/drawingml/2011/main" xmlns="" val="0"/>
             </a:ext>
           </a:extLst>
         </p:spPr>
@@ -5040,7 +4801,7 @@
           <a:p>
             <a:pPr algn="r"/>
             <a:fld id="{F7021451-1387-4CA6-816F-3879F97B5CBC}" type="slidenum">
-              <a:rPr b="0" lang="en-US"/>
+              <a:rPr lang="en-US" b="0"/>
               <a:t>12</a:t>
             </a:fld>
             <a:endParaRPr lang="en-US"/>
@@ -5075,9 +4836,11 @@
       <p:sp>
         <p:nvSpPr>
           <p:cNvPr id="2" name="Text 0"/>
-          <p:cNvSpPr/>
+          <p:cNvSpPr>
+            <a:spLocks noGrp="1"/>
+          </p:cNvSpPr>
           <p:nvPr>
-            <p:ph idx="100" type="title" hasCustomPrompt="1"/>
+            <p:ph type="title" idx="100" hasCustomPrompt="1"/>
           </p:nvPr>
         </p:nvSpPr>
         <p:spPr>
@@ -5095,7 +4858,7 @@
           <a:bodyPr wrap="square" rtlCol="0" anchor="ctr"/>
           <a:lstStyle/>
           <a:p>
-            <a:pPr indent="0" marL="0">
+            <a:pPr marL="0" indent="0">
               <a:buNone/>
             </a:pPr>
             <a:r>
@@ -5131,7 +4894,7 @@
           <a:bodyPr wrap="square" lIns="0" tIns="0" rIns="0" bIns="0" rtlCol="0" anchor="t"/>
           <a:lstStyle/>
           <a:p>
-            <a:pPr indent="0" marL="0">
+            <a:pPr marL="0" indent="0">
               <a:buNone/>
             </a:pPr>
             <a:r>
@@ -5306,7 +5069,7 @@
           <a:bodyPr wrap="square" lIns="0" tIns="0" rIns="0" bIns="0" rtlCol="0" anchor="t"/>
           <a:lstStyle/>
           <a:p>
-            <a:pPr indent="0" marL="0">
+            <a:pPr marL="0" indent="0">
               <a:buNone/>
             </a:pPr>
             <a:r>
@@ -5453,7 +5216,7 @@
           </a:prstGeom>
           <a:extLst>
             <a:ext uri="{C572A759-6A51-4108-AA02-DFA0A04FC94B}">
-              <ma14:wrappingTextBoxFlag xmlns:ma14="http://schemas.microsoft.com/office/mac/drawingml/2011/main" val="0"/>
+              <ma14:wrappingTextBoxFlag xmlns:ma14="http://schemas.microsoft.com/office/mac/drawingml/2011/main" xmlns="" val="0"/>
             </a:ext>
           </a:extLst>
         </p:spPr>
@@ -5471,7 +5234,7 @@
           <a:p>
             <a:pPr algn="r"/>
             <a:fld id="{F7021451-1387-4CA6-816F-3879F97B5CBC}" type="slidenum">
-              <a:rPr b="0" lang="en-US"/>
+              <a:rPr lang="en-US" b="0"/>
               <a:t>13</a:t>
             </a:fld>
             <a:endParaRPr lang="en-US"/>
@@ -5506,9 +5269,11 @@
       <p:sp>
         <p:nvSpPr>
           <p:cNvPr id="2" name="Text 0"/>
-          <p:cNvSpPr/>
+          <p:cNvSpPr>
+            <a:spLocks noGrp="1"/>
+          </p:cNvSpPr>
           <p:nvPr>
-            <p:ph idx="100" type="title" hasCustomPrompt="1"/>
+            <p:ph type="title" idx="100" hasCustomPrompt="1"/>
           </p:nvPr>
         </p:nvSpPr>
         <p:spPr>
@@ -5526,7 +5291,7 @@
           <a:bodyPr wrap="square" rtlCol="0" anchor="b"/>
           <a:lstStyle/>
           <a:p>
-            <a:pPr indent="0" marL="0">
+            <a:pPr marL="0" indent="0">
               <a:buNone/>
             </a:pPr>
             <a:r>
@@ -5544,9 +5309,11 @@
       <p:sp>
         <p:nvSpPr>
           <p:cNvPr id="3" name="Text 0"/>
-          <p:cNvSpPr/>
+          <p:cNvSpPr>
+            <a:spLocks noGrp="1"/>
+          </p:cNvSpPr>
           <p:nvPr>
-            <p:ph idx="101" type="body" hasCustomPrompt="1"/>
+            <p:ph type="body" idx="101" hasCustomPrompt="1"/>
           </p:nvPr>
         </p:nvSpPr>
         <p:spPr>
@@ -5564,7 +5331,7 @@
           <a:bodyPr wrap="square" rtlCol="0" anchor="t"/>
           <a:lstStyle/>
           <a:p>
-            <a:pPr indent="0" marL="0">
+            <a:pPr marL="0" indent="0">
               <a:buNone/>
             </a:pPr>
             <a:r>
@@ -5578,7 +5345,7 @@
             <a:endParaRPr lang="en-US" sz="2000" dirty="0"/>
           </a:p>
           <a:p>
-            <a:pPr indent="0" marL="0">
+            <a:pPr marL="0" indent="0">
               <a:buNone/>
             </a:pPr>
             <a:r>
@@ -5592,7 +5359,7 @@
             <a:endParaRPr lang="en-US" sz="2000" dirty="0"/>
           </a:p>
           <a:p>
-            <a:pPr indent="0" marL="0">
+            <a:pPr marL="0" indent="0">
               <a:buNone/>
             </a:pPr>
             <a:r>
@@ -5635,9 +5402,11 @@
       <p:sp>
         <p:nvSpPr>
           <p:cNvPr id="2" name="Text 0"/>
-          <p:cNvSpPr/>
+          <p:cNvSpPr>
+            <a:spLocks noGrp="1"/>
+          </p:cNvSpPr>
           <p:nvPr>
-            <p:ph idx="100" type="title" hasCustomPrompt="1"/>
+            <p:ph type="title" idx="100" hasCustomPrompt="1"/>
           </p:nvPr>
         </p:nvSpPr>
         <p:spPr>
@@ -5655,7 +5424,7 @@
           <a:bodyPr wrap="square" rtlCol="0" anchor="ctr"/>
           <a:lstStyle/>
           <a:p>
-            <a:pPr indent="0" marL="0">
+            <a:pPr marL="0" indent="0">
               <a:buNone/>
             </a:pPr>
             <a:r>
@@ -5718,7 +5487,7 @@
           <a:bodyPr wrap="square" lIns="0" tIns="0" rIns="0" bIns="0" rtlCol="0" anchor="t"/>
           <a:lstStyle/>
           <a:p>
-            <a:pPr indent="0" marL="0">
+            <a:pPr marL="0" indent="0">
               <a:buNone/>
             </a:pPr>
             <a:r>
@@ -5730,7 +5499,7 @@
                 <a:ea typeface="Cambria" pitchFamily="34" charset="-122"/>
                 <a:cs typeface="Cambria" pitchFamily="34" charset="-120"/>
               </a:rPr>
-              <a:t>8</a:t>
+              <a:t>9</a:t>
             </a:r>
             <a:endParaRPr lang="en-US" sz="4800" dirty="0"/>
           </a:p>
@@ -5757,7 +5526,7 @@
           <a:bodyPr wrap="square" lIns="0" tIns="0" rIns="0" bIns="0" rtlCol="0" anchor="t"/>
           <a:lstStyle/>
           <a:p>
-            <a:pPr indent="0" marL="0">
+            <a:pPr marL="0" indent="0">
               <a:buNone/>
             </a:pPr>
             <a:r>
@@ -5820,7 +5589,7 @@
           <a:bodyPr wrap="square" lIns="0" tIns="0" rIns="0" bIns="0" rtlCol="0" anchor="t"/>
           <a:lstStyle/>
           <a:p>
-            <a:pPr indent="0" marL="0">
+            <a:pPr marL="0" indent="0">
               <a:buNone/>
             </a:pPr>
             <a:r>
@@ -5832,7 +5601,7 @@
                 <a:ea typeface="Cambria" pitchFamily="34" charset="-122"/>
                 <a:cs typeface="Cambria" pitchFamily="34" charset="-120"/>
               </a:rPr>
-              <a:t>276</a:t>
+              <a:t>331</a:t>
             </a:r>
             <a:endParaRPr lang="en-US" sz="4800" dirty="0"/>
           </a:p>
@@ -5859,7 +5628,7 @@
           <a:bodyPr wrap="square" lIns="0" tIns="0" rIns="0" bIns="0" rtlCol="0" anchor="t"/>
           <a:lstStyle/>
           <a:p>
-            <a:pPr indent="0" marL="0">
+            <a:pPr marL="0" indent="0">
               <a:buNone/>
             </a:pPr>
             <a:r>
@@ -5922,7 +5691,7 @@
           <a:bodyPr wrap="square" lIns="0" tIns="0" rIns="0" bIns="0" rtlCol="0" anchor="t"/>
           <a:lstStyle/>
           <a:p>
-            <a:pPr indent="0" marL="0">
+            <a:pPr marL="0" indent="0">
               <a:buNone/>
             </a:pPr>
             <a:r>
@@ -5961,7 +5730,7 @@
           <a:bodyPr wrap="square" lIns="0" tIns="0" rIns="0" bIns="0" rtlCol="0" anchor="t"/>
           <a:lstStyle/>
           <a:p>
-            <a:pPr indent="0" marL="0">
+            <a:pPr marL="0" indent="0">
               <a:buNone/>
             </a:pPr>
             <a:r>
@@ -6024,7 +5793,7 @@
           <a:bodyPr wrap="square" lIns="0" tIns="0" rIns="0" bIns="0" rtlCol="0" anchor="t"/>
           <a:lstStyle/>
           <a:p>
-            <a:pPr indent="0" marL="0">
+            <a:pPr marL="0" indent="0">
               <a:buNone/>
             </a:pPr>
             <a:r>
@@ -6036,7 +5805,7 @@
                 <a:ea typeface="Cambria" pitchFamily="34" charset="-122"/>
                 <a:cs typeface="Cambria" pitchFamily="34" charset="-120"/>
               </a:rPr>
-              <a:t>182 ms</a:t>
+              <a:t>487 ms</a:t>
             </a:r>
             <a:endParaRPr lang="en-US" sz="4800" dirty="0"/>
           </a:p>
@@ -6063,7 +5832,7 @@
           <a:bodyPr wrap="square" lIns="0" tIns="0" rIns="0" bIns="0" rtlCol="0" anchor="t"/>
           <a:lstStyle/>
           <a:p>
-            <a:pPr indent="0" marL="0">
+            <a:pPr marL="0" indent="0">
               <a:buNone/>
             </a:pPr>
             <a:r>
@@ -6099,7 +5868,7 @@
           <a:bodyPr wrap="square" lIns="0" tIns="0" rIns="0" bIns="0" rtlCol="0" anchor="t"/>
           <a:lstStyle/>
           <a:p>
-            <a:pPr indent="0" marL="0">
+            <a:pPr marL="0" indent="0">
               <a:buNone/>
             </a:pPr>
             <a:r>
@@ -6110,9 +5879,6 @@
               </a:rPr>
               <a:t>Problem. </a:t>
             </a:r>
-            <a:pPr indent="0" marL="0">
-              <a:buNone/>
-            </a:pPr>
             <a:r>
               <a:rPr lang="en-US" sz="1600" dirty="0">
                 <a:solidFill>
@@ -6146,7 +5912,7 @@
           <a:bodyPr wrap="square" lIns="0" tIns="0" rIns="0" bIns="0" rtlCol="0" anchor="t"/>
           <a:lstStyle/>
           <a:p>
-            <a:pPr indent="0" marL="0">
+            <a:pPr marL="0" indent="0">
               <a:buNone/>
             </a:pPr>
             <a:r>
@@ -6155,7 +5921,7 @@
                   <a:schemeClr val="accent4"/>
                 </a:solidFill>
               </a:rPr>
-              <a:t>Core FR-01…FR-16 complete · Bonus B2 Order Analytics · Docker Compose + Helm + ArgoCD · k6 load, stress and one bottleneck fixed</a:t>
+              <a:t>Core FR-01…FR-16 complete · Bonus B2 Order Analytics + B1, B3, B4 · Docker Compose + Helm + ArgoCD · k6 load, stress and one bottleneck fixed</a:t>
             </a:r>
             <a:endParaRPr lang="en-US" sz="1400" dirty="0"/>
           </a:p>
@@ -6181,7 +5947,7 @@
           </a:prstGeom>
           <a:extLst>
             <a:ext uri="{C572A759-6A51-4108-AA02-DFA0A04FC94B}">
-              <ma14:wrappingTextBoxFlag xmlns:ma14="http://schemas.microsoft.com/office/mac/drawingml/2011/main" val="0"/>
+              <ma14:wrappingTextBoxFlag xmlns:ma14="http://schemas.microsoft.com/office/mac/drawingml/2011/main" xmlns="" val="0"/>
             </a:ext>
           </a:extLst>
         </p:spPr>
@@ -6199,7 +5965,7 @@
           <a:p>
             <a:pPr algn="r"/>
             <a:fld id="{F7021451-1387-4CA6-816F-3879F97B5CBC}" type="slidenum">
-              <a:rPr b="0" lang="en-US"/>
+              <a:rPr lang="en-US" b="0"/>
               <a:t>2</a:t>
             </a:fld>
             <a:endParaRPr lang="en-US"/>
@@ -6234,9 +6000,11 @@
       <p:sp>
         <p:nvSpPr>
           <p:cNvPr id="2" name="Text 0"/>
-          <p:cNvSpPr/>
+          <p:cNvSpPr>
+            <a:spLocks noGrp="1"/>
+          </p:cNvSpPr>
           <p:nvPr>
-            <p:ph idx="100" type="title" hasCustomPrompt="1"/>
+            <p:ph type="title" idx="100" hasCustomPrompt="1"/>
           </p:nvPr>
         </p:nvSpPr>
         <p:spPr>
@@ -6254,7 +6022,7 @@
           <a:bodyPr wrap="square" rtlCol="0" anchor="ctr"/>
           <a:lstStyle/>
           <a:p>
-            <a:pPr indent="0" marL="0">
+            <a:pPr marL="0" indent="0">
               <a:buNone/>
             </a:pPr>
             <a:r>
@@ -6317,7 +6085,7 @@
           <a:bodyPr wrap="square" lIns="0" tIns="0" rIns="0" bIns="0" rtlCol="0" anchor="t"/>
           <a:lstStyle/>
           <a:p>
-            <a:pPr algn="ctr" indent="0" marL="0">
+            <a:pPr marL="0" indent="0" algn="ctr">
               <a:buNone/>
             </a:pPr>
             <a:r>
@@ -6353,7 +6121,7 @@
           <a:bodyPr wrap="square" lIns="0" tIns="0" rIns="0" bIns="0" rtlCol="0" anchor="t"/>
           <a:lstStyle/>
           <a:p>
-            <a:pPr algn="ctr" indent="0" marL="0">
+            <a:pPr marL="0" indent="0" algn="ctr">
               <a:buNone/>
             </a:pPr>
             <a:r>
@@ -6416,7 +6184,7 @@
           <a:bodyPr wrap="square" lIns="0" tIns="0" rIns="0" bIns="0" rtlCol="0" anchor="t"/>
           <a:lstStyle/>
           <a:p>
-            <a:pPr algn="ctr" indent="0" marL="0">
+            <a:pPr marL="0" indent="0" algn="ctr">
               <a:buNone/>
             </a:pPr>
             <a:r>
@@ -6452,7 +6220,7 @@
           <a:bodyPr wrap="square" lIns="0" tIns="0" rIns="0" bIns="0" rtlCol="0" anchor="t"/>
           <a:lstStyle/>
           <a:p>
-            <a:pPr algn="ctr" indent="0" marL="0">
+            <a:pPr marL="0" indent="0" algn="ctr">
               <a:buNone/>
             </a:pPr>
             <a:r>
@@ -6515,7 +6283,7 @@
           <a:bodyPr wrap="square" lIns="0" tIns="0" rIns="0" bIns="0" rtlCol="0" anchor="t"/>
           <a:lstStyle/>
           <a:p>
-            <a:pPr algn="ctr" indent="0" marL="0">
+            <a:pPr marL="0" indent="0" algn="ctr">
               <a:buNone/>
             </a:pPr>
             <a:r>
@@ -6551,7 +6319,7 @@
           <a:bodyPr wrap="square" lIns="0" tIns="0" rIns="0" bIns="0" rtlCol="0" anchor="t"/>
           <a:lstStyle/>
           <a:p>
-            <a:pPr algn="ctr" indent="0" marL="0">
+            <a:pPr marL="0" indent="0" algn="ctr">
               <a:buNone/>
             </a:pPr>
             <a:r>
@@ -6614,7 +6382,7 @@
           <a:bodyPr wrap="square" lIns="0" tIns="0" rIns="0" bIns="0" rtlCol="0" anchor="t"/>
           <a:lstStyle/>
           <a:p>
-            <a:pPr algn="ctr" indent="0" marL="0">
+            <a:pPr marL="0" indent="0" algn="ctr">
               <a:buNone/>
             </a:pPr>
             <a:r>
@@ -6650,7 +6418,7 @@
           <a:bodyPr wrap="square" lIns="0" tIns="0" rIns="0" bIns="0" rtlCol="0" anchor="t"/>
           <a:lstStyle/>
           <a:p>
-            <a:pPr algn="ctr" indent="0" marL="0">
+            <a:pPr marL="0" indent="0" algn="ctr">
               <a:buNone/>
             </a:pPr>
             <a:r>
@@ -6737,7 +6505,7 @@
           <a:bodyPr wrap="square" lIns="0" tIns="0" rIns="0" bIns="0" rtlCol="0" anchor="t"/>
           <a:lstStyle/>
           <a:p>
-            <a:pPr algn="ctr" indent="0" marL="0">
+            <a:pPr marL="0" indent="0" algn="ctr">
               <a:buNone/>
             </a:pPr>
             <a:r>
@@ -6773,7 +6541,7 @@
           <a:bodyPr wrap="square" lIns="0" tIns="0" rIns="0" bIns="0" rtlCol="0" anchor="t"/>
           <a:lstStyle/>
           <a:p>
-            <a:pPr algn="ctr" indent="0" marL="0">
+            <a:pPr marL="0" indent="0" algn="ctr">
               <a:buNone/>
             </a:pPr>
             <a:r>
@@ -6836,7 +6604,7 @@
           <a:bodyPr wrap="square" lIns="0" tIns="0" rIns="0" bIns="0" rtlCol="0" anchor="t"/>
           <a:lstStyle/>
           <a:p>
-            <a:pPr algn="ctr" indent="0" marL="0">
+            <a:pPr marL="0" indent="0" algn="ctr">
               <a:buNone/>
             </a:pPr>
             <a:r>
@@ -6872,7 +6640,7 @@
           <a:bodyPr wrap="square" lIns="0" tIns="0" rIns="0" bIns="0" rtlCol="0" anchor="t"/>
           <a:lstStyle/>
           <a:p>
-            <a:pPr algn="ctr" indent="0" marL="0">
+            <a:pPr marL="0" indent="0" algn="ctr">
               <a:buNone/>
             </a:pPr>
             <a:r>
@@ -6935,7 +6703,7 @@
           <a:bodyPr wrap="square" lIns="0" tIns="0" rIns="0" bIns="0" rtlCol="0" anchor="t"/>
           <a:lstStyle/>
           <a:p>
-            <a:pPr algn="ctr" indent="0" marL="0">
+            <a:pPr marL="0" indent="0" algn="ctr">
               <a:buNone/>
             </a:pPr>
             <a:r>
@@ -6971,7 +6739,7 @@
           <a:bodyPr wrap="square" lIns="0" tIns="0" rIns="0" bIns="0" rtlCol="0" anchor="t"/>
           <a:lstStyle/>
           <a:p>
-            <a:pPr algn="ctr" indent="0" marL="0">
+            <a:pPr marL="0" indent="0" algn="ctr">
               <a:buNone/>
             </a:pPr>
             <a:r>
@@ -7034,7 +6802,7 @@
           <a:bodyPr wrap="square" lIns="0" tIns="0" rIns="0" bIns="0" rtlCol="0" anchor="t"/>
           <a:lstStyle/>
           <a:p>
-            <a:pPr algn="ctr" indent="0" marL="0">
+            <a:pPr marL="0" indent="0" algn="ctr">
               <a:buNone/>
             </a:pPr>
             <a:r>
@@ -7070,7 +6838,7 @@
           <a:bodyPr wrap="square" lIns="0" tIns="0" rIns="0" bIns="0" rtlCol="0" anchor="t"/>
           <a:lstStyle/>
           <a:p>
-            <a:pPr algn="ctr" indent="0" marL="0">
+            <a:pPr marL="0" indent="0" algn="ctr">
               <a:buNone/>
             </a:pPr>
             <a:r>
@@ -7133,7 +6901,7 @@
           <a:bodyPr wrap="square" lIns="0" tIns="0" rIns="0" bIns="0" rtlCol="0" anchor="t"/>
           <a:lstStyle/>
           <a:p>
-            <a:pPr algn="ctr" indent="0" marL="0">
+            <a:pPr marL="0" indent="0" algn="ctr">
               <a:buNone/>
             </a:pPr>
             <a:r>
@@ -7169,7 +6937,7 @@
           <a:bodyPr wrap="square" lIns="0" tIns="0" rIns="0" bIns="0" rtlCol="0" anchor="t"/>
           <a:lstStyle/>
           <a:p>
-            <a:pPr algn="ctr" indent="0" marL="0">
+            <a:pPr marL="0" indent="0" algn="ctr">
               <a:buNone/>
             </a:pPr>
             <a:r>
@@ -7256,7 +7024,7 @@
           <a:bodyPr wrap="square" lIns="0" tIns="0" rIns="0" bIns="0" rtlCol="0" anchor="ctr"/>
           <a:lstStyle/>
           <a:p>
-            <a:pPr indent="0" marL="0">
+            <a:pPr marL="0" indent="0">
               <a:buNone/>
             </a:pPr>
             <a:r>
@@ -7292,7 +7060,7 @@
           <a:bodyPr wrap="square" lIns="0" tIns="0" rIns="0" bIns="0" rtlCol="0" anchor="t"/>
           <a:lstStyle/>
           <a:p>
-            <a:pPr indent="0" marL="0">
+            <a:pPr marL="0" indent="0">
               <a:buNone/>
             </a:pPr>
             <a:r>
@@ -7303,9 +7071,6 @@
               </a:rPr>
               <a:t>Sync </a:t>
             </a:r>
-            <a:pPr indent="0" marL="0">
-              <a:buNone/>
-            </a:pPr>
             <a:r>
               <a:rPr lang="en-US" sz="1500" dirty="0">
                 <a:solidFill>
@@ -7314,9 +7079,6 @@
               </a:rPr>
               <a:t>only where the caller needs the answer: order → inventory /check and → product price (Feign + Resilience4j).  </a:t>
             </a:r>
-            <a:pPr indent="0" marL="0">
-              <a:buNone/>
-            </a:pPr>
             <a:r>
               <a:rPr lang="en-US" sz="1500" b="1" dirty="0">
                 <a:solidFill>
@@ -7325,9 +7087,6 @@
               </a:rPr>
               <a:t>Async </a:t>
             </a:r>
-            <a:pPr indent="0" marL="0">
-              <a:buNone/>
-            </a:pPr>
             <a:r>
               <a:rPr lang="en-US" sz="1500" dirty="0">
                 <a:solidFill>
@@ -7342,7 +7101,7 @@
       </p:sp>
       <p:sp>
         <p:nvSpPr>
-          <p:cNvPr id="25" name="Slide Number Placeholder 0"/>
+          <p:cNvPr id="35" name="Slide Number Placeholder 0"/>
           <p:cNvSpPr>
             <a:spLocks noGrp="1"/>
           </p:cNvSpPr>
@@ -7360,7 +7119,7 @@
           </a:prstGeom>
           <a:extLst>
             <a:ext uri="{C572A759-6A51-4108-AA02-DFA0A04FC94B}">
-              <ma14:wrappingTextBoxFlag xmlns:ma14="http://schemas.microsoft.com/office/mac/drawingml/2011/main" val="0"/>
+              <ma14:wrappingTextBoxFlag xmlns:ma14="http://schemas.microsoft.com/office/mac/drawingml/2011/main" xmlns="" val="0"/>
             </a:ext>
           </a:extLst>
         </p:spPr>
@@ -7378,7 +7137,7 @@
           <a:p>
             <a:pPr algn="r"/>
             <a:fld id="{F7021451-1387-4CA6-816F-3879F97B5CBC}" type="slidenum">
-              <a:rPr b="0" lang="en-US"/>
+              <a:rPr lang="en-US" b="0"/>
               <a:t>3</a:t>
             </a:fld>
             <a:endParaRPr lang="en-US"/>
@@ -7413,9 +7172,11 @@
       <p:sp>
         <p:nvSpPr>
           <p:cNvPr id="2" name="Text 0"/>
-          <p:cNvSpPr/>
+          <p:cNvSpPr>
+            <a:spLocks noGrp="1"/>
+          </p:cNvSpPr>
           <p:nvPr>
-            <p:ph idx="100" type="title" hasCustomPrompt="1"/>
+            <p:ph type="title" idx="100" hasCustomPrompt="1"/>
           </p:nvPr>
         </p:nvSpPr>
         <p:spPr>
@@ -7433,7 +7194,7 @@
           <a:bodyPr wrap="square" rtlCol="0" anchor="ctr"/>
           <a:lstStyle/>
           <a:p>
-            <a:pPr indent="0" marL="0">
+            <a:pPr marL="0" indent="0">
               <a:buNone/>
             </a:pPr>
             <a:r>
@@ -7494,7 +7255,7 @@
           <a:bodyPr wrap="square" lIns="0" tIns="0" rIns="0" bIns="0" rtlCol="0" anchor="ctr"/>
           <a:lstStyle/>
           <a:p>
-            <a:pPr algn="ctr" indent="0" marL="0">
+            <a:pPr marL="0" indent="0" algn="ctr">
               <a:buNone/>
             </a:pPr>
             <a:r>
@@ -7530,7 +7291,7 @@
           <a:bodyPr wrap="square" lIns="0" tIns="0" rIns="0" bIns="0" rtlCol="0" anchor="t"/>
           <a:lstStyle/>
           <a:p>
-            <a:pPr indent="0" marL="0">
+            <a:pPr marL="0" indent="0">
               <a:buNone/>
             </a:pPr>
             <a:r>
@@ -7566,7 +7327,7 @@
           <a:bodyPr wrap="square" lIns="0" tIns="0" rIns="0" bIns="0" rtlCol="0" anchor="t"/>
           <a:lstStyle/>
           <a:p>
-            <a:pPr indent="0" marL="0">
+            <a:pPr marL="0" indent="0">
               <a:buNone/>
             </a:pPr>
             <a:r>
@@ -7627,7 +7388,7 @@
           <a:bodyPr wrap="square" lIns="0" tIns="0" rIns="0" bIns="0" rtlCol="0" anchor="ctr"/>
           <a:lstStyle/>
           <a:p>
-            <a:pPr algn="ctr" indent="0" marL="0">
+            <a:pPr marL="0" indent="0" algn="ctr">
               <a:buNone/>
             </a:pPr>
             <a:r>
@@ -7663,7 +7424,7 @@
           <a:bodyPr wrap="square" lIns="0" tIns="0" rIns="0" bIns="0" rtlCol="0" anchor="t"/>
           <a:lstStyle/>
           <a:p>
-            <a:pPr indent="0" marL="0">
+            <a:pPr marL="0" indent="0">
               <a:buNone/>
             </a:pPr>
             <a:r>
@@ -7699,7 +7460,7 @@
           <a:bodyPr wrap="square" lIns="0" tIns="0" rIns="0" bIns="0" rtlCol="0" anchor="t"/>
           <a:lstStyle/>
           <a:p>
-            <a:pPr indent="0" marL="0">
+            <a:pPr marL="0" indent="0">
               <a:buNone/>
             </a:pPr>
             <a:r>
@@ -7760,7 +7521,7 @@
           <a:bodyPr wrap="square" lIns="0" tIns="0" rIns="0" bIns="0" rtlCol="0" anchor="ctr"/>
           <a:lstStyle/>
           <a:p>
-            <a:pPr algn="ctr" indent="0" marL="0">
+            <a:pPr marL="0" indent="0" algn="ctr">
               <a:buNone/>
             </a:pPr>
             <a:r>
@@ -7796,7 +7557,7 @@
           <a:bodyPr wrap="square" lIns="0" tIns="0" rIns="0" bIns="0" rtlCol="0" anchor="t"/>
           <a:lstStyle/>
           <a:p>
-            <a:pPr indent="0" marL="0">
+            <a:pPr marL="0" indent="0">
               <a:buNone/>
             </a:pPr>
             <a:r>
@@ -7832,7 +7593,7 @@
           <a:bodyPr wrap="square" lIns="0" tIns="0" rIns="0" bIns="0" rtlCol="0" anchor="t"/>
           <a:lstStyle/>
           <a:p>
-            <a:pPr indent="0" marL="0">
+            <a:pPr marL="0" indent="0">
               <a:buNone/>
             </a:pPr>
             <a:r>
@@ -7893,7 +7654,7 @@
           <a:bodyPr wrap="square" lIns="0" tIns="0" rIns="0" bIns="0" rtlCol="0" anchor="ctr"/>
           <a:lstStyle/>
           <a:p>
-            <a:pPr algn="ctr" indent="0" marL="0">
+            <a:pPr marL="0" indent="0" algn="ctr">
               <a:buNone/>
             </a:pPr>
             <a:r>
@@ -7929,7 +7690,7 @@
           <a:bodyPr wrap="square" lIns="0" tIns="0" rIns="0" bIns="0" rtlCol="0" anchor="t"/>
           <a:lstStyle/>
           <a:p>
-            <a:pPr indent="0" marL="0">
+            <a:pPr marL="0" indent="0">
               <a:buNone/>
             </a:pPr>
             <a:r>
@@ -7965,7 +7726,7 @@
           <a:bodyPr wrap="square" lIns="0" tIns="0" rIns="0" bIns="0" rtlCol="0" anchor="t"/>
           <a:lstStyle/>
           <a:p>
-            <a:pPr indent="0" marL="0">
+            <a:pPr marL="0" indent="0">
               <a:buNone/>
             </a:pPr>
             <a:r>
@@ -8026,7 +7787,7 @@
           <a:bodyPr wrap="square" lIns="0" tIns="0" rIns="0" bIns="0" rtlCol="0" anchor="ctr"/>
           <a:lstStyle/>
           <a:p>
-            <a:pPr algn="ctr" indent="0" marL="0">
+            <a:pPr marL="0" indent="0" algn="ctr">
               <a:buNone/>
             </a:pPr>
             <a:r>
@@ -8062,7 +7823,7 @@
           <a:bodyPr wrap="square" lIns="0" tIns="0" rIns="0" bIns="0" rtlCol="0" anchor="t"/>
           <a:lstStyle/>
           <a:p>
-            <a:pPr indent="0" marL="0">
+            <a:pPr marL="0" indent="0">
               <a:buNone/>
             </a:pPr>
             <a:r>
@@ -8098,7 +7859,7 @@
           <a:bodyPr wrap="square" lIns="0" tIns="0" rIns="0" bIns="0" rtlCol="0" anchor="t"/>
           <a:lstStyle/>
           <a:p>
-            <a:pPr indent="0" marL="0">
+            <a:pPr marL="0" indent="0">
               <a:buNone/>
             </a:pPr>
             <a:r>
@@ -8161,7 +7922,7 @@
           <a:bodyPr wrap="square" lIns="0" tIns="0" rIns="0" bIns="0" rtlCol="0" anchor="t"/>
           <a:lstStyle/>
           <a:p>
-            <a:pPr indent="0" marL="0">
+            <a:pPr marL="0" indent="0">
               <a:buNone/>
             </a:pPr>
             <a:r>
@@ -8272,7 +8033,7 @@
       </p:sp>
       <p:sp>
         <p:nvSpPr>
-          <p:cNvPr id="25" name="Slide Number Placeholder 0"/>
+          <p:cNvPr id="26" name="Slide Number Placeholder 0"/>
           <p:cNvSpPr>
             <a:spLocks noGrp="1"/>
           </p:cNvSpPr>
@@ -8290,7 +8051,7 @@
           </a:prstGeom>
           <a:extLst>
             <a:ext uri="{C572A759-6A51-4108-AA02-DFA0A04FC94B}">
-              <ma14:wrappingTextBoxFlag xmlns:ma14="http://schemas.microsoft.com/office/mac/drawingml/2011/main" val="0"/>
+              <ma14:wrappingTextBoxFlag xmlns:ma14="http://schemas.microsoft.com/office/mac/drawingml/2011/main" xmlns="" val="0"/>
             </a:ext>
           </a:extLst>
         </p:spPr>
@@ -8308,7 +8069,7 @@
           <a:p>
             <a:pPr algn="r"/>
             <a:fld id="{F7021451-1387-4CA6-816F-3879F97B5CBC}" type="slidenum">
-              <a:rPr b="0" lang="en-US"/>
+              <a:rPr lang="en-US" b="0"/>
               <a:t>4</a:t>
             </a:fld>
             <a:endParaRPr lang="en-US"/>
@@ -8343,9 +8104,11 @@
       <p:sp>
         <p:nvSpPr>
           <p:cNvPr id="2" name="Text 0"/>
-          <p:cNvSpPr/>
+          <p:cNvSpPr>
+            <a:spLocks noGrp="1"/>
+          </p:cNvSpPr>
           <p:nvPr>
-            <p:ph idx="100" type="title" hasCustomPrompt="1"/>
+            <p:ph type="title" idx="100" hasCustomPrompt="1"/>
           </p:nvPr>
         </p:nvSpPr>
         <p:spPr>
@@ -8363,7 +8126,7 @@
           <a:bodyPr wrap="square" rtlCol="0" anchor="ctr"/>
           <a:lstStyle/>
           <a:p>
-            <a:pPr indent="0" marL="0">
+            <a:pPr marL="0" indent="0">
               <a:buNone/>
             </a:pPr>
             <a:r>
@@ -8451,7 +8214,7 @@
           <a:bodyPr wrap="square" lIns="0" tIns="0" rIns="0" bIns="0" rtlCol="0" anchor="ctr"/>
           <a:lstStyle/>
           <a:p>
-            <a:pPr algn="ctr" indent="0" marL="0">
+            <a:pPr marL="0" indent="0" algn="ctr">
               <a:buNone/>
             </a:pPr>
             <a:r>
@@ -8487,7 +8250,7 @@
           <a:bodyPr wrap="square" lIns="0" tIns="0" rIns="0" bIns="0" rtlCol="0" anchor="t"/>
           <a:lstStyle/>
           <a:p>
-            <a:pPr indent="0" marL="0">
+            <a:pPr marL="0" indent="0">
               <a:buNone/>
             </a:pPr>
             <a:r>
@@ -8523,7 +8286,7 @@
           <a:bodyPr wrap="square" lIns="0" tIns="0" rIns="0" bIns="0" rtlCol="0" anchor="t"/>
           <a:lstStyle/>
           <a:p>
-            <a:pPr indent="0" marL="0">
+            <a:pPr marL="0" indent="0">
               <a:buNone/>
             </a:pPr>
             <a:r>
@@ -8611,7 +8374,7 @@
           <a:bodyPr wrap="square" lIns="0" tIns="0" rIns="0" bIns="0" rtlCol="0" anchor="ctr"/>
           <a:lstStyle/>
           <a:p>
-            <a:pPr algn="ctr" indent="0" marL="0">
+            <a:pPr marL="0" indent="0" algn="ctr">
               <a:buNone/>
             </a:pPr>
             <a:r>
@@ -8647,7 +8410,7 @@
           <a:bodyPr wrap="square" lIns="0" tIns="0" rIns="0" bIns="0" rtlCol="0" anchor="t"/>
           <a:lstStyle/>
           <a:p>
-            <a:pPr indent="0" marL="0">
+            <a:pPr marL="0" indent="0">
               <a:buNone/>
             </a:pPr>
             <a:r>
@@ -8683,7 +8446,7 @@
           <a:bodyPr wrap="square" lIns="0" tIns="0" rIns="0" bIns="0" rtlCol="0" anchor="t"/>
           <a:lstStyle/>
           <a:p>
-            <a:pPr indent="0" marL="0">
+            <a:pPr marL="0" indent="0">
               <a:buNone/>
             </a:pPr>
             <a:r>
@@ -8771,7 +8534,7 @@
           <a:bodyPr wrap="square" lIns="0" tIns="0" rIns="0" bIns="0" rtlCol="0" anchor="ctr"/>
           <a:lstStyle/>
           <a:p>
-            <a:pPr algn="ctr" indent="0" marL="0">
+            <a:pPr marL="0" indent="0" algn="ctr">
               <a:buNone/>
             </a:pPr>
             <a:r>
@@ -8807,7 +8570,7 @@
           <a:bodyPr wrap="square" lIns="0" tIns="0" rIns="0" bIns="0" rtlCol="0" anchor="t"/>
           <a:lstStyle/>
           <a:p>
-            <a:pPr indent="0" marL="0">
+            <a:pPr marL="0" indent="0">
               <a:buNone/>
             </a:pPr>
             <a:r>
@@ -8843,7 +8606,7 @@
           <a:bodyPr wrap="square" lIns="0" tIns="0" rIns="0" bIns="0" rtlCol="0" anchor="t"/>
           <a:lstStyle/>
           <a:p>
-            <a:pPr indent="0" marL="0">
+            <a:pPr marL="0" indent="0">
               <a:buNone/>
             </a:pPr>
             <a:r>
@@ -8931,7 +8694,7 @@
           <a:bodyPr wrap="square" lIns="0" tIns="0" rIns="0" bIns="0" rtlCol="0" anchor="ctr"/>
           <a:lstStyle/>
           <a:p>
-            <a:pPr algn="ctr" indent="0" marL="0">
+            <a:pPr marL="0" indent="0" algn="ctr">
               <a:buNone/>
             </a:pPr>
             <a:r>
@@ -8967,7 +8730,7 @@
           <a:bodyPr wrap="square" lIns="0" tIns="0" rIns="0" bIns="0" rtlCol="0" anchor="t"/>
           <a:lstStyle/>
           <a:p>
-            <a:pPr indent="0" marL="0">
+            <a:pPr marL="0" indent="0">
               <a:buNone/>
             </a:pPr>
             <a:r>
@@ -9003,7 +8766,7 @@
           <a:bodyPr wrap="square" lIns="0" tIns="0" rIns="0" bIns="0" rtlCol="0" anchor="t"/>
           <a:lstStyle/>
           <a:p>
-            <a:pPr indent="0" marL="0">
+            <a:pPr marL="0" indent="0">
               <a:buNone/>
             </a:pPr>
             <a:r>
@@ -9091,7 +8854,7 @@
           <a:bodyPr wrap="square" lIns="0" tIns="0" rIns="0" bIns="0" rtlCol="0" anchor="ctr"/>
           <a:lstStyle/>
           <a:p>
-            <a:pPr algn="ctr" indent="0" marL="0">
+            <a:pPr marL="0" indent="0" algn="ctr">
               <a:buNone/>
             </a:pPr>
             <a:r>
@@ -9127,7 +8890,7 @@
           <a:bodyPr wrap="square" lIns="0" tIns="0" rIns="0" bIns="0" rtlCol="0" anchor="t"/>
           <a:lstStyle/>
           <a:p>
-            <a:pPr indent="0" marL="0">
+            <a:pPr marL="0" indent="0">
               <a:buNone/>
             </a:pPr>
             <a:r>
@@ -9163,7 +8926,7 @@
           <a:bodyPr wrap="square" lIns="0" tIns="0" rIns="0" bIns="0" rtlCol="0" anchor="t"/>
           <a:lstStyle/>
           <a:p>
-            <a:pPr indent="0" marL="0">
+            <a:pPr marL="0" indent="0">
               <a:buNone/>
             </a:pPr>
             <a:r>
@@ -9251,7 +9014,7 @@
           <a:bodyPr wrap="square" lIns="0" tIns="0" rIns="0" bIns="0" rtlCol="0" anchor="ctr"/>
           <a:lstStyle/>
           <a:p>
-            <a:pPr algn="ctr" indent="0" marL="0">
+            <a:pPr marL="0" indent="0" algn="ctr">
               <a:buNone/>
             </a:pPr>
             <a:r>
@@ -9287,7 +9050,7 @@
           <a:bodyPr wrap="square" lIns="0" tIns="0" rIns="0" bIns="0" rtlCol="0" anchor="t"/>
           <a:lstStyle/>
           <a:p>
-            <a:pPr indent="0" marL="0">
+            <a:pPr marL="0" indent="0">
               <a:buNone/>
             </a:pPr>
             <a:r>
@@ -9323,7 +9086,7 @@
           <a:bodyPr wrap="square" lIns="0" tIns="0" rIns="0" bIns="0" rtlCol="0" anchor="t"/>
           <a:lstStyle/>
           <a:p>
-            <a:pPr indent="0" marL="0">
+            <a:pPr marL="0" indent="0">
               <a:buNone/>
             </a:pPr>
             <a:r>
@@ -9340,7 +9103,7 @@
       </p:sp>
       <p:sp>
         <p:nvSpPr>
-          <p:cNvPr id="25" name="Slide Number Placeholder 0"/>
+          <p:cNvPr id="33" name="Slide Number Placeholder 0"/>
           <p:cNvSpPr>
             <a:spLocks noGrp="1"/>
           </p:cNvSpPr>
@@ -9358,7 +9121,7 @@
           </a:prstGeom>
           <a:extLst>
             <a:ext uri="{C572A759-6A51-4108-AA02-DFA0A04FC94B}">
-              <ma14:wrappingTextBoxFlag xmlns:ma14="http://schemas.microsoft.com/office/mac/drawingml/2011/main" val="0"/>
+              <ma14:wrappingTextBoxFlag xmlns:ma14="http://schemas.microsoft.com/office/mac/drawingml/2011/main" xmlns="" val="0"/>
             </a:ext>
           </a:extLst>
         </p:spPr>
@@ -9376,7 +9139,7 @@
           <a:p>
             <a:pPr algn="r"/>
             <a:fld id="{F7021451-1387-4CA6-816F-3879F97B5CBC}" type="slidenum">
-              <a:rPr b="0" lang="en-US"/>
+              <a:rPr lang="en-US" b="0"/>
               <a:t>5</a:t>
             </a:fld>
             <a:endParaRPr lang="en-US"/>
@@ -9411,9 +9174,11 @@
       <p:sp>
         <p:nvSpPr>
           <p:cNvPr id="2" name="Text 0"/>
-          <p:cNvSpPr/>
+          <p:cNvSpPr>
+            <a:spLocks noGrp="1"/>
+          </p:cNvSpPr>
           <p:nvPr>
-            <p:ph idx="100" type="title" hasCustomPrompt="1"/>
+            <p:ph type="title" idx="100" hasCustomPrompt="1"/>
           </p:nvPr>
         </p:nvSpPr>
         <p:spPr>
@@ -9431,7 +9196,7 @@
           <a:bodyPr wrap="square" rtlCol="0" anchor="ctr"/>
           <a:lstStyle/>
           <a:p>
-            <a:pPr indent="0" marL="0">
+            <a:pPr marL="0" indent="0">
               <a:buNone/>
             </a:pPr>
             <a:r>
@@ -9469,9 +9234,27 @@
             <a:tbl>
               <a:tblPr/>
               <a:tblGrid>
-                <a:gridCol w="3291840"/>
-                <a:gridCol w="4023360"/>
-                <a:gridCol w="3749040"/>
+                <a:gridCol w="3291840">
+                  <a:extLst>
+                    <a:ext uri="{9D8B030D-6E8A-4147-A177-3AD203B41FA5}">
+                      <a16:colId xmlns:a16="http://schemas.microsoft.com/office/drawing/2014/main" val="20000"/>
+                    </a:ext>
+                  </a:extLst>
+                </a:gridCol>
+                <a:gridCol w="4023360">
+                  <a:extLst>
+                    <a:ext uri="{9D8B030D-6E8A-4147-A177-3AD203B41FA5}">
+                      <a16:colId xmlns:a16="http://schemas.microsoft.com/office/drawing/2014/main" val="20001"/>
+                    </a:ext>
+                  </a:extLst>
+                </a:gridCol>
+                <a:gridCol w="3749040">
+                  <a:extLst>
+                    <a:ext uri="{9D8B030D-6E8A-4147-A177-3AD203B41FA5}">
+                      <a16:colId xmlns:a16="http://schemas.microsoft.com/office/drawing/2014/main" val="20002"/>
+                    </a:ext>
+                  </a:extLst>
+                </a:gridCol>
               </a:tblGrid>
               <a:tr h="566928">
                 <a:tc>
@@ -9479,7 +9262,7 @@
                     <a:bodyPr/>
                     <a:lstStyle/>
                     <a:p>
-                      <a:pPr indent="0" marL="0">
+                      <a:pPr marL="0" indent="0">
                         <a:buNone/>
                       </a:pPr>
                       <a:r>
@@ -9540,7 +9323,7 @@
                     <a:bodyPr/>
                     <a:lstStyle/>
                     <a:p>
-                      <a:pPr indent="0" marL="0">
+                      <a:pPr marL="0" indent="0">
                         <a:buNone/>
                       </a:pPr>
                       <a:r>
@@ -9601,7 +9384,7 @@
                     <a:bodyPr/>
                     <a:lstStyle/>
                     <a:p>
-                      <a:pPr indent="0" marL="0">
+                      <a:pPr marL="0" indent="0">
                         <a:buNone/>
                       </a:pPr>
                       <a:r>
@@ -9657,6 +9440,11 @@
                     </a:solidFill>
                   </a:tcPr>
                 </a:tc>
+                <a:extLst>
+                  <a:ext uri="{0D108BD9-81ED-4DB2-BD59-A6C34878D82A}">
+                    <a16:rowId xmlns:a16="http://schemas.microsoft.com/office/drawing/2014/main" val="10000"/>
+                  </a:ext>
+                </a:extLst>
               </a:tr>
               <a:tr h="566928">
                 <a:tc>
@@ -9664,7 +9452,7 @@
                     <a:bodyPr/>
                     <a:lstStyle/>
                     <a:p>
-                      <a:pPr indent="0" marL="0">
+                      <a:pPr marL="0" indent="0">
                         <a:buNone/>
                       </a:pPr>
                       <a:r>
@@ -9725,7 +9513,7 @@
                     <a:bodyPr/>
                     <a:lstStyle/>
                     <a:p>
-                      <a:pPr indent="0" marL="0">
+                      <a:pPr marL="0" indent="0">
                         <a:buNone/>
                       </a:pPr>
                       <a:r>
@@ -9786,7 +9574,7 @@
                     <a:bodyPr/>
                     <a:lstStyle/>
                     <a:p>
-                      <a:pPr indent="0" marL="0">
+                      <a:pPr marL="0" indent="0">
                         <a:buNone/>
                       </a:pPr>
                       <a:r>
@@ -9842,6 +9630,11 @@
                     </a:solidFill>
                   </a:tcPr>
                 </a:tc>
+                <a:extLst>
+                  <a:ext uri="{0D108BD9-81ED-4DB2-BD59-A6C34878D82A}">
+                    <a16:rowId xmlns:a16="http://schemas.microsoft.com/office/drawing/2014/main" val="10001"/>
+                  </a:ext>
+                </a:extLst>
               </a:tr>
               <a:tr h="566928">
                 <a:tc>
@@ -9849,7 +9642,7 @@
                     <a:bodyPr/>
                     <a:lstStyle/>
                     <a:p>
-                      <a:pPr indent="0" marL="0">
+                      <a:pPr marL="0" indent="0">
                         <a:buNone/>
                       </a:pPr>
                       <a:r>
@@ -9910,7 +9703,7 @@
                     <a:bodyPr/>
                     <a:lstStyle/>
                     <a:p>
-                      <a:pPr indent="0" marL="0">
+                      <a:pPr marL="0" indent="0">
                         <a:buNone/>
                       </a:pPr>
                       <a:r>
@@ -9971,7 +9764,7 @@
                     <a:bodyPr/>
                     <a:lstStyle/>
                     <a:p>
-                      <a:pPr indent="0" marL="0">
+                      <a:pPr marL="0" indent="0">
                         <a:buNone/>
                       </a:pPr>
                       <a:r>
@@ -10027,6 +9820,11 @@
                     </a:solidFill>
                   </a:tcPr>
                 </a:tc>
+                <a:extLst>
+                  <a:ext uri="{0D108BD9-81ED-4DB2-BD59-A6C34878D82A}">
+                    <a16:rowId xmlns:a16="http://schemas.microsoft.com/office/drawing/2014/main" val="10002"/>
+                  </a:ext>
+                </a:extLst>
               </a:tr>
               <a:tr h="566928">
                 <a:tc>
@@ -10034,7 +9832,7 @@
                     <a:bodyPr/>
                     <a:lstStyle/>
                     <a:p>
-                      <a:pPr indent="0" marL="0">
+                      <a:pPr marL="0" indent="0">
                         <a:buNone/>
                       </a:pPr>
                       <a:r>
@@ -10095,7 +9893,7 @@
                     <a:bodyPr/>
                     <a:lstStyle/>
                     <a:p>
-                      <a:pPr indent="0" marL="0">
+                      <a:pPr marL="0" indent="0">
                         <a:buNone/>
                       </a:pPr>
                       <a:r>
@@ -10156,7 +9954,7 @@
                     <a:bodyPr/>
                     <a:lstStyle/>
                     <a:p>
-                      <a:pPr indent="0" marL="0">
+                      <a:pPr marL="0" indent="0">
                         <a:buNone/>
                       </a:pPr>
                       <a:r>
@@ -10212,6 +10010,11 @@
                     </a:solidFill>
                   </a:tcPr>
                 </a:tc>
+                <a:extLst>
+                  <a:ext uri="{0D108BD9-81ED-4DB2-BD59-A6C34878D82A}">
+                    <a16:rowId xmlns:a16="http://schemas.microsoft.com/office/drawing/2014/main" val="10003"/>
+                  </a:ext>
+                </a:extLst>
               </a:tr>
               <a:tr h="566928">
                 <a:tc>
@@ -10219,7 +10022,7 @@
                     <a:bodyPr/>
                     <a:lstStyle/>
                     <a:p>
-                      <a:pPr indent="0" marL="0">
+                      <a:pPr marL="0" indent="0">
                         <a:buNone/>
                       </a:pPr>
                       <a:r>
@@ -10280,7 +10083,7 @@
                     <a:bodyPr/>
                     <a:lstStyle/>
                     <a:p>
-                      <a:pPr indent="0" marL="0">
+                      <a:pPr marL="0" indent="0">
                         <a:buNone/>
                       </a:pPr>
                       <a:r>
@@ -10341,7 +10144,7 @@
                     <a:bodyPr/>
                     <a:lstStyle/>
                     <a:p>
-                      <a:pPr indent="0" marL="0">
+                      <a:pPr marL="0" indent="0">
                         <a:buNone/>
                       </a:pPr>
                       <a:r>
@@ -10397,6 +10200,11 @@
                     </a:solidFill>
                   </a:tcPr>
                 </a:tc>
+                <a:extLst>
+                  <a:ext uri="{0D108BD9-81ED-4DB2-BD59-A6C34878D82A}">
+                    <a16:rowId xmlns:a16="http://schemas.microsoft.com/office/drawing/2014/main" val="10004"/>
+                  </a:ext>
+                </a:extLst>
               </a:tr>
               <a:tr h="566928">
                 <a:tc>
@@ -10404,7 +10212,7 @@
                     <a:bodyPr/>
                     <a:lstStyle/>
                     <a:p>
-                      <a:pPr indent="0" marL="0">
+                      <a:pPr marL="0" indent="0">
                         <a:buNone/>
                       </a:pPr>
                       <a:r>
@@ -10465,7 +10273,7 @@
                     <a:bodyPr/>
                     <a:lstStyle/>
                     <a:p>
-                      <a:pPr indent="0" marL="0">
+                      <a:pPr marL="0" indent="0">
                         <a:buNone/>
                       </a:pPr>
                       <a:r>
@@ -10526,7 +10334,7 @@
                     <a:bodyPr/>
                     <a:lstStyle/>
                     <a:p>
-                      <a:pPr indent="0" marL="0">
+                      <a:pPr marL="0" indent="0">
                         <a:buNone/>
                       </a:pPr>
                       <a:r>
@@ -10582,6 +10390,11 @@
                     </a:solidFill>
                   </a:tcPr>
                 </a:tc>
+                <a:extLst>
+                  <a:ext uri="{0D108BD9-81ED-4DB2-BD59-A6C34878D82A}">
+                    <a16:rowId xmlns:a16="http://schemas.microsoft.com/office/drawing/2014/main" val="10005"/>
+                  </a:ext>
+                </a:extLst>
               </a:tr>
               <a:tr h="566928">
                 <a:tc>
@@ -10589,7 +10402,7 @@
                     <a:bodyPr/>
                     <a:lstStyle/>
                     <a:p>
-                      <a:pPr indent="0" marL="0">
+                      <a:pPr marL="0" indent="0">
                         <a:buNone/>
                       </a:pPr>
                       <a:r>
@@ -10650,7 +10463,7 @@
                     <a:bodyPr/>
                     <a:lstStyle/>
                     <a:p>
-                      <a:pPr indent="0" marL="0">
+                      <a:pPr marL="0" indent="0">
                         <a:buNone/>
                       </a:pPr>
                       <a:r>
@@ -10711,7 +10524,7 @@
                     <a:bodyPr/>
                     <a:lstStyle/>
                     <a:p>
-                      <a:pPr indent="0" marL="0">
+                      <a:pPr marL="0" indent="0">
                         <a:buNone/>
                       </a:pPr>
                       <a:r>
@@ -10767,6 +10580,11 @@
                     </a:solidFill>
                   </a:tcPr>
                 </a:tc>
+                <a:extLst>
+                  <a:ext uri="{0D108BD9-81ED-4DB2-BD59-A6C34878D82A}">
+                    <a16:rowId xmlns:a16="http://schemas.microsoft.com/office/drawing/2014/main" val="10006"/>
+                  </a:ext>
+                </a:extLst>
               </a:tr>
             </a:tbl>
           </a:graphicData>
@@ -10792,7 +10610,7 @@
           </a:prstGeom>
           <a:extLst>
             <a:ext uri="{C572A759-6A51-4108-AA02-DFA0A04FC94B}">
-              <ma14:wrappingTextBoxFlag xmlns:ma14="http://schemas.microsoft.com/office/mac/drawingml/2011/main" val="0"/>
+              <ma14:wrappingTextBoxFlag xmlns:ma14="http://schemas.microsoft.com/office/mac/drawingml/2011/main" xmlns="" val="0"/>
             </a:ext>
           </a:extLst>
         </p:spPr>
@@ -10810,7 +10628,7 @@
           <a:p>
             <a:pPr algn="r"/>
             <a:fld id="{F7021451-1387-4CA6-816F-3879F97B5CBC}" type="slidenum">
-              <a:rPr b="0" lang="en-US"/>
+              <a:rPr lang="en-US" b="0"/>
               <a:t>6</a:t>
             </a:fld>
             <a:endParaRPr lang="en-US"/>
@@ -10845,9 +10663,11 @@
       <p:sp>
         <p:nvSpPr>
           <p:cNvPr id="2" name="Text 0"/>
-          <p:cNvSpPr/>
+          <p:cNvSpPr>
+            <a:spLocks noGrp="1"/>
+          </p:cNvSpPr>
           <p:nvPr>
-            <p:ph idx="100" type="title" hasCustomPrompt="1"/>
+            <p:ph type="title" idx="100" hasCustomPrompt="1"/>
           </p:nvPr>
         </p:nvSpPr>
         <p:spPr>
@@ -10865,7 +10685,7 @@
           <a:bodyPr wrap="square" rtlCol="0" anchor="ctr"/>
           <a:lstStyle/>
           <a:p>
-            <a:pPr indent="0" marL="0">
+            <a:pPr marL="0" indent="0">
               <a:buNone/>
             </a:pPr>
             <a:r>
@@ -10928,7 +10748,7 @@
           <a:bodyPr wrap="square" lIns="0" tIns="0" rIns="0" bIns="0" rtlCol="0" anchor="ctr"/>
           <a:lstStyle/>
           <a:p>
-            <a:pPr indent="0" marL="0">
+            <a:pPr marL="0" indent="0">
               <a:buNone/>
             </a:pPr>
             <a:r>
@@ -10964,7 +10784,7 @@
           <a:bodyPr wrap="square" lIns="0" tIns="0" rIns="0" bIns="0" rtlCol="0" anchor="ctr"/>
           <a:lstStyle/>
           <a:p>
-            <a:pPr indent="0" marL="0">
+            <a:pPr marL="0" indent="0">
               <a:buNone/>
             </a:pPr>
             <a:r>
@@ -11027,7 +10847,7 @@
           <a:bodyPr wrap="square" lIns="0" tIns="0" rIns="0" bIns="0" rtlCol="0" anchor="ctr"/>
           <a:lstStyle/>
           <a:p>
-            <a:pPr indent="0" marL="0">
+            <a:pPr marL="0" indent="0">
               <a:buNone/>
             </a:pPr>
             <a:r>
@@ -11063,7 +10883,7 @@
           <a:bodyPr wrap="square" lIns="0" tIns="0" rIns="0" bIns="0" rtlCol="0" anchor="ctr"/>
           <a:lstStyle/>
           <a:p>
-            <a:pPr indent="0" marL="0">
+            <a:pPr marL="0" indent="0">
               <a:buNone/>
             </a:pPr>
             <a:r>
@@ -11126,7 +10946,7 @@
           <a:bodyPr wrap="square" lIns="0" tIns="0" rIns="0" bIns="0" rtlCol="0" anchor="ctr"/>
           <a:lstStyle/>
           <a:p>
-            <a:pPr indent="0" marL="0">
+            <a:pPr marL="0" indent="0">
               <a:buNone/>
             </a:pPr>
             <a:r>
@@ -11162,7 +10982,7 @@
           <a:bodyPr wrap="square" lIns="0" tIns="0" rIns="0" bIns="0" rtlCol="0" anchor="ctr"/>
           <a:lstStyle/>
           <a:p>
-            <a:pPr indent="0" marL="0">
+            <a:pPr marL="0" indent="0">
               <a:buNone/>
             </a:pPr>
             <a:r>
@@ -11225,7 +11045,7 @@
           <a:bodyPr wrap="square" lIns="0" tIns="0" rIns="0" bIns="0" rtlCol="0" anchor="ctr"/>
           <a:lstStyle/>
           <a:p>
-            <a:pPr indent="0" marL="0">
+            <a:pPr marL="0" indent="0">
               <a:buNone/>
             </a:pPr>
             <a:r>
@@ -11261,7 +11081,7 @@
           <a:bodyPr wrap="square" lIns="0" tIns="0" rIns="0" bIns="0" rtlCol="0" anchor="ctr"/>
           <a:lstStyle/>
           <a:p>
-            <a:pPr indent="0" marL="0">
+            <a:pPr marL="0" indent="0">
               <a:buNone/>
             </a:pPr>
             <a:r>
@@ -11296,7 +11116,7 @@
           </a:prstGeom>
           <a:extLst>
             <a:ext uri="{C572A759-6A51-4108-AA02-DFA0A04FC94B}">
-              <ma14:wrappingTextBoxFlag xmlns:ma14="http://schemas.microsoft.com/office/mac/drawingml/2011/main" val="0"/>
+              <ma14:wrappingTextBoxFlag xmlns:ma14="http://schemas.microsoft.com/office/mac/drawingml/2011/main" xmlns="" val="0"/>
             </a:ext>
           </a:extLst>
         </p:spPr>
@@ -11314,7 +11134,7 @@
           <a:p>
             <a:pPr algn="r"/>
             <a:fld id="{F7021451-1387-4CA6-816F-3879F97B5CBC}" type="slidenum">
-              <a:rPr b="0" lang="en-US"/>
+              <a:rPr lang="en-US" b="0"/>
               <a:t>7</a:t>
             </a:fld>
             <a:endParaRPr lang="en-US"/>
@@ -11349,9 +11169,11 @@
       <p:sp>
         <p:nvSpPr>
           <p:cNvPr id="2" name="Text 0"/>
-          <p:cNvSpPr/>
+          <p:cNvSpPr>
+            <a:spLocks noGrp="1"/>
+          </p:cNvSpPr>
           <p:nvPr>
-            <p:ph idx="100" type="title" hasCustomPrompt="1"/>
+            <p:ph type="title" idx="100" hasCustomPrompt="1"/>
           </p:nvPr>
         </p:nvSpPr>
         <p:spPr>
@@ -11369,7 +11191,7 @@
           <a:bodyPr wrap="square" rtlCol="0" anchor="ctr"/>
           <a:lstStyle/>
           <a:p>
-            <a:pPr indent="0" marL="0">
+            <a:pPr marL="0" indent="0">
               <a:buNone/>
             </a:pPr>
             <a:r>
@@ -11386,17 +11208,23 @@
       </p:sp>
       <p:graphicFrame>
         <p:nvGraphicFramePr>
-          <p:cNvPr id="3" name="Chart 0" descr=""/>
+          <p:cNvPr id="3" name="Chart 0"/>
           <p:cNvGraphicFramePr/>
-          <p:nvPr/>
+          <p:nvPr>
+            <p:extLst>
+              <p:ext uri="{D42A27DB-BD31-4B8C-83A1-F6EECF244321}">
+                <p14:modId xmlns:p14="http://schemas.microsoft.com/office/powerpoint/2010/main" val="2361409617"/>
+              </p:ext>
+            </p:extLst>
+          </p:nvPr>
         </p:nvGraphicFramePr>
         <p:xfrm>
           <a:off x="548640" y="1325880"/>
           <a:ext cx="6583680" cy="4754880"/>
         </p:xfrm>
-        <a:graphic xmlns:a="http://schemas.openxmlformats.org/drawingml/2006/main">
+        <a:graphic>
           <a:graphicData uri="http://schemas.openxmlformats.org/drawingml/2006/chart">
-            <c:chart xmlns:c="http://schemas.openxmlformats.org/drawingml/2006/chart" r:id="rId1"/>
+            <c:chart xmlns:c="http://schemas.openxmlformats.org/drawingml/2006/chart" xmlns:r="http://schemas.openxmlformats.org/officeDocument/2006/relationships" r:id="rId3"/>
           </a:graphicData>
         </a:graphic>
       </p:graphicFrame>
@@ -11448,7 +11276,7 @@
           <a:bodyPr wrap="square" lIns="0" tIns="0" rIns="0" bIns="0" rtlCol="0" anchor="ctr"/>
           <a:lstStyle/>
           <a:p>
-            <a:pPr indent="0" marL="0">
+            <a:pPr marL="0" indent="0">
               <a:buNone/>
             </a:pPr>
             <a:r>
@@ -11484,7 +11312,7 @@
           <a:bodyPr wrap="square" lIns="0" tIns="0" rIns="0" bIns="0" rtlCol="0" anchor="ctr"/>
           <a:lstStyle/>
           <a:p>
-            <a:pPr indent="0" marL="0">
+            <a:pPr marL="0" indent="0">
               <a:buNone/>
             </a:pPr>
             <a:r>
@@ -11547,7 +11375,7 @@
           <a:bodyPr wrap="square" lIns="0" tIns="0" rIns="0" bIns="0" rtlCol="0" anchor="ctr"/>
           <a:lstStyle/>
           <a:p>
-            <a:pPr indent="0" marL="0">
+            <a:pPr marL="0" indent="0">
               <a:buNone/>
             </a:pPr>
             <a:r>
@@ -11556,7 +11384,7 @@
                   <a:schemeClr val="tx2"/>
                 </a:solidFill>
               </a:rPr>
-              <a:t>85%</a:t>
+              <a:t>78%</a:t>
             </a:r>
             <a:endParaRPr lang="en-US" sz="2800" dirty="0"/>
           </a:p>
@@ -11583,7 +11411,7 @@
           <a:bodyPr wrap="square" lIns="0" tIns="0" rIns="0" bIns="0" rtlCol="0" anchor="ctr"/>
           <a:lstStyle/>
           <a:p>
-            <a:pPr indent="0" marL="0">
+            <a:pPr marL="0" indent="0">
               <a:buNone/>
             </a:pPr>
             <a:r>
@@ -11646,7 +11474,7 @@
           <a:bodyPr wrap="square" lIns="0" tIns="0" rIns="0" bIns="0" rtlCol="0" anchor="ctr"/>
           <a:lstStyle/>
           <a:p>
-            <a:pPr indent="0" marL="0">
+            <a:pPr marL="0" indent="0">
               <a:buNone/>
             </a:pPr>
             <a:r>
@@ -11682,7 +11510,7 @@
           <a:bodyPr wrap="square" lIns="0" tIns="0" rIns="0" bIns="0" rtlCol="0" anchor="ctr"/>
           <a:lstStyle/>
           <a:p>
-            <a:pPr indent="0" marL="0">
+            <a:pPr marL="0" indent="0">
               <a:buNone/>
             </a:pPr>
             <a:r>
@@ -11718,7 +11546,7 @@
           <a:bodyPr wrap="square" lIns="0" tIns="0" rIns="0" bIns="0" rtlCol="0" anchor="t"/>
           <a:lstStyle/>
           <a:p>
-            <a:pPr indent="0" marL="0">
+            <a:pPr marL="0" indent="0">
               <a:buNone/>
             </a:pPr>
             <a:r>
@@ -11729,9 +11557,6 @@
               </a:rPr>
               <a:t>Testcontainers </a:t>
             </a:r>
-            <a:pPr indent="0" marL="0">
-              <a:buNone/>
-            </a:pPr>
             <a:r>
               <a:rPr lang="en-US" sz="1400" dirty="0">
                 <a:solidFill>
@@ -11740,9 +11565,6 @@
               </a:rPr>
               <a:t>for every database-owning service · </a:t>
             </a:r>
-            <a:pPr indent="0" marL="0">
-              <a:buNone/>
-            </a:pPr>
             <a:r>
               <a:rPr lang="en-US" sz="1400" b="1" dirty="0">
                 <a:solidFill>
@@ -11751,9 +11573,6 @@
               </a:rPr>
               <a:t>embedded Kafka </a:t>
             </a:r>
-            <a:pPr indent="0" marL="0">
-              <a:buNone/>
-            </a:pPr>
             <a:r>
               <a:rPr lang="en-US" sz="1400" dirty="0">
                 <a:solidFill>
@@ -11762,9 +11581,6 @@
               </a:rPr>
               <a:t>for retry → DLT · </a:t>
             </a:r>
-            <a:pPr indent="0" marL="0">
-              <a:buNone/>
-            </a:pPr>
             <a:r>
               <a:rPr lang="en-US" sz="1400" b="1" dirty="0">
                 <a:solidFill>
@@ -11773,9 +11589,6 @@
               </a:rPr>
               <a:t>WireMock </a:t>
             </a:r>
-            <a:pPr indent="0" marL="0">
-              <a:buNone/>
-            </a:pPr>
             <a:r>
               <a:rPr lang="en-US" sz="1400" dirty="0">
                 <a:solidFill>
@@ -11784,9 +11597,6 @@
               </a:rPr>
               <a:t>for resilience and FR-14 · </a:t>
             </a:r>
-            <a:pPr indent="0" marL="0">
-              <a:buNone/>
-            </a:pPr>
             <a:r>
               <a:rPr lang="en-US" sz="1400" b="1" dirty="0">
                 <a:solidFill>
@@ -11819,7 +11629,7 @@
           </a:prstGeom>
           <a:extLst>
             <a:ext uri="{C572A759-6A51-4108-AA02-DFA0A04FC94B}">
-              <ma14:wrappingTextBoxFlag xmlns:ma14="http://schemas.microsoft.com/office/mac/drawingml/2011/main" val="0"/>
+              <ma14:wrappingTextBoxFlag xmlns:ma14="http://schemas.microsoft.com/office/mac/drawingml/2011/main" xmlns="" val="0"/>
             </a:ext>
           </a:extLst>
         </p:spPr>
@@ -11837,7 +11647,7 @@
           <a:p>
             <a:pPr algn="r"/>
             <a:fld id="{F7021451-1387-4CA6-816F-3879F97B5CBC}" type="slidenum">
-              <a:rPr b="0" lang="en-US"/>
+              <a:rPr lang="en-US" b="0"/>
               <a:t>8</a:t>
             </a:fld>
             <a:endParaRPr lang="en-US"/>
@@ -11872,9 +11682,11 @@
       <p:sp>
         <p:nvSpPr>
           <p:cNvPr id="2" name="Text 0"/>
-          <p:cNvSpPr/>
+          <p:cNvSpPr>
+            <a:spLocks noGrp="1"/>
+          </p:cNvSpPr>
           <p:nvPr>
-            <p:ph idx="100" type="title" hasCustomPrompt="1"/>
+            <p:ph type="title" idx="100" hasCustomPrompt="1"/>
           </p:nvPr>
         </p:nvSpPr>
         <p:spPr>
@@ -11892,7 +11704,7 @@
           <a:bodyPr wrap="square" rtlCol="0" anchor="ctr"/>
           <a:lstStyle/>
           <a:p>
-            <a:pPr indent="0" marL="0">
+            <a:pPr marL="0" indent="0">
               <a:buNone/>
             </a:pPr>
             <a:r>
@@ -11901,7 +11713,7 @@
                   <a:schemeClr val="tx2"/>
                 </a:solidFill>
               </a:rPr>
-              <a:t>Performance: targets met with a wide margin</a:t>
+              <a:t>Performance: one bottleneck found and fixed</a:t>
             </a:r>
             <a:endParaRPr lang="en-US" sz="3200" dirty="0"/>
           </a:p>
@@ -11909,17 +11721,23 @@
       </p:sp>
       <p:graphicFrame>
         <p:nvGraphicFramePr>
-          <p:cNvPr id="3" name="Chart 0" descr=""/>
+          <p:cNvPr id="3" name="Chart 0"/>
           <p:cNvGraphicFramePr/>
-          <p:nvPr/>
+          <p:nvPr>
+            <p:extLst>
+              <p:ext uri="{D42A27DB-BD31-4B8C-83A1-F6EECF244321}">
+                <p14:modId xmlns:p14="http://schemas.microsoft.com/office/powerpoint/2010/main" val="2371585072"/>
+              </p:ext>
+            </p:extLst>
+          </p:nvPr>
         </p:nvGraphicFramePr>
         <p:xfrm>
           <a:off x="548640" y="1325880"/>
           <a:ext cx="6035040" cy="4206240"/>
         </p:xfrm>
-        <a:graphic xmlns:a="http://schemas.openxmlformats.org/drawingml/2006/main">
+        <a:graphic>
           <a:graphicData uri="http://schemas.openxmlformats.org/drawingml/2006/chart">
-            <c:chart xmlns:c="http://schemas.openxmlformats.org/drawingml/2006/chart" r:id="rId1"/>
+            <c:chart xmlns:c="http://schemas.openxmlformats.org/drawingml/2006/chart" xmlns:r="http://schemas.openxmlformats.org/officeDocument/2006/relationships" r:id="rId3"/>
           </a:graphicData>
         </a:graphic>
       </p:graphicFrame>
@@ -11949,6 +11767,13 @@
             <a:prstDash val="solid"/>
           </a:ln>
         </p:spPr>
+        <p:txBody>
+          <a:bodyPr/>
+          <a:lstStyle/>
+          <a:p>
+            <a:endParaRPr lang="en-US"/>
+          </a:p>
+        </p:txBody>
       </p:sp>
       <p:sp>
         <p:nvSpPr>
@@ -11971,7 +11796,7 @@
           <a:bodyPr wrap="square" lIns="0" tIns="0" rIns="0" bIns="0" rtlCol="0" anchor="ctr"/>
           <a:lstStyle/>
           <a:p>
-            <a:pPr indent="0" marL="0">
+            <a:pPr marL="0" indent="0">
               <a:buNone/>
             </a:pPr>
             <a:r>
@@ -11980,7 +11805,7 @@
                   <a:schemeClr val="tx2"/>
                 </a:solidFill>
               </a:rPr>
-              <a:t>59.8 req/s</a:t>
+              <a:t>59 req/s</a:t>
             </a:r>
             <a:endParaRPr lang="en-US" sz="2400" dirty="0"/>
           </a:p>
@@ -12007,7 +11832,7 @@
           <a:bodyPr wrap="square" lIns="0" tIns="0" rIns="0" bIns="0" rtlCol="0" anchor="ctr"/>
           <a:lstStyle/>
           <a:p>
-            <a:pPr indent="0" marL="0">
+            <a:pPr marL="0" indent="0">
               <a:buNone/>
             </a:pPr>
             <a:r>
@@ -12048,6 +11873,13 @@
             <a:prstDash val="solid"/>
           </a:ln>
         </p:spPr>
+        <p:txBody>
+          <a:bodyPr/>
+          <a:lstStyle/>
+          <a:p>
+            <a:endParaRPr lang="en-US"/>
+          </a:p>
+        </p:txBody>
       </p:sp>
       <p:sp>
         <p:nvSpPr>
@@ -12070,7 +11902,7 @@
           <a:bodyPr wrap="square" lIns="0" tIns="0" rIns="0" bIns="0" rtlCol="0" anchor="ctr"/>
           <a:lstStyle/>
           <a:p>
-            <a:pPr indent="0" marL="0">
+            <a:pPr marL="0" indent="0">
               <a:buNone/>
             </a:pPr>
             <a:r>
@@ -12106,7 +11938,7 @@
           <a:bodyPr wrap="square" lIns="0" tIns="0" rIns="0" bIns="0" rtlCol="0" anchor="ctr"/>
           <a:lstStyle/>
           <a:p>
-            <a:pPr indent="0" marL="0">
+            <a:pPr marL="0" indent="0">
               <a:buNone/>
             </a:pPr>
             <a:r>
@@ -12115,7 +11947,15 @@
                   <a:schemeClr val="tx1"/>
                 </a:solidFill>
               </a:rPr>
-              <a:t>errors over 28,735 requests</a:t>
+              <a:t>errors over 25,644 </a:t>
+            </a:r>
+            <a:r>
+              <a:rPr lang="en-US" sz="1400">
+                <a:solidFill>
+                  <a:schemeClr val="tx1"/>
+                </a:solidFill>
+              </a:rPr>
+              <a:t>requests (5 min load)</a:t>
             </a:r>
             <a:endParaRPr lang="en-US" sz="1400" dirty="0"/>
           </a:p>
@@ -12147,6 +11987,13 @@
             <a:prstDash val="solid"/>
           </a:ln>
         </p:spPr>
+        <p:txBody>
+          <a:bodyPr/>
+          <a:lstStyle/>
+          <a:p>
+            <a:endParaRPr lang="en-US"/>
+          </a:p>
+        </p:txBody>
       </p:sp>
       <p:sp>
         <p:nvSpPr>
@@ -12169,7 +12016,7 @@
           <a:bodyPr wrap="square" lIns="0" tIns="0" rIns="0" bIns="0" rtlCol="0" anchor="ctr"/>
           <a:lstStyle/>
           <a:p>
-            <a:pPr indent="0" marL="0">
+            <a:pPr marL="0" indent="0">
               <a:buNone/>
             </a:pPr>
             <a:r>
@@ -12178,7 +12025,7 @@
                   <a:schemeClr val="tx2"/>
                 </a:solidFill>
               </a:rPr>
-              <a:t>0 errors</a:t>
+              <a:t>0.07 %</a:t>
             </a:r>
             <a:endParaRPr lang="en-US" sz="2400" dirty="0"/>
           </a:p>
@@ -12205,7 +12052,7 @@
           <a:bodyPr wrap="square" lIns="0" tIns="0" rIns="0" bIns="0" rtlCol="0" anchor="ctr"/>
           <a:lstStyle/>
           <a:p>
-            <a:pPr indent="0" marL="0">
+            <a:pPr marL="0" indent="0">
               <a:buNone/>
             </a:pPr>
             <a:r>
@@ -12214,7 +12061,7 @@
                   <a:schemeClr val="tx1"/>
                 </a:solidFill>
               </a:rPr>
-              <a:t>128,427 requests at up to 150 VUs</a:t>
+              <a:t>errors over 64,159 requests at up to 150 VUs</a:t>
             </a:r>
             <a:endParaRPr lang="en-US" sz="1400" dirty="0"/>
           </a:p>
@@ -12241,7 +12088,7 @@
           <a:bodyPr wrap="square" lIns="0" tIns="0" rIns="0" bIns="0" rtlCol="0" anchor="t"/>
           <a:lstStyle/>
           <a:p>
-            <a:pPr indent="0" marL="0">
+            <a:pPr marL="0" indent="0">
               <a:buNone/>
             </a:pPr>
             <a:r>
@@ -12252,16 +12099,37 @@
               </a:rPr>
               <a:t>Bottleneck found and fixed: </a:t>
             </a:r>
-            <a:pPr indent="0" marL="0">
-              <a:buNone/>
-            </a:pPr>
             <a:r>
               <a:rPr lang="en-US" sz="1400" dirty="0">
                 <a:solidFill>
                   <a:schemeClr val="tx1"/>
                 </a:solidFill>
               </a:rPr>
-              <a:t>two serial remote calls per order. A 60 s price cache took POST /orders p95 from 600 to 443 ms in a controlled A/B.</a:t>
+              <a:t>the gateway built a WebSession per request. Removing it took GET /products p95 </a:t>
+            </a:r>
+            <a:r>
+              <a:rPr lang="en-US" sz="1400">
+                <a:solidFill>
+                  <a:schemeClr val="tx1"/>
+                </a:solidFill>
+              </a:rPr>
+              <a:t>from 1.23 s to 475 ms </a:t>
+            </a:r>
+            <a:r>
+              <a:rPr lang="en-US" sz="1400" dirty="0">
+                <a:solidFill>
+                  <a:schemeClr val="tx1"/>
+                </a:solidFill>
+              </a:rPr>
+              <a:t>and POST /orders </a:t>
+            </a:r>
+            <a:r>
+              <a:rPr lang="en-US" sz="1400">
+                <a:solidFill>
+                  <a:schemeClr val="tx1"/>
+                </a:solidFill>
+              </a:rPr>
+              <a:t>to 487 ms.</a:t>
             </a:r>
             <a:endParaRPr lang="en-US" sz="1400" dirty="0"/>
           </a:p>
@@ -12287,7 +12155,7 @@
           </a:prstGeom>
           <a:extLst>
             <a:ext uri="{C572A759-6A51-4108-AA02-DFA0A04FC94B}">
-              <ma14:wrappingTextBoxFlag xmlns:ma14="http://schemas.microsoft.com/office/mac/drawingml/2011/main" val="0"/>
+              <ma14:wrappingTextBoxFlag xmlns:ma14="http://schemas.microsoft.com/office/mac/drawingml/2011/main" xmlns="" val="0"/>
             </a:ext>
           </a:extLst>
         </p:spPr>
@@ -12305,7 +12173,7 @@
           <a:p>
             <a:pPr algn="r"/>
             <a:fld id="{F7021451-1387-4CA6-816F-3879F97B5CBC}" type="slidenum">
-              <a:rPr b="0" lang="en-US"/>
+              <a:rPr lang="en-US" b="0"/>
               <a:t>9</a:t>
             </a:fld>
             <a:endParaRPr lang="en-US"/>
@@ -12613,4 +12481,299 @@
     </a:ext>
   </a:extLst>
 </a:theme>
+</file>
+
+<file path=ppt/theme/theme2.xml><?xml version="1.0" encoding="utf-8"?>
+<a:theme xmlns:a="http://schemas.openxmlformats.org/drawingml/2006/main" name="Office Theme">
+  <a:themeElements>
+    <a:clrScheme name="Office">
+      <a:dk1>
+        <a:sysClr val="windowText" lastClr="000000"/>
+      </a:dk1>
+      <a:lt1>
+        <a:sysClr val="window" lastClr="FFFFFF"/>
+      </a:lt1>
+      <a:dk2>
+        <a:srgbClr val="44546A"/>
+      </a:dk2>
+      <a:lt2>
+        <a:srgbClr val="E7E6E6"/>
+      </a:lt2>
+      <a:accent1>
+        <a:srgbClr val="4472C4"/>
+      </a:accent1>
+      <a:accent2>
+        <a:srgbClr val="ED7D31"/>
+      </a:accent2>
+      <a:accent3>
+        <a:srgbClr val="A5A5A5"/>
+      </a:accent3>
+      <a:accent4>
+        <a:srgbClr val="FFC000"/>
+      </a:accent4>
+      <a:accent5>
+        <a:srgbClr val="5B9BD5"/>
+      </a:accent5>
+      <a:accent6>
+        <a:srgbClr val="70AD47"/>
+      </a:accent6>
+      <a:hlink>
+        <a:srgbClr val="0563C1"/>
+      </a:hlink>
+      <a:folHlink>
+        <a:srgbClr val="954F72"/>
+      </a:folHlink>
+    </a:clrScheme>
+    <a:fontScheme name="Office">
+      <a:majorFont>
+        <a:latin typeface="Calibri Light" panose="020F0302020204030204"/>
+        <a:ea typeface=""/>
+        <a:cs typeface=""/>
+        <a:font script="Jpan" typeface="游ゴシック Light"/>
+        <a:font script="Hang" typeface="맑은 고딕"/>
+        <a:font script="Hans" typeface="等线 Light"/>
+        <a:font script="Hant" typeface="新細明體"/>
+        <a:font script="Arab" typeface="Times New Roman"/>
+        <a:font script="Hebr" typeface="Times New Roman"/>
+        <a:font script="Thai" typeface="Angsana New"/>
+        <a:font script="Ethi" typeface="Nyala"/>
+        <a:font script="Beng" typeface="Vrinda"/>
+        <a:font script="Gujr" typeface="Shruti"/>
+        <a:font script="Khmr" typeface="MoolBoran"/>
+        <a:font script="Knda" typeface="Tunga"/>
+        <a:font script="Guru" typeface="Raavi"/>
+        <a:font script="Cans" typeface="Euphemia"/>
+        <a:font script="Cher" typeface="Plantagenet Cherokee"/>
+        <a:font script="Yiii" typeface="Microsoft Yi Baiti"/>
+        <a:font script="Tibt" typeface="Microsoft Himalaya"/>
+        <a:font script="Thaa" typeface="MV Boli"/>
+        <a:font script="Deva" typeface="Mangal"/>
+        <a:font script="Telu" typeface="Gautami"/>
+        <a:font script="Taml" typeface="Latha"/>
+        <a:font script="Syrc" typeface="Estrangelo Edessa"/>
+        <a:font script="Orya" typeface="Kalinga"/>
+        <a:font script="Mlym" typeface="Kartika"/>
+        <a:font script="Laoo" typeface="DokChampa"/>
+        <a:font script="Sinh" typeface="Iskoola Pota"/>
+        <a:font script="Mong" typeface="Mongolian Baiti"/>
+        <a:font script="Viet" typeface="Times New Roman"/>
+        <a:font script="Uigh" typeface="Microsoft Uighur"/>
+        <a:font script="Geor" typeface="Sylfaen"/>
+        <a:font script="Armn" typeface="Arial"/>
+        <a:font script="Bugi" typeface="Leelawadee UI"/>
+        <a:font script="Bopo" typeface="Microsoft JhengHei"/>
+        <a:font script="Java" typeface="Javanese Text"/>
+        <a:font script="Lisu" typeface="Segoe UI"/>
+        <a:font script="Mymr" typeface="Myanmar Text"/>
+        <a:font script="Nkoo" typeface="Ebrima"/>
+        <a:font script="Olck" typeface="Nirmala UI"/>
+        <a:font script="Osma" typeface="Ebrima"/>
+        <a:font script="Phag" typeface="Phagspa"/>
+        <a:font script="Syrn" typeface="Estrangelo Edessa"/>
+        <a:font script="Syrj" typeface="Estrangelo Edessa"/>
+        <a:font script="Syre" typeface="Estrangelo Edessa"/>
+        <a:font script="Sora" typeface="Nirmala UI"/>
+        <a:font script="Tale" typeface="Microsoft Tai Le"/>
+        <a:font script="Talu" typeface="Microsoft New Tai Lue"/>
+        <a:font script="Tfng" typeface="Ebrima"/>
+      </a:majorFont>
+      <a:minorFont>
+        <a:latin typeface="Calibri" panose="020F0502020204030204"/>
+        <a:ea typeface=""/>
+        <a:cs typeface=""/>
+        <a:font script="Jpan" typeface="游ゴシック"/>
+        <a:font script="Hang" typeface="맑은 고딕"/>
+        <a:font script="Hans" typeface="等线"/>
+        <a:font script="Hant" typeface="新細明體"/>
+        <a:font script="Arab" typeface="Arial"/>
+        <a:font script="Hebr" typeface="Arial"/>
+        <a:font script="Thai" typeface="Cordia New"/>
+        <a:font script="Ethi" typeface="Nyala"/>
+        <a:font script="Beng" typeface="Vrinda"/>
+        <a:font script="Gujr" typeface="Shruti"/>
+        <a:font script="Khmr" typeface="DaunPenh"/>
+        <a:font script="Knda" typeface="Tunga"/>
+        <a:font script="Guru" typeface="Raavi"/>
+        <a:font script="Cans" typeface="Euphemia"/>
+        <a:font script="Cher" typeface="Plantagenet Cherokee"/>
+        <a:font script="Yiii" typeface="Microsoft Yi Baiti"/>
+        <a:font script="Tibt" typeface="Microsoft Himalaya"/>
+        <a:font script="Thaa" typeface="MV Boli"/>
+        <a:font script="Deva" typeface="Mangal"/>
+        <a:font script="Telu" typeface="Gautami"/>
+        <a:font script="Taml" typeface="Latha"/>
+        <a:font script="Syrc" typeface="Estrangelo Edessa"/>
+        <a:font script="Orya" typeface="Kalinga"/>
+        <a:font script="Mlym" typeface="Kartika"/>
+        <a:font script="Laoo" typeface="DokChampa"/>
+        <a:font script="Sinh" typeface="Iskoola Pota"/>
+        <a:font script="Mong" typeface="Mongolian Baiti"/>
+        <a:font script="Viet" typeface="Arial"/>
+        <a:font script="Uigh" typeface="Microsoft Uighur"/>
+        <a:font script="Geor" typeface="Sylfaen"/>
+        <a:font script="Armn" typeface="Arial"/>
+        <a:font script="Bugi" typeface="Leelawadee UI"/>
+        <a:font script="Bopo" typeface="Microsoft JhengHei"/>
+        <a:font script="Java" typeface="Javanese Text"/>
+        <a:font script="Lisu" typeface="Segoe UI"/>
+        <a:font script="Mymr" typeface="Myanmar Text"/>
+        <a:font script="Nkoo" typeface="Ebrima"/>
+        <a:font script="Olck" typeface="Nirmala UI"/>
+        <a:font script="Osma" typeface="Ebrima"/>
+        <a:font script="Phag" typeface="Phagspa"/>
+        <a:font script="Syrn" typeface="Estrangelo Edessa"/>
+        <a:font script="Syrj" typeface="Estrangelo Edessa"/>
+        <a:font script="Syre" typeface="Estrangelo Edessa"/>
+        <a:font script="Sora" typeface="Nirmala UI"/>
+        <a:font script="Tale" typeface="Microsoft Tai Le"/>
+        <a:font script="Talu" typeface="Microsoft New Tai Lue"/>
+        <a:font script="Tfng" typeface="Ebrima"/>
+      </a:minorFont>
+    </a:fontScheme>
+    <a:fmtScheme name="Office">
+      <a:fillStyleLst>
+        <a:solidFill>
+          <a:schemeClr val="phClr"/>
+        </a:solidFill>
+        <a:gradFill rotWithShape="1">
+          <a:gsLst>
+            <a:gs pos="0">
+              <a:schemeClr val="phClr">
+                <a:lumMod val="110000"/>
+                <a:satMod val="105000"/>
+                <a:tint val="67000"/>
+              </a:schemeClr>
+            </a:gs>
+            <a:gs pos="50000">
+              <a:schemeClr val="phClr">
+                <a:lumMod val="105000"/>
+                <a:satMod val="103000"/>
+                <a:tint val="73000"/>
+              </a:schemeClr>
+            </a:gs>
+            <a:gs pos="100000">
+              <a:schemeClr val="phClr">
+                <a:lumMod val="105000"/>
+                <a:satMod val="109000"/>
+                <a:tint val="81000"/>
+              </a:schemeClr>
+            </a:gs>
+          </a:gsLst>
+          <a:lin ang="5400000" scaled="0"/>
+        </a:gradFill>
+        <a:gradFill rotWithShape="1">
+          <a:gsLst>
+            <a:gs pos="0">
+              <a:schemeClr val="phClr">
+                <a:satMod val="103000"/>
+                <a:lumMod val="102000"/>
+                <a:tint val="94000"/>
+              </a:schemeClr>
+            </a:gs>
+            <a:gs pos="50000">
+              <a:schemeClr val="phClr">
+                <a:satMod val="110000"/>
+                <a:lumMod val="100000"/>
+                <a:shade val="100000"/>
+              </a:schemeClr>
+            </a:gs>
+            <a:gs pos="100000">
+              <a:schemeClr val="phClr">
+                <a:lumMod val="99000"/>
+                <a:satMod val="120000"/>
+                <a:shade val="78000"/>
+              </a:schemeClr>
+            </a:gs>
+          </a:gsLst>
+          <a:lin ang="5400000" scaled="0"/>
+        </a:gradFill>
+      </a:fillStyleLst>
+      <a:lnStyleLst>
+        <a:ln w="6350" cap="flat" cmpd="sng" algn="ctr">
+          <a:solidFill>
+            <a:schemeClr val="phClr"/>
+          </a:solidFill>
+          <a:prstDash val="solid"/>
+          <a:miter lim="800000"/>
+        </a:ln>
+        <a:ln w="12700" cap="flat" cmpd="sng" algn="ctr">
+          <a:solidFill>
+            <a:schemeClr val="phClr"/>
+          </a:solidFill>
+          <a:prstDash val="solid"/>
+          <a:miter lim="800000"/>
+        </a:ln>
+        <a:ln w="19050" cap="flat" cmpd="sng" algn="ctr">
+          <a:solidFill>
+            <a:schemeClr val="phClr"/>
+          </a:solidFill>
+          <a:prstDash val="solid"/>
+          <a:miter lim="800000"/>
+        </a:ln>
+      </a:lnStyleLst>
+      <a:effectStyleLst>
+        <a:effectStyle>
+          <a:effectLst/>
+        </a:effectStyle>
+        <a:effectStyle>
+          <a:effectLst/>
+        </a:effectStyle>
+        <a:effectStyle>
+          <a:effectLst>
+            <a:outerShdw blurRad="57150" dist="19050" dir="5400000" algn="ctr" rotWithShape="0">
+              <a:srgbClr val="000000">
+                <a:alpha val="63000"/>
+              </a:srgbClr>
+            </a:outerShdw>
+          </a:effectLst>
+        </a:effectStyle>
+      </a:effectStyleLst>
+      <a:bgFillStyleLst>
+        <a:solidFill>
+          <a:schemeClr val="phClr"/>
+        </a:solidFill>
+        <a:solidFill>
+          <a:schemeClr val="phClr">
+            <a:tint val="95000"/>
+            <a:satMod val="170000"/>
+          </a:schemeClr>
+        </a:solidFill>
+        <a:gradFill rotWithShape="1">
+          <a:gsLst>
+            <a:gs pos="0">
+              <a:schemeClr val="phClr">
+                <a:tint val="93000"/>
+                <a:satMod val="150000"/>
+                <a:shade val="98000"/>
+                <a:lumMod val="102000"/>
+              </a:schemeClr>
+            </a:gs>
+            <a:gs pos="50000">
+              <a:schemeClr val="phClr">
+                <a:tint val="98000"/>
+                <a:satMod val="130000"/>
+                <a:shade val="90000"/>
+                <a:lumMod val="103000"/>
+              </a:schemeClr>
+            </a:gs>
+            <a:gs pos="100000">
+              <a:schemeClr val="phClr">
+                <a:shade val="63000"/>
+                <a:satMod val="120000"/>
+              </a:schemeClr>
+            </a:gs>
+          </a:gsLst>
+          <a:lin ang="5400000" scaled="0"/>
+        </a:gradFill>
+      </a:bgFillStyleLst>
+    </a:fmtScheme>
+  </a:themeElements>
+  <a:objectDefaults/>
+  <a:extraClrSchemeLst/>
+  <a:extLst>
+    <a:ext uri="{05A4C25C-085E-4340-85A3-A5531E510DB2}">
+      <thm15:themeFamily xmlns:thm15="http://schemas.microsoft.com/office/thememl/2012/main" name="Office Theme" id="{62F939B6-93AF-4DB8-9C6B-D6C7DFDC589F}" vid="{4A3C46E8-61CC-4603-A589-7422A47A8E4A}"/>
+    </a:ext>
+  </a:extLst>
+</a:theme>
 </file>
--- a/docs/slides/capstone-final.pptx
+++ b/docs/slides/capstone-final.pptx
@@ -5,23 +5,24 @@
     <p:sldMasterId id="2147483648" r:id="rId1"/>
   </p:sldMasterIdLst>
   <p:notesMasterIdLst>
-    <p:notesMasterId r:id="rId16"/>
+    <p:notesMasterId r:id="rId17"/>
   </p:notesMasterIdLst>
   <p:sldIdLst>
     <p:sldId id="256" r:id="rId2"/>
-    <p:sldId id="257" r:id="rId3"/>
-    <p:sldId id="258" r:id="rId4"/>
-    <p:sldId id="259" r:id="rId5"/>
-    <p:sldId id="260" r:id="rId6"/>
-    <p:sldId id="261" r:id="rId7"/>
-    <p:sldId id="262" r:id="rId8"/>
-    <p:sldId id="263" r:id="rId9"/>
+    <p:sldId id="270" r:id="rId3"/>
+    <p:sldId id="257" r:id="rId4"/>
+    <p:sldId id="258" r:id="rId5"/>
+    <p:sldId id="259" r:id="rId6"/>
+    <p:sldId id="260" r:id="rId7"/>
+    <p:sldId id="261" r:id="rId8"/>
+    <p:sldId id="262" r:id="rId9"/>
     <p:sldId id="264" r:id="rId10"/>
-    <p:sldId id="265" r:id="rId11"/>
-    <p:sldId id="266" r:id="rId12"/>
-    <p:sldId id="267" r:id="rId13"/>
-    <p:sldId id="268" r:id="rId14"/>
-    <p:sldId id="269" r:id="rId15"/>
+    <p:sldId id="263" r:id="rId11"/>
+    <p:sldId id="267" r:id="rId12"/>
+    <p:sldId id="265" r:id="rId13"/>
+    <p:sldId id="266" r:id="rId14"/>
+    <p:sldId id="268" r:id="rId15"/>
+    <p:sldId id="269" r:id="rId16"/>
   </p:sldIdLst>
   <p:sldSz cx="12192000" cy="6858000"/>
   <p:notesSz cx="6858000" cy="12192000"/>
@@ -123,6 +124,7 @@
         <p14:section name="Opening" id="{E38108A2-D61F-DFE6-9545-102A5D462D0A}">
           <p14:sldIdLst>
             <p14:sldId id="256"/>
+            <p14:sldId id="270"/>
           </p14:sldIdLst>
         </p14:section>
         <p14:section name="Architecture" id="{F76B243D-7286-25EC-9D04-2559ECB70DD9}">
@@ -137,15 +139,15 @@
         <p14:section name="Implementation" id="{B2434C25-559C-09CB-1EBB-EC62F51F9B9B}">
           <p14:sldIdLst>
             <p14:sldId id="262"/>
+            <p14:sldId id="264"/>
             <p14:sldId id="263"/>
-            <p14:sldId id="264"/>
+            <p14:sldId id="267"/>
             <p14:sldId id="265"/>
             <p14:sldId id="266"/>
           </p14:sldIdLst>
         </p14:section>
         <p14:section name="Lessons" id="{1765C54B-27D1-6378-4A08-435ADE8D6A4A}">
           <p14:sldIdLst>
-            <p14:sldId id="267"/>
             <p14:sldId id="268"/>
             <p14:sldId id="269"/>
           </p14:sldIdLst>
@@ -160,277 +162,6 @@
 </file>
 
 <file path=ppt/charts/chart1.xml><?xml version="1.0" encoding="utf-8"?>
-<c:chartSpace xmlns:c="http://schemas.openxmlformats.org/drawingml/2006/chart" xmlns:a="http://schemas.openxmlformats.org/drawingml/2006/main" xmlns:r="http://schemas.openxmlformats.org/officeDocument/2006/relationships" xmlns:c16r2="http://schemas.microsoft.com/office/drawing/2015/06/chart">
-  <c:date1904 val="0"/>
-  <c:lang val="en-US"/>
-  <c:roundedCorners val="1"/>
-  <c:style val="2"/>
-  <c:chart>
-    <c:title>
-      <c:tx>
-        <c:rich>
-          <a:bodyPr/>
-          <a:lstStyle/>
-          <a:p>
-            <a:pPr>
-              <a:defRPr sz="1400" b="0" i="0" u="none" strike="noStrike">
-                <a:solidFill>
-                  <a:srgbClr val="0B3C49"/>
-                </a:solidFill>
-                <a:latin typeface="+mn-lt"/>
-              </a:defRPr>
-            </a:pPr>
-            <a:r>
-              <a:rPr lang="en-US" sz="1400" b="0" i="0" u="none" strike="noStrike">
-                <a:solidFill>
-                  <a:srgbClr val="0B3C49"/>
-                </a:solidFill>
-                <a:latin typeface="+mn-lt"/>
-              </a:rPr>
-              <a:t>331 tests per module (mvn verify)</a:t>
-            </a:r>
-          </a:p>
-        </c:rich>
-      </c:tx>
-      <c:overlay val="0"/>
-    </c:title>
-    <c:autoTitleDeleted val="0"/>
-    <c:plotArea>
-      <c:layout/>
-      <c:barChart>
-        <c:barDir val="bar"/>
-        <c:grouping val="clustered"/>
-        <c:varyColors val="0"/>
-        <c:ser>
-          <c:idx val="0"/>
-          <c:order val="0"/>
-          <c:tx>
-            <c:strRef>
-              <c:f>Sheet1!$B$1</c:f>
-              <c:strCache>
-                <c:ptCount val="1"/>
-                <c:pt idx="0">
-                  <c:v>Tests</c:v>
-                </c:pt>
-              </c:strCache>
-            </c:strRef>
-          </c:tx>
-          <c:spPr>
-            <a:solidFill>
-              <a:srgbClr val="2A9D8F"/>
-            </a:solidFill>
-            <a:effectLst/>
-          </c:spPr>
-          <c:invertIfNegative val="0"/>
-          <c:dLbls>
-            <c:numFmt formatCode="#,##0" sourceLinked="0"/>
-            <c:spPr>
-              <a:noFill/>
-              <a:ln>
-                <a:noFill/>
-              </a:ln>
-              <a:effectLst/>
-            </c:spPr>
-            <c:txPr>
-              <a:bodyPr/>
-              <a:lstStyle/>
-              <a:p>
-                <a:pPr>
-                  <a:defRPr sz="1200" b="0" i="0" u="none" strike="noStrike">
-                    <a:solidFill>
-                      <a:srgbClr val="1B2A30"/>
-                    </a:solidFill>
-                    <a:latin typeface="+mn-lt"/>
-                  </a:defRPr>
-                </a:pPr>
-                <a:endParaRPr lang="en-US"/>
-              </a:p>
-            </c:txPr>
-            <c:showLegendKey val="0"/>
-            <c:showVal val="1"/>
-            <c:showCatName val="0"/>
-            <c:showSerName val="0"/>
-            <c:showPercent val="0"/>
-            <c:showBubbleSize val="0"/>
-            <c:showLeaderLines val="0"/>
-            <c:extLst>
-              <c:ext xmlns:c15="http://schemas.microsoft.com/office/drawing/2012/chart" uri="{CE6537A1-D6FC-4f65-9D91-7224C49458BB}">
-                <c15:showLeaderLines val="0"/>
-              </c:ext>
-            </c:extLst>
-          </c:dLbls>
-          <c:cat>
-            <c:strRef>
-              <c:f>Sheet1!$A$2:$A$10</c:f>
-              <c:strCache>
-                <c:ptCount val="9"/>
-                <c:pt idx="0">
-                  <c:v>payment-service</c:v>
-                </c:pt>
-                <c:pt idx="1">
-                  <c:v>order-service</c:v>
-                </c:pt>
-                <c:pt idx="2">
-                  <c:v>inventory-service</c:v>
-                </c:pt>
-                <c:pt idx="3">
-                  <c:v>api-gateway</c:v>
-                </c:pt>
-                <c:pt idx="4">
-                  <c:v>product-service</c:v>
-                </c:pt>
-                <c:pt idx="5">
-                  <c:v>notification-service</c:v>
-                </c:pt>
-                <c:pt idx="6">
-                  <c:v>review-service</c:v>
-                </c:pt>
-                <c:pt idx="7">
-                  <c:v>config-server</c:v>
-                </c:pt>
-                <c:pt idx="8">
-                  <c:v>eureka-server</c:v>
-                </c:pt>
-              </c:strCache>
-            </c:strRef>
-          </c:cat>
-          <c:val>
-            <c:numRef>
-              <c:f>Sheet1!$B$2:$B$10</c:f>
-              <c:numCache>
-                <c:formatCode>General</c:formatCode>
-                <c:ptCount val="9"/>
-                <c:pt idx="0">
-                  <c:v>74</c:v>
-                </c:pt>
-                <c:pt idx="1">
-                  <c:v>71</c:v>
-                </c:pt>
-                <c:pt idx="2">
-                  <c:v>54</c:v>
-                </c:pt>
-                <c:pt idx="3">
-                  <c:v>47</c:v>
-                </c:pt>
-                <c:pt idx="4">
-                  <c:v>46</c:v>
-                </c:pt>
-                <c:pt idx="5">
-                  <c:v>24</c:v>
-                </c:pt>
-                <c:pt idx="6">
-                  <c:v>9</c:v>
-                </c:pt>
-                <c:pt idx="7">
-                  <c:v>3</c:v>
-                </c:pt>
-                <c:pt idx="8">
-                  <c:v>3</c:v>
-                </c:pt>
-              </c:numCache>
-            </c:numRef>
-          </c:val>
-          <c:extLst>
-            <c:ext xmlns:c16="http://schemas.microsoft.com/office/drawing/2014/chart" uri="{C3380CC4-5D6E-409C-BE32-E72D297353CC}">
-              <c16:uniqueId val="{00000000-38BE-463A-860E-502A698A08D6}"/>
-            </c:ext>
-          </c:extLst>
-        </c:ser>
-        <c:dLbls>
-          <c:showLegendKey val="0"/>
-          <c:showVal val="1"/>
-          <c:showCatName val="0"/>
-          <c:showSerName val="0"/>
-          <c:showPercent val="0"/>
-          <c:showBubbleSize val="0"/>
-        </c:dLbls>
-        <c:gapWidth val="150"/>
-        <c:axId val="2094734554"/>
-        <c:axId val="2094734552"/>
-      </c:barChart>
-      <c:catAx>
-        <c:axId val="2094734554"/>
-        <c:scaling>
-          <c:orientation val="minMax"/>
-        </c:scaling>
-        <c:delete val="0"/>
-        <c:axPos val="l"/>
-        <c:numFmt formatCode="General" sourceLinked="1"/>
-        <c:majorTickMark val="out"/>
-        <c:minorTickMark val="none"/>
-        <c:tickLblPos val="nextTo"/>
-        <c:spPr>
-          <a:ln w="12700" cap="flat">
-            <a:solidFill>
-              <a:srgbClr val="888888"/>
-            </a:solidFill>
-            <a:prstDash val="solid"/>
-            <a:round/>
-          </a:ln>
-        </c:spPr>
-        <c:txPr>
-          <a:bodyPr/>
-          <a:lstStyle/>
-          <a:p>
-            <a:pPr>
-              <a:defRPr sz="1200" b="0" i="0" u="none" strike="noStrike">
-                <a:solidFill>
-                  <a:srgbClr val="1B2A30"/>
-                </a:solidFill>
-                <a:latin typeface="+mn-lt"/>
-              </a:defRPr>
-            </a:pPr>
-            <a:endParaRPr lang="en-US"/>
-          </a:p>
-        </c:txPr>
-        <c:crossAx val="2094734552"/>
-        <c:crosses val="autoZero"/>
-        <c:auto val="1"/>
-        <c:lblAlgn val="ctr"/>
-        <c:lblOffset val="100"/>
-        <c:noMultiLvlLbl val="1"/>
-      </c:catAx>
-      <c:valAx>
-        <c:axId val="2094734552"/>
-        <c:scaling>
-          <c:orientation val="minMax"/>
-        </c:scaling>
-        <c:delete val="1"/>
-        <c:axPos val="b"/>
-        <c:numFmt formatCode="General" sourceLinked="0"/>
-        <c:majorTickMark val="out"/>
-        <c:minorTickMark val="none"/>
-        <c:tickLblPos val="low"/>
-        <c:crossAx val="2094734554"/>
-        <c:crosses val="autoZero"/>
-        <c:crossBetween val="between"/>
-      </c:valAx>
-      <c:spPr>
-        <a:noFill/>
-        <a:ln>
-          <a:noFill/>
-        </a:ln>
-        <a:effectLst/>
-      </c:spPr>
-    </c:plotArea>
-    <c:plotVisOnly val="1"/>
-    <c:dispBlanksAs val="span"/>
-    <c:showDLblsOverMax val="1"/>
-  </c:chart>
-  <c:spPr>
-    <a:noFill/>
-    <a:ln>
-      <a:noFill/>
-    </a:ln>
-    <a:effectLst/>
-  </c:spPr>
-  <c:externalData r:id="rId1">
-    <c:autoUpdate val="0"/>
-  </c:externalData>
-</c:chartSpace>
-</file>
-
-<file path=ppt/charts/chart2.xml><?xml version="1.0" encoding="utf-8"?>
 <c:chartSpace xmlns:c="http://schemas.openxmlformats.org/drawingml/2006/chart" xmlns:a="http://schemas.openxmlformats.org/drawingml/2006/main" xmlns:r="http://schemas.openxmlformats.org/officeDocument/2006/relationships" xmlns:c16r2="http://schemas.microsoft.com/office/drawing/2015/06/chart">
   <c:date1904 val="0"/>
   <c:lang val="en-US"/>
@@ -769,6 +500,277 @@
 </c:chartSpace>
 </file>
 
+<file path=ppt/charts/chart2.xml><?xml version="1.0" encoding="utf-8"?>
+<c:chartSpace xmlns:c="http://schemas.openxmlformats.org/drawingml/2006/chart" xmlns:a="http://schemas.openxmlformats.org/drawingml/2006/main" xmlns:r="http://schemas.openxmlformats.org/officeDocument/2006/relationships" xmlns:c16r2="http://schemas.microsoft.com/office/drawing/2015/06/chart">
+  <c:date1904 val="0"/>
+  <c:lang val="en-US"/>
+  <c:roundedCorners val="1"/>
+  <c:style val="2"/>
+  <c:chart>
+    <c:title>
+      <c:tx>
+        <c:rich>
+          <a:bodyPr/>
+          <a:lstStyle/>
+          <a:p>
+            <a:pPr>
+              <a:defRPr sz="1400" b="0" i="0" u="none" strike="noStrike">
+                <a:solidFill>
+                  <a:srgbClr val="0B3C49"/>
+                </a:solidFill>
+                <a:latin typeface="+mn-lt"/>
+              </a:defRPr>
+            </a:pPr>
+            <a:r>
+              <a:rPr lang="en-US" sz="1400" b="0" i="0" u="none" strike="noStrike">
+                <a:solidFill>
+                  <a:srgbClr val="0B3C49"/>
+                </a:solidFill>
+                <a:latin typeface="+mn-lt"/>
+              </a:rPr>
+              <a:t>331 tests per module (mvn verify)</a:t>
+            </a:r>
+          </a:p>
+        </c:rich>
+      </c:tx>
+      <c:overlay val="0"/>
+    </c:title>
+    <c:autoTitleDeleted val="0"/>
+    <c:plotArea>
+      <c:layout/>
+      <c:barChart>
+        <c:barDir val="bar"/>
+        <c:grouping val="clustered"/>
+        <c:varyColors val="0"/>
+        <c:ser>
+          <c:idx val="0"/>
+          <c:order val="0"/>
+          <c:tx>
+            <c:strRef>
+              <c:f>Sheet1!$B$1</c:f>
+              <c:strCache>
+                <c:ptCount val="1"/>
+                <c:pt idx="0">
+                  <c:v>Tests</c:v>
+                </c:pt>
+              </c:strCache>
+            </c:strRef>
+          </c:tx>
+          <c:spPr>
+            <a:solidFill>
+              <a:srgbClr val="2A9D8F"/>
+            </a:solidFill>
+            <a:effectLst/>
+          </c:spPr>
+          <c:invertIfNegative val="0"/>
+          <c:dLbls>
+            <c:numFmt formatCode="#,##0" sourceLinked="0"/>
+            <c:spPr>
+              <a:noFill/>
+              <a:ln>
+                <a:noFill/>
+              </a:ln>
+              <a:effectLst/>
+            </c:spPr>
+            <c:txPr>
+              <a:bodyPr/>
+              <a:lstStyle/>
+              <a:p>
+                <a:pPr>
+                  <a:defRPr sz="1200" b="0" i="0" u="none" strike="noStrike">
+                    <a:solidFill>
+                      <a:srgbClr val="1B2A30"/>
+                    </a:solidFill>
+                    <a:latin typeface="+mn-lt"/>
+                  </a:defRPr>
+                </a:pPr>
+                <a:endParaRPr lang="en-US"/>
+              </a:p>
+            </c:txPr>
+            <c:showLegendKey val="0"/>
+            <c:showVal val="1"/>
+            <c:showCatName val="0"/>
+            <c:showSerName val="0"/>
+            <c:showPercent val="0"/>
+            <c:showBubbleSize val="0"/>
+            <c:showLeaderLines val="0"/>
+            <c:extLst>
+              <c:ext xmlns:c15="http://schemas.microsoft.com/office/drawing/2012/chart" uri="{CE6537A1-D6FC-4f65-9D91-7224C49458BB}">
+                <c15:showLeaderLines val="0"/>
+              </c:ext>
+            </c:extLst>
+          </c:dLbls>
+          <c:cat>
+            <c:strRef>
+              <c:f>Sheet1!$A$2:$A$10</c:f>
+              <c:strCache>
+                <c:ptCount val="9"/>
+                <c:pt idx="0">
+                  <c:v>payment-service</c:v>
+                </c:pt>
+                <c:pt idx="1">
+                  <c:v>order-service</c:v>
+                </c:pt>
+                <c:pt idx="2">
+                  <c:v>inventory-service</c:v>
+                </c:pt>
+                <c:pt idx="3">
+                  <c:v>api-gateway</c:v>
+                </c:pt>
+                <c:pt idx="4">
+                  <c:v>product-service</c:v>
+                </c:pt>
+                <c:pt idx="5">
+                  <c:v>notification-service</c:v>
+                </c:pt>
+                <c:pt idx="6">
+                  <c:v>review-service</c:v>
+                </c:pt>
+                <c:pt idx="7">
+                  <c:v>config-server</c:v>
+                </c:pt>
+                <c:pt idx="8">
+                  <c:v>eureka-server</c:v>
+                </c:pt>
+              </c:strCache>
+            </c:strRef>
+          </c:cat>
+          <c:val>
+            <c:numRef>
+              <c:f>Sheet1!$B$2:$B$10</c:f>
+              <c:numCache>
+                <c:formatCode>General</c:formatCode>
+                <c:ptCount val="9"/>
+                <c:pt idx="0">
+                  <c:v>74</c:v>
+                </c:pt>
+                <c:pt idx="1">
+                  <c:v>71</c:v>
+                </c:pt>
+                <c:pt idx="2">
+                  <c:v>54</c:v>
+                </c:pt>
+                <c:pt idx="3">
+                  <c:v>47</c:v>
+                </c:pt>
+                <c:pt idx="4">
+                  <c:v>46</c:v>
+                </c:pt>
+                <c:pt idx="5">
+                  <c:v>24</c:v>
+                </c:pt>
+                <c:pt idx="6">
+                  <c:v>9</c:v>
+                </c:pt>
+                <c:pt idx="7">
+                  <c:v>3</c:v>
+                </c:pt>
+                <c:pt idx="8">
+                  <c:v>3</c:v>
+                </c:pt>
+              </c:numCache>
+            </c:numRef>
+          </c:val>
+          <c:extLst>
+            <c:ext xmlns:c16="http://schemas.microsoft.com/office/drawing/2014/chart" uri="{C3380CC4-5D6E-409C-BE32-E72D297353CC}">
+              <c16:uniqueId val="{00000000-38BE-463A-860E-502A698A08D6}"/>
+            </c:ext>
+          </c:extLst>
+        </c:ser>
+        <c:dLbls>
+          <c:showLegendKey val="0"/>
+          <c:showVal val="1"/>
+          <c:showCatName val="0"/>
+          <c:showSerName val="0"/>
+          <c:showPercent val="0"/>
+          <c:showBubbleSize val="0"/>
+        </c:dLbls>
+        <c:gapWidth val="150"/>
+        <c:axId val="2094734554"/>
+        <c:axId val="2094734552"/>
+      </c:barChart>
+      <c:catAx>
+        <c:axId val="2094734554"/>
+        <c:scaling>
+          <c:orientation val="minMax"/>
+        </c:scaling>
+        <c:delete val="0"/>
+        <c:axPos val="l"/>
+        <c:numFmt formatCode="General" sourceLinked="1"/>
+        <c:majorTickMark val="out"/>
+        <c:minorTickMark val="none"/>
+        <c:tickLblPos val="nextTo"/>
+        <c:spPr>
+          <a:ln w="12700" cap="flat">
+            <a:solidFill>
+              <a:srgbClr val="888888"/>
+            </a:solidFill>
+            <a:prstDash val="solid"/>
+            <a:round/>
+          </a:ln>
+        </c:spPr>
+        <c:txPr>
+          <a:bodyPr/>
+          <a:lstStyle/>
+          <a:p>
+            <a:pPr>
+              <a:defRPr sz="1200" b="0" i="0" u="none" strike="noStrike">
+                <a:solidFill>
+                  <a:srgbClr val="1B2A30"/>
+                </a:solidFill>
+                <a:latin typeface="+mn-lt"/>
+              </a:defRPr>
+            </a:pPr>
+            <a:endParaRPr lang="en-US"/>
+          </a:p>
+        </c:txPr>
+        <c:crossAx val="2094734552"/>
+        <c:crosses val="autoZero"/>
+        <c:auto val="1"/>
+        <c:lblAlgn val="ctr"/>
+        <c:lblOffset val="100"/>
+        <c:noMultiLvlLbl val="1"/>
+      </c:catAx>
+      <c:valAx>
+        <c:axId val="2094734552"/>
+        <c:scaling>
+          <c:orientation val="minMax"/>
+        </c:scaling>
+        <c:delete val="1"/>
+        <c:axPos val="b"/>
+        <c:numFmt formatCode="General" sourceLinked="0"/>
+        <c:majorTickMark val="out"/>
+        <c:minorTickMark val="none"/>
+        <c:tickLblPos val="low"/>
+        <c:crossAx val="2094734554"/>
+        <c:crosses val="autoZero"/>
+        <c:crossBetween val="between"/>
+      </c:valAx>
+      <c:spPr>
+        <a:noFill/>
+        <a:ln>
+          <a:noFill/>
+        </a:ln>
+        <a:effectLst/>
+      </c:spPr>
+    </c:plotArea>
+    <c:plotVisOnly val="1"/>
+    <c:dispBlanksAs val="span"/>
+    <c:showDLblsOverMax val="1"/>
+  </c:chart>
+  <c:spPr>
+    <a:noFill/>
+    <a:ln>
+      <a:noFill/>
+    </a:ln>
+    <a:effectLst/>
+  </c:spPr>
+  <c:externalData r:id="rId1">
+    <c:autoUpdate val="0"/>
+  </c:externalData>
+</c:chartSpace>
+</file>
+
 <file path=ppt/notesMasters/notesMaster1.xml><?xml version="1.0" encoding="utf-8"?>
 <p:notesMaster xmlns:a="http://schemas.openxmlformats.org/drawingml/2006/main" xmlns:r="http://schemas.openxmlformats.org/officeDocument/2006/relationships" xmlns:p="http://schemas.openxmlformats.org/presentationml/2006/main">
   <p:cSld>
@@ -939,9 +941,22 @@
           <a:lstStyle/>
           <a:p>
             <a:r>
-              <a:rPr lang="en-US" dirty="0"/>
-              <a:t>Introduce the team and the one-line promise: an order is never lost and never charged twice, and a stranger can run, deploy and load-test it.</a:t>
-            </a:r>
+              <a:rPr lang="en-US"/>
+              <a:t>Speaker: Nourhan (A).</a:t>
+            </a:r>
+          </a:p>
+          <a:p>
+            <a:r>
+              <a:rPr lang="en-US"/>
+              <a:t>Good morning. We are team ... : I am Nourhan — gateway, security, product and notification services, Helm, ArgoCD and the load tests. Mohammed built order and inventory, config and Eureka, and the tracing. Doaa built payment, Bonus B2, the Dockerfiles, CI and Kubernetes.</a:t>
+            </a:r>
+          </a:p>
+          <a:p>
+            <a:r>
+              <a:rPr lang="en-US"/>
+              <a:t>Next: who presents what.</a:t>
+            </a:r>
+            <a:endParaRPr lang="en-US" dirty="0"/>
           </a:p>
         </p:txBody>
       </p:sp>
@@ -1025,6 +1040,22 @@
           <a:bodyPr/>
           <a:lstStyle/>
           <a:p>
+            <a:r>
+              <a:rPr lang="en-US"/>
+              <a:t>Speaker: Doaa (C).</a:t>
+            </a:r>
+          </a:p>
+          <a:p>
+            <a:r>
+              <a:rPr lang="en-US"/>
+              <a:t>331 tests across 10 modules; the chart is per module from mvn verify. The JaCoCo gate fails the build below 60 % on the service layer; order is at 85 %, inventory 78 %.</a:t>
+            </a:r>
+          </a:p>
+          <a:p>
+            <a:r>
+              <a:rPr lang="en-US"/>
+              <a:t>Testcontainers for every database-owning service, embedded Kafka for retry → DLT, WireMock for resilience and FR-14, and 39 of 39 live end-to-end checks.</a:t>
+            </a:r>
             <a:endParaRPr lang="en-US" dirty="0"/>
           </a:p>
         </p:txBody>
@@ -1109,6 +1140,16 @@
           <a:bodyPr/>
           <a:lstStyle/>
           <a:p>
+            <a:r>
+              <a:rPr lang="en-US"/>
+              <a:t>Speaker: Doaa (C).</a:t>
+            </a:r>
+          </a:p>
+          <a:p>
+            <a:r>
+              <a:rPr lang="en-US"/>
+              <a:t>Four bugs that only the whole-system run found, although every unit test was green. The first one is the case for a contract test (Pact) as next step.</a:t>
+            </a:r>
             <a:endParaRPr lang="en-US" dirty="0"/>
           </a:p>
         </p:txBody>
@@ -1193,6 +1234,22 @@
           <a:bodyPr/>
           <a:lstStyle/>
           <a:p>
+            <a:r>
+              <a:rPr lang="en-US"/>
+              <a:t>Speaker: Doaa (C).</a:t>
+            </a:r>
+          </a:p>
+          <a:p>
+            <a:r>
+              <a:rPr lang="en-US"/>
+              <a:t>Our primary Bonus: a CQRS read model inside order-service with its own consumer group and tables (V50+), so no new deployable. A redelivered event never changes a count. Grafana shows orders per minute, revenue and Saga failure rate.</a:t>
+            </a:r>
+          </a:p>
+          <a:p>
+            <a:r>
+              <a:rPr lang="en-US"/>
+              <a:t>We also built B1 reviews, B3 tenants and B4 low-stock alerts.</a:t>
+            </a:r>
             <a:endParaRPr lang="en-US" dirty="0"/>
           </a:p>
         </p:txBody>
@@ -1277,6 +1334,22 @@
           <a:bodyPr/>
           <a:lstStyle/>
           <a:p>
+            <a:r>
+              <a:rPr lang="en-US"/>
+              <a:t>Speaker: Doaa (C).</a:t>
+            </a:r>
+          </a:p>
+          <a:p>
+            <a:r>
+              <a:rPr lang="en-US"/>
+              <a:t>Compose: 17 containers, verify-l0.sh checks them. Images: multi-stage, non-root, healthcheck; CI tests, builds and pushes to GHCR with the commit SHA. Helm: one chart for every service. ArgoCD: automated sync with self-heal — a manual change in the cluster is reverted to Git.</a:t>
+            </a:r>
+          </a:p>
+          <a:p>
+            <a:r>
+              <a:rPr lang="en-US"/>
+              <a:t>Hand over: Mohammed, lessons.</a:t>
+            </a:r>
             <a:endParaRPr lang="en-US" dirty="0"/>
           </a:p>
         </p:txBody>
@@ -1361,6 +1434,22 @@
           <a:bodyPr/>
           <a:lstStyle/>
           <a:p>
+            <a:r>
+              <a:rPr lang="en-US"/>
+              <a:t>Speaker: Mohammed (B).</a:t>
+            </a:r>
+          </a:p>
+          <a:p>
+            <a:r>
+              <a:rPr lang="en-US"/>
+              <a:t>Three lessons: merge small PRs from day one; run the whole system early; a sweeper must use the Saga's outcome, not a timer. Then the debt we left on purpose, and why.</a:t>
+            </a:r>
+          </a:p>
+          <a:p>
+            <a:r>
+              <a:rPr lang="en-US"/>
+              <a:t>Then: let us show it live.</a:t>
+            </a:r>
             <a:endParaRPr lang="en-US" dirty="0"/>
           </a:p>
         </p:txBody>
@@ -1383,6 +1472,118 @@
             <a:fld id="{F7021451-1387-4CA6-816F-3879F97B5CBC}" type="slidenum">
               <a:rPr lang="en-US"/>
               <a:t>14</a:t>
+            </a:fld>
+            <a:endParaRPr lang="en-US"/>
+          </a:p>
+        </p:txBody>
+      </p:sp>
+    </p:spTree>
+    <p:extLst>
+      <p:ext uri="{BB962C8B-B14F-4D97-AF65-F5344CB8AC3E}">
+        <p14:creationId xmlns:p14="http://schemas.microsoft.com/office/powerpoint/2010/main" val="1024086991"/>
+      </p:ext>
+    </p:extLst>
+  </p:cSld>
+  <p:clrMapOvr>
+    <a:masterClrMapping/>
+  </p:clrMapOvr>
+</p:notes>
+</file>
+
+<file path=ppt/notesSlides/notesSlide15.xml><?xml version="1.0" encoding="utf-8"?>
+<p:notes xmlns:a="http://schemas.openxmlformats.org/drawingml/2006/main" xmlns:r="http://schemas.openxmlformats.org/officeDocument/2006/relationships" xmlns:p="http://schemas.openxmlformats.org/presentationml/2006/main">
+  <p:cSld>
+    <p:spTree>
+      <p:nvGrpSpPr>
+        <p:cNvPr id="1" name=""/>
+        <p:cNvGrpSpPr/>
+        <p:nvPr/>
+      </p:nvGrpSpPr>
+      <p:grpSpPr>
+        <a:xfrm>
+          <a:off x="0" y="0"/>
+          <a:ext cx="0" cy="0"/>
+          <a:chOff x="0" y="0"/>
+          <a:chExt cx="0" cy="0"/>
+        </a:xfrm>
+      </p:grpSpPr>
+      <p:sp>
+        <p:nvSpPr>
+          <p:cNvPr id="2" name="Slide Image Placeholder 1"/>
+          <p:cNvSpPr>
+            <a:spLocks noGrp="1" noRot="1" noChangeAspect="1"/>
+          </p:cNvSpPr>
+          <p:nvPr>
+            <p:ph type="sldImg"/>
+          </p:nvPr>
+        </p:nvSpPr>
+        <p:spPr/>
+      </p:sp>
+      <p:sp>
+        <p:nvSpPr>
+          <p:cNvPr id="3" name="Notes Placeholder 2"/>
+          <p:cNvSpPr>
+            <a:spLocks noGrp="1"/>
+          </p:cNvSpPr>
+          <p:nvPr>
+            <p:ph type="body" idx="1"/>
+          </p:nvPr>
+        </p:nvSpPr>
+        <p:spPr/>
+        <p:txBody>
+          <a:bodyPr/>
+          <a:lstStyle/>
+          <a:p>
+            <a:r>
+              <a:rPr lang="en-US"/>
+              <a:t>All three, in this order (commands in README).</a:t>
+            </a:r>
+          </a:p>
+          <a:p>
+            <a:r>
+              <a:rPr lang="en-US"/>
+              <a:t>1. Mohammed: scripts/verify-l0.sh → L0 GREEN; place an order → 201 PENDING → CONFIRMED; open the Zipkin trace of that order.</a:t>
+            </a:r>
+          </a:p>
+          <a:p>
+            <a:r>
+              <a:rPr lang="en-US"/>
+              <a:t>2. Nourhan: public GET 200, no token 401, customer write 403, burst 429; k6 result and the gateway fix.</a:t>
+            </a:r>
+          </a:p>
+          <a:p>
+            <a:r>
+              <a:rPr lang="en-US"/>
+              <a:t>3. Doaa: PAYMENT_FAILURE_RATE=1.0 → order CANCELLED and stock back; stop payment-service → order stays PENDING, start it → CONFIRMED; ArgoCD self-heal; Grafana Order Analytics.</a:t>
+            </a:r>
+          </a:p>
+          <a:p>
+            <a:r>
+              <a:rPr lang="en-US"/>
+              <a:t>Close: questions — any of us on any service.</a:t>
+            </a:r>
+            <a:endParaRPr lang="en-US" dirty="0"/>
+          </a:p>
+        </p:txBody>
+      </p:sp>
+      <p:sp>
+        <p:nvSpPr>
+          <p:cNvPr id="4" name="Slide Number Placeholder 3"/>
+          <p:cNvSpPr>
+            <a:spLocks noGrp="1"/>
+          </p:cNvSpPr>
+          <p:nvPr>
+            <p:ph type="sldNum" sz="quarter" idx="10"/>
+          </p:nvPr>
+        </p:nvSpPr>
+        <p:spPr/>
+        <p:txBody>
+          <a:bodyPr/>
+          <a:lstStyle/>
+          <a:p>
+            <a:fld id="{F7021451-1387-4CA6-816F-3879F97B5CBC}" type="slidenum">
+              <a:rPr lang="en-US"/>
+              <a:t>15</a:t>
             </a:fld>
             <a:endParaRPr lang="en-US"/>
           </a:p>
@@ -1428,7 +1629,21 @@
             <p:ph type="sldImg"/>
           </p:nvPr>
         </p:nvSpPr>
-        <p:spPr/>
+        <p:spPr>
+          <a:xfrm>
+            <a:off x="-228600" y="1524000"/>
+            <a:ext cx="7315200" cy="4114800"/>
+          </a:xfrm>
+          <a:prstGeom prst="rect">
+            <a:avLst/>
+          </a:prstGeom>
+          <a:noFill/>
+          <a:ln w="12700">
+            <a:solidFill>
+              <a:prstClr val="black"/>
+            </a:solidFill>
+          </a:ln>
+        </p:spPr>
       </p:sp>
       <p:sp>
         <p:nvSpPr>
@@ -1440,45 +1655,36 @@
             <p:ph type="body" idx="1"/>
           </p:nvPr>
         </p:nvSpPr>
-        <p:spPr/>
+        <p:spPr>
+          <a:xfrm>
+            <a:off x="685800" y="5867400"/>
+            <a:ext cx="5486400" cy="4800600"/>
+          </a:xfrm>
+          <a:prstGeom prst="rect">
+            <a:avLst/>
+          </a:prstGeom>
+        </p:spPr>
         <p:txBody>
           <a:bodyPr/>
           <a:lstStyle/>
           <a:p>
             <a:r>
-              <a:rPr lang="en-US" dirty="0"/>
-              <a:t>Every number here is reproducible: mvn verify, scripts/e2e-check.sh, k6/load-test.js.</a:t>
-            </a:r>
-          </a:p>
-        </p:txBody>
-      </p:sp>
-      <p:sp>
-        <p:nvSpPr>
-          <p:cNvPr id="4" name="Slide Number Placeholder 3"/>
-          <p:cNvSpPr>
-            <a:spLocks noGrp="1"/>
-          </p:cNvSpPr>
-          <p:nvPr>
-            <p:ph type="sldNum" sz="quarter" idx="10"/>
-          </p:nvPr>
-        </p:nvSpPr>
-        <p:spPr/>
-        <p:txBody>
-          <a:bodyPr/>
-          <a:lstStyle/>
-          <a:p>
-            <a:fld id="{F7021451-1387-4CA6-816F-3879F97B5CBC}" type="slidenum">
               <a:rPr lang="en-US"/>
-              <a:t>2</a:t>
-            </a:fld>
-            <a:endParaRPr lang="en-US"/>
+              <a:t>Speaker: Nourhan (A). 20 seconds.</a:t>
+            </a:r>
+          </a:p>
+          <a:p>
+            <a:r>
+              <a:rPr lang="en-US"/>
+              <a:t>Three blocks, one speaker each, then a live demo split the same way. Any of us can answer on any service.</a:t>
+            </a:r>
           </a:p>
         </p:txBody>
       </p:sp>
     </p:spTree>
     <p:extLst>
       <p:ext uri="{BB962C8B-B14F-4D97-AF65-F5344CB8AC3E}">
-        <p14:creationId xmlns:p14="http://schemas.microsoft.com/office/powerpoint/2010/main" val="1024086991"/>
+        <p14:creationId xmlns:p14="http://schemas.microsoft.com/office/powerpoint/2010/main" val="3980708871"/>
       </p:ext>
     </p:extLst>
   </p:cSld>
@@ -1533,9 +1739,34 @@
           <a:lstStyle/>
           <a:p>
             <a:r>
-              <a:rPr lang="en-US" dirty="0"/>
-              <a:t>PostgreSQL database per service, Flyway only. Observability: Zipkin, Prometheus, Grafana, JSON logs with traceId.</a:t>
-            </a:r>
+              <a:rPr lang="en-US"/>
+              <a:t>Speaker: Nourhan (A).</a:t>
+            </a:r>
+          </a:p>
+          <a:p>
+            <a:r>
+              <a:rPr lang="en-US"/>
+              <a:t>9 services behind one secured gateway; 331 automated tests, all green; 39 of 39 live end-to-end checks; POST /orders p95 487 ms against a target of 800.</a:t>
+            </a:r>
+          </a:p>
+          <a:p>
+            <a:r>
+              <a:rPr lang="en-US"/>
+              <a:t>The problem: the labs built the platform one topic at a time; we rebuilt it once, in its final shape.</a:t>
+            </a:r>
+          </a:p>
+          <a:p>
+            <a:r>
+              <a:rPr lang="en-US"/>
+              <a:t>Every number here is reproducible: mvn verify, scripts/e2e-check.sh, k6/load-test.js.</a:t>
+            </a:r>
+          </a:p>
+          <a:p>
+            <a:r>
+              <a:rPr lang="en-US"/>
+              <a:t>Hand over: Mohammed will show how it is built.</a:t>
+            </a:r>
+            <a:endParaRPr lang="en-US" dirty="0"/>
           </a:p>
         </p:txBody>
       </p:sp>
@@ -1620,9 +1851,22 @@
           <a:lstStyle/>
           <a:p>
             <a:r>
-              <a:rPr lang="en-US" dirty="0"/>
-              <a:t>traceparent is stored on every outbox row, so one trace spans HTTP and Kafka.</a:t>
-            </a:r>
+              <a:rPr lang="en-US"/>
+              <a:t>Speaker: Mohammed (B).</a:t>
+            </a:r>
+          </a:p>
+          <a:p>
+            <a:r>
+              <a:rPr lang="en-US"/>
+              <a:t>One entry point, the gateway. Synchronous only where the caller needs the answer: order → inventory stock check and order → product price, both Feign with Resilience4j. Everything else is the Saga over three Kafka topics, each with a dead-letter topic.</a:t>
+            </a:r>
+          </a:p>
+          <a:p>
+            <a:r>
+              <a:rPr lang="en-US"/>
+              <a:t>Review-service (Bonus B1) sits next to product-service and is not drawn here.</a:t>
+            </a:r>
+            <a:endParaRPr lang="en-US" dirty="0"/>
           </a:p>
         </p:txBody>
       </p:sp>
@@ -1707,9 +1951,22 @@
           <a:lstStyle/>
           <a:p>
             <a:r>
-              <a:rPr lang="en-US" dirty="0"/>
-              <a:t>16 failure modes in ADD §6, each with detection, what the customer sees, mitigation and the test that proves it.</a:t>
-            </a:r>
+              <a:rPr lang="en-US"/>
+              <a:t>Speaker: Mohammed (B).</a:t>
+            </a:r>
+          </a:p>
+          <a:p>
+            <a:r>
+              <a:rPr lang="en-US"/>
+              <a:t>Walk the five steps. Key points: the order row and its OrderPlaced event are written in ONE transaction (outbox); every consumer stores the eventId in processed_event in the same transaction, so a redelivered event changes nothing.</a:t>
+            </a:r>
+          </a:p>
+          <a:p>
+            <a:r>
+              <a:rPr lang="en-US"/>
+              <a:t>We would switch to orchestration only if a branching rule appears (fraud check, partial refunds).</a:t>
+            </a:r>
+            <a:endParaRPr lang="en-US" dirty="0"/>
           </a:p>
         </p:txBody>
       </p:sp>
@@ -1794,9 +2051,22 @@
           <a:lstStyle/>
           <a:p>
             <a:r>
-              <a:rPr lang="en-US" dirty="0"/>
-              <a:t>Each row is a DECISION · OPTIONS · REASON · TRADE-OFF · REVISIT entry in the ADD. Replaced Defaults: none.</a:t>
-            </a:r>
+              <a:rPr lang="en-US"/>
+              <a:t>Speaker: Mohammed (B).</a:t>
+            </a:r>
+          </a:p>
+          <a:p>
+            <a:r>
+              <a:rPr lang="en-US"/>
+              <a:t>Pick three: no stock → 409 before any row exists; inventory slow or down → 503 fast (timeout, retry, circuit breaker, bulkhead); payment down → the order stays PENDING and completes when payment returns (NFR-01).</a:t>
+            </a:r>
+          </a:p>
+          <a:p>
+            <a:r>
+              <a:rPr lang="en-US"/>
+              <a:t>A consumer that keeps failing goes to &lt;topic&gt;.DLT with an ALERT log; sweepers release stock of cancelled orders (NFR-05).</a:t>
+            </a:r>
+            <a:endParaRPr lang="en-US" dirty="0"/>
           </a:p>
         </p:txBody>
       </p:sp>
@@ -1881,9 +2151,22 @@
           <a:lstStyle/>
           <a:p>
             <a:r>
-              <a:rPr lang="en-US" dirty="0"/>
-              <a:t>Rate limit: Redis token bucket per user or IP (FR-13); fails open if Redis is down — availability over protection.</a:t>
-            </a:r>
+              <a:rPr lang="en-US"/>
+              <a:t>Speaker: Mohammed (B).</a:t>
+            </a:r>
+          </a:p>
+          <a:p>
+            <a:r>
+              <a:rPr lang="en-US"/>
+              <a:t>Read one row as decision → why → trade-off. Stress 'release stock by outcome, not age': releasing by age once oversold an order whose payment was only slow.</a:t>
+            </a:r>
+          </a:p>
+          <a:p>
+            <a:r>
+              <a:rPr lang="en-US"/>
+              <a:t>Hand over: Nourhan, security.</a:t>
+            </a:r>
+            <a:endParaRPr lang="en-US" dirty="0"/>
           </a:p>
         </p:txBody>
       </p:sp>
@@ -1967,6 +2250,28 @@
           <a:bodyPr/>
           <a:lstStyle/>
           <a:p>
+            <a:r>
+              <a:rPr lang="en-US"/>
+              <a:t>Speaker: Nourhan (A).</a:t>
+            </a:r>
+          </a:p>
+          <a:p>
+            <a:r>
+              <a:rPr lang="en-US"/>
+              <a:t>The gateway is the trust boundary: JWT from Keycloak, roles per path, X-User-* headers stripped and rebuilt from the token, 401/403/429 as RFC 7807.</a:t>
+            </a:r>
+          </a:p>
+          <a:p>
+            <a:r>
+              <a:rPr lang="en-US"/>
+              <a:t>Every service validates the JWT again. FR-14: order-service calls inventory with its own client-credentials token; a customer token gets 403.</a:t>
+            </a:r>
+          </a:p>
+          <a:p>
+            <a:r>
+              <a:rPr lang="en-US"/>
+              <a:t>Secrets live only in .env and Kubernetes Secrets; gitleaks runs in CI.</a:t>
+            </a:r>
             <a:endParaRPr lang="en-US" dirty="0"/>
           </a:p>
         </p:txBody>
@@ -2052,27 +2357,40 @@
           <a:lstStyle/>
           <a:p>
             <a:r>
-              <a:rPr lang="en-US" dirty="0"/>
+              <a:rPr lang="en-US"/>
+              <a:t>Speaker: Nourhan (A).</a:t>
+            </a:r>
+          </a:p>
+          <a:p>
+            <a:r>
+              <a:rPr lang="en-US"/>
               <a:t>Measured on the merged branch, i5-1335U laptop, k6 on the same machine (Performance Report 8.2).</a:t>
             </a:r>
           </a:p>
           <a:p>
             <a:r>
-              <a:rPr lang="en-US" dirty="0"/>
+              <a:rPr lang="en-US"/>
               <a:t>Met: throughput 59 req/s (target 50) and errors 0.00 % under load, 0.07 % under stress.</a:t>
             </a:r>
           </a:p>
           <a:p>
             <a:r>
-              <a:rPr lang="en-US" dirty="0"/>
+              <a:rPr lang="en-US"/>
               <a:t>Not met here: GET /products p95 below 200 ms. Identical runs gave 475 and 932 ms because the Docker VM is 88 % CPU-busy under the mixed load; the catalogue alone gives 74 to 94 ms.</a:t>
             </a:r>
           </a:p>
           <a:p>
             <a:r>
-              <a:rPr lang="en-US" dirty="0"/>
+              <a:rPr lang="en-US"/>
               <a:t>How we found the bottleneck: Zipkin showed 700 ms inside the gateway before forwarding; Java Flight Recorder showed threads waiting on SecureRandom. A session-backed request cache created a WebSession on every request.</a:t>
             </a:r>
+          </a:p>
+          <a:p>
+            <a:r>
+              <a:rPr lang="en-US"/>
+              <a:t>Hand over: Doaa, how we test.</a:t>
+            </a:r>
+            <a:endParaRPr lang="en-US" dirty="0"/>
           </a:p>
         </p:txBody>
       </p:sp>
@@ -2852,6 +3170,82 @@
           </a:p>
         </p:txBody>
       </p:sp>
+      <p:sp>
+        <p:nvSpPr>
+          <p:cNvPr id="4" name="Presenter tag">
+            <a:extLst>
+              <a:ext uri="{FF2B5EF4-FFF2-40B4-BE49-F238E27FC236}">
+                <a16:creationId xmlns:a16="http://schemas.microsoft.com/office/drawing/2014/main" id="{64B66A4D-778A-49BA-A8C8-B0DD3478912F}"/>
+              </a:ext>
+            </a:extLst>
+          </p:cNvPr>
+          <p:cNvSpPr/>
+          <p:nvPr/>
+        </p:nvSpPr>
+        <p:spPr>
+          <a:xfrm>
+            <a:off x="8585200" y="6375400"/>
+            <a:ext cx="2413000" cy="304800"/>
+          </a:xfrm>
+          <a:prstGeom prst="roundRect">
+            <a:avLst/>
+          </a:prstGeom>
+          <a:solidFill>
+            <a:srgbClr val="2A9D8F"/>
+          </a:solidFill>
+          <a:ln w="12700" cap="flat" cmpd="sng" algn="ctr">
+            <a:noFill/>
+            <a:prstDash val="solid"/>
+            <a:miter lim="800000"/>
+          </a:ln>
+          <a:effectLst/>
+          <a:extLst>
+            <a:ext uri="{91240B29-F687-4F45-9708-019B960494DF}">
+              <a14:hiddenLine xmlns:a14="http://schemas.microsoft.com/office/drawing/2010/main" w="12700" cap="flat" cmpd="sng" algn="ctr">
+                <a:solidFill>
+                  <a:schemeClr val="accent1">
+                    <a:shade val="50000"/>
+                  </a:schemeClr>
+                </a:solidFill>
+                <a:prstDash val="solid"/>
+                <a:miter lim="800000"/>
+              </a14:hiddenLine>
+            </a:ext>
+          </a:extLst>
+        </p:spPr>
+        <p:style>
+          <a:lnRef idx="2">
+            <a:schemeClr val="accent1">
+              <a:shade val="50000"/>
+            </a:schemeClr>
+          </a:lnRef>
+          <a:fillRef idx="1">
+            <a:schemeClr val="accent1"/>
+          </a:fillRef>
+          <a:effectRef idx="0">
+            <a:schemeClr val="accent1"/>
+          </a:effectRef>
+          <a:fontRef idx="minor">
+            <a:schemeClr val="lt1"/>
+          </a:fontRef>
+        </p:style>
+        <p:txBody>
+          <a:bodyPr wrap="none" lIns="50800" tIns="0" rIns="50800" bIns="0" rtlCol="0" anchor="ctr"/>
+          <a:lstStyle/>
+          <a:p>
+            <a:pPr algn="ctr"/>
+            <a:r>
+              <a:rPr lang="en-US" sz="1100" b="1">
+                <a:solidFill>
+                  <a:srgbClr val="FFFFFF"/>
+                </a:solidFill>
+                <a:latin typeface="Calibri" panose="020F0502020204030204" pitchFamily="34" charset="0"/>
+              </a:rPr>
+              <a:t>Presenter: Nourhan (A)</a:t>
+            </a:r>
+          </a:p>
+        </p:txBody>
+      </p:sp>
     </p:spTree>
   </p:cSld>
   <p:clrMapOvr>
@@ -2861,6 +3255,1421 @@
 </file>
 
 <file path=ppt/slides/slide10.xml><?xml version="1.0" encoding="utf-8"?>
+<p:sld xmlns:a="http://schemas.openxmlformats.org/drawingml/2006/main" xmlns:r="http://schemas.openxmlformats.org/officeDocument/2006/relationships" xmlns:p="http://schemas.openxmlformats.org/presentationml/2006/main">
+  <p:cSld name="Slide 8">
+    <p:spTree>
+      <p:nvGrpSpPr>
+        <p:cNvPr id="1" name=""/>
+        <p:cNvGrpSpPr/>
+        <p:nvPr/>
+      </p:nvGrpSpPr>
+      <p:grpSpPr>
+        <a:xfrm>
+          <a:off x="0" y="0"/>
+          <a:ext cx="0" cy="0"/>
+          <a:chOff x="0" y="0"/>
+          <a:chExt cx="0" cy="0"/>
+        </a:xfrm>
+      </p:grpSpPr>
+      <p:sp>
+        <p:nvSpPr>
+          <p:cNvPr id="2" name="Text 0"/>
+          <p:cNvSpPr>
+            <a:spLocks noGrp="1"/>
+          </p:cNvSpPr>
+          <p:nvPr>
+            <p:ph type="title" idx="100" hasCustomPrompt="1"/>
+          </p:nvPr>
+        </p:nvSpPr>
+        <p:spPr>
+          <a:xfrm>
+            <a:off x="548640" y="320040"/>
+            <a:ext cx="11064240" cy="822960"/>
+          </a:xfrm>
+          <a:prstGeom prst="rect">
+            <a:avLst/>
+          </a:prstGeom>
+          <a:noFill/>
+          <a:ln/>
+        </p:spPr>
+        <p:txBody>
+          <a:bodyPr wrap="square" rtlCol="0" anchor="ctr"/>
+          <a:lstStyle/>
+          <a:p>
+            <a:pPr marL="0" indent="0">
+              <a:buNone/>
+            </a:pPr>
+            <a:r>
+              <a:rPr lang="en-US" sz="3200" b="1" dirty="0">
+                <a:solidFill>
+                  <a:schemeClr val="tx2"/>
+                </a:solidFill>
+              </a:rPr>
+              <a:t>Evidence: tests at every level</a:t>
+            </a:r>
+            <a:endParaRPr lang="en-US" sz="3200" dirty="0"/>
+          </a:p>
+        </p:txBody>
+      </p:sp>
+      <p:graphicFrame>
+        <p:nvGraphicFramePr>
+          <p:cNvPr id="3" name="Chart 0"/>
+          <p:cNvGraphicFramePr/>
+          <p:nvPr>
+            <p:extLst>
+              <p:ext uri="{D42A27DB-BD31-4B8C-83A1-F6EECF244321}">
+                <p14:modId xmlns:p14="http://schemas.microsoft.com/office/powerpoint/2010/main" val="2361409617"/>
+              </p:ext>
+            </p:extLst>
+          </p:nvPr>
+        </p:nvGraphicFramePr>
+        <p:xfrm>
+          <a:off x="548640" y="1325880"/>
+          <a:ext cx="6583680" cy="4754880"/>
+        </p:xfrm>
+        <a:graphic>
+          <a:graphicData uri="http://schemas.openxmlformats.org/drawingml/2006/chart">
+            <c:chart xmlns:c="http://schemas.openxmlformats.org/drawingml/2006/chart" xmlns:r="http://schemas.openxmlformats.org/officeDocument/2006/relationships" r:id="rId3"/>
+          </a:graphicData>
+        </a:graphic>
+      </p:graphicFrame>
+      <p:sp>
+        <p:nvSpPr>
+          <p:cNvPr id="4" name="Shape 1"/>
+          <p:cNvSpPr/>
+          <p:nvPr/>
+        </p:nvSpPr>
+        <p:spPr>
+          <a:xfrm>
+            <a:off x="7498080" y="1417320"/>
+            <a:ext cx="4114800" cy="960120"/>
+          </a:xfrm>
+          <a:prstGeom prst="roundRect">
+            <a:avLst>
+              <a:gd name="adj" fmla="val 7619"/>
+            </a:avLst>
+          </a:prstGeom>
+          <a:solidFill>
+            <a:schemeClr val="bg2"/>
+          </a:solidFill>
+          <a:ln w="12700">
+            <a:solidFill>
+              <a:schemeClr val="bg2"/>
+            </a:solidFill>
+            <a:prstDash val="solid"/>
+          </a:ln>
+        </p:spPr>
+      </p:sp>
+      <p:sp>
+        <p:nvSpPr>
+          <p:cNvPr id="5" name="Text 2"/>
+          <p:cNvSpPr txBox="1"/>
+          <p:nvPr/>
+        </p:nvSpPr>
+        <p:spPr>
+          <a:xfrm>
+            <a:off x="7726680" y="1527048"/>
+            <a:ext cx="1554480" cy="731520"/>
+          </a:xfrm>
+          <a:prstGeom prst="rect">
+            <a:avLst/>
+          </a:prstGeom>
+          <a:noFill/>
+          <a:ln/>
+        </p:spPr>
+        <p:txBody>
+          <a:bodyPr wrap="square" lIns="0" tIns="0" rIns="0" bIns="0" rtlCol="0" anchor="ctr"/>
+          <a:lstStyle/>
+          <a:p>
+            <a:pPr marL="0" indent="0">
+              <a:buNone/>
+            </a:pPr>
+            <a:r>
+              <a:rPr lang="en-US" sz="2800" b="1" dirty="0">
+                <a:solidFill>
+                  <a:schemeClr val="tx2"/>
+                </a:solidFill>
+              </a:rPr>
+              <a:t>85%</a:t>
+            </a:r>
+            <a:endParaRPr lang="en-US" sz="2800" dirty="0"/>
+          </a:p>
+        </p:txBody>
+      </p:sp>
+      <p:sp>
+        <p:nvSpPr>
+          <p:cNvPr id="6" name="Text 3"/>
+          <p:cNvSpPr txBox="1"/>
+          <p:nvPr/>
+        </p:nvSpPr>
+        <p:spPr>
+          <a:xfrm>
+            <a:off x="9326880" y="1527048"/>
+            <a:ext cx="2194560" cy="731520"/>
+          </a:xfrm>
+          <a:prstGeom prst="rect">
+            <a:avLst/>
+          </a:prstGeom>
+          <a:noFill/>
+          <a:ln/>
+        </p:spPr>
+        <p:txBody>
+          <a:bodyPr wrap="square" lIns="0" tIns="0" rIns="0" bIns="0" rtlCol="0" anchor="ctr"/>
+          <a:lstStyle/>
+          <a:p>
+            <a:pPr marL="0" indent="0">
+              <a:buNone/>
+            </a:pPr>
+            <a:r>
+              <a:rPr lang="en-US" sz="1400" dirty="0">
+                <a:solidFill>
+                  <a:schemeClr val="tx1"/>
+                </a:solidFill>
+              </a:rPr>
+              <a:t>order.application line coverage</a:t>
+            </a:r>
+            <a:endParaRPr lang="en-US" sz="1400" dirty="0"/>
+          </a:p>
+        </p:txBody>
+      </p:sp>
+      <p:sp>
+        <p:nvSpPr>
+          <p:cNvPr id="7" name="Shape 4"/>
+          <p:cNvSpPr/>
+          <p:nvPr/>
+        </p:nvSpPr>
+        <p:spPr>
+          <a:xfrm>
+            <a:off x="7498080" y="2560320"/>
+            <a:ext cx="4114800" cy="960120"/>
+          </a:xfrm>
+          <a:prstGeom prst="roundRect">
+            <a:avLst>
+              <a:gd name="adj" fmla="val 7619"/>
+            </a:avLst>
+          </a:prstGeom>
+          <a:solidFill>
+            <a:schemeClr val="bg2"/>
+          </a:solidFill>
+          <a:ln w="12700">
+            <a:solidFill>
+              <a:schemeClr val="bg2"/>
+            </a:solidFill>
+            <a:prstDash val="solid"/>
+          </a:ln>
+        </p:spPr>
+      </p:sp>
+      <p:sp>
+        <p:nvSpPr>
+          <p:cNvPr id="8" name="Text 5"/>
+          <p:cNvSpPr txBox="1"/>
+          <p:nvPr/>
+        </p:nvSpPr>
+        <p:spPr>
+          <a:xfrm>
+            <a:off x="7726680" y="2670048"/>
+            <a:ext cx="1554480" cy="731520"/>
+          </a:xfrm>
+          <a:prstGeom prst="rect">
+            <a:avLst/>
+          </a:prstGeom>
+          <a:noFill/>
+          <a:ln/>
+        </p:spPr>
+        <p:txBody>
+          <a:bodyPr wrap="square" lIns="0" tIns="0" rIns="0" bIns="0" rtlCol="0" anchor="ctr"/>
+          <a:lstStyle/>
+          <a:p>
+            <a:pPr marL="0" indent="0">
+              <a:buNone/>
+            </a:pPr>
+            <a:r>
+              <a:rPr lang="en-US" sz="2800" b="1" dirty="0">
+                <a:solidFill>
+                  <a:schemeClr val="tx2"/>
+                </a:solidFill>
+              </a:rPr>
+              <a:t>78%</a:t>
+            </a:r>
+            <a:endParaRPr lang="en-US" sz="2800" dirty="0"/>
+          </a:p>
+        </p:txBody>
+      </p:sp>
+      <p:sp>
+        <p:nvSpPr>
+          <p:cNvPr id="9" name="Text 6"/>
+          <p:cNvSpPr txBox="1"/>
+          <p:nvPr/>
+        </p:nvSpPr>
+        <p:spPr>
+          <a:xfrm>
+            <a:off x="9326880" y="2670048"/>
+            <a:ext cx="2194560" cy="731520"/>
+          </a:xfrm>
+          <a:prstGeom prst="rect">
+            <a:avLst/>
+          </a:prstGeom>
+          <a:noFill/>
+          <a:ln/>
+        </p:spPr>
+        <p:txBody>
+          <a:bodyPr wrap="square" lIns="0" tIns="0" rIns="0" bIns="0" rtlCol="0" anchor="ctr"/>
+          <a:lstStyle/>
+          <a:p>
+            <a:pPr marL="0" indent="0">
+              <a:buNone/>
+            </a:pPr>
+            <a:r>
+              <a:rPr lang="en-US" sz="1400" dirty="0">
+                <a:solidFill>
+                  <a:schemeClr val="tx1"/>
+                </a:solidFill>
+              </a:rPr>
+              <a:t>inventory.application coverage</a:t>
+            </a:r>
+            <a:endParaRPr lang="en-US" sz="1400" dirty="0"/>
+          </a:p>
+        </p:txBody>
+      </p:sp>
+      <p:sp>
+        <p:nvSpPr>
+          <p:cNvPr id="10" name="Shape 7"/>
+          <p:cNvSpPr/>
+          <p:nvPr/>
+        </p:nvSpPr>
+        <p:spPr>
+          <a:xfrm>
+            <a:off x="7498080" y="3703320"/>
+            <a:ext cx="4114800" cy="960120"/>
+          </a:xfrm>
+          <a:prstGeom prst="roundRect">
+            <a:avLst>
+              <a:gd name="adj" fmla="val 7619"/>
+            </a:avLst>
+          </a:prstGeom>
+          <a:solidFill>
+            <a:schemeClr val="bg2"/>
+          </a:solidFill>
+          <a:ln w="12700">
+            <a:solidFill>
+              <a:schemeClr val="bg2"/>
+            </a:solidFill>
+            <a:prstDash val="solid"/>
+          </a:ln>
+        </p:spPr>
+      </p:sp>
+      <p:sp>
+        <p:nvSpPr>
+          <p:cNvPr id="11" name="Text 8"/>
+          <p:cNvSpPr txBox="1"/>
+          <p:nvPr/>
+        </p:nvSpPr>
+        <p:spPr>
+          <a:xfrm>
+            <a:off x="7726680" y="3813048"/>
+            <a:ext cx="1554480" cy="731520"/>
+          </a:xfrm>
+          <a:prstGeom prst="rect">
+            <a:avLst/>
+          </a:prstGeom>
+          <a:noFill/>
+          <a:ln/>
+        </p:spPr>
+        <p:txBody>
+          <a:bodyPr wrap="square" lIns="0" tIns="0" rIns="0" bIns="0" rtlCol="0" anchor="ctr"/>
+          <a:lstStyle/>
+          <a:p>
+            <a:pPr marL="0" indent="0">
+              <a:buNone/>
+            </a:pPr>
+            <a:r>
+              <a:rPr lang="en-US" sz="2800" b="1" dirty="0">
+                <a:solidFill>
+                  <a:schemeClr val="tx2"/>
+                </a:solidFill>
+              </a:rPr>
+              <a:t>≥ 60 %</a:t>
+            </a:r>
+            <a:endParaRPr lang="en-US" sz="2800" dirty="0"/>
+          </a:p>
+        </p:txBody>
+      </p:sp>
+      <p:sp>
+        <p:nvSpPr>
+          <p:cNvPr id="12" name="Text 9"/>
+          <p:cNvSpPr txBox="1"/>
+          <p:nvPr/>
+        </p:nvSpPr>
+        <p:spPr>
+          <a:xfrm>
+            <a:off x="9326880" y="3813048"/>
+            <a:ext cx="2194560" cy="731520"/>
+          </a:xfrm>
+          <a:prstGeom prst="rect">
+            <a:avLst/>
+          </a:prstGeom>
+          <a:noFill/>
+          <a:ln/>
+        </p:spPr>
+        <p:txBody>
+          <a:bodyPr wrap="square" lIns="0" tIns="0" rIns="0" bIns="0" rtlCol="0" anchor="ctr"/>
+          <a:lstStyle/>
+          <a:p>
+            <a:pPr marL="0" indent="0">
+              <a:buNone/>
+            </a:pPr>
+            <a:r>
+              <a:rPr lang="en-US" sz="1400" dirty="0">
+                <a:solidFill>
+                  <a:schemeClr val="tx1"/>
+                </a:solidFill>
+              </a:rPr>
+              <a:t>JaCoCo gate fails the build</a:t>
+            </a:r>
+            <a:endParaRPr lang="en-US" sz="1400" dirty="0"/>
+          </a:p>
+        </p:txBody>
+      </p:sp>
+      <p:sp>
+        <p:nvSpPr>
+          <p:cNvPr id="13" name="Text 10"/>
+          <p:cNvSpPr txBox="1"/>
+          <p:nvPr/>
+        </p:nvSpPr>
+        <p:spPr>
+          <a:xfrm>
+            <a:off x="7498080" y="4937760"/>
+            <a:ext cx="4114800" cy="1188720"/>
+          </a:xfrm>
+          <a:prstGeom prst="rect">
+            <a:avLst/>
+          </a:prstGeom>
+          <a:noFill/>
+          <a:ln/>
+        </p:spPr>
+        <p:txBody>
+          <a:bodyPr wrap="square" lIns="0" tIns="0" rIns="0" bIns="0" rtlCol="0" anchor="t"/>
+          <a:lstStyle/>
+          <a:p>
+            <a:pPr marL="0" indent="0">
+              <a:buNone/>
+            </a:pPr>
+            <a:r>
+              <a:rPr lang="en-US" sz="1400" b="1" dirty="0">
+                <a:solidFill>
+                  <a:schemeClr val="tx1"/>
+                </a:solidFill>
+              </a:rPr>
+              <a:t>Testcontainers </a:t>
+            </a:r>
+            <a:r>
+              <a:rPr lang="en-US" sz="1400" dirty="0">
+                <a:solidFill>
+                  <a:schemeClr val="tx1"/>
+                </a:solidFill>
+              </a:rPr>
+              <a:t>for every database-owning service · </a:t>
+            </a:r>
+            <a:r>
+              <a:rPr lang="en-US" sz="1400" b="1" dirty="0">
+                <a:solidFill>
+                  <a:schemeClr val="tx1"/>
+                </a:solidFill>
+              </a:rPr>
+              <a:t>embedded Kafka </a:t>
+            </a:r>
+            <a:r>
+              <a:rPr lang="en-US" sz="1400" dirty="0">
+                <a:solidFill>
+                  <a:schemeClr val="tx1"/>
+                </a:solidFill>
+              </a:rPr>
+              <a:t>for retry → DLT · </a:t>
+            </a:r>
+            <a:r>
+              <a:rPr lang="en-US" sz="1400" b="1" dirty="0">
+                <a:solidFill>
+                  <a:schemeClr val="tx1"/>
+                </a:solidFill>
+              </a:rPr>
+              <a:t>WireMock </a:t>
+            </a:r>
+            <a:r>
+              <a:rPr lang="en-US" sz="1400" dirty="0">
+                <a:solidFill>
+                  <a:schemeClr val="tx1"/>
+                </a:solidFill>
+              </a:rPr>
+              <a:t>for resilience and FR-14 · </a:t>
+            </a:r>
+            <a:r>
+              <a:rPr lang="en-US" sz="1400" b="1" dirty="0">
+                <a:solidFill>
+                  <a:schemeClr val="tx2"/>
+                </a:solidFill>
+              </a:rPr>
+              <a:t>scripts/e2e-check.sh: 39/39 live</a:t>
+            </a:r>
+            <a:endParaRPr lang="en-US" sz="1400" dirty="0"/>
+          </a:p>
+        </p:txBody>
+      </p:sp>
+      <p:sp>
+        <p:nvSpPr>
+          <p:cNvPr id="25" name="Slide Number Placeholder 0"/>
+          <p:cNvSpPr>
+            <a:spLocks noGrp="1"/>
+          </p:cNvSpPr>
+          <p:nvPr>
+            <p:ph type="sldNum" sz="quarter" idx="4294967295"/>
+          </p:nvPr>
+        </p:nvSpPr>
+        <p:spPr>
+          <a:xfrm>
+            <a:off x="11155680" y="6400800"/>
+            <a:ext cx="548640" cy="274320"/>
+          </a:xfrm>
+          <a:prstGeom prst="rect">
+            <a:avLst/>
+          </a:prstGeom>
+          <a:extLst>
+            <a:ext uri="{C572A759-6A51-4108-AA02-DFA0A04FC94B}">
+              <ma14:wrappingTextBoxFlag xmlns:ma14="http://schemas.microsoft.com/office/mac/drawingml/2011/main" xmlns="" val="0"/>
+            </a:ext>
+          </a:extLst>
+        </p:spPr>
+        <p:txBody>
+          <a:bodyPr/>
+          <a:lstStyle>
+            <a:lvl1pPr>
+              <a:defRPr sz="1000">
+                <a:solidFill>
+                  <a:schemeClr val="accent4"/>
+                </a:solidFill>
+              </a:defRPr>
+            </a:lvl1pPr>
+          </a:lstStyle>
+          <a:p>
+            <a:pPr algn="r"/>
+            <a:fld id="{F7021451-1387-4CA6-816F-3879F97B5CBC}" type="slidenum">
+              <a:rPr lang="en-US" b="0"/>
+              <a:t>10</a:t>
+            </a:fld>
+            <a:endParaRPr lang="en-US"/>
+          </a:p>
+        </p:txBody>
+      </p:sp>
+      <p:sp>
+        <p:nvSpPr>
+          <p:cNvPr id="14" name="Presenter tag">
+            <a:extLst>
+              <a:ext uri="{FF2B5EF4-FFF2-40B4-BE49-F238E27FC236}">
+                <a16:creationId xmlns:a16="http://schemas.microsoft.com/office/drawing/2014/main" id="{90790892-2A00-4F34-8A7E-7CE481B11C5B}"/>
+              </a:ext>
+            </a:extLst>
+          </p:cNvPr>
+          <p:cNvSpPr/>
+          <p:nvPr/>
+        </p:nvSpPr>
+        <p:spPr>
+          <a:xfrm>
+            <a:off x="8585200" y="6375400"/>
+            <a:ext cx="2413000" cy="304800"/>
+          </a:xfrm>
+          <a:prstGeom prst="roundRect">
+            <a:avLst/>
+          </a:prstGeom>
+          <a:solidFill>
+            <a:srgbClr val="0D3B4A"/>
+          </a:solidFill>
+          <a:ln w="12700" cap="flat" cmpd="sng" algn="ctr">
+            <a:noFill/>
+            <a:prstDash val="solid"/>
+            <a:miter lim="800000"/>
+          </a:ln>
+          <a:effectLst/>
+          <a:extLst>
+            <a:ext uri="{91240B29-F687-4F45-9708-019B960494DF}">
+              <a14:hiddenLine xmlns:a14="http://schemas.microsoft.com/office/drawing/2010/main" w="12700" cap="flat" cmpd="sng" algn="ctr">
+                <a:solidFill>
+                  <a:schemeClr val="accent1">
+                    <a:shade val="50000"/>
+                  </a:schemeClr>
+                </a:solidFill>
+                <a:prstDash val="solid"/>
+                <a:miter lim="800000"/>
+              </a14:hiddenLine>
+            </a:ext>
+          </a:extLst>
+        </p:spPr>
+        <p:style>
+          <a:lnRef idx="2">
+            <a:schemeClr val="accent1">
+              <a:shade val="50000"/>
+            </a:schemeClr>
+          </a:lnRef>
+          <a:fillRef idx="1">
+            <a:schemeClr val="accent1"/>
+          </a:fillRef>
+          <a:effectRef idx="0">
+            <a:schemeClr val="accent1"/>
+          </a:effectRef>
+          <a:fontRef idx="minor">
+            <a:schemeClr val="lt1"/>
+          </a:fontRef>
+        </p:style>
+        <p:txBody>
+          <a:bodyPr wrap="none" lIns="50800" tIns="0" rIns="50800" bIns="0" rtlCol="0" anchor="ctr"/>
+          <a:lstStyle/>
+          <a:p>
+            <a:pPr algn="ctr"/>
+            <a:r>
+              <a:rPr lang="en-US" sz="1100" b="1">
+                <a:solidFill>
+                  <a:srgbClr val="FFFFFF"/>
+                </a:solidFill>
+                <a:latin typeface="Calibri" panose="020F0502020204030204" pitchFamily="34" charset="0"/>
+              </a:rPr>
+              <a:t>Presenter: Doaa (C)</a:t>
+            </a:r>
+          </a:p>
+        </p:txBody>
+      </p:sp>
+    </p:spTree>
+  </p:cSld>
+  <p:clrMapOvr>
+    <a:masterClrMapping/>
+  </p:clrMapOvr>
+</p:sld>
+</file>
+
+<file path=ppt/slides/slide11.xml><?xml version="1.0" encoding="utf-8"?>
+<p:sld xmlns:a="http://schemas.openxmlformats.org/drawingml/2006/main" xmlns:r="http://schemas.openxmlformats.org/officeDocument/2006/relationships" xmlns:p="http://schemas.openxmlformats.org/presentationml/2006/main">
+  <p:cSld name="Slide 12">
+    <p:spTree>
+      <p:nvGrpSpPr>
+        <p:cNvPr id="1" name=""/>
+        <p:cNvGrpSpPr/>
+        <p:nvPr/>
+      </p:nvGrpSpPr>
+      <p:grpSpPr>
+        <a:xfrm>
+          <a:off x="0" y="0"/>
+          <a:ext cx="0" cy="0"/>
+          <a:chOff x="0" y="0"/>
+          <a:chExt cx="0" cy="0"/>
+        </a:xfrm>
+      </p:grpSpPr>
+      <p:sp>
+        <p:nvSpPr>
+          <p:cNvPr id="2" name="Text 0"/>
+          <p:cNvSpPr>
+            <a:spLocks noGrp="1"/>
+          </p:cNvSpPr>
+          <p:nvPr>
+            <p:ph type="title" idx="100" hasCustomPrompt="1"/>
+          </p:nvPr>
+        </p:nvSpPr>
+        <p:spPr>
+          <a:xfrm>
+            <a:off x="548640" y="320040"/>
+            <a:ext cx="11064240" cy="822960"/>
+          </a:xfrm>
+          <a:prstGeom prst="rect">
+            <a:avLst/>
+          </a:prstGeom>
+          <a:noFill/>
+          <a:ln/>
+        </p:spPr>
+        <p:txBody>
+          <a:bodyPr wrap="square" rtlCol="0" anchor="ctr"/>
+          <a:lstStyle/>
+          <a:p>
+            <a:pPr marL="0" indent="0">
+              <a:buNone/>
+            </a:pPr>
+            <a:r>
+              <a:rPr lang="en-US" sz="3200" b="1" dirty="0">
+                <a:solidFill>
+                  <a:schemeClr val="tx2"/>
+                </a:solidFill>
+              </a:rPr>
+              <a:t>What testing the whole system caught</a:t>
+            </a:r>
+            <a:endParaRPr lang="en-US" sz="3200" dirty="0"/>
+          </a:p>
+        </p:txBody>
+      </p:sp>
+      <p:sp>
+        <p:nvSpPr>
+          <p:cNvPr id="3" name="Shape 1"/>
+          <p:cNvSpPr/>
+          <p:nvPr/>
+        </p:nvSpPr>
+        <p:spPr>
+          <a:xfrm>
+            <a:off x="548640" y="1417320"/>
+            <a:ext cx="5440680" cy="2103120"/>
+          </a:xfrm>
+          <a:prstGeom prst="roundRect">
+            <a:avLst>
+              <a:gd name="adj" fmla="val 3478"/>
+            </a:avLst>
+          </a:prstGeom>
+          <a:solidFill>
+            <a:schemeClr val="bg2"/>
+          </a:solidFill>
+          <a:ln w="12700">
+            <a:solidFill>
+              <a:schemeClr val="bg2"/>
+            </a:solidFill>
+            <a:prstDash val="solid"/>
+          </a:ln>
+        </p:spPr>
+      </p:sp>
+      <p:sp>
+        <p:nvSpPr>
+          <p:cNvPr id="4" name="Shape 2"/>
+          <p:cNvSpPr/>
+          <p:nvPr/>
+        </p:nvSpPr>
+        <p:spPr>
+          <a:xfrm>
+            <a:off x="777240" y="1645920"/>
+            <a:ext cx="457200" cy="457200"/>
+          </a:xfrm>
+          <a:prstGeom prst="ellipse">
+            <a:avLst/>
+          </a:prstGeom>
+          <a:solidFill>
+            <a:schemeClr val="accent2"/>
+          </a:solidFill>
+          <a:ln w="12700">
+            <a:solidFill>
+              <a:schemeClr val="accent2"/>
+            </a:solidFill>
+            <a:prstDash val="solid"/>
+          </a:ln>
+        </p:spPr>
+      </p:sp>
+      <p:sp>
+        <p:nvSpPr>
+          <p:cNvPr id="5" name="Text 3"/>
+          <p:cNvSpPr txBox="1"/>
+          <p:nvPr/>
+        </p:nvSpPr>
+        <p:spPr>
+          <a:xfrm>
+            <a:off x="777240" y="1645920"/>
+            <a:ext cx="457200" cy="457200"/>
+          </a:xfrm>
+          <a:prstGeom prst="rect">
+            <a:avLst/>
+          </a:prstGeom>
+          <a:noFill/>
+          <a:ln/>
+        </p:spPr>
+        <p:txBody>
+          <a:bodyPr wrap="square" lIns="0" tIns="0" rIns="0" bIns="0" rtlCol="0" anchor="ctr"/>
+          <a:lstStyle/>
+          <a:p>
+            <a:pPr marL="0" indent="0" algn="ctr">
+              <a:buNone/>
+            </a:pPr>
+            <a:r>
+              <a:rPr lang="en-US" sz="1400" b="1" dirty="0">
+                <a:solidFill>
+                  <a:schemeClr val="bg1"/>
+                </a:solidFill>
+              </a:rPr>
+              <a:t>✓</a:t>
+            </a:r>
+            <a:endParaRPr lang="en-US" sz="1400" dirty="0"/>
+          </a:p>
+        </p:txBody>
+      </p:sp>
+      <p:sp>
+        <p:nvSpPr>
+          <p:cNvPr id="6" name="Text 4"/>
+          <p:cNvSpPr txBox="1"/>
+          <p:nvPr/>
+        </p:nvSpPr>
+        <p:spPr>
+          <a:xfrm>
+            <a:off x="1371600" y="1691640"/>
+            <a:ext cx="4389120" cy="411480"/>
+          </a:xfrm>
+          <a:prstGeom prst="rect">
+            <a:avLst/>
+          </a:prstGeom>
+          <a:noFill/>
+          <a:ln/>
+        </p:spPr>
+        <p:txBody>
+          <a:bodyPr wrap="square" lIns="0" tIns="0" rIns="0" bIns="0" rtlCol="0" anchor="t"/>
+          <a:lstStyle/>
+          <a:p>
+            <a:pPr marL="0" indent="0">
+              <a:buNone/>
+            </a:pPr>
+            <a:r>
+              <a:rPr lang="en-US" sz="1800" b="1" dirty="0">
+                <a:solidFill>
+                  <a:schemeClr val="tx2"/>
+                </a:solidFill>
+              </a:rPr>
+              <a:t>Notification never notified</a:t>
+            </a:r>
+            <a:endParaRPr lang="en-US" sz="1800" dirty="0"/>
+          </a:p>
+        </p:txBody>
+      </p:sp>
+      <p:sp>
+        <p:nvSpPr>
+          <p:cNvPr id="7" name="Text 5"/>
+          <p:cNvSpPr txBox="1"/>
+          <p:nvPr/>
+        </p:nvSpPr>
+        <p:spPr>
+          <a:xfrm>
+            <a:off x="777240" y="2286000"/>
+            <a:ext cx="4983480" cy="1143000"/>
+          </a:xfrm>
+          <a:prstGeom prst="rect">
+            <a:avLst/>
+          </a:prstGeom>
+          <a:noFill/>
+          <a:ln/>
+        </p:spPr>
+        <p:txBody>
+          <a:bodyPr wrap="square" lIns="0" tIns="0" rIns="0" bIns="0" rtlCol="0" anchor="t"/>
+          <a:lstStyle/>
+          <a:p>
+            <a:pPr marL="0" indent="0">
+              <a:buNone/>
+            </a:pPr>
+            <a:r>
+              <a:rPr lang="en-US" sz="1500" dirty="0">
+                <a:solidFill>
+                  <a:schemeClr val="tx1"/>
+                </a:solidFill>
+              </a:rPr>
+              <a:t>Unit tests on both sides were green; the live run showed every order event parked on the DLT — two shapes of one contract.</a:t>
+            </a:r>
+            <a:endParaRPr lang="en-US" sz="1500" dirty="0"/>
+          </a:p>
+        </p:txBody>
+      </p:sp>
+      <p:sp>
+        <p:nvSpPr>
+          <p:cNvPr id="8" name="Shape 6"/>
+          <p:cNvSpPr/>
+          <p:nvPr/>
+        </p:nvSpPr>
+        <p:spPr>
+          <a:xfrm>
+            <a:off x="6172200" y="1417320"/>
+            <a:ext cx="5440680" cy="2103120"/>
+          </a:xfrm>
+          <a:prstGeom prst="roundRect">
+            <a:avLst>
+              <a:gd name="adj" fmla="val 3478"/>
+            </a:avLst>
+          </a:prstGeom>
+          <a:solidFill>
+            <a:schemeClr val="bg2"/>
+          </a:solidFill>
+          <a:ln w="12700">
+            <a:solidFill>
+              <a:schemeClr val="bg2"/>
+            </a:solidFill>
+            <a:prstDash val="solid"/>
+          </a:ln>
+        </p:spPr>
+      </p:sp>
+      <p:sp>
+        <p:nvSpPr>
+          <p:cNvPr id="9" name="Shape 7"/>
+          <p:cNvSpPr/>
+          <p:nvPr/>
+        </p:nvSpPr>
+        <p:spPr>
+          <a:xfrm>
+            <a:off x="6400800" y="1645920"/>
+            <a:ext cx="457200" cy="457200"/>
+          </a:xfrm>
+          <a:prstGeom prst="ellipse">
+            <a:avLst/>
+          </a:prstGeom>
+          <a:solidFill>
+            <a:schemeClr val="accent2"/>
+          </a:solidFill>
+          <a:ln w="12700">
+            <a:solidFill>
+              <a:schemeClr val="accent2"/>
+            </a:solidFill>
+            <a:prstDash val="solid"/>
+          </a:ln>
+        </p:spPr>
+      </p:sp>
+      <p:sp>
+        <p:nvSpPr>
+          <p:cNvPr id="10" name="Text 8"/>
+          <p:cNvSpPr txBox="1"/>
+          <p:nvPr/>
+        </p:nvSpPr>
+        <p:spPr>
+          <a:xfrm>
+            <a:off x="6400800" y="1645920"/>
+            <a:ext cx="457200" cy="457200"/>
+          </a:xfrm>
+          <a:prstGeom prst="rect">
+            <a:avLst/>
+          </a:prstGeom>
+          <a:noFill/>
+          <a:ln/>
+        </p:spPr>
+        <p:txBody>
+          <a:bodyPr wrap="square" lIns="0" tIns="0" rIns="0" bIns="0" rtlCol="0" anchor="ctr"/>
+          <a:lstStyle/>
+          <a:p>
+            <a:pPr marL="0" indent="0" algn="ctr">
+              <a:buNone/>
+            </a:pPr>
+            <a:r>
+              <a:rPr lang="en-US" sz="1400" b="1" dirty="0">
+                <a:solidFill>
+                  <a:schemeClr val="bg1"/>
+                </a:solidFill>
+              </a:rPr>
+              <a:t>✓</a:t>
+            </a:r>
+            <a:endParaRPr lang="en-US" sz="1400" dirty="0"/>
+          </a:p>
+        </p:txBody>
+      </p:sp>
+      <p:sp>
+        <p:nvSpPr>
+          <p:cNvPr id="11" name="Text 9"/>
+          <p:cNvSpPr txBox="1"/>
+          <p:nvPr/>
+        </p:nvSpPr>
+        <p:spPr>
+          <a:xfrm>
+            <a:off x="6995160" y="1691640"/>
+            <a:ext cx="4389120" cy="411480"/>
+          </a:xfrm>
+          <a:prstGeom prst="rect">
+            <a:avLst/>
+          </a:prstGeom>
+          <a:noFill/>
+          <a:ln/>
+        </p:spPr>
+        <p:txBody>
+          <a:bodyPr wrap="square" lIns="0" tIns="0" rIns="0" bIns="0" rtlCol="0" anchor="t"/>
+          <a:lstStyle/>
+          <a:p>
+            <a:pPr marL="0" indent="0">
+              <a:buNone/>
+            </a:pPr>
+            <a:r>
+              <a:rPr lang="en-US" sz="1800" b="1" dirty="0">
+                <a:solidFill>
+                  <a:schemeClr val="tx2"/>
+                </a:solidFill>
+              </a:rPr>
+              <a:t>Sold-out opened the circuit</a:t>
+            </a:r>
+            <a:endParaRPr lang="en-US" sz="1800" dirty="0"/>
+          </a:p>
+        </p:txBody>
+      </p:sp>
+      <p:sp>
+        <p:nvSpPr>
+          <p:cNvPr id="12" name="Text 10"/>
+          <p:cNvSpPr txBox="1"/>
+          <p:nvPr/>
+        </p:nvSpPr>
+        <p:spPr>
+          <a:xfrm>
+            <a:off x="6400800" y="2286000"/>
+            <a:ext cx="4983480" cy="1143000"/>
+          </a:xfrm>
+          <a:prstGeom prst="rect">
+            <a:avLst/>
+          </a:prstGeom>
+          <a:noFill/>
+          <a:ln/>
+        </p:spPr>
+        <p:txBody>
+          <a:bodyPr wrap="square" lIns="0" tIns="0" rIns="0" bIns="0" rtlCol="0" anchor="t"/>
+          <a:lstStyle/>
+          <a:p>
+            <a:pPr marL="0" indent="0">
+              <a:buNone/>
+            </a:pPr>
+            <a:r>
+              <a:rPr lang="en-US" sz="1500" dirty="0">
+                <a:solidFill>
+                  <a:schemeClr val="tx1"/>
+                </a:solidFill>
+              </a:rPr>
+              <a:t>Out-of-stock counted as a failure: three sold-out orders gave every customer 503.</a:t>
+            </a:r>
+            <a:endParaRPr lang="en-US" sz="1500" dirty="0"/>
+          </a:p>
+        </p:txBody>
+      </p:sp>
+      <p:sp>
+        <p:nvSpPr>
+          <p:cNvPr id="13" name="Shape 11"/>
+          <p:cNvSpPr/>
+          <p:nvPr/>
+        </p:nvSpPr>
+        <p:spPr>
+          <a:xfrm>
+            <a:off x="548640" y="3749040"/>
+            <a:ext cx="5440680" cy="2103120"/>
+          </a:xfrm>
+          <a:prstGeom prst="roundRect">
+            <a:avLst>
+              <a:gd name="adj" fmla="val 3478"/>
+            </a:avLst>
+          </a:prstGeom>
+          <a:solidFill>
+            <a:schemeClr val="bg2"/>
+          </a:solidFill>
+          <a:ln w="12700">
+            <a:solidFill>
+              <a:schemeClr val="bg2"/>
+            </a:solidFill>
+            <a:prstDash val="solid"/>
+          </a:ln>
+        </p:spPr>
+      </p:sp>
+      <p:sp>
+        <p:nvSpPr>
+          <p:cNvPr id="14" name="Shape 12"/>
+          <p:cNvSpPr/>
+          <p:nvPr/>
+        </p:nvSpPr>
+        <p:spPr>
+          <a:xfrm>
+            <a:off x="777240" y="3977640"/>
+            <a:ext cx="457200" cy="457200"/>
+          </a:xfrm>
+          <a:prstGeom prst="ellipse">
+            <a:avLst/>
+          </a:prstGeom>
+          <a:solidFill>
+            <a:schemeClr val="accent2"/>
+          </a:solidFill>
+          <a:ln w="12700">
+            <a:solidFill>
+              <a:schemeClr val="accent2"/>
+            </a:solidFill>
+            <a:prstDash val="solid"/>
+          </a:ln>
+        </p:spPr>
+      </p:sp>
+      <p:sp>
+        <p:nvSpPr>
+          <p:cNvPr id="15" name="Text 13"/>
+          <p:cNvSpPr txBox="1"/>
+          <p:nvPr/>
+        </p:nvSpPr>
+        <p:spPr>
+          <a:xfrm>
+            <a:off x="777240" y="3977640"/>
+            <a:ext cx="457200" cy="457200"/>
+          </a:xfrm>
+          <a:prstGeom prst="rect">
+            <a:avLst/>
+          </a:prstGeom>
+          <a:noFill/>
+          <a:ln/>
+        </p:spPr>
+        <p:txBody>
+          <a:bodyPr wrap="square" lIns="0" tIns="0" rIns="0" bIns="0" rtlCol="0" anchor="ctr"/>
+          <a:lstStyle/>
+          <a:p>
+            <a:pPr marL="0" indent="0" algn="ctr">
+              <a:buNone/>
+            </a:pPr>
+            <a:r>
+              <a:rPr lang="en-US" sz="1400" b="1" dirty="0">
+                <a:solidFill>
+                  <a:schemeClr val="bg1"/>
+                </a:solidFill>
+              </a:rPr>
+              <a:t>✓</a:t>
+            </a:r>
+            <a:endParaRPr lang="en-US" sz="1400" dirty="0"/>
+          </a:p>
+        </p:txBody>
+      </p:sp>
+      <p:sp>
+        <p:nvSpPr>
+          <p:cNvPr id="16" name="Text 14"/>
+          <p:cNvSpPr txBox="1"/>
+          <p:nvPr/>
+        </p:nvSpPr>
+        <p:spPr>
+          <a:xfrm>
+            <a:off x="1371600" y="4023360"/>
+            <a:ext cx="4389120" cy="411480"/>
+          </a:xfrm>
+          <a:prstGeom prst="rect">
+            <a:avLst/>
+          </a:prstGeom>
+          <a:noFill/>
+          <a:ln/>
+        </p:spPr>
+        <p:txBody>
+          <a:bodyPr wrap="square" lIns="0" tIns="0" rIns="0" bIns="0" rtlCol="0" anchor="t"/>
+          <a:lstStyle/>
+          <a:p>
+            <a:pPr marL="0" indent="0">
+              <a:buNone/>
+            </a:pPr>
+            <a:r>
+              <a:rPr lang="en-US" sz="1800" b="1" dirty="0">
+                <a:solidFill>
+                  <a:schemeClr val="tx2"/>
+                </a:solidFill>
+              </a:rPr>
+              <a:t>Saga steps could vanish</a:t>
+            </a:r>
+            <a:endParaRPr lang="en-US" sz="1800" dirty="0"/>
+          </a:p>
+        </p:txBody>
+      </p:sp>
+      <p:sp>
+        <p:nvSpPr>
+          <p:cNvPr id="17" name="Text 15"/>
+          <p:cNvSpPr txBox="1"/>
+          <p:nvPr/>
+        </p:nvSpPr>
+        <p:spPr>
+          <a:xfrm>
+            <a:off x="777240" y="4617720"/>
+            <a:ext cx="4983480" cy="1143000"/>
+          </a:xfrm>
+          <a:prstGeom prst="rect">
+            <a:avLst/>
+          </a:prstGeom>
+          <a:noFill/>
+          <a:ln/>
+        </p:spPr>
+        <p:txBody>
+          <a:bodyPr wrap="square" lIns="0" tIns="0" rIns="0" bIns="0" rtlCol="0" anchor="t"/>
+          <a:lstStyle/>
+          <a:p>
+            <a:pPr marL="0" indent="0">
+              <a:buNone/>
+            </a:pPr>
+            <a:r>
+              <a:rPr lang="en-US" sz="1500" dirty="0">
+                <a:solidFill>
+                  <a:schemeClr val="tx1"/>
+                </a:solidFill>
+              </a:rPr>
+              <a:t>Order and inventory listeners swallowed errors; now retry → DLT, proven on a real broker.</a:t>
+            </a:r>
+            <a:endParaRPr lang="en-US" sz="1500" dirty="0"/>
+          </a:p>
+        </p:txBody>
+      </p:sp>
+      <p:sp>
+        <p:nvSpPr>
+          <p:cNvPr id="18" name="Shape 16"/>
+          <p:cNvSpPr/>
+          <p:nvPr/>
+        </p:nvSpPr>
+        <p:spPr>
+          <a:xfrm>
+            <a:off x="6172200" y="3749040"/>
+            <a:ext cx="5440680" cy="2103120"/>
+          </a:xfrm>
+          <a:prstGeom prst="roundRect">
+            <a:avLst>
+              <a:gd name="adj" fmla="val 3478"/>
+            </a:avLst>
+          </a:prstGeom>
+          <a:solidFill>
+            <a:schemeClr val="bg2"/>
+          </a:solidFill>
+          <a:ln w="12700">
+            <a:solidFill>
+              <a:schemeClr val="bg2"/>
+            </a:solidFill>
+            <a:prstDash val="solid"/>
+          </a:ln>
+        </p:spPr>
+      </p:sp>
+      <p:sp>
+        <p:nvSpPr>
+          <p:cNvPr id="19" name="Shape 17"/>
+          <p:cNvSpPr/>
+          <p:nvPr/>
+        </p:nvSpPr>
+        <p:spPr>
+          <a:xfrm>
+            <a:off x="6400800" y="3977640"/>
+            <a:ext cx="457200" cy="457200"/>
+          </a:xfrm>
+          <a:prstGeom prst="ellipse">
+            <a:avLst/>
+          </a:prstGeom>
+          <a:solidFill>
+            <a:schemeClr val="accent2"/>
+          </a:solidFill>
+          <a:ln w="12700">
+            <a:solidFill>
+              <a:schemeClr val="accent2"/>
+            </a:solidFill>
+            <a:prstDash val="solid"/>
+          </a:ln>
+        </p:spPr>
+      </p:sp>
+      <p:sp>
+        <p:nvSpPr>
+          <p:cNvPr id="20" name="Text 18"/>
+          <p:cNvSpPr txBox="1"/>
+          <p:nvPr/>
+        </p:nvSpPr>
+        <p:spPr>
+          <a:xfrm>
+            <a:off x="6400800" y="3977640"/>
+            <a:ext cx="457200" cy="457200"/>
+          </a:xfrm>
+          <a:prstGeom prst="rect">
+            <a:avLst/>
+          </a:prstGeom>
+          <a:noFill/>
+          <a:ln/>
+        </p:spPr>
+        <p:txBody>
+          <a:bodyPr wrap="square" lIns="0" tIns="0" rIns="0" bIns="0" rtlCol="0" anchor="ctr"/>
+          <a:lstStyle/>
+          <a:p>
+            <a:pPr marL="0" indent="0" algn="ctr">
+              <a:buNone/>
+            </a:pPr>
+            <a:r>
+              <a:rPr lang="en-US" sz="1400" b="1" dirty="0">
+                <a:solidFill>
+                  <a:schemeClr val="bg1"/>
+                </a:solidFill>
+              </a:rPr>
+              <a:t>✓</a:t>
+            </a:r>
+            <a:endParaRPr lang="en-US" sz="1400" dirty="0"/>
+          </a:p>
+        </p:txBody>
+      </p:sp>
+      <p:sp>
+        <p:nvSpPr>
+          <p:cNvPr id="21" name="Text 19"/>
+          <p:cNvSpPr txBox="1"/>
+          <p:nvPr/>
+        </p:nvSpPr>
+        <p:spPr>
+          <a:xfrm>
+            <a:off x="6995160" y="4023360"/>
+            <a:ext cx="4389120" cy="411480"/>
+          </a:xfrm>
+          <a:prstGeom prst="rect">
+            <a:avLst/>
+          </a:prstGeom>
+          <a:noFill/>
+          <a:ln/>
+        </p:spPr>
+        <p:txBody>
+          <a:bodyPr wrap="square" lIns="0" tIns="0" rIns="0" bIns="0" rtlCol="0" anchor="t"/>
+          <a:lstStyle/>
+          <a:p>
+            <a:pPr marL="0" indent="0">
+              <a:buNone/>
+            </a:pPr>
+            <a:r>
+              <a:rPr lang="en-US" sz="1800" b="1" dirty="0">
+                <a:solidFill>
+                  <a:schemeClr val="tx2"/>
+                </a:solidFill>
+              </a:rPr>
+              <a:t>Coverage gate never ran</a:t>
+            </a:r>
+            <a:endParaRPr lang="en-US" sz="1800" dirty="0"/>
+          </a:p>
+        </p:txBody>
+      </p:sp>
+      <p:sp>
+        <p:nvSpPr>
+          <p:cNvPr id="22" name="Text 20"/>
+          <p:cNvSpPr txBox="1"/>
+          <p:nvPr/>
+        </p:nvSpPr>
+        <p:spPr>
+          <a:xfrm>
+            <a:off x="6400800" y="4617720"/>
+            <a:ext cx="4983480" cy="1143000"/>
+          </a:xfrm>
+          <a:prstGeom prst="rect">
+            <a:avLst/>
+          </a:prstGeom>
+          <a:noFill/>
+          <a:ln/>
+        </p:spPr>
+        <p:txBody>
+          <a:bodyPr wrap="square" lIns="0" tIns="0" rIns="0" bIns="0" rtlCol="0" anchor="t"/>
+          <a:lstStyle/>
+          <a:p>
+            <a:pPr marL="0" indent="0">
+              <a:buNone/>
+            </a:pPr>
+            <a:r>
+              <a:rPr lang="en-US" sz="1500" dirty="0">
+                <a:solidFill>
+                  <a:schemeClr val="tx1"/>
+                </a:solidFill>
+              </a:rPr>
+              <a:t>A surefire argLine dropped the JaCoCo agent, so the 60 % check silently skipped.</a:t>
+            </a:r>
+            <a:endParaRPr lang="en-US" sz="1500" dirty="0"/>
+          </a:p>
+        </p:txBody>
+      </p:sp>
+      <p:sp>
+        <p:nvSpPr>
+          <p:cNvPr id="25" name="Slide Number Placeholder 0"/>
+          <p:cNvSpPr>
+            <a:spLocks noGrp="1"/>
+          </p:cNvSpPr>
+          <p:nvPr>
+            <p:ph type="sldNum" sz="quarter" idx="4294967295"/>
+          </p:nvPr>
+        </p:nvSpPr>
+        <p:spPr>
+          <a:xfrm>
+            <a:off x="11155680" y="6400800"/>
+            <a:ext cx="548640" cy="274320"/>
+          </a:xfrm>
+          <a:prstGeom prst="rect">
+            <a:avLst/>
+          </a:prstGeom>
+          <a:extLst>
+            <a:ext uri="{C572A759-6A51-4108-AA02-DFA0A04FC94B}">
+              <ma14:wrappingTextBoxFlag xmlns:ma14="http://schemas.microsoft.com/office/mac/drawingml/2011/main" xmlns="" val="0"/>
+            </a:ext>
+          </a:extLst>
+        </p:spPr>
+        <p:txBody>
+          <a:bodyPr/>
+          <a:lstStyle>
+            <a:lvl1pPr>
+              <a:defRPr sz="1000">
+                <a:solidFill>
+                  <a:schemeClr val="accent4"/>
+                </a:solidFill>
+              </a:defRPr>
+            </a:lvl1pPr>
+          </a:lstStyle>
+          <a:p>
+            <a:pPr algn="r"/>
+            <a:fld id="{F7021451-1387-4CA6-816F-3879F97B5CBC}" type="slidenum">
+              <a:rPr lang="en-US" b="0"/>
+              <a:t>11</a:t>
+            </a:fld>
+            <a:endParaRPr lang="en-US"/>
+          </a:p>
+        </p:txBody>
+      </p:sp>
+      <p:sp>
+        <p:nvSpPr>
+          <p:cNvPr id="23" name="Presenter tag">
+            <a:extLst>
+              <a:ext uri="{FF2B5EF4-FFF2-40B4-BE49-F238E27FC236}">
+                <a16:creationId xmlns:a16="http://schemas.microsoft.com/office/drawing/2014/main" id="{14C7DA3F-06B9-4D43-A608-30E81EB0A954}"/>
+              </a:ext>
+            </a:extLst>
+          </p:cNvPr>
+          <p:cNvSpPr/>
+          <p:nvPr/>
+        </p:nvSpPr>
+        <p:spPr>
+          <a:xfrm>
+            <a:off x="8585200" y="6375400"/>
+            <a:ext cx="2413000" cy="304800"/>
+          </a:xfrm>
+          <a:prstGeom prst="roundRect">
+            <a:avLst/>
+          </a:prstGeom>
+          <a:solidFill>
+            <a:srgbClr val="0D3B4A"/>
+          </a:solidFill>
+          <a:ln w="12700" cap="flat" cmpd="sng" algn="ctr">
+            <a:noFill/>
+            <a:prstDash val="solid"/>
+            <a:miter lim="800000"/>
+          </a:ln>
+          <a:effectLst/>
+          <a:extLst>
+            <a:ext uri="{91240B29-F687-4F45-9708-019B960494DF}">
+              <a14:hiddenLine xmlns:a14="http://schemas.microsoft.com/office/drawing/2010/main" w="12700" cap="flat" cmpd="sng" algn="ctr">
+                <a:solidFill>
+                  <a:schemeClr val="accent1">
+                    <a:shade val="50000"/>
+                  </a:schemeClr>
+                </a:solidFill>
+                <a:prstDash val="solid"/>
+                <a:miter lim="800000"/>
+              </a14:hiddenLine>
+            </a:ext>
+          </a:extLst>
+        </p:spPr>
+        <p:style>
+          <a:lnRef idx="2">
+            <a:schemeClr val="accent1">
+              <a:shade val="50000"/>
+            </a:schemeClr>
+          </a:lnRef>
+          <a:fillRef idx="1">
+            <a:schemeClr val="accent1"/>
+          </a:fillRef>
+          <a:effectRef idx="0">
+            <a:schemeClr val="accent1"/>
+          </a:effectRef>
+          <a:fontRef idx="minor">
+            <a:schemeClr val="lt1"/>
+          </a:fontRef>
+        </p:style>
+        <p:txBody>
+          <a:bodyPr wrap="none" lIns="50800" tIns="0" rIns="50800" bIns="0" rtlCol="0" anchor="ctr"/>
+          <a:lstStyle/>
+          <a:p>
+            <a:pPr algn="ctr"/>
+            <a:r>
+              <a:rPr lang="en-US" sz="1100" b="1">
+                <a:solidFill>
+                  <a:srgbClr val="FFFFFF"/>
+                </a:solidFill>
+                <a:latin typeface="Calibri" panose="020F0502020204030204" pitchFamily="34" charset="0"/>
+              </a:rPr>
+              <a:t>Presenter: Doaa (C)</a:t>
+            </a:r>
+          </a:p>
+        </p:txBody>
+      </p:sp>
+    </p:spTree>
+  </p:cSld>
+  <p:clrMapOvr>
+    <a:masterClrMapping/>
+  </p:clrMapOvr>
+</p:sld>
+</file>
+
+<file path=ppt/slides/slide12.xml><?xml version="1.0" encoding="utf-8"?>
 <p:sld xmlns:a="http://schemas.openxmlformats.org/drawingml/2006/main" xmlns:r="http://schemas.openxmlformats.org/officeDocument/2006/relationships" xmlns:p="http://schemas.openxmlformats.org/presentationml/2006/main">
   <p:cSld name="Slide 10">
     <p:spTree>
@@ -3410,9 +5219,85 @@
             <a:pPr algn="r"/>
             <a:fld id="{F7021451-1387-4CA6-816F-3879F97B5CBC}" type="slidenum">
               <a:rPr lang="en-US" b="0"/>
-              <a:t>10</a:t>
+              <a:t>12</a:t>
             </a:fld>
             <a:endParaRPr lang="en-US"/>
+          </a:p>
+        </p:txBody>
+      </p:sp>
+      <p:sp>
+        <p:nvSpPr>
+          <p:cNvPr id="15" name="Presenter tag">
+            <a:extLst>
+              <a:ext uri="{FF2B5EF4-FFF2-40B4-BE49-F238E27FC236}">
+                <a16:creationId xmlns:a16="http://schemas.microsoft.com/office/drawing/2014/main" id="{BA6910E7-E0CD-4FAF-80B0-B7DAEA06EE27}"/>
+              </a:ext>
+            </a:extLst>
+          </p:cNvPr>
+          <p:cNvSpPr/>
+          <p:nvPr/>
+        </p:nvSpPr>
+        <p:spPr>
+          <a:xfrm>
+            <a:off x="8585200" y="6375400"/>
+            <a:ext cx="2413000" cy="304800"/>
+          </a:xfrm>
+          <a:prstGeom prst="roundRect">
+            <a:avLst/>
+          </a:prstGeom>
+          <a:solidFill>
+            <a:srgbClr val="0D3B4A"/>
+          </a:solidFill>
+          <a:ln w="12700" cap="flat" cmpd="sng" algn="ctr">
+            <a:noFill/>
+            <a:prstDash val="solid"/>
+            <a:miter lim="800000"/>
+          </a:ln>
+          <a:effectLst/>
+          <a:extLst>
+            <a:ext uri="{91240B29-F687-4F45-9708-019B960494DF}">
+              <a14:hiddenLine xmlns:a14="http://schemas.microsoft.com/office/drawing/2010/main" w="12700" cap="flat" cmpd="sng" algn="ctr">
+                <a:solidFill>
+                  <a:schemeClr val="accent1">
+                    <a:shade val="50000"/>
+                  </a:schemeClr>
+                </a:solidFill>
+                <a:prstDash val="solid"/>
+                <a:miter lim="800000"/>
+              </a14:hiddenLine>
+            </a:ext>
+          </a:extLst>
+        </p:spPr>
+        <p:style>
+          <a:lnRef idx="2">
+            <a:schemeClr val="accent1">
+              <a:shade val="50000"/>
+            </a:schemeClr>
+          </a:lnRef>
+          <a:fillRef idx="1">
+            <a:schemeClr val="accent1"/>
+          </a:fillRef>
+          <a:effectRef idx="0">
+            <a:schemeClr val="accent1"/>
+          </a:effectRef>
+          <a:fontRef idx="minor">
+            <a:schemeClr val="lt1"/>
+          </a:fontRef>
+        </p:style>
+        <p:txBody>
+          <a:bodyPr wrap="none" lIns="50800" tIns="0" rIns="50800" bIns="0" rtlCol="0" anchor="ctr"/>
+          <a:lstStyle/>
+          <a:p>
+            <a:pPr algn="ctr"/>
+            <a:r>
+              <a:rPr lang="en-US" sz="1100" b="1">
+                <a:solidFill>
+                  <a:srgbClr val="FFFFFF"/>
+                </a:solidFill>
+                <a:latin typeface="Calibri" panose="020F0502020204030204" pitchFamily="34" charset="0"/>
+              </a:rPr>
+              <a:t>Presenter: Doaa (C)</a:t>
+            </a:r>
           </a:p>
         </p:txBody>
       </p:sp>
@@ -3424,7 +5309,7 @@
 </p:sld>
 </file>
 
-<file path=ppt/slides/slide11.xml><?xml version="1.0" encoding="utf-8"?>
+<file path=ppt/slides/slide13.xml><?xml version="1.0" encoding="utf-8"?>
 <p:sld xmlns:a="http://schemas.openxmlformats.org/drawingml/2006/main" xmlns:r="http://schemas.openxmlformats.org/officeDocument/2006/relationships" xmlns:p="http://schemas.openxmlformats.org/presentationml/2006/main">
   <p:cSld name="Slide 11">
     <p:spTree>
@@ -4052,9 +5937,85 @@
             <a:pPr algn="r"/>
             <a:fld id="{F7021451-1387-4CA6-816F-3879F97B5CBC}" type="slidenum">
               <a:rPr lang="en-US" b="0"/>
-              <a:t>11</a:t>
+              <a:t>13</a:t>
             </a:fld>
             <a:endParaRPr lang="en-US"/>
+          </a:p>
+        </p:txBody>
+      </p:sp>
+      <p:sp>
+        <p:nvSpPr>
+          <p:cNvPr id="19" name="Presenter tag">
+            <a:extLst>
+              <a:ext uri="{FF2B5EF4-FFF2-40B4-BE49-F238E27FC236}">
+                <a16:creationId xmlns:a16="http://schemas.microsoft.com/office/drawing/2014/main" id="{F364C54A-EB48-41BE-8E8B-E6C6467E278F}"/>
+              </a:ext>
+            </a:extLst>
+          </p:cNvPr>
+          <p:cNvSpPr/>
+          <p:nvPr/>
+        </p:nvSpPr>
+        <p:spPr>
+          <a:xfrm>
+            <a:off x="8585200" y="6375400"/>
+            <a:ext cx="2413000" cy="304800"/>
+          </a:xfrm>
+          <a:prstGeom prst="roundRect">
+            <a:avLst/>
+          </a:prstGeom>
+          <a:solidFill>
+            <a:srgbClr val="0D3B4A"/>
+          </a:solidFill>
+          <a:ln w="12700" cap="flat" cmpd="sng" algn="ctr">
+            <a:noFill/>
+            <a:prstDash val="solid"/>
+            <a:miter lim="800000"/>
+          </a:ln>
+          <a:effectLst/>
+          <a:extLst>
+            <a:ext uri="{91240B29-F687-4F45-9708-019B960494DF}">
+              <a14:hiddenLine xmlns:a14="http://schemas.microsoft.com/office/drawing/2010/main" w="12700" cap="flat" cmpd="sng" algn="ctr">
+                <a:solidFill>
+                  <a:schemeClr val="accent1">
+                    <a:shade val="50000"/>
+                  </a:schemeClr>
+                </a:solidFill>
+                <a:prstDash val="solid"/>
+                <a:miter lim="800000"/>
+              </a14:hiddenLine>
+            </a:ext>
+          </a:extLst>
+        </p:spPr>
+        <p:style>
+          <a:lnRef idx="2">
+            <a:schemeClr val="accent1">
+              <a:shade val="50000"/>
+            </a:schemeClr>
+          </a:lnRef>
+          <a:fillRef idx="1">
+            <a:schemeClr val="accent1"/>
+          </a:fillRef>
+          <a:effectRef idx="0">
+            <a:schemeClr val="accent1"/>
+          </a:effectRef>
+          <a:fontRef idx="minor">
+            <a:schemeClr val="lt1"/>
+          </a:fontRef>
+        </p:style>
+        <p:txBody>
+          <a:bodyPr wrap="none" lIns="50800" tIns="0" rIns="50800" bIns="0" rtlCol="0" anchor="ctr"/>
+          <a:lstStyle/>
+          <a:p>
+            <a:pPr algn="ctr"/>
+            <a:r>
+              <a:rPr lang="en-US" sz="1100" b="1">
+                <a:solidFill>
+                  <a:srgbClr val="FFFFFF"/>
+                </a:solidFill>
+                <a:latin typeface="Calibri" panose="020F0502020204030204" pitchFamily="34" charset="0"/>
+              </a:rPr>
+              <a:t>Presenter: Doaa (C)</a:t>
+            </a:r>
           </a:p>
         </p:txBody>
       </p:sp>
@@ -4066,757 +6027,7 @@
 </p:sld>
 </file>
 
-<file path=ppt/slides/slide12.xml><?xml version="1.0" encoding="utf-8"?>
-<p:sld xmlns:a="http://schemas.openxmlformats.org/drawingml/2006/main" xmlns:r="http://schemas.openxmlformats.org/officeDocument/2006/relationships" xmlns:p="http://schemas.openxmlformats.org/presentationml/2006/main">
-  <p:cSld name="Slide 12">
-    <p:spTree>
-      <p:nvGrpSpPr>
-        <p:cNvPr id="1" name=""/>
-        <p:cNvGrpSpPr/>
-        <p:nvPr/>
-      </p:nvGrpSpPr>
-      <p:grpSpPr>
-        <a:xfrm>
-          <a:off x="0" y="0"/>
-          <a:ext cx="0" cy="0"/>
-          <a:chOff x="0" y="0"/>
-          <a:chExt cx="0" cy="0"/>
-        </a:xfrm>
-      </p:grpSpPr>
-      <p:sp>
-        <p:nvSpPr>
-          <p:cNvPr id="2" name="Text 0"/>
-          <p:cNvSpPr>
-            <a:spLocks noGrp="1"/>
-          </p:cNvSpPr>
-          <p:nvPr>
-            <p:ph type="title" idx="100" hasCustomPrompt="1"/>
-          </p:nvPr>
-        </p:nvSpPr>
-        <p:spPr>
-          <a:xfrm>
-            <a:off x="548640" y="320040"/>
-            <a:ext cx="11064240" cy="822960"/>
-          </a:xfrm>
-          <a:prstGeom prst="rect">
-            <a:avLst/>
-          </a:prstGeom>
-          <a:noFill/>
-          <a:ln/>
-        </p:spPr>
-        <p:txBody>
-          <a:bodyPr wrap="square" rtlCol="0" anchor="ctr"/>
-          <a:lstStyle/>
-          <a:p>
-            <a:pPr marL="0" indent="0">
-              <a:buNone/>
-            </a:pPr>
-            <a:r>
-              <a:rPr lang="en-US" sz="3200" b="1" dirty="0">
-                <a:solidFill>
-                  <a:schemeClr val="tx2"/>
-                </a:solidFill>
-              </a:rPr>
-              <a:t>What testing the whole system caught</a:t>
-            </a:r>
-            <a:endParaRPr lang="en-US" sz="3200" dirty="0"/>
-          </a:p>
-        </p:txBody>
-      </p:sp>
-      <p:sp>
-        <p:nvSpPr>
-          <p:cNvPr id="3" name="Shape 1"/>
-          <p:cNvSpPr/>
-          <p:nvPr/>
-        </p:nvSpPr>
-        <p:spPr>
-          <a:xfrm>
-            <a:off x="548640" y="1417320"/>
-            <a:ext cx="5440680" cy="2103120"/>
-          </a:xfrm>
-          <a:prstGeom prst="roundRect">
-            <a:avLst>
-              <a:gd name="adj" fmla="val 3478"/>
-            </a:avLst>
-          </a:prstGeom>
-          <a:solidFill>
-            <a:schemeClr val="bg2"/>
-          </a:solidFill>
-          <a:ln w="12700">
-            <a:solidFill>
-              <a:schemeClr val="bg2"/>
-            </a:solidFill>
-            <a:prstDash val="solid"/>
-          </a:ln>
-        </p:spPr>
-      </p:sp>
-      <p:sp>
-        <p:nvSpPr>
-          <p:cNvPr id="4" name="Shape 2"/>
-          <p:cNvSpPr/>
-          <p:nvPr/>
-        </p:nvSpPr>
-        <p:spPr>
-          <a:xfrm>
-            <a:off x="777240" y="1645920"/>
-            <a:ext cx="457200" cy="457200"/>
-          </a:xfrm>
-          <a:prstGeom prst="ellipse">
-            <a:avLst/>
-          </a:prstGeom>
-          <a:solidFill>
-            <a:schemeClr val="accent2"/>
-          </a:solidFill>
-          <a:ln w="12700">
-            <a:solidFill>
-              <a:schemeClr val="accent2"/>
-            </a:solidFill>
-            <a:prstDash val="solid"/>
-          </a:ln>
-        </p:spPr>
-      </p:sp>
-      <p:sp>
-        <p:nvSpPr>
-          <p:cNvPr id="5" name="Text 3"/>
-          <p:cNvSpPr txBox="1"/>
-          <p:nvPr/>
-        </p:nvSpPr>
-        <p:spPr>
-          <a:xfrm>
-            <a:off x="777240" y="1645920"/>
-            <a:ext cx="457200" cy="457200"/>
-          </a:xfrm>
-          <a:prstGeom prst="rect">
-            <a:avLst/>
-          </a:prstGeom>
-          <a:noFill/>
-          <a:ln/>
-        </p:spPr>
-        <p:txBody>
-          <a:bodyPr wrap="square" lIns="0" tIns="0" rIns="0" bIns="0" rtlCol="0" anchor="ctr"/>
-          <a:lstStyle/>
-          <a:p>
-            <a:pPr marL="0" indent="0" algn="ctr">
-              <a:buNone/>
-            </a:pPr>
-            <a:r>
-              <a:rPr lang="en-US" sz="1400" b="1" dirty="0">
-                <a:solidFill>
-                  <a:schemeClr val="bg1"/>
-                </a:solidFill>
-              </a:rPr>
-              <a:t>✓</a:t>
-            </a:r>
-            <a:endParaRPr lang="en-US" sz="1400" dirty="0"/>
-          </a:p>
-        </p:txBody>
-      </p:sp>
-      <p:sp>
-        <p:nvSpPr>
-          <p:cNvPr id="6" name="Text 4"/>
-          <p:cNvSpPr txBox="1"/>
-          <p:nvPr/>
-        </p:nvSpPr>
-        <p:spPr>
-          <a:xfrm>
-            <a:off x="1371600" y="1691640"/>
-            <a:ext cx="4389120" cy="411480"/>
-          </a:xfrm>
-          <a:prstGeom prst="rect">
-            <a:avLst/>
-          </a:prstGeom>
-          <a:noFill/>
-          <a:ln/>
-        </p:spPr>
-        <p:txBody>
-          <a:bodyPr wrap="square" lIns="0" tIns="0" rIns="0" bIns="0" rtlCol="0" anchor="t"/>
-          <a:lstStyle/>
-          <a:p>
-            <a:pPr marL="0" indent="0">
-              <a:buNone/>
-            </a:pPr>
-            <a:r>
-              <a:rPr lang="en-US" sz="1800" b="1" dirty="0">
-                <a:solidFill>
-                  <a:schemeClr val="tx2"/>
-                </a:solidFill>
-              </a:rPr>
-              <a:t>Notification never notified</a:t>
-            </a:r>
-            <a:endParaRPr lang="en-US" sz="1800" dirty="0"/>
-          </a:p>
-        </p:txBody>
-      </p:sp>
-      <p:sp>
-        <p:nvSpPr>
-          <p:cNvPr id="7" name="Text 5"/>
-          <p:cNvSpPr txBox="1"/>
-          <p:nvPr/>
-        </p:nvSpPr>
-        <p:spPr>
-          <a:xfrm>
-            <a:off x="777240" y="2286000"/>
-            <a:ext cx="4983480" cy="1143000"/>
-          </a:xfrm>
-          <a:prstGeom prst="rect">
-            <a:avLst/>
-          </a:prstGeom>
-          <a:noFill/>
-          <a:ln/>
-        </p:spPr>
-        <p:txBody>
-          <a:bodyPr wrap="square" lIns="0" tIns="0" rIns="0" bIns="0" rtlCol="0" anchor="t"/>
-          <a:lstStyle/>
-          <a:p>
-            <a:pPr marL="0" indent="0">
-              <a:buNone/>
-            </a:pPr>
-            <a:r>
-              <a:rPr lang="en-US" sz="1500" dirty="0">
-                <a:solidFill>
-                  <a:schemeClr val="tx1"/>
-                </a:solidFill>
-              </a:rPr>
-              <a:t>Unit tests on both sides were green; the live run showed every order event parked on the DLT — two shapes of one contract.</a:t>
-            </a:r>
-            <a:endParaRPr lang="en-US" sz="1500" dirty="0"/>
-          </a:p>
-        </p:txBody>
-      </p:sp>
-      <p:sp>
-        <p:nvSpPr>
-          <p:cNvPr id="8" name="Shape 6"/>
-          <p:cNvSpPr/>
-          <p:nvPr/>
-        </p:nvSpPr>
-        <p:spPr>
-          <a:xfrm>
-            <a:off x="6172200" y="1417320"/>
-            <a:ext cx="5440680" cy="2103120"/>
-          </a:xfrm>
-          <a:prstGeom prst="roundRect">
-            <a:avLst>
-              <a:gd name="adj" fmla="val 3478"/>
-            </a:avLst>
-          </a:prstGeom>
-          <a:solidFill>
-            <a:schemeClr val="bg2"/>
-          </a:solidFill>
-          <a:ln w="12700">
-            <a:solidFill>
-              <a:schemeClr val="bg2"/>
-            </a:solidFill>
-            <a:prstDash val="solid"/>
-          </a:ln>
-        </p:spPr>
-      </p:sp>
-      <p:sp>
-        <p:nvSpPr>
-          <p:cNvPr id="9" name="Shape 7"/>
-          <p:cNvSpPr/>
-          <p:nvPr/>
-        </p:nvSpPr>
-        <p:spPr>
-          <a:xfrm>
-            <a:off x="6400800" y="1645920"/>
-            <a:ext cx="457200" cy="457200"/>
-          </a:xfrm>
-          <a:prstGeom prst="ellipse">
-            <a:avLst/>
-          </a:prstGeom>
-          <a:solidFill>
-            <a:schemeClr val="accent2"/>
-          </a:solidFill>
-          <a:ln w="12700">
-            <a:solidFill>
-              <a:schemeClr val="accent2"/>
-            </a:solidFill>
-            <a:prstDash val="solid"/>
-          </a:ln>
-        </p:spPr>
-      </p:sp>
-      <p:sp>
-        <p:nvSpPr>
-          <p:cNvPr id="10" name="Text 8"/>
-          <p:cNvSpPr txBox="1"/>
-          <p:nvPr/>
-        </p:nvSpPr>
-        <p:spPr>
-          <a:xfrm>
-            <a:off x="6400800" y="1645920"/>
-            <a:ext cx="457200" cy="457200"/>
-          </a:xfrm>
-          <a:prstGeom prst="rect">
-            <a:avLst/>
-          </a:prstGeom>
-          <a:noFill/>
-          <a:ln/>
-        </p:spPr>
-        <p:txBody>
-          <a:bodyPr wrap="square" lIns="0" tIns="0" rIns="0" bIns="0" rtlCol="0" anchor="ctr"/>
-          <a:lstStyle/>
-          <a:p>
-            <a:pPr marL="0" indent="0" algn="ctr">
-              <a:buNone/>
-            </a:pPr>
-            <a:r>
-              <a:rPr lang="en-US" sz="1400" b="1" dirty="0">
-                <a:solidFill>
-                  <a:schemeClr val="bg1"/>
-                </a:solidFill>
-              </a:rPr>
-              <a:t>✓</a:t>
-            </a:r>
-            <a:endParaRPr lang="en-US" sz="1400" dirty="0"/>
-          </a:p>
-        </p:txBody>
-      </p:sp>
-      <p:sp>
-        <p:nvSpPr>
-          <p:cNvPr id="11" name="Text 9"/>
-          <p:cNvSpPr txBox="1"/>
-          <p:nvPr/>
-        </p:nvSpPr>
-        <p:spPr>
-          <a:xfrm>
-            <a:off x="6995160" y="1691640"/>
-            <a:ext cx="4389120" cy="411480"/>
-          </a:xfrm>
-          <a:prstGeom prst="rect">
-            <a:avLst/>
-          </a:prstGeom>
-          <a:noFill/>
-          <a:ln/>
-        </p:spPr>
-        <p:txBody>
-          <a:bodyPr wrap="square" lIns="0" tIns="0" rIns="0" bIns="0" rtlCol="0" anchor="t"/>
-          <a:lstStyle/>
-          <a:p>
-            <a:pPr marL="0" indent="0">
-              <a:buNone/>
-            </a:pPr>
-            <a:r>
-              <a:rPr lang="en-US" sz="1800" b="1" dirty="0">
-                <a:solidFill>
-                  <a:schemeClr val="tx2"/>
-                </a:solidFill>
-              </a:rPr>
-              <a:t>Sold-out opened the circuit</a:t>
-            </a:r>
-            <a:endParaRPr lang="en-US" sz="1800" dirty="0"/>
-          </a:p>
-        </p:txBody>
-      </p:sp>
-      <p:sp>
-        <p:nvSpPr>
-          <p:cNvPr id="12" name="Text 10"/>
-          <p:cNvSpPr txBox="1"/>
-          <p:nvPr/>
-        </p:nvSpPr>
-        <p:spPr>
-          <a:xfrm>
-            <a:off x="6400800" y="2286000"/>
-            <a:ext cx="4983480" cy="1143000"/>
-          </a:xfrm>
-          <a:prstGeom prst="rect">
-            <a:avLst/>
-          </a:prstGeom>
-          <a:noFill/>
-          <a:ln/>
-        </p:spPr>
-        <p:txBody>
-          <a:bodyPr wrap="square" lIns="0" tIns="0" rIns="0" bIns="0" rtlCol="0" anchor="t"/>
-          <a:lstStyle/>
-          <a:p>
-            <a:pPr marL="0" indent="0">
-              <a:buNone/>
-            </a:pPr>
-            <a:r>
-              <a:rPr lang="en-US" sz="1500" dirty="0">
-                <a:solidFill>
-                  <a:schemeClr val="tx1"/>
-                </a:solidFill>
-              </a:rPr>
-              <a:t>Out-of-stock counted as a failure: three sold-out orders gave every customer 503.</a:t>
-            </a:r>
-            <a:endParaRPr lang="en-US" sz="1500" dirty="0"/>
-          </a:p>
-        </p:txBody>
-      </p:sp>
-      <p:sp>
-        <p:nvSpPr>
-          <p:cNvPr id="13" name="Shape 11"/>
-          <p:cNvSpPr/>
-          <p:nvPr/>
-        </p:nvSpPr>
-        <p:spPr>
-          <a:xfrm>
-            <a:off x="548640" y="3749040"/>
-            <a:ext cx="5440680" cy="2103120"/>
-          </a:xfrm>
-          <a:prstGeom prst="roundRect">
-            <a:avLst>
-              <a:gd name="adj" fmla="val 3478"/>
-            </a:avLst>
-          </a:prstGeom>
-          <a:solidFill>
-            <a:schemeClr val="bg2"/>
-          </a:solidFill>
-          <a:ln w="12700">
-            <a:solidFill>
-              <a:schemeClr val="bg2"/>
-            </a:solidFill>
-            <a:prstDash val="solid"/>
-          </a:ln>
-        </p:spPr>
-      </p:sp>
-      <p:sp>
-        <p:nvSpPr>
-          <p:cNvPr id="14" name="Shape 12"/>
-          <p:cNvSpPr/>
-          <p:nvPr/>
-        </p:nvSpPr>
-        <p:spPr>
-          <a:xfrm>
-            <a:off x="777240" y="3977640"/>
-            <a:ext cx="457200" cy="457200"/>
-          </a:xfrm>
-          <a:prstGeom prst="ellipse">
-            <a:avLst/>
-          </a:prstGeom>
-          <a:solidFill>
-            <a:schemeClr val="accent2"/>
-          </a:solidFill>
-          <a:ln w="12700">
-            <a:solidFill>
-              <a:schemeClr val="accent2"/>
-            </a:solidFill>
-            <a:prstDash val="solid"/>
-          </a:ln>
-        </p:spPr>
-      </p:sp>
-      <p:sp>
-        <p:nvSpPr>
-          <p:cNvPr id="15" name="Text 13"/>
-          <p:cNvSpPr txBox="1"/>
-          <p:nvPr/>
-        </p:nvSpPr>
-        <p:spPr>
-          <a:xfrm>
-            <a:off x="777240" y="3977640"/>
-            <a:ext cx="457200" cy="457200"/>
-          </a:xfrm>
-          <a:prstGeom prst="rect">
-            <a:avLst/>
-          </a:prstGeom>
-          <a:noFill/>
-          <a:ln/>
-        </p:spPr>
-        <p:txBody>
-          <a:bodyPr wrap="square" lIns="0" tIns="0" rIns="0" bIns="0" rtlCol="0" anchor="ctr"/>
-          <a:lstStyle/>
-          <a:p>
-            <a:pPr marL="0" indent="0" algn="ctr">
-              <a:buNone/>
-            </a:pPr>
-            <a:r>
-              <a:rPr lang="en-US" sz="1400" b="1" dirty="0">
-                <a:solidFill>
-                  <a:schemeClr val="bg1"/>
-                </a:solidFill>
-              </a:rPr>
-              <a:t>✓</a:t>
-            </a:r>
-            <a:endParaRPr lang="en-US" sz="1400" dirty="0"/>
-          </a:p>
-        </p:txBody>
-      </p:sp>
-      <p:sp>
-        <p:nvSpPr>
-          <p:cNvPr id="16" name="Text 14"/>
-          <p:cNvSpPr txBox="1"/>
-          <p:nvPr/>
-        </p:nvSpPr>
-        <p:spPr>
-          <a:xfrm>
-            <a:off x="1371600" y="4023360"/>
-            <a:ext cx="4389120" cy="411480"/>
-          </a:xfrm>
-          <a:prstGeom prst="rect">
-            <a:avLst/>
-          </a:prstGeom>
-          <a:noFill/>
-          <a:ln/>
-        </p:spPr>
-        <p:txBody>
-          <a:bodyPr wrap="square" lIns="0" tIns="0" rIns="0" bIns="0" rtlCol="0" anchor="t"/>
-          <a:lstStyle/>
-          <a:p>
-            <a:pPr marL="0" indent="0">
-              <a:buNone/>
-            </a:pPr>
-            <a:r>
-              <a:rPr lang="en-US" sz="1800" b="1" dirty="0">
-                <a:solidFill>
-                  <a:schemeClr val="tx2"/>
-                </a:solidFill>
-              </a:rPr>
-              <a:t>Saga steps could vanish</a:t>
-            </a:r>
-            <a:endParaRPr lang="en-US" sz="1800" dirty="0"/>
-          </a:p>
-        </p:txBody>
-      </p:sp>
-      <p:sp>
-        <p:nvSpPr>
-          <p:cNvPr id="17" name="Text 15"/>
-          <p:cNvSpPr txBox="1"/>
-          <p:nvPr/>
-        </p:nvSpPr>
-        <p:spPr>
-          <a:xfrm>
-            <a:off x="777240" y="4617720"/>
-            <a:ext cx="4983480" cy="1143000"/>
-          </a:xfrm>
-          <a:prstGeom prst="rect">
-            <a:avLst/>
-          </a:prstGeom>
-          <a:noFill/>
-          <a:ln/>
-        </p:spPr>
-        <p:txBody>
-          <a:bodyPr wrap="square" lIns="0" tIns="0" rIns="0" bIns="0" rtlCol="0" anchor="t"/>
-          <a:lstStyle/>
-          <a:p>
-            <a:pPr marL="0" indent="0">
-              <a:buNone/>
-            </a:pPr>
-            <a:r>
-              <a:rPr lang="en-US" sz="1500" dirty="0">
-                <a:solidFill>
-                  <a:schemeClr val="tx1"/>
-                </a:solidFill>
-              </a:rPr>
-              <a:t>Order and inventory listeners swallowed errors; now retry → DLT, proven on a real broker.</a:t>
-            </a:r>
-            <a:endParaRPr lang="en-US" sz="1500" dirty="0"/>
-          </a:p>
-        </p:txBody>
-      </p:sp>
-      <p:sp>
-        <p:nvSpPr>
-          <p:cNvPr id="18" name="Shape 16"/>
-          <p:cNvSpPr/>
-          <p:nvPr/>
-        </p:nvSpPr>
-        <p:spPr>
-          <a:xfrm>
-            <a:off x="6172200" y="3749040"/>
-            <a:ext cx="5440680" cy="2103120"/>
-          </a:xfrm>
-          <a:prstGeom prst="roundRect">
-            <a:avLst>
-              <a:gd name="adj" fmla="val 3478"/>
-            </a:avLst>
-          </a:prstGeom>
-          <a:solidFill>
-            <a:schemeClr val="bg2"/>
-          </a:solidFill>
-          <a:ln w="12700">
-            <a:solidFill>
-              <a:schemeClr val="bg2"/>
-            </a:solidFill>
-            <a:prstDash val="solid"/>
-          </a:ln>
-        </p:spPr>
-      </p:sp>
-      <p:sp>
-        <p:nvSpPr>
-          <p:cNvPr id="19" name="Shape 17"/>
-          <p:cNvSpPr/>
-          <p:nvPr/>
-        </p:nvSpPr>
-        <p:spPr>
-          <a:xfrm>
-            <a:off x="6400800" y="3977640"/>
-            <a:ext cx="457200" cy="457200"/>
-          </a:xfrm>
-          <a:prstGeom prst="ellipse">
-            <a:avLst/>
-          </a:prstGeom>
-          <a:solidFill>
-            <a:schemeClr val="accent2"/>
-          </a:solidFill>
-          <a:ln w="12700">
-            <a:solidFill>
-              <a:schemeClr val="accent2"/>
-            </a:solidFill>
-            <a:prstDash val="solid"/>
-          </a:ln>
-        </p:spPr>
-      </p:sp>
-      <p:sp>
-        <p:nvSpPr>
-          <p:cNvPr id="20" name="Text 18"/>
-          <p:cNvSpPr txBox="1"/>
-          <p:nvPr/>
-        </p:nvSpPr>
-        <p:spPr>
-          <a:xfrm>
-            <a:off x="6400800" y="3977640"/>
-            <a:ext cx="457200" cy="457200"/>
-          </a:xfrm>
-          <a:prstGeom prst="rect">
-            <a:avLst/>
-          </a:prstGeom>
-          <a:noFill/>
-          <a:ln/>
-        </p:spPr>
-        <p:txBody>
-          <a:bodyPr wrap="square" lIns="0" tIns="0" rIns="0" bIns="0" rtlCol="0" anchor="ctr"/>
-          <a:lstStyle/>
-          <a:p>
-            <a:pPr marL="0" indent="0" algn="ctr">
-              <a:buNone/>
-            </a:pPr>
-            <a:r>
-              <a:rPr lang="en-US" sz="1400" b="1" dirty="0">
-                <a:solidFill>
-                  <a:schemeClr val="bg1"/>
-                </a:solidFill>
-              </a:rPr>
-              <a:t>✓</a:t>
-            </a:r>
-            <a:endParaRPr lang="en-US" sz="1400" dirty="0"/>
-          </a:p>
-        </p:txBody>
-      </p:sp>
-      <p:sp>
-        <p:nvSpPr>
-          <p:cNvPr id="21" name="Text 19"/>
-          <p:cNvSpPr txBox="1"/>
-          <p:nvPr/>
-        </p:nvSpPr>
-        <p:spPr>
-          <a:xfrm>
-            <a:off x="6995160" y="4023360"/>
-            <a:ext cx="4389120" cy="411480"/>
-          </a:xfrm>
-          <a:prstGeom prst="rect">
-            <a:avLst/>
-          </a:prstGeom>
-          <a:noFill/>
-          <a:ln/>
-        </p:spPr>
-        <p:txBody>
-          <a:bodyPr wrap="square" lIns="0" tIns="0" rIns="0" bIns="0" rtlCol="0" anchor="t"/>
-          <a:lstStyle/>
-          <a:p>
-            <a:pPr marL="0" indent="0">
-              <a:buNone/>
-            </a:pPr>
-            <a:r>
-              <a:rPr lang="en-US" sz="1800" b="1" dirty="0">
-                <a:solidFill>
-                  <a:schemeClr val="tx2"/>
-                </a:solidFill>
-              </a:rPr>
-              <a:t>Coverage gate never ran</a:t>
-            </a:r>
-            <a:endParaRPr lang="en-US" sz="1800" dirty="0"/>
-          </a:p>
-        </p:txBody>
-      </p:sp>
-      <p:sp>
-        <p:nvSpPr>
-          <p:cNvPr id="22" name="Text 20"/>
-          <p:cNvSpPr txBox="1"/>
-          <p:nvPr/>
-        </p:nvSpPr>
-        <p:spPr>
-          <a:xfrm>
-            <a:off x="6400800" y="4617720"/>
-            <a:ext cx="4983480" cy="1143000"/>
-          </a:xfrm>
-          <a:prstGeom prst="rect">
-            <a:avLst/>
-          </a:prstGeom>
-          <a:noFill/>
-          <a:ln/>
-        </p:spPr>
-        <p:txBody>
-          <a:bodyPr wrap="square" lIns="0" tIns="0" rIns="0" bIns="0" rtlCol="0" anchor="t"/>
-          <a:lstStyle/>
-          <a:p>
-            <a:pPr marL="0" indent="0">
-              <a:buNone/>
-            </a:pPr>
-            <a:r>
-              <a:rPr lang="en-US" sz="1500" dirty="0">
-                <a:solidFill>
-                  <a:schemeClr val="tx1"/>
-                </a:solidFill>
-              </a:rPr>
-              <a:t>A surefire argLine dropped the JaCoCo agent, so the 60 % check silently skipped.</a:t>
-            </a:r>
-            <a:endParaRPr lang="en-US" sz="1500" dirty="0"/>
-          </a:p>
-        </p:txBody>
-      </p:sp>
-      <p:sp>
-        <p:nvSpPr>
-          <p:cNvPr id="25" name="Slide Number Placeholder 0"/>
-          <p:cNvSpPr>
-            <a:spLocks noGrp="1"/>
-          </p:cNvSpPr>
-          <p:nvPr>
-            <p:ph type="sldNum" sz="quarter" idx="4294967295"/>
-          </p:nvPr>
-        </p:nvSpPr>
-        <p:spPr>
-          <a:xfrm>
-            <a:off x="11155680" y="6400800"/>
-            <a:ext cx="548640" cy="274320"/>
-          </a:xfrm>
-          <a:prstGeom prst="rect">
-            <a:avLst/>
-          </a:prstGeom>
-          <a:extLst>
-            <a:ext uri="{C572A759-6A51-4108-AA02-DFA0A04FC94B}">
-              <ma14:wrappingTextBoxFlag xmlns:ma14="http://schemas.microsoft.com/office/mac/drawingml/2011/main" xmlns="" val="0"/>
-            </a:ext>
-          </a:extLst>
-        </p:spPr>
-        <p:txBody>
-          <a:bodyPr/>
-          <a:lstStyle>
-            <a:lvl1pPr>
-              <a:defRPr sz="1000">
-                <a:solidFill>
-                  <a:schemeClr val="accent4"/>
-                </a:solidFill>
-              </a:defRPr>
-            </a:lvl1pPr>
-          </a:lstStyle>
-          <a:p>
-            <a:pPr algn="r"/>
-            <a:fld id="{F7021451-1387-4CA6-816F-3879F97B5CBC}" type="slidenum">
-              <a:rPr lang="en-US" b="0"/>
-              <a:t>12</a:t>
-            </a:fld>
-            <a:endParaRPr lang="en-US"/>
-          </a:p>
-        </p:txBody>
-      </p:sp>
-    </p:spTree>
-  </p:cSld>
-  <p:clrMapOvr>
-    <a:masterClrMapping/>
-  </p:clrMapOvr>
-</p:sld>
-</file>
-
-<file path=ppt/slides/slide13.xml><?xml version="1.0" encoding="utf-8"?>
+<file path=ppt/slides/slide14.xml><?xml version="1.0" encoding="utf-8"?>
 <p:sld xmlns:a="http://schemas.openxmlformats.org/drawingml/2006/main" xmlns:r="http://schemas.openxmlformats.org/officeDocument/2006/relationships" xmlns:p="http://schemas.openxmlformats.org/presentationml/2006/main">
   <p:cSld name="Slide 13">
     <p:spTree>
@@ -5235,9 +6446,85 @@
             <a:pPr algn="r"/>
             <a:fld id="{F7021451-1387-4CA6-816F-3879F97B5CBC}" type="slidenum">
               <a:rPr lang="en-US" b="0"/>
-              <a:t>13</a:t>
+              <a:t>14</a:t>
             </a:fld>
             <a:endParaRPr lang="en-US"/>
+          </a:p>
+        </p:txBody>
+      </p:sp>
+      <p:sp>
+        <p:nvSpPr>
+          <p:cNvPr id="8" name="Presenter tag">
+            <a:extLst>
+              <a:ext uri="{FF2B5EF4-FFF2-40B4-BE49-F238E27FC236}">
+                <a16:creationId xmlns:a16="http://schemas.microsoft.com/office/drawing/2014/main" id="{8C391F85-1FD0-4FB0-A9E6-5E5963AF12EA}"/>
+              </a:ext>
+            </a:extLst>
+          </p:cNvPr>
+          <p:cNvSpPr/>
+          <p:nvPr/>
+        </p:nvSpPr>
+        <p:spPr>
+          <a:xfrm>
+            <a:off x="8585200" y="6375400"/>
+            <a:ext cx="2413000" cy="304800"/>
+          </a:xfrm>
+          <a:prstGeom prst="roundRect">
+            <a:avLst/>
+          </a:prstGeom>
+          <a:solidFill>
+            <a:srgbClr val="F2A541"/>
+          </a:solidFill>
+          <a:ln w="12700" cap="flat" cmpd="sng" algn="ctr">
+            <a:noFill/>
+            <a:prstDash val="solid"/>
+            <a:miter lim="800000"/>
+          </a:ln>
+          <a:effectLst/>
+          <a:extLst>
+            <a:ext uri="{91240B29-F687-4F45-9708-019B960494DF}">
+              <a14:hiddenLine xmlns:a14="http://schemas.microsoft.com/office/drawing/2010/main" w="12700" cap="flat" cmpd="sng" algn="ctr">
+                <a:solidFill>
+                  <a:schemeClr val="accent1">
+                    <a:shade val="50000"/>
+                  </a:schemeClr>
+                </a:solidFill>
+                <a:prstDash val="solid"/>
+                <a:miter lim="800000"/>
+              </a14:hiddenLine>
+            </a:ext>
+          </a:extLst>
+        </p:spPr>
+        <p:style>
+          <a:lnRef idx="2">
+            <a:schemeClr val="accent1">
+              <a:shade val="50000"/>
+            </a:schemeClr>
+          </a:lnRef>
+          <a:fillRef idx="1">
+            <a:schemeClr val="accent1"/>
+          </a:fillRef>
+          <a:effectRef idx="0">
+            <a:schemeClr val="accent1"/>
+          </a:effectRef>
+          <a:fontRef idx="minor">
+            <a:schemeClr val="lt1"/>
+          </a:fontRef>
+        </p:style>
+        <p:txBody>
+          <a:bodyPr wrap="none" lIns="50800" tIns="0" rIns="50800" bIns="0" rtlCol="0" anchor="ctr"/>
+          <a:lstStyle/>
+          <a:p>
+            <a:pPr algn="ctr"/>
+            <a:r>
+              <a:rPr lang="en-US" sz="1100" b="1">
+                <a:solidFill>
+                  <a:srgbClr val="0D3B4A"/>
+                </a:solidFill>
+                <a:latin typeface="Calibri" panose="020F0502020204030204" pitchFamily="34" charset="0"/>
+              </a:rPr>
+              <a:t>Presenter: Mohammed (B)</a:t>
+            </a:r>
           </a:p>
         </p:txBody>
       </p:sp>
@@ -5249,7 +6536,7 @@
 </p:sld>
 </file>
 
-<file path=ppt/slides/slide14.xml><?xml version="1.0" encoding="utf-8"?>
+<file path=ppt/slides/slide15.xml><?xml version="1.0" encoding="utf-8"?>
 <p:sld xmlns:a="http://schemas.openxmlformats.org/drawingml/2006/main" xmlns:r="http://schemas.openxmlformats.org/officeDocument/2006/relationships" xmlns:p="http://schemas.openxmlformats.org/presentationml/2006/main">
   <p:cSld name="Slide 14">
     <p:spTree>
@@ -5319,7 +6606,7 @@
         <p:spPr>
           <a:xfrm>
             <a:off x="731520" y="3520440"/>
-            <a:ext cx="10698480" cy="1097280"/>
+            <a:ext cx="10698480" cy="1905000"/>
           </a:xfrm>
           <a:prstGeom prst="rect">
             <a:avLst/>
@@ -5335,42 +6622,153 @@
               <a:buNone/>
             </a:pPr>
             <a:r>
-              <a:rPr lang="en-US" sz="2000" dirty="0">
+              <a:rPr lang="en-US" sz="2000" b="1">
+                <a:solidFill>
+                  <a:srgbClr val="C77D12"/>
+                </a:solidFill>
+              </a:rPr>
+              <a:t>Mohammed</a:t>
+            </a:r>
+            <a:r>
+              <a:rPr lang="en-US" sz="2000">
                 <a:solidFill>
                   <a:schemeClr val="bg2"/>
                 </a:solidFill>
               </a:rPr>
-              <a:t>verify-l0 GREEN  →  401 / 403 / 429  →  order PENDING → CONFIRMED  →  payment declined → CANCELLED + stock back</a:t>
+              <a:t> — verify-l0 GREEN → order PENDING → CONFIRMED → one Zipkin trace</a:t>
+            </a:r>
+          </a:p>
+          <a:p>
+            <a:pPr marL="0" indent="0">
+              <a:buNone/>
+            </a:pPr>
+            <a:r>
+              <a:rPr lang="en-US" sz="2000" b="1">
+                <a:solidFill>
+                  <a:srgbClr val="2A9D8F"/>
+                </a:solidFill>
+              </a:rPr>
+              <a:t>Nourhan</a:t>
+            </a:r>
+            <a:r>
+              <a:rPr lang="en-US" sz="2000">
+                <a:solidFill>
+                  <a:schemeClr val="bg2"/>
+                </a:solidFill>
+              </a:rPr>
+              <a:t> — 401 / 403 / 429 → k6 load and the gateway fix</a:t>
+            </a:r>
+          </a:p>
+          <a:p>
+            <a:pPr marL="0" indent="0">
+              <a:buNone/>
+            </a:pPr>
+            <a:r>
+              <a:rPr lang="en-US" sz="2000" b="1">
+                <a:solidFill>
+                  <a:srgbClr val="BFE0DB"/>
+                </a:solidFill>
+              </a:rPr>
+              <a:t>Doaa</a:t>
+            </a:r>
+            <a:r>
+              <a:rPr lang="en-US" sz="2000">
+                <a:solidFill>
+                  <a:srgbClr val="EDF3F2"/>
+                </a:solidFill>
+              </a:rPr>
+              <a:t> — payment declined → CANCELLED, stock back → payment down → ArgoCD → B2</a:t>
+            </a:r>
+          </a:p>
+          <a:p>
+            <a:pPr marL="0" indent="0">
+              <a:buNone/>
+            </a:pPr>
+            <a:r>
+              <a:rPr lang="en-US" sz="2000">
+                <a:solidFill>
+                  <a:schemeClr val="bg2"/>
+                </a:solidFill>
+              </a:rPr>
+              <a:t>Questions welcome — every member can explain every service</a:t>
             </a:r>
             <a:endParaRPr lang="en-US" sz="2000" dirty="0"/>
           </a:p>
-          <a:p>
-            <a:pPr marL="0" indent="0">
-              <a:buNone/>
-            </a:pPr>
-            <a:r>
-              <a:rPr lang="en-US" sz="2000" dirty="0">
-                <a:solidFill>
-                  <a:schemeClr val="bg2"/>
-                </a:solidFill>
-              </a:rPr>
-              <a:t>→  payment down → PENDING → CONFIRMED  →  one Zipkin trace  →  k6  →  B2 dashboard</a:t>
-            </a:r>
-            <a:endParaRPr lang="en-US" sz="2000" dirty="0"/>
-          </a:p>
-          <a:p>
-            <a:pPr marL="0" indent="0">
-              <a:buNone/>
-            </a:pPr>
-            <a:r>
-              <a:rPr lang="en-US" sz="1600" dirty="0">
-                <a:solidFill>
-                  <a:schemeClr val="accent1"/>
-                </a:solidFill>
-              </a:rPr>
-              <a:t>Questions welcome — every member can explain every service</a:t>
-            </a:r>
-            <a:endParaRPr lang="en-US" sz="2000" dirty="0"/>
+        </p:txBody>
+      </p:sp>
+      <p:sp>
+        <p:nvSpPr>
+          <p:cNvPr id="4" name="Presenter tag">
+            <a:extLst>
+              <a:ext uri="{FF2B5EF4-FFF2-40B4-BE49-F238E27FC236}">
+                <a16:creationId xmlns:a16="http://schemas.microsoft.com/office/drawing/2014/main" id="{B141064A-D4A0-4014-85B3-0260E4EE4F2A}"/>
+              </a:ext>
+            </a:extLst>
+          </p:cNvPr>
+          <p:cNvSpPr/>
+          <p:nvPr/>
+        </p:nvSpPr>
+        <p:spPr>
+          <a:xfrm>
+            <a:off x="8585200" y="6375400"/>
+            <a:ext cx="2413000" cy="304800"/>
+          </a:xfrm>
+          <a:prstGeom prst="roundRect">
+            <a:avLst/>
+          </a:prstGeom>
+          <a:solidFill>
+            <a:srgbClr val="EDF3F2"/>
+          </a:solidFill>
+          <a:ln w="12700" cap="flat" cmpd="sng" algn="ctr">
+            <a:noFill/>
+            <a:prstDash val="solid"/>
+            <a:miter lim="800000"/>
+          </a:ln>
+          <a:effectLst/>
+          <a:extLst>
+            <a:ext uri="{91240B29-F687-4F45-9708-019B960494DF}">
+              <a14:hiddenLine xmlns:a14="http://schemas.microsoft.com/office/drawing/2010/main" w="12700" cap="flat" cmpd="sng" algn="ctr">
+                <a:solidFill>
+                  <a:schemeClr val="accent1">
+                    <a:shade val="50000"/>
+                  </a:schemeClr>
+                </a:solidFill>
+                <a:prstDash val="solid"/>
+                <a:miter lim="800000"/>
+              </a14:hiddenLine>
+            </a:ext>
+          </a:extLst>
+        </p:spPr>
+        <p:style>
+          <a:lnRef idx="2">
+            <a:schemeClr val="accent1">
+              <a:shade val="50000"/>
+            </a:schemeClr>
+          </a:lnRef>
+          <a:fillRef idx="1">
+            <a:schemeClr val="accent1"/>
+          </a:fillRef>
+          <a:effectRef idx="0">
+            <a:schemeClr val="accent1"/>
+          </a:effectRef>
+          <a:fontRef idx="minor">
+            <a:schemeClr val="lt1"/>
+          </a:fontRef>
+        </p:style>
+        <p:txBody>
+          <a:bodyPr wrap="none" lIns="50800" tIns="0" rIns="50800" bIns="0" rtlCol="0" anchor="ctr"/>
+          <a:lstStyle/>
+          <a:p>
+            <a:pPr algn="ctr"/>
+            <a:r>
+              <a:rPr lang="en-US" sz="1100" b="1">
+                <a:solidFill>
+                  <a:srgbClr val="0D3B4A"/>
+                </a:solidFill>
+                <a:latin typeface="Calibri" panose="020F0502020204030204" pitchFamily="34" charset="0"/>
+              </a:rPr>
+              <a:t>All three</a:t>
+            </a:r>
           </a:p>
         </p:txBody>
       </p:sp>
@@ -5383,6 +6781,780 @@
 </file>
 
 <file path=ppt/slides/slide2.xml><?xml version="1.0" encoding="utf-8"?>
+<p:sld xmlns:a="http://schemas.openxmlformats.org/drawingml/2006/main" xmlns:r="http://schemas.openxmlformats.org/officeDocument/2006/relationships" xmlns:p="http://schemas.openxmlformats.org/presentationml/2006/main">
+  <p:cSld>
+    <p:spTree>
+      <p:nvGrpSpPr>
+        <p:cNvPr id="1" name=""/>
+        <p:cNvGrpSpPr/>
+        <p:nvPr/>
+      </p:nvGrpSpPr>
+      <p:grpSpPr>
+        <a:xfrm>
+          <a:off x="0" y="0"/>
+          <a:ext cx="0" cy="0"/>
+          <a:chOff x="0" y="0"/>
+          <a:chExt cx="0" cy="0"/>
+        </a:xfrm>
+      </p:grpSpPr>
+      <p:sp>
+        <p:nvSpPr>
+          <p:cNvPr id="2" name="Text 0"/>
+          <p:cNvSpPr>
+            <a:spLocks noGrp="1"/>
+          </p:cNvSpPr>
+          <p:nvPr>
+            <p:ph type="title" idx="100" hasCustomPrompt="1"/>
+          </p:nvPr>
+        </p:nvSpPr>
+        <p:spPr>
+          <a:xfrm>
+            <a:off x="548640" y="320040"/>
+            <a:ext cx="11064240" cy="822960"/>
+          </a:xfrm>
+          <a:prstGeom prst="rect">
+            <a:avLst/>
+          </a:prstGeom>
+          <a:noFill/>
+          <a:ln/>
+        </p:spPr>
+        <p:txBody>
+          <a:bodyPr wrap="square" rtlCol="0" anchor="ctr"/>
+          <a:lstStyle/>
+          <a:p>
+            <a:pPr marL="0" indent="0">
+              <a:buNone/>
+            </a:pPr>
+            <a:r>
+              <a:rPr lang="en-US" sz="3200" b="1">
+                <a:solidFill>
+                  <a:schemeClr val="tx2"/>
+                </a:solidFill>
+              </a:rPr>
+              <a:t>Who presents what</a:t>
+            </a:r>
+            <a:endParaRPr lang="en-US" sz="3200" dirty="0"/>
+          </a:p>
+        </p:txBody>
+      </p:sp>
+      <p:sp>
+        <p:nvSpPr>
+          <p:cNvPr id="3" name="Shape 1"/>
+          <p:cNvSpPr/>
+          <p:nvPr/>
+        </p:nvSpPr>
+        <p:spPr>
+          <a:xfrm>
+            <a:off x="548640" y="1554480"/>
+            <a:ext cx="2606040" cy="2377440"/>
+          </a:xfrm>
+          <a:prstGeom prst="roundRect">
+            <a:avLst>
+              <a:gd name="adj" fmla="val 3077"/>
+            </a:avLst>
+          </a:prstGeom>
+          <a:solidFill>
+            <a:schemeClr val="bg2"/>
+          </a:solidFill>
+          <a:ln w="12700">
+            <a:solidFill>
+              <a:schemeClr val="bg2"/>
+            </a:solidFill>
+            <a:prstDash val="solid"/>
+          </a:ln>
+        </p:spPr>
+      </p:sp>
+      <p:sp>
+        <p:nvSpPr>
+          <p:cNvPr id="4" name="Text 2"/>
+          <p:cNvSpPr txBox="1"/>
+          <p:nvPr/>
+        </p:nvSpPr>
+        <p:spPr>
+          <a:xfrm>
+            <a:off x="777240" y="1828800"/>
+            <a:ext cx="2194560" cy="1005840"/>
+          </a:xfrm>
+          <a:prstGeom prst="rect">
+            <a:avLst/>
+          </a:prstGeom>
+          <a:noFill/>
+          <a:ln/>
+        </p:spPr>
+        <p:txBody>
+          <a:bodyPr wrap="square" lIns="0" tIns="0" rIns="0" bIns="0" rtlCol="0" anchor="t"/>
+          <a:lstStyle/>
+          <a:p>
+            <a:pPr marL="0" indent="0">
+              <a:buNone/>
+            </a:pPr>
+            <a:r>
+              <a:rPr lang="en-US" sz="3000" b="1">
+                <a:solidFill>
+                  <a:srgbClr val="2A9D8F"/>
+                </a:solidFill>
+                <a:latin typeface="Cambria" pitchFamily="34" charset="0"/>
+                <a:ea typeface="Cambria" pitchFamily="34" charset="-122"/>
+                <a:cs typeface="Cambria" pitchFamily="34" charset="-120"/>
+              </a:rPr>
+              <a:t>Nourhan</a:t>
+            </a:r>
+            <a:endParaRPr lang="en-US" sz="3000" dirty="0">
+              <a:solidFill>
+                <a:srgbClr val="2A9D8F"/>
+              </a:solidFill>
+            </a:endParaRPr>
+          </a:p>
+        </p:txBody>
+      </p:sp>
+      <p:sp>
+        <p:nvSpPr>
+          <p:cNvPr id="5" name="Text 3"/>
+          <p:cNvSpPr txBox="1"/>
+          <p:nvPr/>
+        </p:nvSpPr>
+        <p:spPr>
+          <a:xfrm>
+            <a:off x="777240" y="2540000"/>
+            <a:ext cx="2194560" cy="1270000"/>
+          </a:xfrm>
+          <a:prstGeom prst="rect">
+            <a:avLst/>
+          </a:prstGeom>
+          <a:noFill/>
+          <a:ln/>
+        </p:spPr>
+        <p:txBody>
+          <a:bodyPr wrap="square" lIns="0" tIns="0" rIns="0" bIns="0" rtlCol="0" anchor="t"/>
+          <a:lstStyle/>
+          <a:p>
+            <a:pPr marL="0" indent="0">
+              <a:buNone/>
+            </a:pPr>
+            <a:r>
+              <a:rPr lang="en-US" sz="1200" b="1">
+                <a:solidFill>
+                  <a:schemeClr val="tx1"/>
+                </a:solidFill>
+              </a:rPr>
+              <a:t>Slides 1–3, 8–9</a:t>
+            </a:r>
+          </a:p>
+          <a:p>
+            <a:pPr marL="0" indent="0">
+              <a:buNone/>
+            </a:pPr>
+            <a:r>
+              <a:rPr lang="en-US" sz="1200">
+                <a:solidFill>
+                  <a:schemeClr val="tx1"/>
+                </a:solidFill>
+              </a:rPr>
+              <a:t>Intro · security · performance</a:t>
+            </a:r>
+          </a:p>
+          <a:p>
+            <a:pPr marL="0" indent="0">
+              <a:buNone/>
+            </a:pPr>
+            <a:r>
+              <a:rPr lang="en-US" sz="1200">
+                <a:solidFill>
+                  <a:schemeClr val="tx1"/>
+                </a:solidFill>
+              </a:rPr>
+              <a:t>Demo: 401 / 403 / 429, k6</a:t>
+            </a:r>
+            <a:endParaRPr lang="en-US" sz="1200" dirty="0"/>
+          </a:p>
+        </p:txBody>
+      </p:sp>
+      <p:sp>
+        <p:nvSpPr>
+          <p:cNvPr id="6" name="Shape 4"/>
+          <p:cNvSpPr/>
+          <p:nvPr/>
+        </p:nvSpPr>
+        <p:spPr>
+          <a:xfrm>
+            <a:off x="3383280" y="1554480"/>
+            <a:ext cx="2606040" cy="2377440"/>
+          </a:xfrm>
+          <a:prstGeom prst="roundRect">
+            <a:avLst>
+              <a:gd name="adj" fmla="val 3077"/>
+            </a:avLst>
+          </a:prstGeom>
+          <a:solidFill>
+            <a:schemeClr val="bg2"/>
+          </a:solidFill>
+          <a:ln w="12700">
+            <a:solidFill>
+              <a:schemeClr val="bg2"/>
+            </a:solidFill>
+            <a:prstDash val="solid"/>
+          </a:ln>
+        </p:spPr>
+      </p:sp>
+      <p:sp>
+        <p:nvSpPr>
+          <p:cNvPr id="7" name="Text 5"/>
+          <p:cNvSpPr txBox="1"/>
+          <p:nvPr/>
+        </p:nvSpPr>
+        <p:spPr>
+          <a:xfrm>
+            <a:off x="3611880" y="1828800"/>
+            <a:ext cx="2194560" cy="1005840"/>
+          </a:xfrm>
+          <a:prstGeom prst="rect">
+            <a:avLst/>
+          </a:prstGeom>
+          <a:noFill/>
+          <a:ln/>
+        </p:spPr>
+        <p:txBody>
+          <a:bodyPr wrap="square" lIns="0" tIns="0" rIns="0" bIns="0" rtlCol="0" anchor="t"/>
+          <a:lstStyle/>
+          <a:p>
+            <a:pPr marL="0" indent="0">
+              <a:buNone/>
+            </a:pPr>
+            <a:r>
+              <a:rPr lang="en-US" sz="3000" b="1">
+                <a:solidFill>
+                  <a:srgbClr val="C77D12"/>
+                </a:solidFill>
+                <a:latin typeface="Cambria" pitchFamily="34" charset="0"/>
+                <a:ea typeface="Cambria" pitchFamily="34" charset="-122"/>
+                <a:cs typeface="Cambria" pitchFamily="34" charset="-120"/>
+              </a:rPr>
+              <a:t>Mohammed</a:t>
+            </a:r>
+            <a:endParaRPr lang="en-US" sz="3000" dirty="0">
+              <a:solidFill>
+                <a:srgbClr val="C77D12"/>
+              </a:solidFill>
+            </a:endParaRPr>
+          </a:p>
+        </p:txBody>
+      </p:sp>
+      <p:sp>
+        <p:nvSpPr>
+          <p:cNvPr id="8" name="Text 6"/>
+          <p:cNvSpPr txBox="1"/>
+          <p:nvPr/>
+        </p:nvSpPr>
+        <p:spPr>
+          <a:xfrm>
+            <a:off x="3611880" y="2540000"/>
+            <a:ext cx="2194560" cy="1270000"/>
+          </a:xfrm>
+          <a:prstGeom prst="rect">
+            <a:avLst/>
+          </a:prstGeom>
+          <a:noFill/>
+          <a:ln/>
+        </p:spPr>
+        <p:txBody>
+          <a:bodyPr wrap="square" lIns="0" tIns="0" rIns="0" bIns="0" rtlCol="0" anchor="t"/>
+          <a:lstStyle/>
+          <a:p>
+            <a:pPr marL="0" indent="0">
+              <a:buNone/>
+            </a:pPr>
+            <a:r>
+              <a:rPr lang="en-US" sz="1200" b="1">
+                <a:solidFill>
+                  <a:schemeClr val="tx1"/>
+                </a:solidFill>
+              </a:rPr>
+              <a:t>Slides 4–7, 14</a:t>
+            </a:r>
+          </a:p>
+          <a:p>
+            <a:pPr marL="0" indent="0">
+              <a:buNone/>
+            </a:pPr>
+            <a:r>
+              <a:rPr lang="en-US" sz="1200">
+                <a:solidFill>
+                  <a:schemeClr val="tx1"/>
+                </a:solidFill>
+              </a:rPr>
+              <a:t>Architecture · Saga · failures · decisions · lessons</a:t>
+            </a:r>
+          </a:p>
+          <a:p>
+            <a:pPr marL="0" indent="0">
+              <a:buNone/>
+            </a:pPr>
+            <a:r>
+              <a:rPr lang="en-US" sz="1200">
+                <a:solidFill>
+                  <a:schemeClr val="tx1"/>
+                </a:solidFill>
+              </a:rPr>
+              <a:t>Demo: L0, order, one trace</a:t>
+            </a:r>
+            <a:endParaRPr lang="en-US" sz="1200" dirty="0"/>
+          </a:p>
+        </p:txBody>
+      </p:sp>
+      <p:sp>
+        <p:nvSpPr>
+          <p:cNvPr id="9" name="Shape 7"/>
+          <p:cNvSpPr/>
+          <p:nvPr/>
+        </p:nvSpPr>
+        <p:spPr>
+          <a:xfrm>
+            <a:off x="6217920" y="1554480"/>
+            <a:ext cx="2606040" cy="2377440"/>
+          </a:xfrm>
+          <a:prstGeom prst="roundRect">
+            <a:avLst>
+              <a:gd name="adj" fmla="val 3077"/>
+            </a:avLst>
+          </a:prstGeom>
+          <a:solidFill>
+            <a:schemeClr val="bg2"/>
+          </a:solidFill>
+          <a:ln w="12700">
+            <a:solidFill>
+              <a:schemeClr val="bg2"/>
+            </a:solidFill>
+            <a:prstDash val="solid"/>
+          </a:ln>
+        </p:spPr>
+      </p:sp>
+      <p:sp>
+        <p:nvSpPr>
+          <p:cNvPr id="10" name="Text 8"/>
+          <p:cNvSpPr txBox="1"/>
+          <p:nvPr/>
+        </p:nvSpPr>
+        <p:spPr>
+          <a:xfrm>
+            <a:off x="6446520" y="1828800"/>
+            <a:ext cx="2194560" cy="1005840"/>
+          </a:xfrm>
+          <a:prstGeom prst="rect">
+            <a:avLst/>
+          </a:prstGeom>
+          <a:noFill/>
+          <a:ln/>
+        </p:spPr>
+        <p:txBody>
+          <a:bodyPr wrap="square" lIns="0" tIns="0" rIns="0" bIns="0" rtlCol="0" anchor="t"/>
+          <a:lstStyle/>
+          <a:p>
+            <a:pPr marL="0" indent="0">
+              <a:buNone/>
+            </a:pPr>
+            <a:r>
+              <a:rPr lang="en-US" sz="3000" b="1">
+                <a:solidFill>
+                  <a:srgbClr val="0D3B4A"/>
+                </a:solidFill>
+                <a:latin typeface="Cambria" pitchFamily="34" charset="0"/>
+                <a:ea typeface="Cambria" pitchFamily="34" charset="-122"/>
+                <a:cs typeface="Cambria" pitchFamily="34" charset="-120"/>
+              </a:rPr>
+              <a:t>Doaa</a:t>
+            </a:r>
+            <a:endParaRPr lang="en-US" sz="3000" dirty="0">
+              <a:solidFill>
+                <a:srgbClr val="0D3B4A"/>
+              </a:solidFill>
+            </a:endParaRPr>
+          </a:p>
+        </p:txBody>
+      </p:sp>
+      <p:sp>
+        <p:nvSpPr>
+          <p:cNvPr id="11" name="Text 9"/>
+          <p:cNvSpPr txBox="1"/>
+          <p:nvPr/>
+        </p:nvSpPr>
+        <p:spPr>
+          <a:xfrm>
+            <a:off x="6446520" y="2540000"/>
+            <a:ext cx="2194560" cy="1270000"/>
+          </a:xfrm>
+          <a:prstGeom prst="rect">
+            <a:avLst/>
+          </a:prstGeom>
+          <a:noFill/>
+          <a:ln/>
+        </p:spPr>
+        <p:txBody>
+          <a:bodyPr wrap="square" lIns="0" tIns="0" rIns="0" bIns="0" rtlCol="0" anchor="t"/>
+          <a:lstStyle/>
+          <a:p>
+            <a:pPr marL="0" indent="0">
+              <a:buNone/>
+            </a:pPr>
+            <a:r>
+              <a:rPr lang="en-US" sz="1200" b="1">
+                <a:solidFill>
+                  <a:schemeClr val="tx1"/>
+                </a:solidFill>
+              </a:rPr>
+              <a:t>Slides 10–13</a:t>
+            </a:r>
+          </a:p>
+          <a:p>
+            <a:pPr marL="0" indent="0">
+              <a:buNone/>
+            </a:pPr>
+            <a:r>
+              <a:rPr lang="en-US" sz="1200">
+                <a:solidFill>
+                  <a:schemeClr val="tx1"/>
+                </a:solidFill>
+              </a:rPr>
+              <a:t>Tests · what testing caught · Bonus B2 · cluster</a:t>
+            </a:r>
+          </a:p>
+          <a:p>
+            <a:pPr marL="0" indent="0">
+              <a:buNone/>
+            </a:pPr>
+            <a:r>
+              <a:rPr lang="en-US" sz="1200">
+                <a:solidFill>
+                  <a:schemeClr val="tx1"/>
+                </a:solidFill>
+              </a:rPr>
+              <a:t>Demo: compensation, payment down, ArgoCD, B2</a:t>
+            </a:r>
+            <a:endParaRPr lang="en-US" sz="1200" dirty="0"/>
+          </a:p>
+        </p:txBody>
+      </p:sp>
+      <p:sp>
+        <p:nvSpPr>
+          <p:cNvPr id="12" name="Shape 10"/>
+          <p:cNvSpPr/>
+          <p:nvPr/>
+        </p:nvSpPr>
+        <p:spPr>
+          <a:xfrm>
+            <a:off x="9052560" y="1554480"/>
+            <a:ext cx="2606040" cy="2377440"/>
+          </a:xfrm>
+          <a:prstGeom prst="roundRect">
+            <a:avLst>
+              <a:gd name="adj" fmla="val 3077"/>
+            </a:avLst>
+          </a:prstGeom>
+          <a:solidFill>
+            <a:schemeClr val="bg2"/>
+          </a:solidFill>
+          <a:ln w="12700">
+            <a:solidFill>
+              <a:schemeClr val="bg2"/>
+            </a:solidFill>
+            <a:prstDash val="solid"/>
+          </a:ln>
+        </p:spPr>
+      </p:sp>
+      <p:sp>
+        <p:nvSpPr>
+          <p:cNvPr id="13" name="Text 11"/>
+          <p:cNvSpPr txBox="1"/>
+          <p:nvPr/>
+        </p:nvSpPr>
+        <p:spPr>
+          <a:xfrm>
+            <a:off x="9281160" y="1828800"/>
+            <a:ext cx="2194560" cy="1005840"/>
+          </a:xfrm>
+          <a:prstGeom prst="rect">
+            <a:avLst/>
+          </a:prstGeom>
+          <a:noFill/>
+          <a:ln/>
+        </p:spPr>
+        <p:txBody>
+          <a:bodyPr wrap="square" lIns="0" tIns="0" rIns="0" bIns="0" rtlCol="0" anchor="t"/>
+          <a:lstStyle/>
+          <a:p>
+            <a:pPr marL="0" indent="0">
+              <a:buNone/>
+            </a:pPr>
+            <a:r>
+              <a:rPr lang="en-US" sz="3000" b="1">
+                <a:solidFill>
+                  <a:schemeClr val="tx2"/>
+                </a:solidFill>
+                <a:latin typeface="Cambria" pitchFamily="34" charset="0"/>
+                <a:ea typeface="Cambria" pitchFamily="34" charset="-122"/>
+                <a:cs typeface="Cambria" pitchFamily="34" charset="-120"/>
+              </a:rPr>
+              <a:t>All three</a:t>
+            </a:r>
+            <a:endParaRPr lang="en-US" sz="3000" dirty="0"/>
+          </a:p>
+        </p:txBody>
+      </p:sp>
+      <p:sp>
+        <p:nvSpPr>
+          <p:cNvPr id="14" name="Text 12"/>
+          <p:cNvSpPr txBox="1"/>
+          <p:nvPr/>
+        </p:nvSpPr>
+        <p:spPr>
+          <a:xfrm>
+            <a:off x="9281160" y="2540000"/>
+            <a:ext cx="2194560" cy="1270000"/>
+          </a:xfrm>
+          <a:prstGeom prst="rect">
+            <a:avLst/>
+          </a:prstGeom>
+          <a:noFill/>
+          <a:ln/>
+        </p:spPr>
+        <p:txBody>
+          <a:bodyPr wrap="square" lIns="0" tIns="0" rIns="0" bIns="0" rtlCol="0" anchor="t"/>
+          <a:lstStyle/>
+          <a:p>
+            <a:pPr marL="0" indent="0">
+              <a:buNone/>
+            </a:pPr>
+            <a:r>
+              <a:rPr lang="en-US" sz="1200" b="1">
+                <a:solidFill>
+                  <a:schemeClr val="tx1"/>
+                </a:solidFill>
+              </a:rPr>
+              <a:t>Slide 15</a:t>
+            </a:r>
+          </a:p>
+          <a:p>
+            <a:pPr marL="0" indent="0">
+              <a:buNone/>
+            </a:pPr>
+            <a:r>
+              <a:rPr lang="en-US" sz="1200">
+                <a:solidFill>
+                  <a:schemeClr val="tx1"/>
+                </a:solidFill>
+              </a:rPr>
+              <a:t>Live demo in three parts, then questions</a:t>
+            </a:r>
+            <a:endParaRPr lang="en-US" sz="1200" dirty="0"/>
+          </a:p>
+        </p:txBody>
+      </p:sp>
+      <p:sp>
+        <p:nvSpPr>
+          <p:cNvPr id="15" name="Text 13"/>
+          <p:cNvSpPr txBox="1"/>
+          <p:nvPr/>
+        </p:nvSpPr>
+        <p:spPr>
+          <a:xfrm>
+            <a:off x="548640" y="4343400"/>
+            <a:ext cx="11064240" cy="1097280"/>
+          </a:xfrm>
+          <a:prstGeom prst="rect">
+            <a:avLst/>
+          </a:prstGeom>
+          <a:noFill/>
+          <a:ln/>
+        </p:spPr>
+        <p:txBody>
+          <a:bodyPr wrap="square" lIns="0" tIns="0" rIns="0" bIns="0" rtlCol="0" anchor="t"/>
+          <a:lstStyle/>
+          <a:p>
+            <a:pPr marL="0" indent="0">
+              <a:buNone/>
+            </a:pPr>
+            <a:r>
+              <a:rPr lang="en-US" sz="1600">
+                <a:solidFill>
+                  <a:schemeClr val="tx2"/>
+                </a:solidFill>
+              </a:rPr>
+              <a:t>Each block is one speaker, so there are only three handovers. The demo follows the same split: Mohammed brings the platform up and places an order, Nourhan shows security and load, Doaa breaks payment and shows the deployment and Bonus B2.</a:t>
+            </a:r>
+            <a:endParaRPr lang="en-US" sz="1600" dirty="0"/>
+          </a:p>
+        </p:txBody>
+      </p:sp>
+      <p:sp>
+        <p:nvSpPr>
+          <p:cNvPr id="16" name="Text 14"/>
+          <p:cNvSpPr txBox="1"/>
+          <p:nvPr/>
+        </p:nvSpPr>
+        <p:spPr>
+          <a:xfrm>
+            <a:off x="548640" y="5532120"/>
+            <a:ext cx="11064240" cy="457200"/>
+          </a:xfrm>
+          <a:prstGeom prst="rect">
+            <a:avLst/>
+          </a:prstGeom>
+          <a:noFill/>
+          <a:ln/>
+        </p:spPr>
+        <p:txBody>
+          <a:bodyPr wrap="square" lIns="0" tIns="0" rIns="0" bIns="0" rtlCol="0" anchor="t"/>
+          <a:lstStyle/>
+          <a:p>
+            <a:pPr marL="0" indent="0">
+              <a:buNone/>
+            </a:pPr>
+            <a:r>
+              <a:rPr lang="en-US" sz="1400" i="1">
+                <a:solidFill>
+                  <a:schemeClr val="accent4"/>
+                </a:solidFill>
+              </a:rPr>
+              <a:t>Every one of us answers questions on every service — not only the ones we built (Brief 12).</a:t>
+            </a:r>
+            <a:endParaRPr lang="en-US" sz="1400" dirty="0"/>
+          </a:p>
+        </p:txBody>
+      </p:sp>
+      <p:sp>
+        <p:nvSpPr>
+          <p:cNvPr id="25" name="Slide Number Placeholder 0"/>
+          <p:cNvSpPr>
+            <a:spLocks noGrp="1"/>
+          </p:cNvSpPr>
+          <p:nvPr>
+            <p:ph type="sldNum" sz="quarter" idx="4294967295"/>
+          </p:nvPr>
+        </p:nvSpPr>
+        <p:spPr>
+          <a:xfrm>
+            <a:off x="11155680" y="6400800"/>
+            <a:ext cx="548640" cy="274320"/>
+          </a:xfrm>
+          <a:prstGeom prst="rect">
+            <a:avLst/>
+          </a:prstGeom>
+          <a:extLst>
+            <a:ext uri="{C572A759-6A51-4108-AA02-DFA0A04FC94B}">
+              <ma14:wrappingTextBoxFlag xmlns:ma14="http://schemas.microsoft.com/office/mac/drawingml/2011/main" xmlns="" val="0"/>
+            </a:ext>
+          </a:extLst>
+        </p:spPr>
+        <p:txBody>
+          <a:bodyPr/>
+          <a:lstStyle>
+            <a:lvl1pPr>
+              <a:defRPr sz="1000">
+                <a:solidFill>
+                  <a:schemeClr val="accent4"/>
+                </a:solidFill>
+              </a:defRPr>
+            </a:lvl1pPr>
+          </a:lstStyle>
+          <a:p>
+            <a:pPr algn="r"/>
+            <a:fld id="{F7021451-1387-4CA6-816F-3879F97B5CBC}" type="slidenum">
+              <a:rPr lang="en-US" b="0"/>
+              <a:t>2</a:t>
+            </a:fld>
+            <a:endParaRPr lang="en-US"/>
+          </a:p>
+        </p:txBody>
+      </p:sp>
+      <p:sp>
+        <p:nvSpPr>
+          <p:cNvPr id="17" name="Presenter tag">
+            <a:extLst>
+              <a:ext uri="{FF2B5EF4-FFF2-40B4-BE49-F238E27FC236}">
+                <a16:creationId xmlns:a16="http://schemas.microsoft.com/office/drawing/2014/main" id="{1E1BF787-02D9-4240-9302-15424C449F76}"/>
+              </a:ext>
+            </a:extLst>
+          </p:cNvPr>
+          <p:cNvSpPr/>
+          <p:nvPr/>
+        </p:nvSpPr>
+        <p:spPr>
+          <a:xfrm>
+            <a:off x="8585200" y="6375400"/>
+            <a:ext cx="2413000" cy="304800"/>
+          </a:xfrm>
+          <a:prstGeom prst="roundRect">
+            <a:avLst/>
+          </a:prstGeom>
+          <a:solidFill>
+            <a:srgbClr val="2A9D8F"/>
+          </a:solidFill>
+          <a:ln w="12700" cap="flat" cmpd="sng" algn="ctr">
+            <a:noFill/>
+            <a:prstDash val="solid"/>
+            <a:miter lim="800000"/>
+          </a:ln>
+          <a:effectLst/>
+          <a:extLst>
+            <a:ext uri="{91240B29-F687-4F45-9708-019B960494DF}">
+              <a14:hiddenLine xmlns:a14="http://schemas.microsoft.com/office/drawing/2010/main" w="12700" cap="flat" cmpd="sng" algn="ctr">
+                <a:solidFill>
+                  <a:schemeClr val="accent1">
+                    <a:shade val="50000"/>
+                  </a:schemeClr>
+                </a:solidFill>
+                <a:prstDash val="solid"/>
+                <a:miter lim="800000"/>
+              </a14:hiddenLine>
+            </a:ext>
+          </a:extLst>
+        </p:spPr>
+        <p:style>
+          <a:lnRef idx="2">
+            <a:schemeClr val="accent1">
+              <a:shade val="50000"/>
+            </a:schemeClr>
+          </a:lnRef>
+          <a:fillRef idx="1">
+            <a:schemeClr val="accent1"/>
+          </a:fillRef>
+          <a:effectRef idx="0">
+            <a:schemeClr val="accent1"/>
+          </a:effectRef>
+          <a:fontRef idx="minor">
+            <a:schemeClr val="lt1"/>
+          </a:fontRef>
+        </p:style>
+        <p:txBody>
+          <a:bodyPr wrap="none" lIns="50800" tIns="0" rIns="50800" bIns="0" rtlCol="0" anchor="ctr"/>
+          <a:lstStyle/>
+          <a:p>
+            <a:pPr algn="ctr"/>
+            <a:r>
+              <a:rPr lang="en-US" sz="1100" b="1">
+                <a:solidFill>
+                  <a:srgbClr val="FFFFFF"/>
+                </a:solidFill>
+                <a:latin typeface="Calibri" panose="020F0502020204030204" pitchFamily="34" charset="0"/>
+              </a:rPr>
+              <a:t>Presenter: Nourhan (A)</a:t>
+            </a:r>
+          </a:p>
+        </p:txBody>
+      </p:sp>
+    </p:spTree>
+    <p:extLst>
+      <p:ext uri="{BB962C8B-B14F-4D97-AF65-F5344CB8AC3E}">
+        <p14:creationId xmlns:p14="http://schemas.microsoft.com/office/powerpoint/2010/main" val="1470196882"/>
+      </p:ext>
+    </p:extLst>
+  </p:cSld>
+  <p:clrMapOvr>
+    <a:masterClrMapping/>
+  </p:clrMapOvr>
+</p:sld>
+</file>
+
+<file path=ppt/slides/slide3.xml><?xml version="1.0" encoding="utf-8"?>
 <p:sld xmlns:a="http://schemas.openxmlformats.org/drawingml/2006/main" xmlns:r="http://schemas.openxmlformats.org/officeDocument/2006/relationships" xmlns:p="http://schemas.openxmlformats.org/presentationml/2006/main">
   <p:cSld name="Slide 2">
     <p:spTree>
@@ -5966,9 +8138,85 @@
             <a:pPr algn="r"/>
             <a:fld id="{F7021451-1387-4CA6-816F-3879F97B5CBC}" type="slidenum">
               <a:rPr lang="en-US" b="0"/>
-              <a:t>2</a:t>
+              <a:t>3</a:t>
             </a:fld>
             <a:endParaRPr lang="en-US"/>
+          </a:p>
+        </p:txBody>
+      </p:sp>
+      <p:sp>
+        <p:nvSpPr>
+          <p:cNvPr id="17" name="Presenter tag">
+            <a:extLst>
+              <a:ext uri="{FF2B5EF4-FFF2-40B4-BE49-F238E27FC236}">
+                <a16:creationId xmlns:a16="http://schemas.microsoft.com/office/drawing/2014/main" id="{B132EDBE-3C97-4F2E-AD4D-DF5A4271419E}"/>
+              </a:ext>
+            </a:extLst>
+          </p:cNvPr>
+          <p:cNvSpPr/>
+          <p:nvPr/>
+        </p:nvSpPr>
+        <p:spPr>
+          <a:xfrm>
+            <a:off x="8585200" y="6375400"/>
+            <a:ext cx="2413000" cy="304800"/>
+          </a:xfrm>
+          <a:prstGeom prst="roundRect">
+            <a:avLst/>
+          </a:prstGeom>
+          <a:solidFill>
+            <a:srgbClr val="2A9D8F"/>
+          </a:solidFill>
+          <a:ln w="12700" cap="flat" cmpd="sng" algn="ctr">
+            <a:noFill/>
+            <a:prstDash val="solid"/>
+            <a:miter lim="800000"/>
+          </a:ln>
+          <a:effectLst/>
+          <a:extLst>
+            <a:ext uri="{91240B29-F687-4F45-9708-019B960494DF}">
+              <a14:hiddenLine xmlns:a14="http://schemas.microsoft.com/office/drawing/2010/main" w="12700" cap="flat" cmpd="sng" algn="ctr">
+                <a:solidFill>
+                  <a:schemeClr val="accent1">
+                    <a:shade val="50000"/>
+                  </a:schemeClr>
+                </a:solidFill>
+                <a:prstDash val="solid"/>
+                <a:miter lim="800000"/>
+              </a14:hiddenLine>
+            </a:ext>
+          </a:extLst>
+        </p:spPr>
+        <p:style>
+          <a:lnRef idx="2">
+            <a:schemeClr val="accent1">
+              <a:shade val="50000"/>
+            </a:schemeClr>
+          </a:lnRef>
+          <a:fillRef idx="1">
+            <a:schemeClr val="accent1"/>
+          </a:fillRef>
+          <a:effectRef idx="0">
+            <a:schemeClr val="accent1"/>
+          </a:effectRef>
+          <a:fontRef idx="minor">
+            <a:schemeClr val="lt1"/>
+          </a:fontRef>
+        </p:style>
+        <p:txBody>
+          <a:bodyPr wrap="none" lIns="50800" tIns="0" rIns="50800" bIns="0" rtlCol="0" anchor="ctr"/>
+          <a:lstStyle/>
+          <a:p>
+            <a:pPr algn="ctr"/>
+            <a:r>
+              <a:rPr lang="en-US" sz="1100" b="1">
+                <a:solidFill>
+                  <a:srgbClr val="FFFFFF"/>
+                </a:solidFill>
+                <a:latin typeface="Calibri" panose="020F0502020204030204" pitchFamily="34" charset="0"/>
+              </a:rPr>
+              <a:t>Presenter: Nourhan (A)</a:t>
+            </a:r>
           </a:p>
         </p:txBody>
       </p:sp>
@@ -5980,7 +8228,7 @@
 </p:sld>
 </file>
 
-<file path=ppt/slides/slide3.xml><?xml version="1.0" encoding="utf-8"?>
+<file path=ppt/slides/slide4.xml><?xml version="1.0" encoding="utf-8"?>
 <p:sld xmlns:a="http://schemas.openxmlformats.org/drawingml/2006/main" xmlns:r="http://schemas.openxmlformats.org/officeDocument/2006/relationships" xmlns:p="http://schemas.openxmlformats.org/presentationml/2006/main">
   <p:cSld name="Slide 3">
     <p:spTree>
@@ -7138,9 +9386,85 @@
             <a:pPr algn="r"/>
             <a:fld id="{F7021451-1387-4CA6-816F-3879F97B5CBC}" type="slidenum">
               <a:rPr lang="en-US" b="0"/>
-              <a:t>3</a:t>
+              <a:t>4</a:t>
             </a:fld>
             <a:endParaRPr lang="en-US"/>
+          </a:p>
+        </p:txBody>
+      </p:sp>
+      <p:sp>
+        <p:nvSpPr>
+          <p:cNvPr id="36" name="Presenter tag">
+            <a:extLst>
+              <a:ext uri="{FF2B5EF4-FFF2-40B4-BE49-F238E27FC236}">
+                <a16:creationId xmlns:a16="http://schemas.microsoft.com/office/drawing/2014/main" id="{8CDA5CC4-04F4-4CC9-A821-C1EB598E186D}"/>
+              </a:ext>
+            </a:extLst>
+          </p:cNvPr>
+          <p:cNvSpPr/>
+          <p:nvPr/>
+        </p:nvSpPr>
+        <p:spPr>
+          <a:xfrm>
+            <a:off x="8585200" y="6375400"/>
+            <a:ext cx="2413000" cy="304800"/>
+          </a:xfrm>
+          <a:prstGeom prst="roundRect">
+            <a:avLst/>
+          </a:prstGeom>
+          <a:solidFill>
+            <a:srgbClr val="F2A541"/>
+          </a:solidFill>
+          <a:ln w="12700" cap="flat" cmpd="sng" algn="ctr">
+            <a:noFill/>
+            <a:prstDash val="solid"/>
+            <a:miter lim="800000"/>
+          </a:ln>
+          <a:effectLst/>
+          <a:extLst>
+            <a:ext uri="{91240B29-F687-4F45-9708-019B960494DF}">
+              <a14:hiddenLine xmlns:a14="http://schemas.microsoft.com/office/drawing/2010/main" w="12700" cap="flat" cmpd="sng" algn="ctr">
+                <a:solidFill>
+                  <a:schemeClr val="accent1">
+                    <a:shade val="50000"/>
+                  </a:schemeClr>
+                </a:solidFill>
+                <a:prstDash val="solid"/>
+                <a:miter lim="800000"/>
+              </a14:hiddenLine>
+            </a:ext>
+          </a:extLst>
+        </p:spPr>
+        <p:style>
+          <a:lnRef idx="2">
+            <a:schemeClr val="accent1">
+              <a:shade val="50000"/>
+            </a:schemeClr>
+          </a:lnRef>
+          <a:fillRef idx="1">
+            <a:schemeClr val="accent1"/>
+          </a:fillRef>
+          <a:effectRef idx="0">
+            <a:schemeClr val="accent1"/>
+          </a:effectRef>
+          <a:fontRef idx="minor">
+            <a:schemeClr val="lt1"/>
+          </a:fontRef>
+        </p:style>
+        <p:txBody>
+          <a:bodyPr wrap="none" lIns="50800" tIns="0" rIns="50800" bIns="0" rtlCol="0" anchor="ctr"/>
+          <a:lstStyle/>
+          <a:p>
+            <a:pPr algn="ctr"/>
+            <a:r>
+              <a:rPr lang="en-US" sz="1100" b="1">
+                <a:solidFill>
+                  <a:srgbClr val="0D3B4A"/>
+                </a:solidFill>
+                <a:latin typeface="Calibri" panose="020F0502020204030204" pitchFamily="34" charset="0"/>
+              </a:rPr>
+              <a:t>Presenter: Mohammed (B)</a:t>
+            </a:r>
           </a:p>
         </p:txBody>
       </p:sp>
@@ -7152,7 +9476,7 @@
 </p:sld>
 </file>
 
-<file path=ppt/slides/slide4.xml><?xml version="1.0" encoding="utf-8"?>
+<file path=ppt/slides/slide5.xml><?xml version="1.0" encoding="utf-8"?>
 <p:sld xmlns:a="http://schemas.openxmlformats.org/drawingml/2006/main" xmlns:r="http://schemas.openxmlformats.org/officeDocument/2006/relationships" xmlns:p="http://schemas.openxmlformats.org/presentationml/2006/main">
   <p:cSld name="Slide 4">
     <p:spTree>
@@ -8070,9 +10394,85 @@
             <a:pPr algn="r"/>
             <a:fld id="{F7021451-1387-4CA6-816F-3879F97B5CBC}" type="slidenum">
               <a:rPr lang="en-US" b="0"/>
-              <a:t>4</a:t>
+              <a:t>5</a:t>
             </a:fld>
             <a:endParaRPr lang="en-US"/>
+          </a:p>
+        </p:txBody>
+      </p:sp>
+      <p:sp>
+        <p:nvSpPr>
+          <p:cNvPr id="27" name="Presenter tag">
+            <a:extLst>
+              <a:ext uri="{FF2B5EF4-FFF2-40B4-BE49-F238E27FC236}">
+                <a16:creationId xmlns:a16="http://schemas.microsoft.com/office/drawing/2014/main" id="{A543E5EC-F799-4E3E-99B0-88CD5714C113}"/>
+              </a:ext>
+            </a:extLst>
+          </p:cNvPr>
+          <p:cNvSpPr/>
+          <p:nvPr/>
+        </p:nvSpPr>
+        <p:spPr>
+          <a:xfrm>
+            <a:off x="8585200" y="6375400"/>
+            <a:ext cx="2413000" cy="304800"/>
+          </a:xfrm>
+          <a:prstGeom prst="roundRect">
+            <a:avLst/>
+          </a:prstGeom>
+          <a:solidFill>
+            <a:srgbClr val="F2A541"/>
+          </a:solidFill>
+          <a:ln w="12700" cap="flat" cmpd="sng" algn="ctr">
+            <a:noFill/>
+            <a:prstDash val="solid"/>
+            <a:miter lim="800000"/>
+          </a:ln>
+          <a:effectLst/>
+          <a:extLst>
+            <a:ext uri="{91240B29-F687-4F45-9708-019B960494DF}">
+              <a14:hiddenLine xmlns:a14="http://schemas.microsoft.com/office/drawing/2010/main" w="12700" cap="flat" cmpd="sng" algn="ctr">
+                <a:solidFill>
+                  <a:schemeClr val="accent1">
+                    <a:shade val="50000"/>
+                  </a:schemeClr>
+                </a:solidFill>
+                <a:prstDash val="solid"/>
+                <a:miter lim="800000"/>
+              </a14:hiddenLine>
+            </a:ext>
+          </a:extLst>
+        </p:spPr>
+        <p:style>
+          <a:lnRef idx="2">
+            <a:schemeClr val="accent1">
+              <a:shade val="50000"/>
+            </a:schemeClr>
+          </a:lnRef>
+          <a:fillRef idx="1">
+            <a:schemeClr val="accent1"/>
+          </a:fillRef>
+          <a:effectRef idx="0">
+            <a:schemeClr val="accent1"/>
+          </a:effectRef>
+          <a:fontRef idx="minor">
+            <a:schemeClr val="lt1"/>
+          </a:fontRef>
+        </p:style>
+        <p:txBody>
+          <a:bodyPr wrap="none" lIns="50800" tIns="0" rIns="50800" bIns="0" rtlCol="0" anchor="ctr"/>
+          <a:lstStyle/>
+          <a:p>
+            <a:pPr algn="ctr"/>
+            <a:r>
+              <a:rPr lang="en-US" sz="1100" b="1">
+                <a:solidFill>
+                  <a:srgbClr val="0D3B4A"/>
+                </a:solidFill>
+                <a:latin typeface="Calibri" panose="020F0502020204030204" pitchFamily="34" charset="0"/>
+              </a:rPr>
+              <a:t>Presenter: Mohammed (B)</a:t>
+            </a:r>
           </a:p>
         </p:txBody>
       </p:sp>
@@ -8084,7 +10484,7 @@
 </p:sld>
 </file>
 
-<file path=ppt/slides/slide5.xml><?xml version="1.0" encoding="utf-8"?>
+<file path=ppt/slides/slide6.xml><?xml version="1.0" encoding="utf-8"?>
 <p:sld xmlns:a="http://schemas.openxmlformats.org/drawingml/2006/main" xmlns:r="http://schemas.openxmlformats.org/officeDocument/2006/relationships" xmlns:p="http://schemas.openxmlformats.org/presentationml/2006/main">
   <p:cSld name="Slide 5">
     <p:spTree>
@@ -9140,9 +11540,85 @@
             <a:pPr algn="r"/>
             <a:fld id="{F7021451-1387-4CA6-816F-3879F97B5CBC}" type="slidenum">
               <a:rPr lang="en-US" b="0"/>
-              <a:t>5</a:t>
+              <a:t>6</a:t>
             </a:fld>
             <a:endParaRPr lang="en-US"/>
+          </a:p>
+        </p:txBody>
+      </p:sp>
+      <p:sp>
+        <p:nvSpPr>
+          <p:cNvPr id="34" name="Presenter tag">
+            <a:extLst>
+              <a:ext uri="{FF2B5EF4-FFF2-40B4-BE49-F238E27FC236}">
+                <a16:creationId xmlns:a16="http://schemas.microsoft.com/office/drawing/2014/main" id="{EEC8D50F-341F-4FD6-A9A6-018060D181F1}"/>
+              </a:ext>
+            </a:extLst>
+          </p:cNvPr>
+          <p:cNvSpPr/>
+          <p:nvPr/>
+        </p:nvSpPr>
+        <p:spPr>
+          <a:xfrm>
+            <a:off x="8585200" y="6375400"/>
+            <a:ext cx="2413000" cy="304800"/>
+          </a:xfrm>
+          <a:prstGeom prst="roundRect">
+            <a:avLst/>
+          </a:prstGeom>
+          <a:solidFill>
+            <a:srgbClr val="F2A541"/>
+          </a:solidFill>
+          <a:ln w="12700" cap="flat" cmpd="sng" algn="ctr">
+            <a:noFill/>
+            <a:prstDash val="solid"/>
+            <a:miter lim="800000"/>
+          </a:ln>
+          <a:effectLst/>
+          <a:extLst>
+            <a:ext uri="{91240B29-F687-4F45-9708-019B960494DF}">
+              <a14:hiddenLine xmlns:a14="http://schemas.microsoft.com/office/drawing/2010/main" w="12700" cap="flat" cmpd="sng" algn="ctr">
+                <a:solidFill>
+                  <a:schemeClr val="accent1">
+                    <a:shade val="50000"/>
+                  </a:schemeClr>
+                </a:solidFill>
+                <a:prstDash val="solid"/>
+                <a:miter lim="800000"/>
+              </a14:hiddenLine>
+            </a:ext>
+          </a:extLst>
+        </p:spPr>
+        <p:style>
+          <a:lnRef idx="2">
+            <a:schemeClr val="accent1">
+              <a:shade val="50000"/>
+            </a:schemeClr>
+          </a:lnRef>
+          <a:fillRef idx="1">
+            <a:schemeClr val="accent1"/>
+          </a:fillRef>
+          <a:effectRef idx="0">
+            <a:schemeClr val="accent1"/>
+          </a:effectRef>
+          <a:fontRef idx="minor">
+            <a:schemeClr val="lt1"/>
+          </a:fontRef>
+        </p:style>
+        <p:txBody>
+          <a:bodyPr wrap="none" lIns="50800" tIns="0" rIns="50800" bIns="0" rtlCol="0" anchor="ctr"/>
+          <a:lstStyle/>
+          <a:p>
+            <a:pPr algn="ctr"/>
+            <a:r>
+              <a:rPr lang="en-US" sz="1100" b="1">
+                <a:solidFill>
+                  <a:srgbClr val="0D3B4A"/>
+                </a:solidFill>
+                <a:latin typeface="Calibri" panose="020F0502020204030204" pitchFamily="34" charset="0"/>
+              </a:rPr>
+              <a:t>Presenter: Mohammed (B)</a:t>
+            </a:r>
           </a:p>
         </p:txBody>
       </p:sp>
@@ -9154,7 +11630,7 @@
 </p:sld>
 </file>
 
-<file path=ppt/slides/slide6.xml><?xml version="1.0" encoding="utf-8"?>
+<file path=ppt/slides/slide7.xml><?xml version="1.0" encoding="utf-8"?>
 <p:sld xmlns:a="http://schemas.openxmlformats.org/drawingml/2006/main" xmlns:r="http://schemas.openxmlformats.org/officeDocument/2006/relationships" xmlns:p="http://schemas.openxmlformats.org/presentationml/2006/main">
   <p:cSld name="Slide 6">
     <p:spTree>
@@ -10629,9 +13105,85 @@
             <a:pPr algn="r"/>
             <a:fld id="{F7021451-1387-4CA6-816F-3879F97B5CBC}" type="slidenum">
               <a:rPr lang="en-US" b="0"/>
-              <a:t>6</a:t>
+              <a:t>7</a:t>
             </a:fld>
             <a:endParaRPr lang="en-US"/>
+          </a:p>
+        </p:txBody>
+      </p:sp>
+      <p:sp>
+        <p:nvSpPr>
+          <p:cNvPr id="3" name="Presenter tag">
+            <a:extLst>
+              <a:ext uri="{FF2B5EF4-FFF2-40B4-BE49-F238E27FC236}">
+                <a16:creationId xmlns:a16="http://schemas.microsoft.com/office/drawing/2014/main" id="{836B296B-25B1-4AEE-B09F-8756939B8E08}"/>
+              </a:ext>
+            </a:extLst>
+          </p:cNvPr>
+          <p:cNvSpPr/>
+          <p:nvPr/>
+        </p:nvSpPr>
+        <p:spPr>
+          <a:xfrm>
+            <a:off x="8585200" y="6375400"/>
+            <a:ext cx="2413000" cy="304800"/>
+          </a:xfrm>
+          <a:prstGeom prst="roundRect">
+            <a:avLst/>
+          </a:prstGeom>
+          <a:solidFill>
+            <a:srgbClr val="F2A541"/>
+          </a:solidFill>
+          <a:ln w="12700" cap="flat" cmpd="sng" algn="ctr">
+            <a:noFill/>
+            <a:prstDash val="solid"/>
+            <a:miter lim="800000"/>
+          </a:ln>
+          <a:effectLst/>
+          <a:extLst>
+            <a:ext uri="{91240B29-F687-4F45-9708-019B960494DF}">
+              <a14:hiddenLine xmlns:a14="http://schemas.microsoft.com/office/drawing/2010/main" w="12700" cap="flat" cmpd="sng" algn="ctr">
+                <a:solidFill>
+                  <a:schemeClr val="accent1">
+                    <a:shade val="50000"/>
+                  </a:schemeClr>
+                </a:solidFill>
+                <a:prstDash val="solid"/>
+                <a:miter lim="800000"/>
+              </a14:hiddenLine>
+            </a:ext>
+          </a:extLst>
+        </p:spPr>
+        <p:style>
+          <a:lnRef idx="2">
+            <a:schemeClr val="accent1">
+              <a:shade val="50000"/>
+            </a:schemeClr>
+          </a:lnRef>
+          <a:fillRef idx="1">
+            <a:schemeClr val="accent1"/>
+          </a:fillRef>
+          <a:effectRef idx="0">
+            <a:schemeClr val="accent1"/>
+          </a:effectRef>
+          <a:fontRef idx="minor">
+            <a:schemeClr val="lt1"/>
+          </a:fontRef>
+        </p:style>
+        <p:txBody>
+          <a:bodyPr wrap="none" lIns="50800" tIns="0" rIns="50800" bIns="0" rtlCol="0" anchor="ctr"/>
+          <a:lstStyle/>
+          <a:p>
+            <a:pPr algn="ctr"/>
+            <a:r>
+              <a:rPr lang="en-US" sz="1100" b="1">
+                <a:solidFill>
+                  <a:srgbClr val="0D3B4A"/>
+                </a:solidFill>
+                <a:latin typeface="Calibri" panose="020F0502020204030204" pitchFamily="34" charset="0"/>
+              </a:rPr>
+              <a:t>Presenter: Mohammed (B)</a:t>
+            </a:r>
           </a:p>
         </p:txBody>
       </p:sp>
@@ -10643,7 +13195,7 @@
 </p:sld>
 </file>
 
-<file path=ppt/slides/slide7.xml><?xml version="1.0" encoding="utf-8"?>
+<file path=ppt/slides/slide8.xml><?xml version="1.0" encoding="utf-8"?>
 <p:sld xmlns:a="http://schemas.openxmlformats.org/drawingml/2006/main" xmlns:r="http://schemas.openxmlformats.org/officeDocument/2006/relationships" xmlns:p="http://schemas.openxmlformats.org/presentationml/2006/main">
   <p:cSld name="Slide 7">
     <p:spTree>
@@ -11135,522 +13687,85 @@
             <a:pPr algn="r"/>
             <a:fld id="{F7021451-1387-4CA6-816F-3879F97B5CBC}" type="slidenum">
               <a:rPr lang="en-US" b="0"/>
-              <a:t>7</a:t>
-            </a:fld>
-            <a:endParaRPr lang="en-US"/>
-          </a:p>
-        </p:txBody>
-      </p:sp>
-    </p:spTree>
-  </p:cSld>
-  <p:clrMapOvr>
-    <a:masterClrMapping/>
-  </p:clrMapOvr>
-</p:sld>
-</file>
-
-<file path=ppt/slides/slide8.xml><?xml version="1.0" encoding="utf-8"?>
-<p:sld xmlns:a="http://schemas.openxmlformats.org/drawingml/2006/main" xmlns:r="http://schemas.openxmlformats.org/officeDocument/2006/relationships" xmlns:p="http://schemas.openxmlformats.org/presentationml/2006/main">
-  <p:cSld name="Slide 8">
-    <p:spTree>
-      <p:nvGrpSpPr>
-        <p:cNvPr id="1" name=""/>
-        <p:cNvGrpSpPr/>
-        <p:nvPr/>
-      </p:nvGrpSpPr>
-      <p:grpSpPr>
-        <a:xfrm>
-          <a:off x="0" y="0"/>
-          <a:ext cx="0" cy="0"/>
-          <a:chOff x="0" y="0"/>
-          <a:chExt cx="0" cy="0"/>
-        </a:xfrm>
-      </p:grpSpPr>
-      <p:sp>
-        <p:nvSpPr>
-          <p:cNvPr id="2" name="Text 0"/>
-          <p:cNvSpPr>
-            <a:spLocks noGrp="1"/>
-          </p:cNvSpPr>
-          <p:nvPr>
-            <p:ph type="title" idx="100" hasCustomPrompt="1"/>
-          </p:nvPr>
-        </p:nvSpPr>
-        <p:spPr>
-          <a:xfrm>
-            <a:off x="548640" y="320040"/>
-            <a:ext cx="11064240" cy="822960"/>
-          </a:xfrm>
-          <a:prstGeom prst="rect">
-            <a:avLst/>
-          </a:prstGeom>
-          <a:noFill/>
-          <a:ln/>
-        </p:spPr>
-        <p:txBody>
-          <a:bodyPr wrap="square" rtlCol="0" anchor="ctr"/>
-          <a:lstStyle/>
-          <a:p>
-            <a:pPr marL="0" indent="0">
-              <a:buNone/>
-            </a:pPr>
-            <a:r>
-              <a:rPr lang="en-US" sz="3200" b="1" dirty="0">
-                <a:solidFill>
-                  <a:schemeClr val="tx2"/>
-                </a:solidFill>
-              </a:rPr>
-              <a:t>Evidence: tests at every level</a:t>
-            </a:r>
-            <a:endParaRPr lang="en-US" sz="3200" dirty="0"/>
-          </a:p>
-        </p:txBody>
-      </p:sp>
-      <p:graphicFrame>
-        <p:nvGraphicFramePr>
-          <p:cNvPr id="3" name="Chart 0"/>
-          <p:cNvGraphicFramePr/>
-          <p:nvPr>
-            <p:extLst>
-              <p:ext uri="{D42A27DB-BD31-4B8C-83A1-F6EECF244321}">
-                <p14:modId xmlns:p14="http://schemas.microsoft.com/office/powerpoint/2010/main" val="2361409617"/>
-              </p:ext>
-            </p:extLst>
-          </p:nvPr>
-        </p:nvGraphicFramePr>
-        <p:xfrm>
-          <a:off x="548640" y="1325880"/>
-          <a:ext cx="6583680" cy="4754880"/>
-        </p:xfrm>
-        <a:graphic>
-          <a:graphicData uri="http://schemas.openxmlformats.org/drawingml/2006/chart">
-            <c:chart xmlns:c="http://schemas.openxmlformats.org/drawingml/2006/chart" xmlns:r="http://schemas.openxmlformats.org/officeDocument/2006/relationships" r:id="rId3"/>
-          </a:graphicData>
-        </a:graphic>
-      </p:graphicFrame>
-      <p:sp>
-        <p:nvSpPr>
-          <p:cNvPr id="4" name="Shape 1"/>
-          <p:cNvSpPr/>
-          <p:nvPr/>
-        </p:nvSpPr>
-        <p:spPr>
-          <a:xfrm>
-            <a:off x="7498080" y="1417320"/>
-            <a:ext cx="4114800" cy="960120"/>
-          </a:xfrm>
-          <a:prstGeom prst="roundRect">
-            <a:avLst>
-              <a:gd name="adj" fmla="val 7619"/>
-            </a:avLst>
-          </a:prstGeom>
-          <a:solidFill>
-            <a:schemeClr val="bg2"/>
-          </a:solidFill>
-          <a:ln w="12700">
-            <a:solidFill>
-              <a:schemeClr val="bg2"/>
-            </a:solidFill>
-            <a:prstDash val="solid"/>
-          </a:ln>
-        </p:spPr>
-      </p:sp>
-      <p:sp>
-        <p:nvSpPr>
-          <p:cNvPr id="5" name="Text 2"/>
-          <p:cNvSpPr txBox="1"/>
-          <p:nvPr/>
-        </p:nvSpPr>
-        <p:spPr>
-          <a:xfrm>
-            <a:off x="7726680" y="1527048"/>
-            <a:ext cx="1554480" cy="731520"/>
-          </a:xfrm>
-          <a:prstGeom prst="rect">
-            <a:avLst/>
-          </a:prstGeom>
-          <a:noFill/>
-          <a:ln/>
-        </p:spPr>
-        <p:txBody>
-          <a:bodyPr wrap="square" lIns="0" tIns="0" rIns="0" bIns="0" rtlCol="0" anchor="ctr"/>
-          <a:lstStyle/>
-          <a:p>
-            <a:pPr marL="0" indent="0">
-              <a:buNone/>
-            </a:pPr>
-            <a:r>
-              <a:rPr lang="en-US" sz="2800" b="1" dirty="0">
-                <a:solidFill>
-                  <a:schemeClr val="tx2"/>
-                </a:solidFill>
-              </a:rPr>
-              <a:t>85%</a:t>
-            </a:r>
-            <a:endParaRPr lang="en-US" sz="2800" dirty="0"/>
-          </a:p>
-        </p:txBody>
-      </p:sp>
-      <p:sp>
-        <p:nvSpPr>
-          <p:cNvPr id="6" name="Text 3"/>
-          <p:cNvSpPr txBox="1"/>
-          <p:nvPr/>
-        </p:nvSpPr>
-        <p:spPr>
-          <a:xfrm>
-            <a:off x="9326880" y="1527048"/>
-            <a:ext cx="2194560" cy="731520"/>
-          </a:xfrm>
-          <a:prstGeom prst="rect">
-            <a:avLst/>
-          </a:prstGeom>
-          <a:noFill/>
-          <a:ln/>
-        </p:spPr>
-        <p:txBody>
-          <a:bodyPr wrap="square" lIns="0" tIns="0" rIns="0" bIns="0" rtlCol="0" anchor="ctr"/>
-          <a:lstStyle/>
-          <a:p>
-            <a:pPr marL="0" indent="0">
-              <a:buNone/>
-            </a:pPr>
-            <a:r>
-              <a:rPr lang="en-US" sz="1400" dirty="0">
-                <a:solidFill>
-                  <a:schemeClr val="tx1"/>
-                </a:solidFill>
-              </a:rPr>
-              <a:t>order.application line coverage</a:t>
-            </a:r>
-            <a:endParaRPr lang="en-US" sz="1400" dirty="0"/>
-          </a:p>
-        </p:txBody>
-      </p:sp>
-      <p:sp>
-        <p:nvSpPr>
-          <p:cNvPr id="7" name="Shape 4"/>
-          <p:cNvSpPr/>
-          <p:nvPr/>
-        </p:nvSpPr>
-        <p:spPr>
-          <a:xfrm>
-            <a:off x="7498080" y="2560320"/>
-            <a:ext cx="4114800" cy="960120"/>
-          </a:xfrm>
-          <a:prstGeom prst="roundRect">
-            <a:avLst>
-              <a:gd name="adj" fmla="val 7619"/>
-            </a:avLst>
-          </a:prstGeom>
-          <a:solidFill>
-            <a:schemeClr val="bg2"/>
-          </a:solidFill>
-          <a:ln w="12700">
-            <a:solidFill>
-              <a:schemeClr val="bg2"/>
-            </a:solidFill>
-            <a:prstDash val="solid"/>
-          </a:ln>
-        </p:spPr>
-      </p:sp>
-      <p:sp>
-        <p:nvSpPr>
-          <p:cNvPr id="8" name="Text 5"/>
-          <p:cNvSpPr txBox="1"/>
-          <p:nvPr/>
-        </p:nvSpPr>
-        <p:spPr>
-          <a:xfrm>
-            <a:off x="7726680" y="2670048"/>
-            <a:ext cx="1554480" cy="731520"/>
-          </a:xfrm>
-          <a:prstGeom prst="rect">
-            <a:avLst/>
-          </a:prstGeom>
-          <a:noFill/>
-          <a:ln/>
-        </p:spPr>
-        <p:txBody>
-          <a:bodyPr wrap="square" lIns="0" tIns="0" rIns="0" bIns="0" rtlCol="0" anchor="ctr"/>
-          <a:lstStyle/>
-          <a:p>
-            <a:pPr marL="0" indent="0">
-              <a:buNone/>
-            </a:pPr>
-            <a:r>
-              <a:rPr lang="en-US" sz="2800" b="1" dirty="0">
-                <a:solidFill>
-                  <a:schemeClr val="tx2"/>
-                </a:solidFill>
-              </a:rPr>
-              <a:t>78%</a:t>
-            </a:r>
-            <a:endParaRPr lang="en-US" sz="2800" dirty="0"/>
-          </a:p>
-        </p:txBody>
-      </p:sp>
-      <p:sp>
-        <p:nvSpPr>
-          <p:cNvPr id="9" name="Text 6"/>
-          <p:cNvSpPr txBox="1"/>
-          <p:nvPr/>
-        </p:nvSpPr>
-        <p:spPr>
-          <a:xfrm>
-            <a:off x="9326880" y="2670048"/>
-            <a:ext cx="2194560" cy="731520"/>
-          </a:xfrm>
-          <a:prstGeom prst="rect">
-            <a:avLst/>
-          </a:prstGeom>
-          <a:noFill/>
-          <a:ln/>
-        </p:spPr>
-        <p:txBody>
-          <a:bodyPr wrap="square" lIns="0" tIns="0" rIns="0" bIns="0" rtlCol="0" anchor="ctr"/>
-          <a:lstStyle/>
-          <a:p>
-            <a:pPr marL="0" indent="0">
-              <a:buNone/>
-            </a:pPr>
-            <a:r>
-              <a:rPr lang="en-US" sz="1400" dirty="0">
-                <a:solidFill>
-                  <a:schemeClr val="tx1"/>
-                </a:solidFill>
-              </a:rPr>
-              <a:t>inventory.application coverage</a:t>
-            </a:r>
-            <a:endParaRPr lang="en-US" sz="1400" dirty="0"/>
-          </a:p>
-        </p:txBody>
-      </p:sp>
-      <p:sp>
-        <p:nvSpPr>
-          <p:cNvPr id="10" name="Shape 7"/>
-          <p:cNvSpPr/>
-          <p:nvPr/>
-        </p:nvSpPr>
-        <p:spPr>
-          <a:xfrm>
-            <a:off x="7498080" y="3703320"/>
-            <a:ext cx="4114800" cy="960120"/>
-          </a:xfrm>
-          <a:prstGeom prst="roundRect">
-            <a:avLst>
-              <a:gd name="adj" fmla="val 7619"/>
-            </a:avLst>
-          </a:prstGeom>
-          <a:solidFill>
-            <a:schemeClr val="bg2"/>
-          </a:solidFill>
-          <a:ln w="12700">
-            <a:solidFill>
-              <a:schemeClr val="bg2"/>
-            </a:solidFill>
-            <a:prstDash val="solid"/>
-          </a:ln>
-        </p:spPr>
-      </p:sp>
-      <p:sp>
-        <p:nvSpPr>
-          <p:cNvPr id="11" name="Text 8"/>
-          <p:cNvSpPr txBox="1"/>
-          <p:nvPr/>
-        </p:nvSpPr>
-        <p:spPr>
-          <a:xfrm>
-            <a:off x="7726680" y="3813048"/>
-            <a:ext cx="1554480" cy="731520"/>
-          </a:xfrm>
-          <a:prstGeom prst="rect">
-            <a:avLst/>
-          </a:prstGeom>
-          <a:noFill/>
-          <a:ln/>
-        </p:spPr>
-        <p:txBody>
-          <a:bodyPr wrap="square" lIns="0" tIns="0" rIns="0" bIns="0" rtlCol="0" anchor="ctr"/>
-          <a:lstStyle/>
-          <a:p>
-            <a:pPr marL="0" indent="0">
-              <a:buNone/>
-            </a:pPr>
-            <a:r>
-              <a:rPr lang="en-US" sz="2800" b="1" dirty="0">
-                <a:solidFill>
-                  <a:schemeClr val="tx2"/>
-                </a:solidFill>
-              </a:rPr>
-              <a:t>≥ 60 %</a:t>
-            </a:r>
-            <a:endParaRPr lang="en-US" sz="2800" dirty="0"/>
-          </a:p>
-        </p:txBody>
-      </p:sp>
-      <p:sp>
-        <p:nvSpPr>
-          <p:cNvPr id="12" name="Text 9"/>
-          <p:cNvSpPr txBox="1"/>
-          <p:nvPr/>
-        </p:nvSpPr>
-        <p:spPr>
-          <a:xfrm>
-            <a:off x="9326880" y="3813048"/>
-            <a:ext cx="2194560" cy="731520"/>
-          </a:xfrm>
-          <a:prstGeom prst="rect">
-            <a:avLst/>
-          </a:prstGeom>
-          <a:noFill/>
-          <a:ln/>
-        </p:spPr>
-        <p:txBody>
-          <a:bodyPr wrap="square" lIns="0" tIns="0" rIns="0" bIns="0" rtlCol="0" anchor="ctr"/>
-          <a:lstStyle/>
-          <a:p>
-            <a:pPr marL="0" indent="0">
-              <a:buNone/>
-            </a:pPr>
-            <a:r>
-              <a:rPr lang="en-US" sz="1400" dirty="0">
-                <a:solidFill>
-                  <a:schemeClr val="tx1"/>
-                </a:solidFill>
-              </a:rPr>
-              <a:t>JaCoCo gate fails the build</a:t>
-            </a:r>
-            <a:endParaRPr lang="en-US" sz="1400" dirty="0"/>
-          </a:p>
-        </p:txBody>
-      </p:sp>
-      <p:sp>
-        <p:nvSpPr>
-          <p:cNvPr id="13" name="Text 10"/>
-          <p:cNvSpPr txBox="1"/>
-          <p:nvPr/>
-        </p:nvSpPr>
-        <p:spPr>
-          <a:xfrm>
-            <a:off x="7498080" y="4937760"/>
-            <a:ext cx="4114800" cy="1188720"/>
-          </a:xfrm>
-          <a:prstGeom prst="rect">
-            <a:avLst/>
-          </a:prstGeom>
-          <a:noFill/>
-          <a:ln/>
-        </p:spPr>
-        <p:txBody>
-          <a:bodyPr wrap="square" lIns="0" tIns="0" rIns="0" bIns="0" rtlCol="0" anchor="t"/>
-          <a:lstStyle/>
-          <a:p>
-            <a:pPr marL="0" indent="0">
-              <a:buNone/>
-            </a:pPr>
-            <a:r>
-              <a:rPr lang="en-US" sz="1400" b="1" dirty="0">
-                <a:solidFill>
-                  <a:schemeClr val="tx1"/>
-                </a:solidFill>
-              </a:rPr>
-              <a:t>Testcontainers </a:t>
-            </a:r>
-            <a:r>
-              <a:rPr lang="en-US" sz="1400" dirty="0">
-                <a:solidFill>
-                  <a:schemeClr val="tx1"/>
-                </a:solidFill>
-              </a:rPr>
-              <a:t>for every database-owning service · </a:t>
-            </a:r>
-            <a:r>
-              <a:rPr lang="en-US" sz="1400" b="1" dirty="0">
-                <a:solidFill>
-                  <a:schemeClr val="tx1"/>
-                </a:solidFill>
-              </a:rPr>
-              <a:t>embedded Kafka </a:t>
-            </a:r>
-            <a:r>
-              <a:rPr lang="en-US" sz="1400" dirty="0">
-                <a:solidFill>
-                  <a:schemeClr val="tx1"/>
-                </a:solidFill>
-              </a:rPr>
-              <a:t>for retry → DLT · </a:t>
-            </a:r>
-            <a:r>
-              <a:rPr lang="en-US" sz="1400" b="1" dirty="0">
-                <a:solidFill>
-                  <a:schemeClr val="tx1"/>
-                </a:solidFill>
-              </a:rPr>
-              <a:t>WireMock </a:t>
-            </a:r>
-            <a:r>
-              <a:rPr lang="en-US" sz="1400" dirty="0">
-                <a:solidFill>
-                  <a:schemeClr val="tx1"/>
-                </a:solidFill>
-              </a:rPr>
-              <a:t>for resilience and FR-14 · </a:t>
-            </a:r>
-            <a:r>
-              <a:rPr lang="en-US" sz="1400" b="1" dirty="0">
-                <a:solidFill>
-                  <a:schemeClr val="tx2"/>
-                </a:solidFill>
-              </a:rPr>
-              <a:t>scripts/e2e-check.sh: 39/39 live</a:t>
-            </a:r>
-            <a:endParaRPr lang="en-US" sz="1400" dirty="0"/>
-          </a:p>
-        </p:txBody>
-      </p:sp>
-      <p:sp>
-        <p:nvSpPr>
-          <p:cNvPr id="25" name="Slide Number Placeholder 0"/>
-          <p:cNvSpPr>
-            <a:spLocks noGrp="1"/>
-          </p:cNvSpPr>
-          <p:nvPr>
-            <p:ph type="sldNum" sz="quarter" idx="4294967295"/>
-          </p:nvPr>
-        </p:nvSpPr>
-        <p:spPr>
-          <a:xfrm>
-            <a:off x="11155680" y="6400800"/>
-            <a:ext cx="548640" cy="274320"/>
-          </a:xfrm>
-          <a:prstGeom prst="rect">
-            <a:avLst/>
-          </a:prstGeom>
-          <a:extLst>
-            <a:ext uri="{C572A759-6A51-4108-AA02-DFA0A04FC94B}">
-              <ma14:wrappingTextBoxFlag xmlns:ma14="http://schemas.microsoft.com/office/mac/drawingml/2011/main" xmlns="" val="0"/>
-            </a:ext>
-          </a:extLst>
-        </p:spPr>
-        <p:txBody>
-          <a:bodyPr/>
-          <a:lstStyle>
-            <a:lvl1pPr>
-              <a:defRPr sz="1000">
-                <a:solidFill>
-                  <a:schemeClr val="accent4"/>
-                </a:solidFill>
-              </a:defRPr>
-            </a:lvl1pPr>
-          </a:lstStyle>
-          <a:p>
-            <a:pPr algn="r"/>
-            <a:fld id="{F7021451-1387-4CA6-816F-3879F97B5CBC}" type="slidenum">
-              <a:rPr lang="en-US" b="0"/>
               <a:t>8</a:t>
             </a:fld>
             <a:endParaRPr lang="en-US"/>
+          </a:p>
+        </p:txBody>
+      </p:sp>
+      <p:sp>
+        <p:nvSpPr>
+          <p:cNvPr id="15" name="Presenter tag">
+            <a:extLst>
+              <a:ext uri="{FF2B5EF4-FFF2-40B4-BE49-F238E27FC236}">
+                <a16:creationId xmlns:a16="http://schemas.microsoft.com/office/drawing/2014/main" id="{68BE7D18-03C9-4B8D-83D5-B337EB8B847C}"/>
+              </a:ext>
+            </a:extLst>
+          </p:cNvPr>
+          <p:cNvSpPr/>
+          <p:nvPr/>
+        </p:nvSpPr>
+        <p:spPr>
+          <a:xfrm>
+            <a:off x="8585200" y="6375400"/>
+            <a:ext cx="2413000" cy="304800"/>
+          </a:xfrm>
+          <a:prstGeom prst="roundRect">
+            <a:avLst/>
+          </a:prstGeom>
+          <a:solidFill>
+            <a:srgbClr val="2A9D8F"/>
+          </a:solidFill>
+          <a:ln w="12700" cap="flat" cmpd="sng" algn="ctr">
+            <a:noFill/>
+            <a:prstDash val="solid"/>
+            <a:miter lim="800000"/>
+          </a:ln>
+          <a:effectLst/>
+          <a:extLst>
+            <a:ext uri="{91240B29-F687-4F45-9708-019B960494DF}">
+              <a14:hiddenLine xmlns:a14="http://schemas.microsoft.com/office/drawing/2010/main" w="12700" cap="flat" cmpd="sng" algn="ctr">
+                <a:solidFill>
+                  <a:schemeClr val="accent1">
+                    <a:shade val="50000"/>
+                  </a:schemeClr>
+                </a:solidFill>
+                <a:prstDash val="solid"/>
+                <a:miter lim="800000"/>
+              </a14:hiddenLine>
+            </a:ext>
+          </a:extLst>
+        </p:spPr>
+        <p:style>
+          <a:lnRef idx="2">
+            <a:schemeClr val="accent1">
+              <a:shade val="50000"/>
+            </a:schemeClr>
+          </a:lnRef>
+          <a:fillRef idx="1">
+            <a:schemeClr val="accent1"/>
+          </a:fillRef>
+          <a:effectRef idx="0">
+            <a:schemeClr val="accent1"/>
+          </a:effectRef>
+          <a:fontRef idx="minor">
+            <a:schemeClr val="lt1"/>
+          </a:fontRef>
+        </p:style>
+        <p:txBody>
+          <a:bodyPr wrap="none" lIns="50800" tIns="0" rIns="50800" bIns="0" rtlCol="0" anchor="ctr"/>
+          <a:lstStyle/>
+          <a:p>
+            <a:pPr algn="ctr"/>
+            <a:r>
+              <a:rPr lang="en-US" sz="1100" b="1">
+                <a:solidFill>
+                  <a:srgbClr val="FFFFFF"/>
+                </a:solidFill>
+                <a:latin typeface="Calibri" panose="020F0502020204030204" pitchFamily="34" charset="0"/>
+              </a:rPr>
+              <a:t>Presenter: Nourhan (A)</a:t>
+            </a:r>
           </a:p>
         </p:txBody>
       </p:sp>
@@ -12177,6 +14292,82 @@
               <a:t>9</a:t>
             </a:fld>
             <a:endParaRPr lang="en-US"/>
+          </a:p>
+        </p:txBody>
+      </p:sp>
+      <p:sp>
+        <p:nvSpPr>
+          <p:cNvPr id="14" name="Presenter tag">
+            <a:extLst>
+              <a:ext uri="{FF2B5EF4-FFF2-40B4-BE49-F238E27FC236}">
+                <a16:creationId xmlns:a16="http://schemas.microsoft.com/office/drawing/2014/main" id="{7D5B9634-E931-4696-B393-DB7845FAAD81}"/>
+              </a:ext>
+            </a:extLst>
+          </p:cNvPr>
+          <p:cNvSpPr/>
+          <p:nvPr/>
+        </p:nvSpPr>
+        <p:spPr>
+          <a:xfrm>
+            <a:off x="8585200" y="6375400"/>
+            <a:ext cx="2413000" cy="304800"/>
+          </a:xfrm>
+          <a:prstGeom prst="roundRect">
+            <a:avLst/>
+          </a:prstGeom>
+          <a:solidFill>
+            <a:srgbClr val="2A9D8F"/>
+          </a:solidFill>
+          <a:ln w="12700" cap="flat" cmpd="sng" algn="ctr">
+            <a:noFill/>
+            <a:prstDash val="solid"/>
+            <a:miter lim="800000"/>
+          </a:ln>
+          <a:effectLst/>
+          <a:extLst>
+            <a:ext uri="{91240B29-F687-4F45-9708-019B960494DF}">
+              <a14:hiddenLine xmlns:a14="http://schemas.microsoft.com/office/drawing/2010/main" w="12700" cap="flat" cmpd="sng" algn="ctr">
+                <a:solidFill>
+                  <a:schemeClr val="accent1">
+                    <a:shade val="50000"/>
+                  </a:schemeClr>
+                </a:solidFill>
+                <a:prstDash val="solid"/>
+                <a:miter lim="800000"/>
+              </a14:hiddenLine>
+            </a:ext>
+          </a:extLst>
+        </p:spPr>
+        <p:style>
+          <a:lnRef idx="2">
+            <a:schemeClr val="accent1">
+              <a:shade val="50000"/>
+            </a:schemeClr>
+          </a:lnRef>
+          <a:fillRef idx="1">
+            <a:schemeClr val="accent1"/>
+          </a:fillRef>
+          <a:effectRef idx="0">
+            <a:schemeClr val="accent1"/>
+          </a:effectRef>
+          <a:fontRef idx="minor">
+            <a:schemeClr val="lt1"/>
+          </a:fontRef>
+        </p:style>
+        <p:txBody>
+          <a:bodyPr wrap="none" lIns="50800" tIns="0" rIns="50800" bIns="0" rtlCol="0" anchor="ctr"/>
+          <a:lstStyle/>
+          <a:p>
+            <a:pPr algn="ctr"/>
+            <a:r>
+              <a:rPr lang="en-US" sz="1100" b="1">
+                <a:solidFill>
+                  <a:srgbClr val="FFFFFF"/>
+                </a:solidFill>
+                <a:latin typeface="Calibri" panose="020F0502020204030204" pitchFamily="34" charset="0"/>
+              </a:rPr>
+              <a:t>Presenter: Nourhan (A)</a:t>
+            </a:r>
           </a:p>
         </p:txBody>
       </p:sp>

--- a/docs/slides/capstone-final.pptx
+++ b/docs/slides/capstone-final.pptx
@@ -5,7 +5,7 @@
     <p:sldMasterId id="2147483648" r:id="rId1"/>
   </p:sldMasterIdLst>
   <p:notesMasterIdLst>
-    <p:notesMasterId r:id="rId17"/>
+    <p:notesMasterId r:id="rId21"/>
   </p:notesMasterIdLst>
   <p:sldIdLst>
     <p:sldId id="256" r:id="rId2"/>
@@ -15,14 +15,18 @@
     <p:sldId id="259" r:id="rId6"/>
     <p:sldId id="260" r:id="rId7"/>
     <p:sldId id="261" r:id="rId8"/>
-    <p:sldId id="262" r:id="rId9"/>
-    <p:sldId id="264" r:id="rId10"/>
-    <p:sldId id="263" r:id="rId11"/>
-    <p:sldId id="267" r:id="rId12"/>
-    <p:sldId id="265" r:id="rId13"/>
-    <p:sldId id="266" r:id="rId14"/>
-    <p:sldId id="268" r:id="rId15"/>
-    <p:sldId id="269" r:id="rId16"/>
+    <p:sldId id="271" r:id="rId9"/>
+    <p:sldId id="262" r:id="rId10"/>
+    <p:sldId id="264" r:id="rId11"/>
+    <p:sldId id="263" r:id="rId12"/>
+    <p:sldId id="267" r:id="rId13"/>
+    <p:sldId id="265" r:id="rId14"/>
+    <p:sldId id="272" r:id="rId15"/>
+    <p:sldId id="266" r:id="rId16"/>
+    <p:sldId id="273" r:id="rId17"/>
+    <p:sldId id="274" r:id="rId18"/>
+    <p:sldId id="268" r:id="rId19"/>
+    <p:sldId id="269" r:id="rId20"/>
   </p:sldIdLst>
   <p:sldSz cx="12192000" cy="6858000"/>
   <p:notesSz cx="6858000" cy="12192000"/>
@@ -134,6 +138,7 @@
             <p14:sldId id="259"/>
             <p14:sldId id="260"/>
             <p14:sldId id="261"/>
+            <p14:sldId id="271"/>
           </p14:sldIdLst>
         </p14:section>
         <p14:section name="Implementation" id="{B2434C25-559C-09CB-1EBB-EC62F51F9B9B}">
@@ -143,7 +148,10 @@
             <p14:sldId id="263"/>
             <p14:sldId id="267"/>
             <p14:sldId id="265"/>
+            <p14:sldId id="272"/>
             <p14:sldId id="266"/>
+            <p14:sldId id="273"/>
+            <p14:sldId id="274"/>
           </p14:sldIdLst>
         </p14:section>
         <p14:section name="Lessons" id="{1765C54B-27D1-6378-4A08-435ADE8D6A4A}">
@@ -1042,19 +1050,37 @@
           <a:p>
             <a:r>
               <a:rPr lang="en-US"/>
-              <a:t>Speaker: Doaa (C).</a:t>
+              <a:t>Speaker: Nourhan (A).</a:t>
             </a:r>
           </a:p>
           <a:p>
             <a:r>
               <a:rPr lang="en-US"/>
-              <a:t>331 tests across 10 modules; the chart is per module from mvn verify. The JaCoCo gate fails the build below 60 % on the service layer; order is at 85 %, inventory 78 %.</a:t>
+              <a:t>Measured on the merged branch, i5-1335U laptop, k6 on the same machine (Performance Report 8.2).</a:t>
             </a:r>
           </a:p>
           <a:p>
             <a:r>
               <a:rPr lang="en-US"/>
-              <a:t>Testcontainers for every database-owning service, embedded Kafka for retry → DLT, WireMock for resilience and FR-14, and 39 of 39 live end-to-end checks.</a:t>
+              <a:t>Met: throughput 59 req/s (target 50) and errors 0.00 % under load, 0.07 % under stress.</a:t>
+            </a:r>
+          </a:p>
+          <a:p>
+            <a:r>
+              <a:rPr lang="en-US"/>
+              <a:t>Not met here: GET /products p95 below 200 ms. Identical runs gave 475 and 932 ms because the Docker VM is 88 % CPU-busy under the mixed load; the catalogue alone gives 74 to 94 ms.</a:t>
+            </a:r>
+          </a:p>
+          <a:p>
+            <a:r>
+              <a:rPr lang="en-US"/>
+              <a:t>How we found the bottleneck: Zipkin showed 700 ms inside the gateway before forwarding; Java Flight Recorder showed threads waiting on SecureRandom. A session-backed request cache created a WebSession on every request.</a:t>
+            </a:r>
+          </a:p>
+          <a:p>
+            <a:r>
+              <a:rPr lang="en-US"/>
+              <a:t>Hand over: Doaa, how we test.</a:t>
             </a:r>
             <a:endParaRPr lang="en-US" dirty="0"/>
           </a:p>
@@ -1148,7 +1174,13 @@
           <a:p>
             <a:r>
               <a:rPr lang="en-US"/>
-              <a:t>Four bugs that only the whole-system run found, although every unit test was green. The first one is the case for a contract test (Pact) as next step.</a:t>
+              <a:t>331 tests across 10 modules; the chart is per module from mvn verify. The JaCoCo gate fails the build below 60 % on the service layer; order is at 85 %, inventory 78 %.</a:t>
+            </a:r>
+          </a:p>
+          <a:p>
+            <a:r>
+              <a:rPr lang="en-US"/>
+              <a:t>Testcontainers for every database-owning service, embedded Kafka for retry → DLT, WireMock for resilience and FR-14, and 39 of 39 live end-to-end checks.</a:t>
             </a:r>
             <a:endParaRPr lang="en-US" dirty="0"/>
           </a:p>
@@ -1242,13 +1274,7 @@
           <a:p>
             <a:r>
               <a:rPr lang="en-US"/>
-              <a:t>Our primary Bonus: a CQRS read model inside order-service with its own consumer group and tables (V50+), so no new deployable. A redelivered event never changes a count. Grafana shows orders per minute, revenue and Saga failure rate.</a:t>
-            </a:r>
-          </a:p>
-          <a:p>
-            <a:r>
-              <a:rPr lang="en-US"/>
-              <a:t>We also built B1 reviews, B3 tenants and B4 low-stock alerts.</a:t>
+              <a:t>Four bugs that only the whole-system run found, although every unit test was green. The first one is the case for a contract test (Pact) as next step.</a:t>
             </a:r>
             <a:endParaRPr lang="en-US" dirty="0"/>
           </a:p>
@@ -1342,13 +1368,13 @@
           <a:p>
             <a:r>
               <a:rPr lang="en-US"/>
-              <a:t>Compose: 17 containers, verify-l0.sh checks them. Images: multi-stage, non-root, healthcheck; CI tests, builds and pushes to GHCR with the commit SHA. Helm: one chart for every service. ArgoCD: automated sync with self-heal — a manual change in the cluster is reverted to Git.</a:t>
+              <a:t>Our primary Bonus: a CQRS read model inside order-service with its own consumer group and tables (V50+), so no new deployable. A redelivered event never changes a count. Grafana shows orders per minute, revenue and Saga failure rate.</a:t>
             </a:r>
           </a:p>
           <a:p>
             <a:r>
               <a:rPr lang="en-US"/>
-              <a:t>Hand over: Mohammed, lessons.</a:t>
+              <a:t>We also built B1 reviews, B3 tenants and B4 low-stock alerts.</a:t>
             </a:r>
             <a:endParaRPr lang="en-US" dirty="0"/>
           </a:p>
@@ -1436,19 +1462,19 @@
           <a:p>
             <a:r>
               <a:rPr lang="en-US"/>
-              <a:t>Speaker: Mohammed (B).</a:t>
+              <a:t>Speaker: Doaa (C).</a:t>
             </a:r>
           </a:p>
           <a:p>
             <a:r>
               <a:rPr lang="en-US"/>
-              <a:t>Three lessons: merge small PRs from day one; run the whole system early; a sweeper must use the Saga's outcome, not a timer. Then the debt we left on purpose, and why.</a:t>
+              <a:t>Compose: 17 containers, verify-l0.sh checks them. Images: multi-stage, non-root, healthcheck; CI tests, builds and pushes to GHCR with the commit SHA. Helm: one chart for every service. ArgoCD: automated sync with self-heal — a manual change in the cluster is reverted to Git.</a:t>
             </a:r>
           </a:p>
           <a:p>
             <a:r>
               <a:rPr lang="en-US"/>
-              <a:t>Then: let us show it live.</a:t>
+              <a:t>Hand over: Mohammed, lessons.</a:t>
             </a:r>
             <a:endParaRPr lang="en-US" dirty="0"/>
           </a:p>
@@ -1471,7 +1497,7 @@
           <a:p>
             <a:fld id="{F7021451-1387-4CA6-816F-3879F97B5CBC}" type="slidenum">
               <a:rPr lang="en-US"/>
-              <a:t>14</a:t>
+              <a:t>15</a:t>
             </a:fld>
             <a:endParaRPr lang="en-US"/>
           </a:p>
@@ -1517,7 +1543,21 @@
             <p:ph type="sldImg"/>
           </p:nvPr>
         </p:nvSpPr>
-        <p:spPr/>
+        <p:spPr>
+          <a:xfrm>
+            <a:off x="-228600" y="1524000"/>
+            <a:ext cx="7315200" cy="4114800"/>
+          </a:xfrm>
+          <a:prstGeom prst="rect">
+            <a:avLst/>
+          </a:prstGeom>
+          <a:noFill/>
+          <a:ln w="12700">
+            <a:solidFill>
+              <a:prstClr val="black"/>
+            </a:solidFill>
+          </a:ln>
+        </p:spPr>
       </p:sp>
       <p:sp>
         <p:nvSpPr>
@@ -1529,38 +1569,98 @@
             <p:ph type="body" idx="1"/>
           </p:nvPr>
         </p:nvSpPr>
+        <p:spPr>
+          <a:xfrm>
+            <a:off x="685800" y="5867400"/>
+            <a:ext cx="5486400" cy="4800600"/>
+          </a:xfrm>
+          <a:prstGeom prst="rect">
+            <a:avLst/>
+          </a:prstGeom>
+        </p:spPr>
+        <p:txBody>
+          <a:bodyPr/>
+          <a:lstStyle/>
+          <a:p>
+            <a:r>
+              <a:rPr lang="en-US"/>
+              <a:t>Live: kubectl -n ecommerce scale deploy/product-service --replicas=0, then watch the product-service card go OutOfSync and back to Synced/Healthy in about 20 seconds.</a:t>
+            </a:r>
+          </a:p>
+        </p:txBody>
+      </p:sp>
+    </p:spTree>
+    <p:extLst>
+      <p:ext uri="{BB962C8B-B14F-4D97-AF65-F5344CB8AC3E}">
+        <p14:creationId xmlns:p14="http://schemas.microsoft.com/office/powerpoint/2010/main" val="1453160512"/>
+      </p:ext>
+    </p:extLst>
+  </p:cSld>
+  <p:clrMapOvr>
+    <a:masterClrMapping/>
+  </p:clrMapOvr>
+</p:notes>
+</file>
+
+<file path=ppt/notesSlides/notesSlide16.xml><?xml version="1.0" encoding="utf-8"?>
+<p:notes xmlns:a="http://schemas.openxmlformats.org/drawingml/2006/main" xmlns:r="http://schemas.openxmlformats.org/officeDocument/2006/relationships" xmlns:p="http://schemas.openxmlformats.org/presentationml/2006/main">
+  <p:cSld>
+    <p:spTree>
+      <p:nvGrpSpPr>
+        <p:cNvPr id="1" name=""/>
+        <p:cNvGrpSpPr/>
+        <p:nvPr/>
+      </p:nvGrpSpPr>
+      <p:grpSpPr>
+        <a:xfrm>
+          <a:off x="0" y="0"/>
+          <a:ext cx="0" cy="0"/>
+          <a:chOff x="0" y="0"/>
+          <a:chExt cx="0" cy="0"/>
+        </a:xfrm>
+      </p:grpSpPr>
+      <p:sp>
+        <p:nvSpPr>
+          <p:cNvPr id="2" name="Slide Image Placeholder 1"/>
+          <p:cNvSpPr>
+            <a:spLocks noGrp="1" noRot="1" noChangeAspect="1"/>
+          </p:cNvSpPr>
+          <p:nvPr>
+            <p:ph type="sldImg"/>
+          </p:nvPr>
+        </p:nvSpPr>
         <p:spPr/>
+      </p:sp>
+      <p:sp>
+        <p:nvSpPr>
+          <p:cNvPr id="3" name="Notes Placeholder 2"/>
+          <p:cNvSpPr>
+            <a:spLocks noGrp="1"/>
+          </p:cNvSpPr>
+          <p:nvPr>
+            <p:ph type="body" idx="1"/>
+          </p:nvPr>
+        </p:nvSpPr>
+        <p:spPr/>
         <p:txBody>
           <a:bodyPr/>
           <a:lstStyle/>
           <a:p>
             <a:r>
               <a:rPr lang="en-US"/>
-              <a:t>All three, in this order (commands in README).</a:t>
+              <a:t>Speaker: Mohammed (B).</a:t>
             </a:r>
           </a:p>
           <a:p>
             <a:r>
               <a:rPr lang="en-US"/>
-              <a:t>1. Mohammed: scripts/verify-l0.sh → L0 GREEN; place an order → 201 PENDING → CONFIRMED; open the Zipkin trace of that order.</a:t>
+              <a:t>Three lessons: merge small PRs from day one; run the whole system early; a sweeper must use the Saga's outcome, not a timer. Then the debt we left on purpose, and why.</a:t>
             </a:r>
           </a:p>
           <a:p>
             <a:r>
               <a:rPr lang="en-US"/>
-              <a:t>2. Nourhan: public GET 200, no token 401, customer write 403, burst 429; k6 result and the gateway fix.</a:t>
-            </a:r>
-          </a:p>
-          <a:p>
-            <a:r>
-              <a:rPr lang="en-US"/>
-              <a:t>3. Doaa: PAYMENT_FAILURE_RATE=1.0 → order CANCELLED and stock back; stop payment-service → order stays PENDING, start it → CONFIRMED; ArgoCD self-heal; Grafana Order Analytics.</a:t>
-            </a:r>
-          </a:p>
-          <a:p>
-            <a:r>
-              <a:rPr lang="en-US"/>
-              <a:t>Close: questions — any of us on any service.</a:t>
+              <a:t>Then: let us show it live.</a:t>
             </a:r>
             <a:endParaRPr lang="en-US" dirty="0"/>
           </a:p>
@@ -1583,7 +1683,119 @@
           <a:p>
             <a:fld id="{F7021451-1387-4CA6-816F-3879F97B5CBC}" type="slidenum">
               <a:rPr lang="en-US"/>
-              <a:t>15</a:t>
+              <a:t>18</a:t>
+            </a:fld>
+            <a:endParaRPr lang="en-US"/>
+          </a:p>
+        </p:txBody>
+      </p:sp>
+    </p:spTree>
+    <p:extLst>
+      <p:ext uri="{BB962C8B-B14F-4D97-AF65-F5344CB8AC3E}">
+        <p14:creationId xmlns:p14="http://schemas.microsoft.com/office/powerpoint/2010/main" val="1024086991"/>
+      </p:ext>
+    </p:extLst>
+  </p:cSld>
+  <p:clrMapOvr>
+    <a:masterClrMapping/>
+  </p:clrMapOvr>
+</p:notes>
+</file>
+
+<file path=ppt/notesSlides/notesSlide17.xml><?xml version="1.0" encoding="utf-8"?>
+<p:notes xmlns:a="http://schemas.openxmlformats.org/drawingml/2006/main" xmlns:r="http://schemas.openxmlformats.org/officeDocument/2006/relationships" xmlns:p="http://schemas.openxmlformats.org/presentationml/2006/main">
+  <p:cSld>
+    <p:spTree>
+      <p:nvGrpSpPr>
+        <p:cNvPr id="1" name=""/>
+        <p:cNvGrpSpPr/>
+        <p:nvPr/>
+      </p:nvGrpSpPr>
+      <p:grpSpPr>
+        <a:xfrm>
+          <a:off x="0" y="0"/>
+          <a:ext cx="0" cy="0"/>
+          <a:chOff x="0" y="0"/>
+          <a:chExt cx="0" cy="0"/>
+        </a:xfrm>
+      </p:grpSpPr>
+      <p:sp>
+        <p:nvSpPr>
+          <p:cNvPr id="2" name="Slide Image Placeholder 1"/>
+          <p:cNvSpPr>
+            <a:spLocks noGrp="1" noRot="1" noChangeAspect="1"/>
+          </p:cNvSpPr>
+          <p:nvPr>
+            <p:ph type="sldImg"/>
+          </p:nvPr>
+        </p:nvSpPr>
+        <p:spPr/>
+      </p:sp>
+      <p:sp>
+        <p:nvSpPr>
+          <p:cNvPr id="3" name="Notes Placeholder 2"/>
+          <p:cNvSpPr>
+            <a:spLocks noGrp="1"/>
+          </p:cNvSpPr>
+          <p:nvPr>
+            <p:ph type="body" idx="1"/>
+          </p:nvPr>
+        </p:nvSpPr>
+        <p:spPr/>
+        <p:txBody>
+          <a:bodyPr/>
+          <a:lstStyle/>
+          <a:p>
+            <a:r>
+              <a:rPr lang="en-US"/>
+              <a:t>All three, in this order (commands in README).</a:t>
+            </a:r>
+          </a:p>
+          <a:p>
+            <a:r>
+              <a:rPr lang="en-US"/>
+              <a:t>1. Mohammed: scripts/verify-l0.sh → L0 GREEN; place an order → 201 PENDING → CONFIRMED; open the Zipkin trace of that order.</a:t>
+            </a:r>
+          </a:p>
+          <a:p>
+            <a:r>
+              <a:rPr lang="en-US"/>
+              <a:t>2. Nourhan: public GET 200, no token 401, customer write 403, burst 429; k6 result and the gateway fix.</a:t>
+            </a:r>
+          </a:p>
+          <a:p>
+            <a:r>
+              <a:rPr lang="en-US"/>
+              <a:t>3. Doaa: PAYMENT_FAILURE_RATE=1.0 → order CANCELLED and stock back; stop payment-service → order stays PENDING, start it → CONFIRMED; ArgoCD self-heal; Grafana Order Analytics.</a:t>
+            </a:r>
+          </a:p>
+          <a:p>
+            <a:r>
+              <a:rPr lang="en-US"/>
+              <a:t>Close: questions — any of us on any service.</a:t>
+            </a:r>
+            <a:endParaRPr lang="en-US" dirty="0"/>
+          </a:p>
+        </p:txBody>
+      </p:sp>
+      <p:sp>
+        <p:nvSpPr>
+          <p:cNvPr id="4" name="Slide Number Placeholder 3"/>
+          <p:cNvSpPr>
+            <a:spLocks noGrp="1"/>
+          </p:cNvSpPr>
+          <p:nvPr>
+            <p:ph type="sldNum" sz="quarter" idx="10"/>
+          </p:nvPr>
+        </p:nvSpPr>
+        <p:spPr/>
+        <p:txBody>
+          <a:bodyPr/>
+          <a:lstStyle/>
+          <a:p>
+            <a:fld id="{F7021451-1387-4CA6-816F-3879F97B5CBC}" type="slidenum">
+              <a:rPr lang="en-US"/>
+              <a:t>19</a:t>
             </a:fld>
             <a:endParaRPr lang="en-US"/>
           </a:p>
@@ -2233,7 +2445,21 @@
             <p:ph type="sldImg"/>
           </p:nvPr>
         </p:nvSpPr>
-        <p:spPr/>
+        <p:spPr>
+          <a:xfrm>
+            <a:off x="-228600" y="1524000"/>
+            <a:ext cx="7315200" cy="4114800"/>
+          </a:xfrm>
+          <a:prstGeom prst="rect">
+            <a:avLst/>
+          </a:prstGeom>
+          <a:noFill/>
+          <a:ln w="12700">
+            <a:solidFill>
+              <a:prstClr val="black"/>
+            </a:solidFill>
+          </a:ln>
+        </p:spPr>
       </p:sp>
       <p:sp>
         <p:nvSpPr>
@@ -2245,64 +2471,30 @@
             <p:ph type="body" idx="1"/>
           </p:nvPr>
         </p:nvSpPr>
-        <p:spPr/>
+        <p:spPr>
+          <a:xfrm>
+            <a:off x="685800" y="5867400"/>
+            <a:ext cx="5486400" cy="4800600"/>
+          </a:xfrm>
+          <a:prstGeom prst="rect">
+            <a:avLst/>
+          </a:prstGeom>
+        </p:spPr>
         <p:txBody>
           <a:bodyPr/>
           <a:lstStyle/>
           <a:p>
             <a:r>
               <a:rPr lang="en-US"/>
-              <a:t>Speaker: Nourhan (A).</a:t>
-            </a:r>
-          </a:p>
-          <a:p>
-            <a:r>
-              <a:rPr lang="en-US"/>
-              <a:t>The gateway is the trust boundary: JWT from Keycloak, roles per path, X-User-* headers stripped and rebuilt from the token, 401/403/429 as RFC 7807.</a:t>
-            </a:r>
-          </a:p>
-          <a:p>
-            <a:r>
-              <a:rPr lang="en-US"/>
-              <a:t>Every service validates the JWT again. FR-14: order-service calls inventory with its own client-credentials token; a customer token gets 403.</a:t>
-            </a:r>
-          </a:p>
-          <a:p>
-            <a:r>
-              <a:rPr lang="en-US"/>
-              <a:t>Secrets live only in .env and Kubernetes Secrets; gitleaks runs in CI.</a:t>
-            </a:r>
-            <a:endParaRPr lang="en-US" dirty="0"/>
-          </a:p>
-        </p:txBody>
-      </p:sp>
-      <p:sp>
-        <p:nvSpPr>
-          <p:cNvPr id="4" name="Slide Number Placeholder 3"/>
-          <p:cNvSpPr>
-            <a:spLocks noGrp="1"/>
-          </p:cNvSpPr>
-          <p:nvPr>
-            <p:ph type="sldNum" sz="quarter" idx="10"/>
-          </p:nvPr>
-        </p:nvSpPr>
-        <p:spPr/>
-        <p:txBody>
-          <a:bodyPr/>
-          <a:lstStyle/>
-          <a:p>
-            <a:fld id="{F7021451-1387-4CA6-816F-3879F97B5CBC}" type="slidenum">
-              <a:rPr lang="en-US"/>
-              <a:t>8</a:t>
-            </a:fld>
-            <a:endParaRPr lang="en-US"/>
+              <a:t>Show this live in Zipkin: search by service order-service, open the newest POST. Point at the outbox publish span, then the inventory, payment and notification consumers.</a:t>
+            </a:r>
           </a:p>
         </p:txBody>
       </p:sp>
     </p:spTree>
     <p:extLst>
       <p:ext uri="{BB962C8B-B14F-4D97-AF65-F5344CB8AC3E}">
-        <p14:creationId xmlns:p14="http://schemas.microsoft.com/office/powerpoint/2010/main" val="1024086991"/>
+        <p14:creationId xmlns:p14="http://schemas.microsoft.com/office/powerpoint/2010/main" val="3074964547"/>
       </p:ext>
     </p:extLst>
   </p:cSld>
@@ -2364,31 +2556,19 @@
           <a:p>
             <a:r>
               <a:rPr lang="en-US"/>
-              <a:t>Measured on the merged branch, i5-1335U laptop, k6 on the same machine (Performance Report 8.2).</a:t>
+              <a:t>The gateway is the trust boundary: JWT from Keycloak, roles per path, X-User-* headers stripped and rebuilt from the token, 401/403/429 as RFC 7807.</a:t>
             </a:r>
           </a:p>
           <a:p>
             <a:r>
               <a:rPr lang="en-US"/>
-              <a:t>Met: throughput 59 req/s (target 50) and errors 0.00 % under load, 0.07 % under stress.</a:t>
+              <a:t>Every service validates the JWT again. FR-14: order-service calls inventory with its own client-credentials token; a customer token gets 403.</a:t>
             </a:r>
           </a:p>
           <a:p>
             <a:r>
               <a:rPr lang="en-US"/>
-              <a:t>Not met here: GET /products p95 below 200 ms. Identical runs gave 475 and 932 ms because the Docker VM is 88 % CPU-busy under the mixed load; the catalogue alone gives 74 to 94 ms.</a:t>
-            </a:r>
-          </a:p>
-          <a:p>
-            <a:r>
-              <a:rPr lang="en-US"/>
-              <a:t>How we found the bottleneck: Zipkin showed 700 ms inside the gateway before forwarding; Java Flight Recorder showed threads waiting on SecureRandom. A session-backed request cache created a WebSession on every request.</a:t>
-            </a:r>
-          </a:p>
-          <a:p>
-            <a:r>
-              <a:rPr lang="en-US"/>
-              <a:t>Hand over: Doaa, how we test.</a:t>
+              <a:t>Secrets live only in .env and Kubernetes Secrets; gitleaks runs in CI.</a:t>
             </a:r>
             <a:endParaRPr lang="en-US" dirty="0"/>
           </a:p>
@@ -2697,7 +2877,7 @@
           </a:prstGeom>
           <a:extLst>
             <a:ext uri="{C572A759-6A51-4108-AA02-DFA0A04FC94B}">
-              <ma14:wrappingTextBoxFlag xmlns:ma14="http://schemas.microsoft.com/office/mac/drawingml/2011/main" xmlns="" val="0"/>
+              <ma14:wrappingTextBoxFlag xmlns="" xmlns:ma14="http://schemas.microsoft.com/office/mac/drawingml/2011/main" val="0"/>
             </a:ext>
           </a:extLst>
         </p:spPr>
@@ -2772,7 +2952,7 @@
           </a:prstGeom>
           <a:extLst>
             <a:ext uri="{C572A759-6A51-4108-AA02-DFA0A04FC94B}">
-              <ma14:wrappingTextBoxFlag xmlns:ma14="http://schemas.microsoft.com/office/mac/drawingml/2011/main" xmlns="" val="0"/>
+              <ma14:wrappingTextBoxFlag xmlns="" xmlns:ma14="http://schemas.microsoft.com/office/mac/drawingml/2011/main" val="0"/>
             </a:ext>
           </a:extLst>
         </p:spPr>
@@ -3164,7 +3344,23 @@
                   <a:schemeClr val="accent5"/>
                 </a:solidFill>
               </a:rPr>
-              <a:t>Nourhan Fahmy (A) · Mohammed Selim (B) · Doaa Amr (C) — Trainer: Dr. ElSayed Baladoh</a:t>
+              <a:t>Nourhan Fahmy (A) </a:t>
+            </a:r>
+            <a:r>
+              <a:rPr lang="en-US" sz="1600">
+                <a:solidFill>
+                  <a:schemeClr val="accent5"/>
+                </a:solidFill>
+              </a:rPr>
+              <a:t>· Mohamed Seliem </a:t>
+            </a:r>
+            <a:r>
+              <a:rPr lang="en-US" sz="1600" dirty="0">
+                <a:solidFill>
+                  <a:schemeClr val="accent5"/>
+                </a:solidFill>
+              </a:rPr>
+              <a:t>(B) · Doaa Amr (C) — Trainer: Dr. ElSayed Baladoh</a:t>
             </a:r>
             <a:endParaRPr lang="en-US" sz="2000" dirty="0"/>
           </a:p>
@@ -3255,6 +3451,608 @@
 </file>
 
 <file path=ppt/slides/slide10.xml><?xml version="1.0" encoding="utf-8"?>
+<p:sld xmlns:a="http://schemas.openxmlformats.org/drawingml/2006/main" xmlns:r="http://schemas.openxmlformats.org/officeDocument/2006/relationships" xmlns:p="http://schemas.openxmlformats.org/presentationml/2006/main">
+  <p:cSld name="Slide 9">
+    <p:spTree>
+      <p:nvGrpSpPr>
+        <p:cNvPr id="1" name=""/>
+        <p:cNvGrpSpPr/>
+        <p:nvPr/>
+      </p:nvGrpSpPr>
+      <p:grpSpPr>
+        <a:xfrm>
+          <a:off x="0" y="0"/>
+          <a:ext cx="0" cy="0"/>
+          <a:chOff x="0" y="0"/>
+          <a:chExt cx="0" cy="0"/>
+        </a:xfrm>
+      </p:grpSpPr>
+      <p:sp>
+        <p:nvSpPr>
+          <p:cNvPr id="2" name="Text 0"/>
+          <p:cNvSpPr>
+            <a:spLocks noGrp="1"/>
+          </p:cNvSpPr>
+          <p:nvPr>
+            <p:ph type="title" idx="100" hasCustomPrompt="1"/>
+          </p:nvPr>
+        </p:nvSpPr>
+        <p:spPr>
+          <a:xfrm>
+            <a:off x="548640" y="320040"/>
+            <a:ext cx="11064240" cy="822960"/>
+          </a:xfrm>
+          <a:prstGeom prst="rect">
+            <a:avLst/>
+          </a:prstGeom>
+          <a:noFill/>
+          <a:ln/>
+        </p:spPr>
+        <p:txBody>
+          <a:bodyPr wrap="square" rtlCol="0" anchor="ctr"/>
+          <a:lstStyle/>
+          <a:p>
+            <a:pPr marL="0" indent="0">
+              <a:buNone/>
+            </a:pPr>
+            <a:r>
+              <a:rPr lang="en-US" sz="3200" b="1" dirty="0">
+                <a:solidFill>
+                  <a:schemeClr val="tx2"/>
+                </a:solidFill>
+              </a:rPr>
+              <a:t>Performance: one bottleneck found and fixed</a:t>
+            </a:r>
+            <a:endParaRPr lang="en-US" sz="3200" dirty="0"/>
+          </a:p>
+        </p:txBody>
+      </p:sp>
+      <p:graphicFrame>
+        <p:nvGraphicFramePr>
+          <p:cNvPr id="3" name="Chart 0"/>
+          <p:cNvGraphicFramePr/>
+          <p:nvPr>
+            <p:extLst>
+              <p:ext uri="{D42A27DB-BD31-4B8C-83A1-F6EECF244321}">
+                <p14:modId xmlns:p14="http://schemas.microsoft.com/office/powerpoint/2010/main" val="2371585072"/>
+              </p:ext>
+            </p:extLst>
+          </p:nvPr>
+        </p:nvGraphicFramePr>
+        <p:xfrm>
+          <a:off x="548640" y="1325880"/>
+          <a:ext cx="6035040" cy="4206240"/>
+        </p:xfrm>
+        <a:graphic>
+          <a:graphicData uri="http://schemas.openxmlformats.org/drawingml/2006/chart">
+            <c:chart xmlns:c="http://schemas.openxmlformats.org/drawingml/2006/chart" xmlns:r="http://schemas.openxmlformats.org/officeDocument/2006/relationships" r:id="rId3"/>
+          </a:graphicData>
+        </a:graphic>
+      </p:graphicFrame>
+      <p:sp>
+        <p:nvSpPr>
+          <p:cNvPr id="4" name="Shape 1"/>
+          <p:cNvSpPr/>
+          <p:nvPr/>
+        </p:nvSpPr>
+        <p:spPr>
+          <a:xfrm>
+            <a:off x="6949440" y="1417320"/>
+            <a:ext cx="4663440" cy="914400"/>
+          </a:xfrm>
+          <a:prstGeom prst="roundRect">
+            <a:avLst>
+              <a:gd name="adj" fmla="val 8000"/>
+            </a:avLst>
+          </a:prstGeom>
+          <a:solidFill>
+            <a:schemeClr val="bg2"/>
+          </a:solidFill>
+          <a:ln w="12700">
+            <a:solidFill>
+              <a:schemeClr val="bg2"/>
+            </a:solidFill>
+            <a:prstDash val="solid"/>
+          </a:ln>
+        </p:spPr>
+        <p:txBody>
+          <a:bodyPr/>
+          <a:lstStyle/>
+          <a:p>
+            <a:endParaRPr lang="en-US"/>
+          </a:p>
+        </p:txBody>
+      </p:sp>
+      <p:sp>
+        <p:nvSpPr>
+          <p:cNvPr id="5" name="Text 2"/>
+          <p:cNvSpPr txBox="1"/>
+          <p:nvPr/>
+        </p:nvSpPr>
+        <p:spPr>
+          <a:xfrm>
+            <a:off x="7178040" y="1508760"/>
+            <a:ext cx="2103120" cy="731520"/>
+          </a:xfrm>
+          <a:prstGeom prst="rect">
+            <a:avLst/>
+          </a:prstGeom>
+          <a:noFill/>
+          <a:ln/>
+        </p:spPr>
+        <p:txBody>
+          <a:bodyPr wrap="square" lIns="0" tIns="0" rIns="0" bIns="0" rtlCol="0" anchor="ctr"/>
+          <a:lstStyle/>
+          <a:p>
+            <a:pPr marL="0" indent="0">
+              <a:buNone/>
+            </a:pPr>
+            <a:r>
+              <a:rPr lang="en-US" sz="2400" b="1" dirty="0">
+                <a:solidFill>
+                  <a:schemeClr val="tx2"/>
+                </a:solidFill>
+              </a:rPr>
+              <a:t>59 req/s</a:t>
+            </a:r>
+            <a:endParaRPr lang="en-US" sz="2400" dirty="0"/>
+          </a:p>
+        </p:txBody>
+      </p:sp>
+      <p:sp>
+        <p:nvSpPr>
+          <p:cNvPr id="6" name="Text 3"/>
+          <p:cNvSpPr txBox="1"/>
+          <p:nvPr/>
+        </p:nvSpPr>
+        <p:spPr>
+          <a:xfrm>
+            <a:off x="9326880" y="1508760"/>
+            <a:ext cx="2194560" cy="731520"/>
+          </a:xfrm>
+          <a:prstGeom prst="rect">
+            <a:avLst/>
+          </a:prstGeom>
+          <a:noFill/>
+          <a:ln/>
+        </p:spPr>
+        <p:txBody>
+          <a:bodyPr wrap="square" lIns="0" tIns="0" rIns="0" bIns="0" rtlCol="0" anchor="ctr"/>
+          <a:lstStyle/>
+          <a:p>
+            <a:pPr marL="0" indent="0">
+              <a:buNone/>
+            </a:pPr>
+            <a:r>
+              <a:rPr lang="en-US" sz="1400" dirty="0">
+                <a:solidFill>
+                  <a:schemeClr val="tx1"/>
+                </a:solidFill>
+              </a:rPr>
+              <a:t>catalogue reads (target ≥ 50)</a:t>
+            </a:r>
+            <a:endParaRPr lang="en-US" sz="1400" dirty="0"/>
+          </a:p>
+        </p:txBody>
+      </p:sp>
+      <p:sp>
+        <p:nvSpPr>
+          <p:cNvPr id="7" name="Shape 4"/>
+          <p:cNvSpPr/>
+          <p:nvPr/>
+        </p:nvSpPr>
+        <p:spPr>
+          <a:xfrm>
+            <a:off x="6949440" y="2514600"/>
+            <a:ext cx="4663440" cy="914400"/>
+          </a:xfrm>
+          <a:prstGeom prst="roundRect">
+            <a:avLst>
+              <a:gd name="adj" fmla="val 8000"/>
+            </a:avLst>
+          </a:prstGeom>
+          <a:solidFill>
+            <a:schemeClr val="bg2"/>
+          </a:solidFill>
+          <a:ln w="12700">
+            <a:solidFill>
+              <a:schemeClr val="bg2"/>
+            </a:solidFill>
+            <a:prstDash val="solid"/>
+          </a:ln>
+        </p:spPr>
+        <p:txBody>
+          <a:bodyPr/>
+          <a:lstStyle/>
+          <a:p>
+            <a:endParaRPr lang="en-US"/>
+          </a:p>
+        </p:txBody>
+      </p:sp>
+      <p:sp>
+        <p:nvSpPr>
+          <p:cNvPr id="8" name="Text 5"/>
+          <p:cNvSpPr txBox="1"/>
+          <p:nvPr/>
+        </p:nvSpPr>
+        <p:spPr>
+          <a:xfrm>
+            <a:off x="7178040" y="2606040"/>
+            <a:ext cx="2103120" cy="731520"/>
+          </a:xfrm>
+          <a:prstGeom prst="rect">
+            <a:avLst/>
+          </a:prstGeom>
+          <a:noFill/>
+          <a:ln/>
+        </p:spPr>
+        <p:txBody>
+          <a:bodyPr wrap="square" lIns="0" tIns="0" rIns="0" bIns="0" rtlCol="0" anchor="ctr"/>
+          <a:lstStyle/>
+          <a:p>
+            <a:pPr marL="0" indent="0">
+              <a:buNone/>
+            </a:pPr>
+            <a:r>
+              <a:rPr lang="en-US" sz="2400" b="1" dirty="0">
+                <a:solidFill>
+                  <a:schemeClr val="tx2"/>
+                </a:solidFill>
+              </a:rPr>
+              <a:t>0.00 %</a:t>
+            </a:r>
+            <a:endParaRPr lang="en-US" sz="2400" dirty="0"/>
+          </a:p>
+        </p:txBody>
+      </p:sp>
+      <p:sp>
+        <p:nvSpPr>
+          <p:cNvPr id="9" name="Text 6"/>
+          <p:cNvSpPr txBox="1"/>
+          <p:nvPr/>
+        </p:nvSpPr>
+        <p:spPr>
+          <a:xfrm>
+            <a:off x="9326880" y="2606040"/>
+            <a:ext cx="2194560" cy="731520"/>
+          </a:xfrm>
+          <a:prstGeom prst="rect">
+            <a:avLst/>
+          </a:prstGeom>
+          <a:noFill/>
+          <a:ln/>
+        </p:spPr>
+        <p:txBody>
+          <a:bodyPr wrap="square" lIns="0" tIns="0" rIns="0" bIns="0" rtlCol="0" anchor="ctr"/>
+          <a:lstStyle/>
+          <a:p>
+            <a:pPr marL="0" indent="0">
+              <a:buNone/>
+            </a:pPr>
+            <a:r>
+              <a:rPr lang="en-US" sz="1400" dirty="0">
+                <a:solidFill>
+                  <a:schemeClr val="tx1"/>
+                </a:solidFill>
+              </a:rPr>
+              <a:t>errors over 25,644 </a:t>
+            </a:r>
+            <a:r>
+              <a:rPr lang="en-US" sz="1400">
+                <a:solidFill>
+                  <a:schemeClr val="tx1"/>
+                </a:solidFill>
+              </a:rPr>
+              <a:t>requests (5 min load)</a:t>
+            </a:r>
+            <a:endParaRPr lang="en-US" sz="1400" dirty="0"/>
+          </a:p>
+        </p:txBody>
+      </p:sp>
+      <p:sp>
+        <p:nvSpPr>
+          <p:cNvPr id="10" name="Shape 7"/>
+          <p:cNvSpPr/>
+          <p:nvPr/>
+        </p:nvSpPr>
+        <p:spPr>
+          <a:xfrm>
+            <a:off x="6949440" y="3611880"/>
+            <a:ext cx="4663440" cy="914400"/>
+          </a:xfrm>
+          <a:prstGeom prst="roundRect">
+            <a:avLst>
+              <a:gd name="adj" fmla="val 8000"/>
+            </a:avLst>
+          </a:prstGeom>
+          <a:solidFill>
+            <a:schemeClr val="bg2"/>
+          </a:solidFill>
+          <a:ln w="12700">
+            <a:solidFill>
+              <a:schemeClr val="bg2"/>
+            </a:solidFill>
+            <a:prstDash val="solid"/>
+          </a:ln>
+        </p:spPr>
+        <p:txBody>
+          <a:bodyPr/>
+          <a:lstStyle/>
+          <a:p>
+            <a:endParaRPr lang="en-US"/>
+          </a:p>
+        </p:txBody>
+      </p:sp>
+      <p:sp>
+        <p:nvSpPr>
+          <p:cNvPr id="11" name="Text 8"/>
+          <p:cNvSpPr txBox="1"/>
+          <p:nvPr/>
+        </p:nvSpPr>
+        <p:spPr>
+          <a:xfrm>
+            <a:off x="7178040" y="3703320"/>
+            <a:ext cx="2103120" cy="731520"/>
+          </a:xfrm>
+          <a:prstGeom prst="rect">
+            <a:avLst/>
+          </a:prstGeom>
+          <a:noFill/>
+          <a:ln/>
+        </p:spPr>
+        <p:txBody>
+          <a:bodyPr wrap="square" lIns="0" tIns="0" rIns="0" bIns="0" rtlCol="0" anchor="ctr"/>
+          <a:lstStyle/>
+          <a:p>
+            <a:pPr marL="0" indent="0">
+              <a:buNone/>
+            </a:pPr>
+            <a:r>
+              <a:rPr lang="en-US" sz="2400" b="1" dirty="0">
+                <a:solidFill>
+                  <a:schemeClr val="tx2"/>
+                </a:solidFill>
+              </a:rPr>
+              <a:t>0.07 %</a:t>
+            </a:r>
+            <a:endParaRPr lang="en-US" sz="2400" dirty="0"/>
+          </a:p>
+        </p:txBody>
+      </p:sp>
+      <p:sp>
+        <p:nvSpPr>
+          <p:cNvPr id="12" name="Text 9"/>
+          <p:cNvSpPr txBox="1"/>
+          <p:nvPr/>
+        </p:nvSpPr>
+        <p:spPr>
+          <a:xfrm>
+            <a:off x="9326880" y="3703320"/>
+            <a:ext cx="2194560" cy="731520"/>
+          </a:xfrm>
+          <a:prstGeom prst="rect">
+            <a:avLst/>
+          </a:prstGeom>
+          <a:noFill/>
+          <a:ln/>
+        </p:spPr>
+        <p:txBody>
+          <a:bodyPr wrap="square" lIns="0" tIns="0" rIns="0" bIns="0" rtlCol="0" anchor="ctr"/>
+          <a:lstStyle/>
+          <a:p>
+            <a:pPr marL="0" indent="0">
+              <a:buNone/>
+            </a:pPr>
+            <a:r>
+              <a:rPr lang="en-US" sz="1400" dirty="0">
+                <a:solidFill>
+                  <a:schemeClr val="tx1"/>
+                </a:solidFill>
+              </a:rPr>
+              <a:t>errors over 64,159 requests at up to 150 VUs</a:t>
+            </a:r>
+            <a:endParaRPr lang="en-US" sz="1400" dirty="0"/>
+          </a:p>
+        </p:txBody>
+      </p:sp>
+      <p:sp>
+        <p:nvSpPr>
+          <p:cNvPr id="13" name="Text 10"/>
+          <p:cNvSpPr txBox="1"/>
+          <p:nvPr/>
+        </p:nvSpPr>
+        <p:spPr>
+          <a:xfrm>
+            <a:off x="6949440" y="4800600"/>
+            <a:ext cx="4663440" cy="1188720"/>
+          </a:xfrm>
+          <a:prstGeom prst="rect">
+            <a:avLst/>
+          </a:prstGeom>
+          <a:noFill/>
+          <a:ln/>
+        </p:spPr>
+        <p:txBody>
+          <a:bodyPr wrap="square" lIns="0" tIns="0" rIns="0" bIns="0" rtlCol="0" anchor="t"/>
+          <a:lstStyle/>
+          <a:p>
+            <a:pPr marL="0" indent="0">
+              <a:buNone/>
+            </a:pPr>
+            <a:r>
+              <a:rPr lang="en-US" sz="1400" b="1" dirty="0">
+                <a:solidFill>
+                  <a:schemeClr val="tx2"/>
+                </a:solidFill>
+              </a:rPr>
+              <a:t>Bottleneck found and fixed: </a:t>
+            </a:r>
+            <a:r>
+              <a:rPr lang="en-US" sz="1400" dirty="0">
+                <a:solidFill>
+                  <a:schemeClr val="tx1"/>
+                </a:solidFill>
+              </a:rPr>
+              <a:t>the gateway built a WebSession per request. Removing it took GET /products p95 </a:t>
+            </a:r>
+            <a:r>
+              <a:rPr lang="en-US" sz="1400">
+                <a:solidFill>
+                  <a:schemeClr val="tx1"/>
+                </a:solidFill>
+              </a:rPr>
+              <a:t>from 1.23 s to 475 ms </a:t>
+            </a:r>
+            <a:r>
+              <a:rPr lang="en-US" sz="1400" dirty="0">
+                <a:solidFill>
+                  <a:schemeClr val="tx1"/>
+                </a:solidFill>
+              </a:rPr>
+              <a:t>and POST /orders </a:t>
+            </a:r>
+            <a:r>
+              <a:rPr lang="en-US" sz="1400">
+                <a:solidFill>
+                  <a:schemeClr val="tx1"/>
+                </a:solidFill>
+              </a:rPr>
+              <a:t>to 487 ms.</a:t>
+            </a:r>
+            <a:endParaRPr lang="en-US" sz="1400" dirty="0"/>
+          </a:p>
+        </p:txBody>
+      </p:sp>
+      <p:sp>
+        <p:nvSpPr>
+          <p:cNvPr id="25" name="Slide Number Placeholder 0"/>
+          <p:cNvSpPr>
+            <a:spLocks noGrp="1"/>
+          </p:cNvSpPr>
+          <p:nvPr>
+            <p:ph type="sldNum" sz="quarter" idx="4294967295"/>
+          </p:nvPr>
+        </p:nvSpPr>
+        <p:spPr>
+          <a:xfrm>
+            <a:off x="11155680" y="6400800"/>
+            <a:ext cx="548640" cy="274320"/>
+          </a:xfrm>
+          <a:prstGeom prst="rect">
+            <a:avLst/>
+          </a:prstGeom>
+          <a:extLst>
+            <a:ext uri="{C572A759-6A51-4108-AA02-DFA0A04FC94B}">
+              <ma14:wrappingTextBoxFlag xmlns="" xmlns:ma14="http://schemas.microsoft.com/office/mac/drawingml/2011/main" val="0"/>
+            </a:ext>
+          </a:extLst>
+        </p:spPr>
+        <p:txBody>
+          <a:bodyPr/>
+          <a:lstStyle>
+            <a:lvl1pPr>
+              <a:defRPr sz="1000">
+                <a:solidFill>
+                  <a:schemeClr val="accent4"/>
+                </a:solidFill>
+              </a:defRPr>
+            </a:lvl1pPr>
+          </a:lstStyle>
+          <a:p>
+            <a:pPr algn="r"/>
+            <a:fld id="{F7021451-1387-4CA6-816F-3879F97B5CBC}" type="slidenum">
+              <a:rPr lang="en-US" b="0"/>
+              <a:t>10</a:t>
+            </a:fld>
+            <a:endParaRPr lang="en-US"/>
+          </a:p>
+        </p:txBody>
+      </p:sp>
+      <p:sp>
+        <p:nvSpPr>
+          <p:cNvPr id="14" name="Presenter tag">
+            <a:extLst>
+              <a:ext uri="{FF2B5EF4-FFF2-40B4-BE49-F238E27FC236}">
+                <a16:creationId xmlns:a16="http://schemas.microsoft.com/office/drawing/2014/main" id="{7D5B9634-E931-4696-B393-DB7845FAAD81}"/>
+              </a:ext>
+            </a:extLst>
+          </p:cNvPr>
+          <p:cNvSpPr/>
+          <p:nvPr/>
+        </p:nvSpPr>
+        <p:spPr>
+          <a:xfrm>
+            <a:off x="8585200" y="6375400"/>
+            <a:ext cx="2413000" cy="304800"/>
+          </a:xfrm>
+          <a:prstGeom prst="roundRect">
+            <a:avLst/>
+          </a:prstGeom>
+          <a:solidFill>
+            <a:srgbClr val="2A9D8F"/>
+          </a:solidFill>
+          <a:ln w="12700" cap="flat" cmpd="sng" algn="ctr">
+            <a:noFill/>
+            <a:prstDash val="solid"/>
+            <a:miter lim="800000"/>
+          </a:ln>
+          <a:effectLst/>
+          <a:extLst>
+            <a:ext uri="{91240B29-F687-4F45-9708-019B960494DF}">
+              <a14:hiddenLine xmlns:a14="http://schemas.microsoft.com/office/drawing/2010/main" w="12700" cap="flat" cmpd="sng" algn="ctr">
+                <a:solidFill>
+                  <a:schemeClr val="accent1">
+                    <a:shade val="50000"/>
+                  </a:schemeClr>
+                </a:solidFill>
+                <a:prstDash val="solid"/>
+                <a:miter lim="800000"/>
+              </a14:hiddenLine>
+            </a:ext>
+          </a:extLst>
+        </p:spPr>
+        <p:style>
+          <a:lnRef idx="2">
+            <a:schemeClr val="accent1">
+              <a:shade val="50000"/>
+            </a:schemeClr>
+          </a:lnRef>
+          <a:fillRef idx="1">
+            <a:schemeClr val="accent1"/>
+          </a:fillRef>
+          <a:effectRef idx="0">
+            <a:schemeClr val="accent1"/>
+          </a:effectRef>
+          <a:fontRef idx="minor">
+            <a:schemeClr val="lt1"/>
+          </a:fontRef>
+        </p:style>
+        <p:txBody>
+          <a:bodyPr wrap="none" lIns="50800" tIns="0" rIns="50800" bIns="0" rtlCol="0" anchor="ctr"/>
+          <a:lstStyle/>
+          <a:p>
+            <a:pPr algn="ctr"/>
+            <a:r>
+              <a:rPr lang="en-US" sz="1100" b="1">
+                <a:solidFill>
+                  <a:srgbClr val="FFFFFF"/>
+                </a:solidFill>
+                <a:latin typeface="Calibri" panose="020F0502020204030204" pitchFamily="34" charset="0"/>
+              </a:rPr>
+              <a:t>Presenter: Nourhan (A)</a:t>
+            </a:r>
+          </a:p>
+        </p:txBody>
+      </p:sp>
+    </p:spTree>
+  </p:cSld>
+  <p:clrMapOvr>
+    <a:masterClrMapping/>
+  </p:clrMapOvr>
+</p:sld>
+</file>
+
+<file path=ppt/slides/slide11.xml><?xml version="1.0" encoding="utf-8"?>
 <p:sld xmlns:a="http://schemas.openxmlformats.org/drawingml/2006/main" xmlns:r="http://schemas.openxmlformats.org/officeDocument/2006/relationships" xmlns:p="http://schemas.openxmlformats.org/presentationml/2006/main">
   <p:cSld name="Slide 8">
     <p:spTree>
@@ -3359,6 +4157,13 @@
             <a:prstDash val="solid"/>
           </a:ln>
         </p:spPr>
+        <p:txBody>
+          <a:bodyPr/>
+          <a:lstStyle/>
+          <a:p>
+            <a:endParaRPr lang="en-US"/>
+          </a:p>
+        </p:txBody>
       </p:sp>
       <p:sp>
         <p:nvSpPr>
@@ -3458,6 +4263,13 @@
             <a:prstDash val="solid"/>
           </a:ln>
         </p:spPr>
+        <p:txBody>
+          <a:bodyPr/>
+          <a:lstStyle/>
+          <a:p>
+            <a:endParaRPr lang="en-US"/>
+          </a:p>
+        </p:txBody>
       </p:sp>
       <p:sp>
         <p:nvSpPr>
@@ -3557,6 +4369,13 @@
             <a:prstDash val="solid"/>
           </a:ln>
         </p:spPr>
+        <p:txBody>
+          <a:bodyPr/>
+          <a:lstStyle/>
+          <a:p>
+            <a:endParaRPr lang="en-US"/>
+          </a:p>
+        </p:txBody>
       </p:sp>
       <p:sp>
         <p:nvSpPr>
@@ -3734,7 +4553,7 @@
           </a:prstGeom>
           <a:extLst>
             <a:ext uri="{C572A759-6A51-4108-AA02-DFA0A04FC94B}">
-              <ma14:wrappingTextBoxFlag xmlns:ma14="http://schemas.microsoft.com/office/mac/drawingml/2011/main" xmlns="" val="0"/>
+              <ma14:wrappingTextBoxFlag xmlns="" xmlns:ma14="http://schemas.microsoft.com/office/mac/drawingml/2011/main" val="0"/>
             </a:ext>
           </a:extLst>
         </p:spPr>
@@ -3753,7 +4572,7 @@
             <a:pPr algn="r"/>
             <a:fld id="{F7021451-1387-4CA6-816F-3879F97B5CBC}" type="slidenum">
               <a:rPr lang="en-US" b="0"/>
-              <a:t>10</a:t>
+              <a:t>11</a:t>
             </a:fld>
             <a:endParaRPr lang="en-US"/>
           </a:p>
@@ -3843,7 +4662,7 @@
 </p:sld>
 </file>
 
-<file path=ppt/slides/slide11.xml><?xml version="1.0" encoding="utf-8"?>
+<file path=ppt/slides/slide12.xml><?xml version="1.0" encoding="utf-8"?>
 <p:sld xmlns:a="http://schemas.openxmlformats.org/drawingml/2006/main" xmlns:r="http://schemas.openxmlformats.org/officeDocument/2006/relationships" xmlns:p="http://schemas.openxmlformats.org/presentationml/2006/main">
   <p:cSld name="Slide 12">
     <p:spTree>
@@ -3926,6 +4745,13 @@
             <a:prstDash val="solid"/>
           </a:ln>
         </p:spPr>
+        <p:txBody>
+          <a:bodyPr/>
+          <a:lstStyle/>
+          <a:p>
+            <a:endParaRPr lang="en-US"/>
+          </a:p>
+        </p:txBody>
       </p:sp>
       <p:sp>
         <p:nvSpPr>
@@ -3951,6 +4777,13 @@
             <a:prstDash val="solid"/>
           </a:ln>
         </p:spPr>
+        <p:txBody>
+          <a:bodyPr/>
+          <a:lstStyle/>
+          <a:p>
+            <a:endParaRPr lang="en-US"/>
+          </a:p>
+        </p:txBody>
       </p:sp>
       <p:sp>
         <p:nvSpPr>
@@ -4086,6 +4919,13 @@
             <a:prstDash val="solid"/>
           </a:ln>
         </p:spPr>
+        <p:txBody>
+          <a:bodyPr/>
+          <a:lstStyle/>
+          <a:p>
+            <a:endParaRPr lang="en-US"/>
+          </a:p>
+        </p:txBody>
       </p:sp>
       <p:sp>
         <p:nvSpPr>
@@ -4111,6 +4951,13 @@
             <a:prstDash val="solid"/>
           </a:ln>
         </p:spPr>
+        <p:txBody>
+          <a:bodyPr/>
+          <a:lstStyle/>
+          <a:p>
+            <a:endParaRPr lang="en-US"/>
+          </a:p>
+        </p:txBody>
       </p:sp>
       <p:sp>
         <p:nvSpPr>
@@ -4246,6 +5093,13 @@
             <a:prstDash val="solid"/>
           </a:ln>
         </p:spPr>
+        <p:txBody>
+          <a:bodyPr/>
+          <a:lstStyle/>
+          <a:p>
+            <a:endParaRPr lang="en-US"/>
+          </a:p>
+        </p:txBody>
       </p:sp>
       <p:sp>
         <p:nvSpPr>
@@ -4271,6 +5125,13 @@
             <a:prstDash val="solid"/>
           </a:ln>
         </p:spPr>
+        <p:txBody>
+          <a:bodyPr/>
+          <a:lstStyle/>
+          <a:p>
+            <a:endParaRPr lang="en-US"/>
+          </a:p>
+        </p:txBody>
       </p:sp>
       <p:sp>
         <p:nvSpPr>
@@ -4406,6 +5267,13 @@
             <a:prstDash val="solid"/>
           </a:ln>
         </p:spPr>
+        <p:txBody>
+          <a:bodyPr/>
+          <a:lstStyle/>
+          <a:p>
+            <a:endParaRPr lang="en-US"/>
+          </a:p>
+        </p:txBody>
       </p:sp>
       <p:sp>
         <p:nvSpPr>
@@ -4431,6 +5299,13 @@
             <a:prstDash val="solid"/>
           </a:ln>
         </p:spPr>
+        <p:txBody>
+          <a:bodyPr/>
+          <a:lstStyle/>
+          <a:p>
+            <a:endParaRPr lang="en-US"/>
+          </a:p>
+        </p:txBody>
       </p:sp>
       <p:sp>
         <p:nvSpPr>
@@ -4560,7 +5435,7 @@
           </a:prstGeom>
           <a:extLst>
             <a:ext uri="{C572A759-6A51-4108-AA02-DFA0A04FC94B}">
-              <ma14:wrappingTextBoxFlag xmlns:ma14="http://schemas.microsoft.com/office/mac/drawingml/2011/main" xmlns="" val="0"/>
+              <ma14:wrappingTextBoxFlag xmlns="" xmlns:ma14="http://schemas.microsoft.com/office/mac/drawingml/2011/main" val="0"/>
             </a:ext>
           </a:extLst>
         </p:spPr>
@@ -4579,7 +5454,7 @@
             <a:pPr algn="r"/>
             <a:fld id="{F7021451-1387-4CA6-816F-3879F97B5CBC}" type="slidenum">
               <a:rPr lang="en-US" b="0"/>
-              <a:t>11</a:t>
+              <a:t>12</a:t>
             </a:fld>
             <a:endParaRPr lang="en-US"/>
           </a:p>
@@ -4669,7 +5544,7 @@
 </p:sld>
 </file>
 
-<file path=ppt/slides/slide12.xml><?xml version="1.0" encoding="utf-8"?>
+<file path=ppt/slides/slide13.xml><?xml version="1.0" encoding="utf-8"?>
 <p:sld xmlns:a="http://schemas.openxmlformats.org/drawingml/2006/main" xmlns:r="http://schemas.openxmlformats.org/officeDocument/2006/relationships" xmlns:p="http://schemas.openxmlformats.org/presentationml/2006/main">
   <p:cSld name="Slide 10">
     <p:spTree>
@@ -4752,6 +5627,13 @@
             <a:prstDash val="solid"/>
           </a:ln>
         </p:spPr>
+        <p:txBody>
+          <a:bodyPr/>
+          <a:lstStyle/>
+          <a:p>
+            <a:endParaRPr lang="en-US"/>
+          </a:p>
+        </p:txBody>
       </p:sp>
       <p:sp>
         <p:nvSpPr>
@@ -4909,6 +5791,13 @@
             <a:prstDash val="solid"/>
           </a:ln>
         </p:spPr>
+        <p:txBody>
+          <a:bodyPr/>
+          <a:lstStyle/>
+          <a:p>
+            <a:endParaRPr lang="en-US"/>
+          </a:p>
+        </p:txBody>
       </p:sp>
       <p:sp>
         <p:nvSpPr>
@@ -5008,6 +5897,13 @@
             <a:prstDash val="solid"/>
           </a:ln>
         </p:spPr>
+        <p:txBody>
+          <a:bodyPr/>
+          <a:lstStyle/>
+          <a:p>
+            <a:endParaRPr lang="en-US"/>
+          </a:p>
+        </p:txBody>
       </p:sp>
       <p:sp>
         <p:nvSpPr>
@@ -5107,6 +6003,13 @@
             <a:prstDash val="solid"/>
           </a:ln>
         </p:spPr>
+        <p:txBody>
+          <a:bodyPr/>
+          <a:lstStyle/>
+          <a:p>
+            <a:endParaRPr lang="en-US"/>
+          </a:p>
+        </p:txBody>
       </p:sp>
       <p:sp>
         <p:nvSpPr>
@@ -5200,7 +6103,7 @@
           </a:prstGeom>
           <a:extLst>
             <a:ext uri="{C572A759-6A51-4108-AA02-DFA0A04FC94B}">
-              <ma14:wrappingTextBoxFlag xmlns:ma14="http://schemas.microsoft.com/office/mac/drawingml/2011/main" xmlns="" val="0"/>
+              <ma14:wrappingTextBoxFlag xmlns="" xmlns:ma14="http://schemas.microsoft.com/office/mac/drawingml/2011/main" val="0"/>
             </a:ext>
           </a:extLst>
         </p:spPr>
@@ -5219,7 +6122,7 @@
             <a:pPr algn="r"/>
             <a:fld id="{F7021451-1387-4CA6-816F-3879F97B5CBC}" type="slidenum">
               <a:rPr lang="en-US" b="0"/>
-              <a:t>12</a:t>
+              <a:t>13</a:t>
             </a:fld>
             <a:endParaRPr lang="en-US"/>
           </a:p>
@@ -5309,7 +6212,494 @@
 </p:sld>
 </file>
 
-<file path=ppt/slides/slide13.xml><?xml version="1.0" encoding="utf-8"?>
+<file path=ppt/slides/slide14.xml><?xml version="1.0" encoding="utf-8"?>
+<p:sld xmlns:a="http://schemas.openxmlformats.org/drawingml/2006/main" xmlns:r="http://schemas.openxmlformats.org/officeDocument/2006/relationships" xmlns:p="http://schemas.openxmlformats.org/presentationml/2006/main">
+  <p:cSld>
+    <p:spTree>
+      <p:nvGrpSpPr>
+        <p:cNvPr id="1" name=""/>
+        <p:cNvGrpSpPr/>
+        <p:nvPr/>
+      </p:nvGrpSpPr>
+      <p:grpSpPr>
+        <a:xfrm>
+          <a:off x="0" y="0"/>
+          <a:ext cx="0" cy="0"/>
+          <a:chOff x="0" y="0"/>
+          <a:chExt cx="0" cy="0"/>
+        </a:xfrm>
+      </p:grpSpPr>
+      <p:sp>
+        <p:nvSpPr>
+          <p:cNvPr id="2" name="Text 0"/>
+          <p:cNvSpPr>
+            <a:spLocks noGrp="1"/>
+          </p:cNvSpPr>
+          <p:nvPr>
+            <p:ph type="title" idx="100" hasCustomPrompt="1"/>
+          </p:nvPr>
+        </p:nvSpPr>
+        <p:spPr>
+          <a:xfrm>
+            <a:off x="548640" y="320040"/>
+            <a:ext cx="11064240" cy="822960"/>
+          </a:xfrm>
+          <a:prstGeom prst="rect">
+            <a:avLst/>
+          </a:prstGeom>
+          <a:noFill/>
+          <a:ln/>
+        </p:spPr>
+        <p:txBody>
+          <a:bodyPr wrap="square" rtlCol="0" anchor="ctr"/>
+          <a:lstStyle/>
+          <a:p>
+            <a:pPr marL="0" indent="0">
+              <a:buNone/>
+            </a:pPr>
+            <a:r>
+              <a:rPr lang="en-US" sz="3200" b="1">
+                <a:solidFill>
+                  <a:schemeClr val="tx2"/>
+                </a:solidFill>
+              </a:rPr>
+              <a:t>B2 live: Order Analytics in Grafana</a:t>
+            </a:r>
+            <a:endParaRPr lang="en-US" sz="3200" dirty="0"/>
+          </a:p>
+        </p:txBody>
+      </p:sp>
+      <p:sp>
+        <p:nvSpPr>
+          <p:cNvPr id="25" name="Slide Number Placeholder 0"/>
+          <p:cNvSpPr>
+            <a:spLocks noGrp="1"/>
+          </p:cNvSpPr>
+          <p:nvPr>
+            <p:ph type="sldNum" sz="quarter" idx="4294967295"/>
+          </p:nvPr>
+        </p:nvSpPr>
+        <p:spPr>
+          <a:xfrm>
+            <a:off x="11155680" y="6400800"/>
+            <a:ext cx="548640" cy="274320"/>
+          </a:xfrm>
+          <a:prstGeom prst="rect">
+            <a:avLst/>
+          </a:prstGeom>
+          <a:extLst>
+            <a:ext uri="{C572A759-6A51-4108-AA02-DFA0A04FC94B}">
+              <ma14:wrappingTextBoxFlag xmlns="" xmlns:ma14="http://schemas.microsoft.com/office/mac/drawingml/2011/main" val="0"/>
+            </a:ext>
+          </a:extLst>
+        </p:spPr>
+        <p:txBody>
+          <a:bodyPr/>
+          <a:lstStyle>
+            <a:lvl1pPr>
+              <a:defRPr sz="1000">
+                <a:solidFill>
+                  <a:schemeClr val="accent4"/>
+                </a:solidFill>
+              </a:defRPr>
+            </a:lvl1pPr>
+          </a:lstStyle>
+          <a:p>
+            <a:pPr algn="r"/>
+            <a:fld id="{F7021451-1387-4CA6-816F-3879F97B5CBC}" type="slidenum">
+              <a:rPr lang="en-US" b="0"/>
+              <a:t>14</a:t>
+            </a:fld>
+            <a:endParaRPr lang="en-US"/>
+          </a:p>
+        </p:txBody>
+      </p:sp>
+      <p:sp>
+        <p:nvSpPr>
+          <p:cNvPr id="15" name="Presenter tag">
+            <a:extLst>
+              <a:ext uri="{FF2B5EF4-FFF2-40B4-BE49-F238E27FC236}">
+                <a16:creationId xmlns:a16="http://schemas.microsoft.com/office/drawing/2014/main" id="{BA6910E7-E0CD-4FAF-80B0-B7DAEA06EE27}"/>
+              </a:ext>
+            </a:extLst>
+          </p:cNvPr>
+          <p:cNvSpPr/>
+          <p:nvPr/>
+        </p:nvSpPr>
+        <p:spPr>
+          <a:xfrm>
+            <a:off x="8585200" y="6375400"/>
+            <a:ext cx="2413000" cy="304800"/>
+          </a:xfrm>
+          <a:prstGeom prst="roundRect">
+            <a:avLst/>
+          </a:prstGeom>
+          <a:solidFill>
+            <a:srgbClr val="0D3B4A"/>
+          </a:solidFill>
+          <a:ln w="12700" cap="flat" cmpd="sng" algn="ctr">
+            <a:noFill/>
+            <a:prstDash val="solid"/>
+            <a:miter lim="800000"/>
+          </a:ln>
+          <a:effectLst/>
+          <a:extLst>
+            <a:ext uri="{91240B29-F687-4F45-9708-019B960494DF}">
+              <a14:hiddenLine xmlns:a14="http://schemas.microsoft.com/office/drawing/2010/main" w="12700" cap="flat" cmpd="sng" algn="ctr">
+                <a:solidFill>
+                  <a:schemeClr val="accent1">
+                    <a:shade val="50000"/>
+                  </a:schemeClr>
+                </a:solidFill>
+                <a:prstDash val="solid"/>
+                <a:miter lim="800000"/>
+              </a14:hiddenLine>
+            </a:ext>
+          </a:extLst>
+        </p:spPr>
+        <p:style>
+          <a:lnRef idx="2">
+            <a:schemeClr val="accent1">
+              <a:shade val="50000"/>
+            </a:schemeClr>
+          </a:lnRef>
+          <a:fillRef idx="1">
+            <a:schemeClr val="accent1"/>
+          </a:fillRef>
+          <a:effectRef idx="0">
+            <a:schemeClr val="accent1"/>
+          </a:effectRef>
+          <a:fontRef idx="minor">
+            <a:schemeClr val="lt1"/>
+          </a:fontRef>
+        </p:style>
+        <p:txBody>
+          <a:bodyPr wrap="none" lIns="50800" tIns="0" rIns="50800" bIns="0" rtlCol="0" anchor="ctr"/>
+          <a:lstStyle/>
+          <a:p>
+            <a:pPr algn="ctr"/>
+            <a:r>
+              <a:rPr lang="en-US" sz="1100" b="1">
+                <a:solidFill>
+                  <a:srgbClr val="FFFFFF"/>
+                </a:solidFill>
+                <a:latin typeface="Calibri" panose="020F0502020204030204" pitchFamily="34" charset="0"/>
+              </a:rPr>
+              <a:t>Presenter: Doaa (C)</a:t>
+            </a:r>
+          </a:p>
+        </p:txBody>
+      </p:sp>
+      <p:pic>
+        <p:nvPicPr>
+          <p:cNvPr id="17" name="Grafana B2">
+            <a:extLst>
+              <a:ext uri="{FF2B5EF4-FFF2-40B4-BE49-F238E27FC236}">
+                <a16:creationId xmlns:a16="http://schemas.microsoft.com/office/drawing/2014/main" id="{F829DD4B-D685-4DB0-A1AD-383594B8662B}"/>
+              </a:ext>
+            </a:extLst>
+          </p:cNvPr>
+          <p:cNvPicPr>
+            <a:picLocks/>
+          </p:cNvPicPr>
+          <p:nvPr/>
+        </p:nvPicPr>
+        <p:blipFill>
+          <a:blip r:embed="rId2"/>
+          <a:stretch>
+            <a:fillRect/>
+          </a:stretch>
+        </p:blipFill>
+        <p:spPr>
+          <a:xfrm>
+            <a:off x="546100" y="1270000"/>
+            <a:ext cx="7620000" cy="4292600"/>
+          </a:xfrm>
+          <a:prstGeom prst="rect">
+            <a:avLst/>
+          </a:prstGeom>
+          <a:ln w="9525">
+            <a:solidFill>
+              <a:srgbClr val="C9D6D3"/>
+            </a:solidFill>
+          </a:ln>
+        </p:spPr>
+      </p:pic>
+      <p:sp>
+        <p:nvSpPr>
+          <p:cNvPr id="18" name="B2 card">
+            <a:extLst>
+              <a:ext uri="{FF2B5EF4-FFF2-40B4-BE49-F238E27FC236}">
+                <a16:creationId xmlns:a16="http://schemas.microsoft.com/office/drawing/2014/main" id="{259F29C4-636B-4D65-B139-E1245A9864CB}"/>
+              </a:ext>
+            </a:extLst>
+          </p:cNvPr>
+          <p:cNvSpPr/>
+          <p:nvPr/>
+        </p:nvSpPr>
+        <p:spPr>
+          <a:xfrm>
+            <a:off x="8382000" y="1270000"/>
+            <a:ext cx="3225800" cy="4292600"/>
+          </a:xfrm>
+          <a:prstGeom prst="roundRect">
+            <a:avLst>
+              <a:gd name="adj" fmla="val 6000"/>
+            </a:avLst>
+          </a:prstGeom>
+          <a:solidFill>
+            <a:srgbClr val="EDF4F2"/>
+          </a:solidFill>
+          <a:ln w="12700" cap="flat" cmpd="sng" algn="ctr">
+            <a:noFill/>
+            <a:prstDash val="solid"/>
+            <a:miter lim="800000"/>
+          </a:ln>
+          <a:effectLst/>
+          <a:extLst>
+            <a:ext uri="{91240B29-F687-4F45-9708-019B960494DF}">
+              <a14:hiddenLine xmlns:a14="http://schemas.microsoft.com/office/drawing/2010/main" w="12700" cap="flat" cmpd="sng" algn="ctr">
+                <a:solidFill>
+                  <a:schemeClr val="accent1">
+                    <a:shade val="50000"/>
+                  </a:schemeClr>
+                </a:solidFill>
+                <a:prstDash val="solid"/>
+                <a:miter lim="800000"/>
+              </a14:hiddenLine>
+            </a:ext>
+          </a:extLst>
+        </p:spPr>
+        <p:style>
+          <a:lnRef idx="2">
+            <a:schemeClr val="accent1">
+              <a:shade val="50000"/>
+            </a:schemeClr>
+          </a:lnRef>
+          <a:fillRef idx="1">
+            <a:schemeClr val="accent1"/>
+          </a:fillRef>
+          <a:effectRef idx="0">
+            <a:schemeClr val="accent1"/>
+          </a:effectRef>
+          <a:fontRef idx="minor">
+            <a:schemeClr val="lt1"/>
+          </a:fontRef>
+        </p:style>
+        <p:txBody>
+          <a:bodyPr rtlCol="0" anchor="ctr"/>
+          <a:lstStyle/>
+          <a:p>
+            <a:pPr algn="ctr"/>
+            <a:endParaRPr lang="en-US"/>
+          </a:p>
+        </p:txBody>
+      </p:sp>
+      <p:sp>
+        <p:nvSpPr>
+          <p:cNvPr id="19" name="B2 heading">
+            <a:extLst>
+              <a:ext uri="{FF2B5EF4-FFF2-40B4-BE49-F238E27FC236}">
+                <a16:creationId xmlns:a16="http://schemas.microsoft.com/office/drawing/2014/main" id="{D2A545C7-8C37-4796-B1AA-F332B9B0E375}"/>
+              </a:ext>
+            </a:extLst>
+          </p:cNvPr>
+          <p:cNvSpPr txBox="1"/>
+          <p:nvPr/>
+        </p:nvSpPr>
+        <p:spPr>
+          <a:xfrm>
+            <a:off x="8585200" y="1498600"/>
+            <a:ext cx="2819400" cy="369332"/>
+          </a:xfrm>
+          <a:prstGeom prst="rect">
+            <a:avLst/>
+          </a:prstGeom>
+          <a:noFill/>
+        </p:spPr>
+        <p:txBody>
+          <a:bodyPr vert="horz" wrap="square" lIns="0" tIns="0" rIns="0" bIns="0" rtlCol="0">
+            <a:noAutofit/>
+          </a:bodyPr>
+          <a:lstStyle/>
+          <a:p>
+            <a:pPr>
+              <a:spcAft>
+                <a:spcPts val="600"/>
+              </a:spcAft>
+            </a:pPr>
+            <a:r>
+              <a:rPr lang="en-US" sz="1600" b="1">
+                <a:solidFill>
+                  <a:srgbClr val="0D3B4A"/>
+                </a:solidFill>
+                <a:latin typeface="Calibri" panose="020F0502020204030204" pitchFamily="34" charset="0"/>
+              </a:rPr>
+              <a:t>Built from order-events, nothing else</a:t>
+            </a:r>
+          </a:p>
+        </p:txBody>
+      </p:sp>
+      <p:sp>
+        <p:nvSpPr>
+          <p:cNvPr id="20" name="B2 body">
+            <a:extLst>
+              <a:ext uri="{FF2B5EF4-FFF2-40B4-BE49-F238E27FC236}">
+                <a16:creationId xmlns:a16="http://schemas.microsoft.com/office/drawing/2014/main" id="{EA43782B-9284-45EF-B864-23E6BC04573C}"/>
+              </a:ext>
+            </a:extLst>
+          </p:cNvPr>
+          <p:cNvSpPr txBox="1"/>
+          <p:nvPr/>
+        </p:nvSpPr>
+        <p:spPr>
+          <a:xfrm>
+            <a:off x="8585200" y="2159000"/>
+            <a:ext cx="2819400" cy="369332"/>
+          </a:xfrm>
+          <a:prstGeom prst="rect">
+            <a:avLst/>
+          </a:prstGeom>
+          <a:noFill/>
+        </p:spPr>
+        <p:txBody>
+          <a:bodyPr vert="horz" wrap="square" lIns="0" tIns="0" rIns="0" bIns="0" rtlCol="0">
+            <a:noAutofit/>
+          </a:bodyPr>
+          <a:lstStyle/>
+          <a:p>
+            <a:pPr marL="177800" indent="-177800">
+              <a:spcAft>
+                <a:spcPts val="800"/>
+              </a:spcAft>
+              <a:buFont typeface="+mj-lt"/>
+              <a:buChar char="•"/>
+            </a:pPr>
+            <a:r>
+              <a:rPr lang="en-US" sz="1400">
+                <a:solidFill>
+                  <a:srgbClr val="0D3B4A"/>
+                </a:solidFill>
+                <a:latin typeface="Calibri" panose="020F0502020204030204" pitchFamily="34" charset="0"/>
+              </a:rPr>
+              <a:t>Orders per minute by status (PLACED, CONFIRMED, CANCELLED)</a:t>
+            </a:r>
+          </a:p>
+          <a:p>
+            <a:pPr marL="177800" indent="-177800">
+              <a:spcAft>
+                <a:spcPts val="800"/>
+              </a:spcAft>
+              <a:buFont typeface="+mj-lt"/>
+              <a:buChar char="•"/>
+            </a:pPr>
+            <a:r>
+              <a:rPr lang="en-US" sz="1400">
+                <a:solidFill>
+                  <a:srgbClr val="0D3B4A"/>
+                </a:solidFill>
+                <a:latin typeface="Calibri" panose="020F0502020204030204" pitchFamily="34" charset="0"/>
+              </a:rPr>
+              <a:t>Revenue from confirmed orders</a:t>
+            </a:r>
+          </a:p>
+          <a:p>
+            <a:pPr marL="177800" indent="-177800">
+              <a:spcAft>
+                <a:spcPts val="800"/>
+              </a:spcAft>
+              <a:buFont typeface="+mj-lt"/>
+              <a:buChar char="•"/>
+            </a:pPr>
+            <a:r>
+              <a:rPr lang="en-US" sz="1400">
+                <a:solidFill>
+                  <a:srgbClr val="0D3B4A"/>
+                </a:solidFill>
+                <a:latin typeface="Calibri" panose="020F0502020204030204" pitchFamily="34" charset="0"/>
+              </a:rPr>
+              <a:t>Saga failure rate = cancelled / placed</a:t>
+            </a:r>
+          </a:p>
+          <a:p>
+            <a:pPr marL="177800" indent="-177800">
+              <a:spcAft>
+                <a:spcPts val="800"/>
+              </a:spcAft>
+              <a:buFont typeface="+mj-lt"/>
+              <a:buChar char="•"/>
+            </a:pPr>
+            <a:r>
+              <a:rPr lang="en-US" sz="1400">
+                <a:solidFill>
+                  <a:srgbClr val="0D3B4A"/>
+                </a:solidFill>
+                <a:latin typeface="Calibri" panose="020F0502020204030204" pitchFamily="34" charset="0"/>
+              </a:rPr>
+              <a:t>Same data as GET /api/v1/analytics/summary (ADMIN)</a:t>
+            </a:r>
+          </a:p>
+        </p:txBody>
+      </p:sp>
+      <p:sp>
+        <p:nvSpPr>
+          <p:cNvPr id="21" name="B2 caption">
+            <a:extLst>
+              <a:ext uri="{FF2B5EF4-FFF2-40B4-BE49-F238E27FC236}">
+                <a16:creationId xmlns:a16="http://schemas.microsoft.com/office/drawing/2014/main" id="{365D0D11-F4FD-480D-A9C1-E7CE7338C63F}"/>
+              </a:ext>
+            </a:extLst>
+          </p:cNvPr>
+          <p:cNvSpPr txBox="1"/>
+          <p:nvPr/>
+        </p:nvSpPr>
+        <p:spPr>
+          <a:xfrm>
+            <a:off x="546100" y="5664200"/>
+            <a:ext cx="7620000" cy="369332"/>
+          </a:xfrm>
+          <a:prstGeom prst="rect">
+            <a:avLst/>
+          </a:prstGeom>
+          <a:noFill/>
+        </p:spPr>
+        <p:txBody>
+          <a:bodyPr vert="horz" wrap="square" lIns="0" tIns="0" rIns="0" bIns="0" rtlCol="0">
+            <a:noAutofit/>
+          </a:bodyPr>
+          <a:lstStyle/>
+          <a:p>
+            <a:pPr>
+              <a:spcAft>
+                <a:spcPts val="600"/>
+              </a:spcAft>
+            </a:pPr>
+            <a:r>
+              <a:rPr lang="en-US" sz="1100">
+                <a:solidFill>
+                  <a:srgbClr val="5F7C86"/>
+                </a:solidFill>
+                <a:latin typeface="Calibri" panose="020F0502020204030204" pitchFamily="34" charset="0"/>
+              </a:rPr>
+              <a:t>Orders placed through NodePort 30080 on the kind cluster, 7 Oct 2026. No payment failures in this run, so the failure panel is empty.</a:t>
+            </a:r>
+          </a:p>
+        </p:txBody>
+      </p:sp>
+    </p:spTree>
+    <p:extLst>
+      <p:ext uri="{BB962C8B-B14F-4D97-AF65-F5344CB8AC3E}">
+        <p14:creationId xmlns:p14="http://schemas.microsoft.com/office/powerpoint/2010/main" val="664940356"/>
+      </p:ext>
+    </p:extLst>
+  </p:cSld>
+  <p:clrMapOvr>
+    <a:masterClrMapping/>
+  </p:clrMapOvr>
+</p:sld>
+</file>
+
+<file path=ppt/slides/slide15.xml><?xml version="1.0" encoding="utf-8"?>
 <p:sld xmlns:a="http://schemas.openxmlformats.org/drawingml/2006/main" xmlns:r="http://schemas.openxmlformats.org/officeDocument/2006/relationships" xmlns:p="http://schemas.openxmlformats.org/presentationml/2006/main">
   <p:cSld name="Slide 11">
     <p:spTree>
@@ -5390,6 +6780,13 @@
             <a:prstDash val="solid"/>
           </a:ln>
         </p:spPr>
+        <p:txBody>
+          <a:bodyPr/>
+          <a:lstStyle/>
+          <a:p>
+            <a:endParaRPr lang="en-US"/>
+          </a:p>
+        </p:txBody>
       </p:sp>
       <p:sp>
         <p:nvSpPr>
@@ -5523,6 +6920,13 @@
             <a:prstDash val="solid"/>
           </a:ln>
         </p:spPr>
+        <p:txBody>
+          <a:bodyPr/>
+          <a:lstStyle/>
+          <a:p>
+            <a:endParaRPr lang="en-US"/>
+          </a:p>
+        </p:txBody>
       </p:sp>
       <p:sp>
         <p:nvSpPr>
@@ -5656,6 +7060,13 @@
             <a:prstDash val="solid"/>
           </a:ln>
         </p:spPr>
+        <p:txBody>
+          <a:bodyPr/>
+          <a:lstStyle/>
+          <a:p>
+            <a:endParaRPr lang="en-US"/>
+          </a:p>
+        </p:txBody>
       </p:sp>
       <p:sp>
         <p:nvSpPr>
@@ -5789,6 +7200,13 @@
             <a:prstDash val="solid"/>
           </a:ln>
         </p:spPr>
+        <p:txBody>
+          <a:bodyPr/>
+          <a:lstStyle/>
+          <a:p>
+            <a:endParaRPr lang="en-US"/>
+          </a:p>
+        </p:txBody>
       </p:sp>
       <p:sp>
         <p:nvSpPr>
@@ -5918,7 +7336,7 @@
           </a:prstGeom>
           <a:extLst>
             <a:ext uri="{C572A759-6A51-4108-AA02-DFA0A04FC94B}">
-              <ma14:wrappingTextBoxFlag xmlns:ma14="http://schemas.microsoft.com/office/mac/drawingml/2011/main" xmlns="" val="0"/>
+              <ma14:wrappingTextBoxFlag xmlns="" xmlns:ma14="http://schemas.microsoft.com/office/mac/drawingml/2011/main" val="0"/>
             </a:ext>
           </a:extLst>
         </p:spPr>
@@ -5937,7 +7355,7 @@
             <a:pPr algn="r"/>
             <a:fld id="{F7021451-1387-4CA6-816F-3879F97B5CBC}" type="slidenum">
               <a:rPr lang="en-US" b="0"/>
-              <a:t>13</a:t>
+              <a:t>15</a:t>
             </a:fld>
             <a:endParaRPr lang="en-US"/>
           </a:p>
@@ -6027,7 +7445,1109 @@
 </p:sld>
 </file>
 
-<file path=ppt/slides/slide14.xml><?xml version="1.0" encoding="utf-8"?>
+<file path=ppt/slides/slide16.xml><?xml version="1.0" encoding="utf-8"?>
+<p:sld xmlns:a="http://schemas.openxmlformats.org/drawingml/2006/main" xmlns:r="http://schemas.openxmlformats.org/officeDocument/2006/relationships" xmlns:p="http://schemas.openxmlformats.org/presentationml/2006/main">
+  <p:cSld>
+    <p:spTree>
+      <p:nvGrpSpPr>
+        <p:cNvPr id="1" name=""/>
+        <p:cNvGrpSpPr/>
+        <p:nvPr/>
+      </p:nvGrpSpPr>
+      <p:grpSpPr>
+        <a:xfrm>
+          <a:off x="0" y="0"/>
+          <a:ext cx="0" cy="0"/>
+          <a:chOff x="0" y="0"/>
+          <a:chExt cx="0" cy="0"/>
+        </a:xfrm>
+      </p:grpSpPr>
+      <p:sp>
+        <p:nvSpPr>
+          <p:cNvPr id="2" name="Text 0"/>
+          <p:cNvSpPr>
+            <a:spLocks noGrp="1"/>
+          </p:cNvSpPr>
+          <p:nvPr>
+            <p:ph type="title" idx="100" hasCustomPrompt="1"/>
+          </p:nvPr>
+        </p:nvSpPr>
+        <p:spPr>
+          <a:xfrm>
+            <a:off x="548640" y="320040"/>
+            <a:ext cx="11064240" cy="822960"/>
+          </a:xfrm>
+          <a:prstGeom prst="rect">
+            <a:avLst/>
+          </a:prstGeom>
+          <a:noFill/>
+          <a:ln/>
+        </p:spPr>
+        <p:txBody>
+          <a:bodyPr wrap="square" rtlCol="0" anchor="ctr"/>
+          <a:lstStyle/>
+          <a:p>
+            <a:pPr marL="0" indent="0">
+              <a:buNone/>
+            </a:pPr>
+            <a:r>
+              <a:rPr lang="en-US" sz="3200" b="1">
+                <a:solidFill>
+                  <a:schemeClr val="tx2"/>
+                </a:solidFill>
+              </a:rPr>
+              <a:t>Deployed from Git: 10 of 10 Synced and Healthy</a:t>
+            </a:r>
+            <a:endParaRPr lang="en-US" sz="3200" dirty="0"/>
+          </a:p>
+        </p:txBody>
+      </p:sp>
+      <p:sp>
+        <p:nvSpPr>
+          <p:cNvPr id="25" name="Slide Number Placeholder 0"/>
+          <p:cNvSpPr>
+            <a:spLocks noGrp="1"/>
+          </p:cNvSpPr>
+          <p:nvPr>
+            <p:ph type="sldNum" sz="quarter" idx="4294967295"/>
+          </p:nvPr>
+        </p:nvSpPr>
+        <p:spPr>
+          <a:xfrm>
+            <a:off x="11155680" y="6400800"/>
+            <a:ext cx="548640" cy="274320"/>
+          </a:xfrm>
+          <a:prstGeom prst="rect">
+            <a:avLst/>
+          </a:prstGeom>
+          <a:extLst>
+            <a:ext uri="{C572A759-6A51-4108-AA02-DFA0A04FC94B}">
+              <ma14:wrappingTextBoxFlag xmlns="" xmlns:ma14="http://schemas.microsoft.com/office/mac/drawingml/2011/main" val="0"/>
+            </a:ext>
+          </a:extLst>
+        </p:spPr>
+        <p:txBody>
+          <a:bodyPr/>
+          <a:lstStyle>
+            <a:lvl1pPr>
+              <a:defRPr sz="1000">
+                <a:solidFill>
+                  <a:schemeClr val="accent4"/>
+                </a:solidFill>
+              </a:defRPr>
+            </a:lvl1pPr>
+          </a:lstStyle>
+          <a:p>
+            <a:pPr algn="r"/>
+            <a:fld id="{F7021451-1387-4CA6-816F-3879F97B5CBC}" type="slidenum">
+              <a:rPr lang="en-US" b="0"/>
+              <a:t>16</a:t>
+            </a:fld>
+            <a:endParaRPr lang="en-US"/>
+          </a:p>
+        </p:txBody>
+      </p:sp>
+      <p:sp>
+        <p:nvSpPr>
+          <p:cNvPr id="19" name="Presenter tag">
+            <a:extLst>
+              <a:ext uri="{FF2B5EF4-FFF2-40B4-BE49-F238E27FC236}">
+                <a16:creationId xmlns:a16="http://schemas.microsoft.com/office/drawing/2014/main" id="{F364C54A-EB48-41BE-8E8B-E6C6467E278F}"/>
+              </a:ext>
+            </a:extLst>
+          </p:cNvPr>
+          <p:cNvSpPr/>
+          <p:nvPr/>
+        </p:nvSpPr>
+        <p:spPr>
+          <a:xfrm>
+            <a:off x="8585200" y="6375400"/>
+            <a:ext cx="2413000" cy="304800"/>
+          </a:xfrm>
+          <a:prstGeom prst="roundRect">
+            <a:avLst/>
+          </a:prstGeom>
+          <a:solidFill>
+            <a:srgbClr val="0D3B4A"/>
+          </a:solidFill>
+          <a:ln w="12700" cap="flat" cmpd="sng" algn="ctr">
+            <a:noFill/>
+            <a:prstDash val="solid"/>
+            <a:miter lim="800000"/>
+          </a:ln>
+          <a:effectLst/>
+          <a:extLst>
+            <a:ext uri="{91240B29-F687-4F45-9708-019B960494DF}">
+              <a14:hiddenLine xmlns:a14="http://schemas.microsoft.com/office/drawing/2010/main" w="12700" cap="flat" cmpd="sng" algn="ctr">
+                <a:solidFill>
+                  <a:schemeClr val="accent1">
+                    <a:shade val="50000"/>
+                  </a:schemeClr>
+                </a:solidFill>
+                <a:prstDash val="solid"/>
+                <a:miter lim="800000"/>
+              </a14:hiddenLine>
+            </a:ext>
+          </a:extLst>
+        </p:spPr>
+        <p:style>
+          <a:lnRef idx="2">
+            <a:schemeClr val="accent1">
+              <a:shade val="50000"/>
+            </a:schemeClr>
+          </a:lnRef>
+          <a:fillRef idx="1">
+            <a:schemeClr val="accent1"/>
+          </a:fillRef>
+          <a:effectRef idx="0">
+            <a:schemeClr val="accent1"/>
+          </a:effectRef>
+          <a:fontRef idx="minor">
+            <a:schemeClr val="lt1"/>
+          </a:fontRef>
+        </p:style>
+        <p:txBody>
+          <a:bodyPr wrap="none" lIns="50800" tIns="0" rIns="50800" bIns="0" rtlCol="0" anchor="ctr"/>
+          <a:lstStyle/>
+          <a:p>
+            <a:pPr algn="ctr"/>
+            <a:r>
+              <a:rPr lang="en-US" sz="1100" b="1">
+                <a:solidFill>
+                  <a:srgbClr val="FFFFFF"/>
+                </a:solidFill>
+                <a:latin typeface="Calibri" panose="020F0502020204030204" pitchFamily="34" charset="0"/>
+              </a:rPr>
+              <a:t>Presenter: Doaa (C)</a:t>
+            </a:r>
+          </a:p>
+        </p:txBody>
+      </p:sp>
+      <p:pic>
+        <p:nvPicPr>
+          <p:cNvPr id="21" name="ArgoCD apps">
+            <a:extLst>
+              <a:ext uri="{FF2B5EF4-FFF2-40B4-BE49-F238E27FC236}">
+                <a16:creationId xmlns:a16="http://schemas.microsoft.com/office/drawing/2014/main" id="{FAF6AACF-A1CE-473B-A9EA-DDFF092A7D24}"/>
+              </a:ext>
+            </a:extLst>
+          </p:cNvPr>
+          <p:cNvPicPr>
+            <a:picLocks/>
+          </p:cNvPicPr>
+          <p:nvPr/>
+        </p:nvPicPr>
+        <p:blipFill>
+          <a:blip r:embed="rId3"/>
+          <a:stretch>
+            <a:fillRect/>
+          </a:stretch>
+        </p:blipFill>
+        <p:spPr>
+          <a:xfrm>
+            <a:off x="546100" y="1270000"/>
+            <a:ext cx="7112000" cy="4000500"/>
+          </a:xfrm>
+          <a:prstGeom prst="rect">
+            <a:avLst/>
+          </a:prstGeom>
+          <a:ln w="9525">
+            <a:solidFill>
+              <a:srgbClr val="C9D6D3"/>
+            </a:solidFill>
+          </a:ln>
+        </p:spPr>
+      </p:pic>
+      <p:sp>
+        <p:nvSpPr>
+          <p:cNvPr id="22" name="Card apps">
+            <a:extLst>
+              <a:ext uri="{FF2B5EF4-FFF2-40B4-BE49-F238E27FC236}">
+                <a16:creationId xmlns:a16="http://schemas.microsoft.com/office/drawing/2014/main" id="{B6992DA0-9CFC-4CD3-8364-6EE4E2371F07}"/>
+              </a:ext>
+            </a:extLst>
+          </p:cNvPr>
+          <p:cNvSpPr/>
+          <p:nvPr/>
+        </p:nvSpPr>
+        <p:spPr>
+          <a:xfrm>
+            <a:off x="7874000" y="1270000"/>
+            <a:ext cx="3733800" cy="1231900"/>
+          </a:xfrm>
+          <a:prstGeom prst="roundRect">
+            <a:avLst>
+              <a:gd name="adj" fmla="val 6000"/>
+            </a:avLst>
+          </a:prstGeom>
+          <a:solidFill>
+            <a:srgbClr val="EDF4F2"/>
+          </a:solidFill>
+          <a:ln w="12700" cap="flat" cmpd="sng" algn="ctr">
+            <a:noFill/>
+            <a:prstDash val="solid"/>
+            <a:miter lim="800000"/>
+          </a:ln>
+          <a:effectLst/>
+          <a:extLst>
+            <a:ext uri="{91240B29-F687-4F45-9708-019B960494DF}">
+              <a14:hiddenLine xmlns:a14="http://schemas.microsoft.com/office/drawing/2010/main" w="12700" cap="flat" cmpd="sng" algn="ctr">
+                <a:solidFill>
+                  <a:schemeClr val="accent1">
+                    <a:shade val="50000"/>
+                  </a:schemeClr>
+                </a:solidFill>
+                <a:prstDash val="solid"/>
+                <a:miter lim="800000"/>
+              </a14:hiddenLine>
+            </a:ext>
+          </a:extLst>
+        </p:spPr>
+        <p:style>
+          <a:lnRef idx="2">
+            <a:schemeClr val="accent1">
+              <a:shade val="50000"/>
+            </a:schemeClr>
+          </a:lnRef>
+          <a:fillRef idx="1">
+            <a:schemeClr val="accent1"/>
+          </a:fillRef>
+          <a:effectRef idx="0">
+            <a:schemeClr val="accent1"/>
+          </a:effectRef>
+          <a:fontRef idx="minor">
+            <a:schemeClr val="lt1"/>
+          </a:fontRef>
+        </p:style>
+        <p:txBody>
+          <a:bodyPr rtlCol="0" anchor="ctr"/>
+          <a:lstStyle/>
+          <a:p>
+            <a:pPr algn="ctr"/>
+            <a:endParaRPr lang="en-US"/>
+          </a:p>
+        </p:txBody>
+      </p:sp>
+      <p:sp>
+        <p:nvSpPr>
+          <p:cNvPr id="23" name="Stat apps">
+            <a:extLst>
+              <a:ext uri="{FF2B5EF4-FFF2-40B4-BE49-F238E27FC236}">
+                <a16:creationId xmlns:a16="http://schemas.microsoft.com/office/drawing/2014/main" id="{5D8AAA3F-1FE3-43E1-B4F5-57ECDCA802CA}"/>
+              </a:ext>
+            </a:extLst>
+          </p:cNvPr>
+          <p:cNvSpPr txBox="1"/>
+          <p:nvPr/>
+        </p:nvSpPr>
+        <p:spPr>
+          <a:xfrm>
+            <a:off x="8077200" y="1549400"/>
+            <a:ext cx="1168400" cy="369332"/>
+          </a:xfrm>
+          <a:prstGeom prst="rect">
+            <a:avLst/>
+          </a:prstGeom>
+          <a:noFill/>
+        </p:spPr>
+        <p:txBody>
+          <a:bodyPr vert="horz" wrap="square" lIns="0" tIns="0" rIns="0" bIns="0" rtlCol="0">
+            <a:noAutofit/>
+          </a:bodyPr>
+          <a:lstStyle/>
+          <a:p>
+            <a:pPr>
+              <a:spcAft>
+                <a:spcPts val="600"/>
+              </a:spcAft>
+            </a:pPr>
+            <a:r>
+              <a:rPr lang="en-US" sz="3000" b="1">
+                <a:solidFill>
+                  <a:srgbClr val="2A9D8F"/>
+                </a:solidFill>
+                <a:latin typeface="Calibri" panose="020F0502020204030204" pitchFamily="34" charset="0"/>
+              </a:rPr>
+              <a:t>10/10</a:t>
+            </a:r>
+          </a:p>
+        </p:txBody>
+      </p:sp>
+      <p:sp>
+        <p:nvSpPr>
+          <p:cNvPr id="24" name="Label apps">
+            <a:extLst>
+              <a:ext uri="{FF2B5EF4-FFF2-40B4-BE49-F238E27FC236}">
+                <a16:creationId xmlns:a16="http://schemas.microsoft.com/office/drawing/2014/main" id="{174E5D11-3F38-40D1-A800-B33127277253}"/>
+              </a:ext>
+            </a:extLst>
+          </p:cNvPr>
+          <p:cNvSpPr txBox="1"/>
+          <p:nvPr/>
+        </p:nvSpPr>
+        <p:spPr>
+          <a:xfrm>
+            <a:off x="9296400" y="1524000"/>
+            <a:ext cx="2133600" cy="369332"/>
+          </a:xfrm>
+          <a:prstGeom prst="rect">
+            <a:avLst/>
+          </a:prstGeom>
+          <a:noFill/>
+        </p:spPr>
+        <p:txBody>
+          <a:bodyPr vert="horz" wrap="square" lIns="0" tIns="0" rIns="0" bIns="0" rtlCol="0">
+            <a:noAutofit/>
+          </a:bodyPr>
+          <a:lstStyle/>
+          <a:p>
+            <a:pPr>
+              <a:spcAft>
+                <a:spcPts val="600"/>
+              </a:spcAft>
+            </a:pPr>
+            <a:r>
+              <a:rPr lang="en-US" sz="1400">
+                <a:solidFill>
+                  <a:srgbClr val="0D3B4A"/>
+                </a:solidFill>
+                <a:latin typeface="Calibri" panose="020F0502020204030204" pitchFamily="34" charset="0"/>
+              </a:rPr>
+              <a:t>ArgoCD Applications Synced and Healthy</a:t>
+            </a:r>
+          </a:p>
+        </p:txBody>
+      </p:sp>
+      <p:sp>
+        <p:nvSpPr>
+          <p:cNvPr id="26" name="Card heal">
+            <a:extLst>
+              <a:ext uri="{FF2B5EF4-FFF2-40B4-BE49-F238E27FC236}">
+                <a16:creationId xmlns:a16="http://schemas.microsoft.com/office/drawing/2014/main" id="{7C4D11EB-3461-45A0-AF14-AD14DF110946}"/>
+              </a:ext>
+            </a:extLst>
+          </p:cNvPr>
+          <p:cNvSpPr/>
+          <p:nvPr/>
+        </p:nvSpPr>
+        <p:spPr>
+          <a:xfrm>
+            <a:off x="7874000" y="2654300"/>
+            <a:ext cx="3733800" cy="1231900"/>
+          </a:xfrm>
+          <a:prstGeom prst="roundRect">
+            <a:avLst>
+              <a:gd name="adj" fmla="val 6000"/>
+            </a:avLst>
+          </a:prstGeom>
+          <a:solidFill>
+            <a:srgbClr val="EDF4F2"/>
+          </a:solidFill>
+          <a:ln w="12700" cap="flat" cmpd="sng" algn="ctr">
+            <a:noFill/>
+            <a:prstDash val="solid"/>
+            <a:miter lim="800000"/>
+          </a:ln>
+          <a:effectLst/>
+          <a:extLst>
+            <a:ext uri="{91240B29-F687-4F45-9708-019B960494DF}">
+              <a14:hiddenLine xmlns:a14="http://schemas.microsoft.com/office/drawing/2010/main" w="12700" cap="flat" cmpd="sng" algn="ctr">
+                <a:solidFill>
+                  <a:schemeClr val="accent1">
+                    <a:shade val="50000"/>
+                  </a:schemeClr>
+                </a:solidFill>
+                <a:prstDash val="solid"/>
+                <a:miter lim="800000"/>
+              </a14:hiddenLine>
+            </a:ext>
+          </a:extLst>
+        </p:spPr>
+        <p:style>
+          <a:lnRef idx="2">
+            <a:schemeClr val="accent1">
+              <a:shade val="50000"/>
+            </a:schemeClr>
+          </a:lnRef>
+          <a:fillRef idx="1">
+            <a:schemeClr val="accent1"/>
+          </a:fillRef>
+          <a:effectRef idx="0">
+            <a:schemeClr val="accent1"/>
+          </a:effectRef>
+          <a:fontRef idx="minor">
+            <a:schemeClr val="lt1"/>
+          </a:fontRef>
+        </p:style>
+        <p:txBody>
+          <a:bodyPr rtlCol="0" anchor="ctr"/>
+          <a:lstStyle/>
+          <a:p>
+            <a:pPr algn="ctr"/>
+            <a:endParaRPr lang="en-US"/>
+          </a:p>
+        </p:txBody>
+      </p:sp>
+      <p:sp>
+        <p:nvSpPr>
+          <p:cNvPr id="27" name="Stat heal">
+            <a:extLst>
+              <a:ext uri="{FF2B5EF4-FFF2-40B4-BE49-F238E27FC236}">
+                <a16:creationId xmlns:a16="http://schemas.microsoft.com/office/drawing/2014/main" id="{9EF9E9FB-9159-43DA-9D90-3608665DB9C5}"/>
+              </a:ext>
+            </a:extLst>
+          </p:cNvPr>
+          <p:cNvSpPr txBox="1"/>
+          <p:nvPr/>
+        </p:nvSpPr>
+        <p:spPr>
+          <a:xfrm>
+            <a:off x="8077200" y="2933700"/>
+            <a:ext cx="1168400" cy="369332"/>
+          </a:xfrm>
+          <a:prstGeom prst="rect">
+            <a:avLst/>
+          </a:prstGeom>
+          <a:noFill/>
+        </p:spPr>
+        <p:txBody>
+          <a:bodyPr vert="horz" wrap="square" lIns="0" tIns="0" rIns="0" bIns="0" rtlCol="0">
+            <a:noAutofit/>
+          </a:bodyPr>
+          <a:lstStyle/>
+          <a:p>
+            <a:pPr>
+              <a:spcAft>
+                <a:spcPts val="600"/>
+              </a:spcAft>
+            </a:pPr>
+            <a:r>
+              <a:rPr lang="en-US" sz="3000" b="1">
+                <a:solidFill>
+                  <a:srgbClr val="2A9D8F"/>
+                </a:solidFill>
+                <a:latin typeface="Calibri" panose="020F0502020204030204" pitchFamily="34" charset="0"/>
+              </a:rPr>
+              <a:t>22 s</a:t>
+            </a:r>
+          </a:p>
+        </p:txBody>
+      </p:sp>
+      <p:sp>
+        <p:nvSpPr>
+          <p:cNvPr id="28" name="Label heal">
+            <a:extLst>
+              <a:ext uri="{FF2B5EF4-FFF2-40B4-BE49-F238E27FC236}">
+                <a16:creationId xmlns:a16="http://schemas.microsoft.com/office/drawing/2014/main" id="{8EAD9EF5-56CE-46AC-8652-98EE54A113F3}"/>
+              </a:ext>
+            </a:extLst>
+          </p:cNvPr>
+          <p:cNvSpPr txBox="1"/>
+          <p:nvPr/>
+        </p:nvSpPr>
+        <p:spPr>
+          <a:xfrm>
+            <a:off x="9296400" y="2908300"/>
+            <a:ext cx="2133600" cy="369332"/>
+          </a:xfrm>
+          <a:prstGeom prst="rect">
+            <a:avLst/>
+          </a:prstGeom>
+          <a:noFill/>
+        </p:spPr>
+        <p:txBody>
+          <a:bodyPr vert="horz" wrap="square" lIns="0" tIns="0" rIns="0" bIns="0" rtlCol="0">
+            <a:noAutofit/>
+          </a:bodyPr>
+          <a:lstStyle/>
+          <a:p>
+            <a:pPr>
+              <a:spcAft>
+                <a:spcPts val="600"/>
+              </a:spcAft>
+            </a:pPr>
+            <a:r>
+              <a:rPr lang="en-US" sz="1400">
+                <a:solidFill>
+                  <a:srgbClr val="0D3B4A"/>
+                </a:solidFill>
+                <a:latin typeface="Calibri" panose="020F0502020204030204" pitchFamily="34" charset="0"/>
+              </a:rPr>
+              <a:t>self-heal: product-service scaled to 0, ArgoCD brings it back</a:t>
+            </a:r>
+          </a:p>
+        </p:txBody>
+      </p:sp>
+      <p:sp>
+        <p:nvSpPr>
+          <p:cNvPr id="29" name="Card order">
+            <a:extLst>
+              <a:ext uri="{FF2B5EF4-FFF2-40B4-BE49-F238E27FC236}">
+                <a16:creationId xmlns:a16="http://schemas.microsoft.com/office/drawing/2014/main" id="{279EF561-99BD-4D7B-89ED-E976ECA9FB0D}"/>
+              </a:ext>
+            </a:extLst>
+          </p:cNvPr>
+          <p:cNvSpPr/>
+          <p:nvPr/>
+        </p:nvSpPr>
+        <p:spPr>
+          <a:xfrm>
+            <a:off x="7874000" y="4038600"/>
+            <a:ext cx="3733800" cy="1231900"/>
+          </a:xfrm>
+          <a:prstGeom prst="roundRect">
+            <a:avLst>
+              <a:gd name="adj" fmla="val 6000"/>
+            </a:avLst>
+          </a:prstGeom>
+          <a:solidFill>
+            <a:srgbClr val="EDF4F2"/>
+          </a:solidFill>
+          <a:ln w="12700" cap="flat" cmpd="sng" algn="ctr">
+            <a:noFill/>
+            <a:prstDash val="solid"/>
+            <a:miter lim="800000"/>
+          </a:ln>
+          <a:effectLst/>
+          <a:extLst>
+            <a:ext uri="{91240B29-F687-4F45-9708-019B960494DF}">
+              <a14:hiddenLine xmlns:a14="http://schemas.microsoft.com/office/drawing/2010/main" w="12700" cap="flat" cmpd="sng" algn="ctr">
+                <a:solidFill>
+                  <a:schemeClr val="accent1">
+                    <a:shade val="50000"/>
+                  </a:schemeClr>
+                </a:solidFill>
+                <a:prstDash val="solid"/>
+                <a:miter lim="800000"/>
+              </a14:hiddenLine>
+            </a:ext>
+          </a:extLst>
+        </p:spPr>
+        <p:style>
+          <a:lnRef idx="2">
+            <a:schemeClr val="accent1">
+              <a:shade val="50000"/>
+            </a:schemeClr>
+          </a:lnRef>
+          <a:fillRef idx="1">
+            <a:schemeClr val="accent1"/>
+          </a:fillRef>
+          <a:effectRef idx="0">
+            <a:schemeClr val="accent1"/>
+          </a:effectRef>
+          <a:fontRef idx="minor">
+            <a:schemeClr val="lt1"/>
+          </a:fontRef>
+        </p:style>
+        <p:txBody>
+          <a:bodyPr rtlCol="0" anchor="ctr"/>
+          <a:lstStyle/>
+          <a:p>
+            <a:pPr algn="ctr"/>
+            <a:endParaRPr lang="en-US"/>
+          </a:p>
+        </p:txBody>
+      </p:sp>
+      <p:sp>
+        <p:nvSpPr>
+          <p:cNvPr id="30" name="Stat order">
+            <a:extLst>
+              <a:ext uri="{FF2B5EF4-FFF2-40B4-BE49-F238E27FC236}">
+                <a16:creationId xmlns:a16="http://schemas.microsoft.com/office/drawing/2014/main" id="{E5DEA139-8C9A-4364-AB2C-1EB9011A82C7}"/>
+              </a:ext>
+            </a:extLst>
+          </p:cNvPr>
+          <p:cNvSpPr txBox="1"/>
+          <p:nvPr/>
+        </p:nvSpPr>
+        <p:spPr>
+          <a:xfrm>
+            <a:off x="8077200" y="4318000"/>
+            <a:ext cx="1168400" cy="369332"/>
+          </a:xfrm>
+          <a:prstGeom prst="rect">
+            <a:avLst/>
+          </a:prstGeom>
+          <a:noFill/>
+        </p:spPr>
+        <p:txBody>
+          <a:bodyPr vert="horz" wrap="square" lIns="0" tIns="0" rIns="0" bIns="0" rtlCol="0">
+            <a:noAutofit/>
+          </a:bodyPr>
+          <a:lstStyle/>
+          <a:p>
+            <a:pPr>
+              <a:spcAft>
+                <a:spcPts val="600"/>
+              </a:spcAft>
+            </a:pPr>
+            <a:r>
+              <a:rPr lang="en-US" sz="3000" b="1">
+                <a:solidFill>
+                  <a:srgbClr val="2A9D8F"/>
+                </a:solidFill>
+                <a:latin typeface="Calibri" panose="020F0502020204030204" pitchFamily="34" charset="0"/>
+              </a:rPr>
+              <a:t>~4 s</a:t>
+            </a:r>
+          </a:p>
+        </p:txBody>
+      </p:sp>
+      <p:sp>
+        <p:nvSpPr>
+          <p:cNvPr id="31" name="Label order">
+            <a:extLst>
+              <a:ext uri="{FF2B5EF4-FFF2-40B4-BE49-F238E27FC236}">
+                <a16:creationId xmlns:a16="http://schemas.microsoft.com/office/drawing/2014/main" id="{849B20A7-9287-4A67-89FD-4056683A0F2E}"/>
+              </a:ext>
+            </a:extLst>
+          </p:cNvPr>
+          <p:cNvSpPr txBox="1"/>
+          <p:nvPr/>
+        </p:nvSpPr>
+        <p:spPr>
+          <a:xfrm>
+            <a:off x="9296400" y="4292600"/>
+            <a:ext cx="2133600" cy="369332"/>
+          </a:xfrm>
+          <a:prstGeom prst="rect">
+            <a:avLst/>
+          </a:prstGeom>
+          <a:noFill/>
+        </p:spPr>
+        <p:txBody>
+          <a:bodyPr vert="horz" wrap="square" lIns="0" tIns="0" rIns="0" bIns="0" rtlCol="0">
+            <a:noAutofit/>
+          </a:bodyPr>
+          <a:lstStyle/>
+          <a:p>
+            <a:pPr>
+              <a:spcAft>
+                <a:spcPts val="600"/>
+              </a:spcAft>
+            </a:pPr>
+            <a:r>
+              <a:rPr lang="en-US" sz="1400">
+                <a:solidFill>
+                  <a:srgbClr val="0D3B4A"/>
+                </a:solidFill>
+                <a:latin typeface="Calibri" panose="020F0502020204030204" pitchFamily="34" charset="0"/>
+              </a:rPr>
+              <a:t>order PENDING → CONFIRMED through NodePort 30080</a:t>
+            </a:r>
+          </a:p>
+        </p:txBody>
+      </p:sp>
+      <p:sp>
+        <p:nvSpPr>
+          <p:cNvPr id="32" name="ArgoCD caption">
+            <a:extLst>
+              <a:ext uri="{FF2B5EF4-FFF2-40B4-BE49-F238E27FC236}">
+                <a16:creationId xmlns:a16="http://schemas.microsoft.com/office/drawing/2014/main" id="{15CA0CDA-A3DD-4264-9BAA-9B6C88AF56F6}"/>
+              </a:ext>
+            </a:extLst>
+          </p:cNvPr>
+          <p:cNvSpPr txBox="1"/>
+          <p:nvPr/>
+        </p:nvSpPr>
+        <p:spPr>
+          <a:xfrm>
+            <a:off x="546100" y="5397500"/>
+            <a:ext cx="7112000" cy="369332"/>
+          </a:xfrm>
+          <a:prstGeom prst="rect">
+            <a:avLst/>
+          </a:prstGeom>
+          <a:noFill/>
+        </p:spPr>
+        <p:txBody>
+          <a:bodyPr vert="horz" wrap="square" lIns="0" tIns="0" rIns="0" bIns="0" rtlCol="0">
+            <a:noAutofit/>
+          </a:bodyPr>
+          <a:lstStyle/>
+          <a:p>
+            <a:pPr>
+              <a:spcAft>
+                <a:spcPts val="600"/>
+              </a:spcAft>
+            </a:pPr>
+            <a:r>
+              <a:rPr lang="en-US" sz="1100">
+                <a:solidFill>
+                  <a:srgbClr val="5F7C86"/>
+                </a:solidFill>
+                <a:latin typeface="Calibri" panose="020F0502020204030204" pitchFamily="34" charset="0"/>
+              </a:rPr>
+              <a:t>kind · ArgoCD 3.5 · env/dev = CI's deploy of 8c14289 · one ServiceAccount per service, no API token, uid 10001, read-only root filesystem</a:t>
+            </a:r>
+          </a:p>
+        </p:txBody>
+      </p:sp>
+    </p:spTree>
+    <p:extLst>
+      <p:ext uri="{BB962C8B-B14F-4D97-AF65-F5344CB8AC3E}">
+        <p14:creationId xmlns:p14="http://schemas.microsoft.com/office/powerpoint/2010/main" val="2764855869"/>
+      </p:ext>
+    </p:extLst>
+  </p:cSld>
+  <p:clrMapOvr>
+    <a:masterClrMapping/>
+  </p:clrMapOvr>
+</p:sld>
+</file>
+
+<file path=ppt/slides/slide17.xml><?xml version="1.0" encoding="utf-8"?>
+<p:sld xmlns:a="http://schemas.openxmlformats.org/drawingml/2006/main" xmlns:r="http://schemas.openxmlformats.org/officeDocument/2006/relationships" xmlns:p="http://schemas.openxmlformats.org/presentationml/2006/main">
+  <p:cSld>
+    <p:spTree>
+      <p:nvGrpSpPr>
+        <p:cNvPr id="1" name=""/>
+        <p:cNvGrpSpPr/>
+        <p:nvPr/>
+      </p:nvGrpSpPr>
+      <p:grpSpPr>
+        <a:xfrm>
+          <a:off x="0" y="0"/>
+          <a:ext cx="0" cy="0"/>
+          <a:chOff x="0" y="0"/>
+          <a:chExt cx="0" cy="0"/>
+        </a:xfrm>
+      </p:grpSpPr>
+      <p:sp>
+        <p:nvSpPr>
+          <p:cNvPr id="2" name="Text 0"/>
+          <p:cNvSpPr>
+            <a:spLocks noGrp="1"/>
+          </p:cNvSpPr>
+          <p:nvPr>
+            <p:ph type="title" idx="100" hasCustomPrompt="1"/>
+          </p:nvPr>
+        </p:nvSpPr>
+        <p:spPr>
+          <a:xfrm>
+            <a:off x="548640" y="320040"/>
+            <a:ext cx="11064240" cy="822960"/>
+          </a:xfrm>
+          <a:prstGeom prst="rect">
+            <a:avLst/>
+          </a:prstGeom>
+          <a:noFill/>
+          <a:ln/>
+        </p:spPr>
+        <p:txBody>
+          <a:bodyPr wrap="square" rtlCol="0" anchor="ctr"/>
+          <a:lstStyle/>
+          <a:p>
+            <a:pPr marL="0" indent="0">
+              <a:buNone/>
+            </a:pPr>
+            <a:r>
+              <a:rPr lang="en-US" sz="3200" b="1">
+                <a:solidFill>
+                  <a:schemeClr val="tx2"/>
+                </a:solidFill>
+              </a:rPr>
+              <a:t>Shipped by CI, watched in Grafana</a:t>
+            </a:r>
+            <a:endParaRPr lang="en-US" sz="3200" dirty="0"/>
+          </a:p>
+        </p:txBody>
+      </p:sp>
+      <p:sp>
+        <p:nvSpPr>
+          <p:cNvPr id="25" name="Slide Number Placeholder 0"/>
+          <p:cNvSpPr>
+            <a:spLocks noGrp="1"/>
+          </p:cNvSpPr>
+          <p:nvPr>
+            <p:ph type="sldNum" sz="quarter" idx="4294967295"/>
+          </p:nvPr>
+        </p:nvSpPr>
+        <p:spPr>
+          <a:xfrm>
+            <a:off x="11155680" y="6400800"/>
+            <a:ext cx="548640" cy="274320"/>
+          </a:xfrm>
+          <a:prstGeom prst="rect">
+            <a:avLst/>
+          </a:prstGeom>
+          <a:extLst>
+            <a:ext uri="{C572A759-6A51-4108-AA02-DFA0A04FC94B}">
+              <ma14:wrappingTextBoxFlag xmlns="" xmlns:ma14="http://schemas.microsoft.com/office/mac/drawingml/2011/main" val="0"/>
+            </a:ext>
+          </a:extLst>
+        </p:spPr>
+        <p:txBody>
+          <a:bodyPr/>
+          <a:lstStyle>
+            <a:lvl1pPr>
+              <a:defRPr sz="1000">
+                <a:solidFill>
+                  <a:schemeClr val="accent4"/>
+                </a:solidFill>
+              </a:defRPr>
+            </a:lvl1pPr>
+          </a:lstStyle>
+          <a:p>
+            <a:pPr algn="r"/>
+            <a:fld id="{F7021451-1387-4CA6-816F-3879F97B5CBC}" type="slidenum">
+              <a:rPr lang="en-US" b="0"/>
+              <a:t>17</a:t>
+            </a:fld>
+            <a:endParaRPr lang="en-US"/>
+          </a:p>
+        </p:txBody>
+      </p:sp>
+      <p:sp>
+        <p:nvSpPr>
+          <p:cNvPr id="19" name="Presenter tag">
+            <a:extLst>
+              <a:ext uri="{FF2B5EF4-FFF2-40B4-BE49-F238E27FC236}">
+                <a16:creationId xmlns:a16="http://schemas.microsoft.com/office/drawing/2014/main" id="{F364C54A-EB48-41BE-8E8B-E6C6467E278F}"/>
+              </a:ext>
+            </a:extLst>
+          </p:cNvPr>
+          <p:cNvSpPr/>
+          <p:nvPr/>
+        </p:nvSpPr>
+        <p:spPr>
+          <a:xfrm>
+            <a:off x="8585200" y="6375400"/>
+            <a:ext cx="2413000" cy="304800"/>
+          </a:xfrm>
+          <a:prstGeom prst="roundRect">
+            <a:avLst/>
+          </a:prstGeom>
+          <a:solidFill>
+            <a:srgbClr val="0D3B4A"/>
+          </a:solidFill>
+          <a:ln w="12700" cap="flat" cmpd="sng" algn="ctr">
+            <a:noFill/>
+            <a:prstDash val="solid"/>
+            <a:miter lim="800000"/>
+          </a:ln>
+          <a:effectLst/>
+          <a:extLst>
+            <a:ext uri="{91240B29-F687-4F45-9708-019B960494DF}">
+              <a14:hiddenLine xmlns:a14="http://schemas.microsoft.com/office/drawing/2010/main" w="12700" cap="flat" cmpd="sng" algn="ctr">
+                <a:solidFill>
+                  <a:schemeClr val="accent1">
+                    <a:shade val="50000"/>
+                  </a:schemeClr>
+                </a:solidFill>
+                <a:prstDash val="solid"/>
+                <a:miter lim="800000"/>
+              </a14:hiddenLine>
+            </a:ext>
+          </a:extLst>
+        </p:spPr>
+        <p:style>
+          <a:lnRef idx="2">
+            <a:schemeClr val="accent1">
+              <a:shade val="50000"/>
+            </a:schemeClr>
+          </a:lnRef>
+          <a:fillRef idx="1">
+            <a:schemeClr val="accent1"/>
+          </a:fillRef>
+          <a:effectRef idx="0">
+            <a:schemeClr val="accent1"/>
+          </a:effectRef>
+          <a:fontRef idx="minor">
+            <a:schemeClr val="lt1"/>
+          </a:fontRef>
+        </p:style>
+        <p:txBody>
+          <a:bodyPr wrap="none" lIns="50800" tIns="0" rIns="50800" bIns="0" rtlCol="0" anchor="ctr"/>
+          <a:lstStyle/>
+          <a:p>
+            <a:pPr algn="ctr"/>
+            <a:r>
+              <a:rPr lang="en-US" sz="1100" b="1">
+                <a:solidFill>
+                  <a:srgbClr val="FFFFFF"/>
+                </a:solidFill>
+                <a:latin typeface="Calibri" panose="020F0502020204030204" pitchFamily="34" charset="0"/>
+              </a:rPr>
+              <a:t>Presenter: Doaa (C)</a:t>
+            </a:r>
+          </a:p>
+        </p:txBody>
+      </p:sp>
+      <p:pic>
+        <p:nvPicPr>
+          <p:cNvPr id="4" name="CI run">
+            <a:extLst>
+              <a:ext uri="{FF2B5EF4-FFF2-40B4-BE49-F238E27FC236}">
+                <a16:creationId xmlns:a16="http://schemas.microsoft.com/office/drawing/2014/main" id="{74AF0855-E1E0-45E2-B57D-9FF6526A7F53}"/>
+              </a:ext>
+            </a:extLst>
+          </p:cNvPr>
+          <p:cNvPicPr>
+            <a:picLocks/>
+          </p:cNvPicPr>
+          <p:nvPr/>
+        </p:nvPicPr>
+        <p:blipFill>
+          <a:blip r:embed="rId2"/>
+          <a:stretch>
+            <a:fillRect/>
+          </a:stretch>
+        </p:blipFill>
+        <p:spPr>
+          <a:xfrm>
+            <a:off x="546100" y="1320800"/>
+            <a:ext cx="5461000" cy="3098800"/>
+          </a:xfrm>
+          <a:prstGeom prst="rect">
+            <a:avLst/>
+          </a:prstGeom>
+          <a:ln w="9525">
+            <a:solidFill>
+              <a:srgbClr val="C9D6D3"/>
+            </a:solidFill>
+          </a:ln>
+        </p:spPr>
+      </p:pic>
+      <p:pic>
+        <p:nvPicPr>
+          <p:cNvPr id="6" name="Grafana platform">
+            <a:extLst>
+              <a:ext uri="{FF2B5EF4-FFF2-40B4-BE49-F238E27FC236}">
+                <a16:creationId xmlns:a16="http://schemas.microsoft.com/office/drawing/2014/main" id="{994D04C2-A00B-4C3D-961E-45E98B91023D}"/>
+              </a:ext>
+            </a:extLst>
+          </p:cNvPr>
+          <p:cNvPicPr>
+            <a:picLocks/>
+          </p:cNvPicPr>
+          <p:nvPr/>
+        </p:nvPicPr>
+        <p:blipFill>
+          <a:blip r:embed="rId3"/>
+          <a:stretch>
+            <a:fillRect/>
+          </a:stretch>
+        </p:blipFill>
+        <p:spPr>
+          <a:xfrm>
+            <a:off x="6146800" y="1320800"/>
+            <a:ext cx="5461000" cy="3073400"/>
+          </a:xfrm>
+          <a:prstGeom prst="rect">
+            <a:avLst/>
+          </a:prstGeom>
+          <a:ln w="9525">
+            <a:solidFill>
+              <a:srgbClr val="C9D6D3"/>
+            </a:solidFill>
+          </a:ln>
+        </p:spPr>
+      </p:pic>
+      <p:sp>
+        <p:nvSpPr>
+          <p:cNvPr id="7" name="CI caption">
+            <a:extLst>
+              <a:ext uri="{FF2B5EF4-FFF2-40B4-BE49-F238E27FC236}">
+                <a16:creationId xmlns:a16="http://schemas.microsoft.com/office/drawing/2014/main" id="{20A085AB-D8C6-4B29-BF78-1C3D64BB5A84}"/>
+              </a:ext>
+            </a:extLst>
+          </p:cNvPr>
+          <p:cNvSpPr txBox="1"/>
+          <p:nvPr/>
+        </p:nvSpPr>
+        <p:spPr>
+          <a:xfrm>
+            <a:off x="546100" y="4572000"/>
+            <a:ext cx="5461000" cy="369332"/>
+          </a:xfrm>
+          <a:prstGeom prst="rect">
+            <a:avLst/>
+          </a:prstGeom>
+          <a:noFill/>
+        </p:spPr>
+        <p:txBody>
+          <a:bodyPr vert="horz" wrap="square" lIns="0" tIns="0" rIns="0" bIns="0" rtlCol="0">
+            <a:noAutofit/>
+          </a:bodyPr>
+          <a:lstStyle/>
+          <a:p>
+            <a:pPr>
+              <a:spcAft>
+                <a:spcPts val="600"/>
+              </a:spcAft>
+            </a:pPr>
+            <a:r>
+              <a:rPr lang="en-US" sz="1400">
+                <a:solidFill>
+                  <a:srgbClr val="0D3B4A"/>
+                </a:solidFill>
+                <a:latin typeface="Calibri" panose="020F0502020204030204" pitchFamily="34" charset="0"/>
+              </a:rPr>
+              <a:t>CI on main: secret scan, non-root guard, tests + JaCoCo gate, image to GHCR, tags committed to env/dev (run #31, every module green)</a:t>
+            </a:r>
+          </a:p>
+        </p:txBody>
+      </p:sp>
+      <p:sp>
+        <p:nvSpPr>
+          <p:cNvPr id="8" name="Grafana caption">
+            <a:extLst>
+              <a:ext uri="{FF2B5EF4-FFF2-40B4-BE49-F238E27FC236}">
+                <a16:creationId xmlns:a16="http://schemas.microsoft.com/office/drawing/2014/main" id="{12EFA5E1-0364-4EF3-9556-3AE783C72B34}"/>
+              </a:ext>
+            </a:extLst>
+          </p:cNvPr>
+          <p:cNvSpPr txBox="1"/>
+          <p:nvPr/>
+        </p:nvSpPr>
+        <p:spPr>
+          <a:xfrm>
+            <a:off x="6146800" y="4572000"/>
+            <a:ext cx="5461000" cy="369332"/>
+          </a:xfrm>
+          <a:prstGeom prst="rect">
+            <a:avLst/>
+          </a:prstGeom>
+          <a:noFill/>
+        </p:spPr>
+        <p:txBody>
+          <a:bodyPr vert="horz" wrap="square" lIns="0" tIns="0" rIns="0" bIns="0" rtlCol="0">
+            <a:noAutofit/>
+          </a:bodyPr>
+          <a:lstStyle/>
+          <a:p>
+            <a:pPr>
+              <a:spcAft>
+                <a:spcPts val="600"/>
+              </a:spcAft>
+            </a:pPr>
+            <a:r>
+              <a:rPr lang="en-US" sz="1400">
+                <a:solidFill>
+                  <a:srgbClr val="0D3B4A"/>
+                </a:solidFill>
+                <a:latin typeface="Calibri" panose="020F0502020204030204" pitchFamily="34" charset="0"/>
+              </a:rPr>
+              <a:t>Platform Overview: all 9 services up, request rate, P95 latency, 5xx, JVM heap, payments and outbox backlog</a:t>
+            </a:r>
+          </a:p>
+        </p:txBody>
+      </p:sp>
+    </p:spTree>
+    <p:extLst>
+      <p:ext uri="{BB962C8B-B14F-4D97-AF65-F5344CB8AC3E}">
+        <p14:creationId xmlns:p14="http://schemas.microsoft.com/office/powerpoint/2010/main" val="3953753475"/>
+      </p:ext>
+    </p:extLst>
+  </p:cSld>
+  <p:clrMapOvr>
+    <a:masterClrMapping/>
+  </p:clrMapOvr>
+</p:sld>
+</file>
+
+<file path=ppt/slides/slide18.xml><?xml version="1.0" encoding="utf-8"?>
 <p:sld xmlns:a="http://schemas.openxmlformats.org/drawingml/2006/main" xmlns:r="http://schemas.openxmlformats.org/officeDocument/2006/relationships" xmlns:p="http://schemas.openxmlformats.org/presentationml/2006/main">
   <p:cSld name="Slide 13">
     <p:spTree>
@@ -6258,6 +8778,13 @@
             <a:prstDash val="solid"/>
           </a:ln>
         </p:spPr>
+        <p:txBody>
+          <a:bodyPr/>
+          <a:lstStyle/>
+          <a:p>
+            <a:endParaRPr lang="en-US"/>
+          </a:p>
+        </p:txBody>
       </p:sp>
       <p:sp>
         <p:nvSpPr>
@@ -6427,7 +8954,7 @@
           </a:prstGeom>
           <a:extLst>
             <a:ext uri="{C572A759-6A51-4108-AA02-DFA0A04FC94B}">
-              <ma14:wrappingTextBoxFlag xmlns:ma14="http://schemas.microsoft.com/office/mac/drawingml/2011/main" xmlns="" val="0"/>
+              <ma14:wrappingTextBoxFlag xmlns="" xmlns:ma14="http://schemas.microsoft.com/office/mac/drawingml/2011/main" val="0"/>
             </a:ext>
           </a:extLst>
         </p:spPr>
@@ -6446,7 +8973,7 @@
             <a:pPr algn="r"/>
             <a:fld id="{F7021451-1387-4CA6-816F-3879F97B5CBC}" type="slidenum">
               <a:rPr lang="en-US" b="0"/>
-              <a:t>14</a:t>
+              <a:t>18</a:t>
             </a:fld>
             <a:endParaRPr lang="en-US"/>
           </a:p>
@@ -6523,7 +9050,7 @@
                 </a:solidFill>
                 <a:latin typeface="Calibri" panose="020F0502020204030204" pitchFamily="34" charset="0"/>
               </a:rPr>
-              <a:t>Presenter: Mohammed (B)</a:t>
+              <a:t>Presenter: Mohamed (B)</a:t>
             </a:r>
           </a:p>
         </p:txBody>
@@ -6536,7 +9063,7 @@
 </p:sld>
 </file>
 
-<file path=ppt/slides/slide15.xml><?xml version="1.0" encoding="utf-8"?>
+<file path=ppt/slides/slide19.xml><?xml version="1.0" encoding="utf-8"?>
 <p:sld xmlns:a="http://schemas.openxmlformats.org/drawingml/2006/main" xmlns:r="http://schemas.openxmlformats.org/officeDocument/2006/relationships" xmlns:p="http://schemas.openxmlformats.org/presentationml/2006/main">
   <p:cSld name="Slide 14">
     <p:spTree>
@@ -6627,7 +9154,7 @@
                   <a:srgbClr val="C77D12"/>
                 </a:solidFill>
               </a:rPr>
-              <a:t>Mohammed</a:t>
+              <a:t>Mohamed</a:t>
             </a:r>
             <a:r>
               <a:rPr lang="en-US" sz="2000">
@@ -6863,6 +9390,13 @@
             <a:prstDash val="solid"/>
           </a:ln>
         </p:spPr>
+        <p:txBody>
+          <a:bodyPr/>
+          <a:lstStyle/>
+          <a:p>
+            <a:endParaRPr lang="en-US"/>
+          </a:p>
+        </p:txBody>
       </p:sp>
       <p:sp>
         <p:nvSpPr>
@@ -6937,7 +9471,7 @@
                   <a:schemeClr val="tx1"/>
                 </a:solidFill>
               </a:rPr>
-              <a:t>Slides 1–3, 8–9</a:t>
+              <a:t>Slides 1–3, 9–10</a:t>
             </a:r>
           </a:p>
           <a:p>
@@ -6995,6 +9529,13 @@
             <a:prstDash val="solid"/>
           </a:ln>
         </p:spPr>
+        <p:txBody>
+          <a:bodyPr/>
+          <a:lstStyle/>
+          <a:p>
+            <a:endParaRPr lang="en-US"/>
+          </a:p>
+        </p:txBody>
       </p:sp>
       <p:sp>
         <p:nvSpPr>
@@ -7029,7 +9570,7 @@
                 <a:ea typeface="Cambria" pitchFamily="34" charset="-122"/>
                 <a:cs typeface="Cambria" pitchFamily="34" charset="-120"/>
               </a:rPr>
-              <a:t>Mohammed</a:t>
+              <a:t>Mohamed</a:t>
             </a:r>
             <a:endParaRPr lang="en-US" sz="3000" dirty="0">
               <a:solidFill>
@@ -7069,7 +9610,7 @@
                   <a:schemeClr val="tx1"/>
                 </a:solidFill>
               </a:rPr>
-              <a:t>Slides 4–7, 14</a:t>
+              <a:t>Slides 4–8, 18</a:t>
             </a:r>
           </a:p>
           <a:p>
@@ -7127,6 +9668,13 @@
             <a:prstDash val="solid"/>
           </a:ln>
         </p:spPr>
+        <p:txBody>
+          <a:bodyPr/>
+          <a:lstStyle/>
+          <a:p>
+            <a:endParaRPr lang="en-US"/>
+          </a:p>
+        </p:txBody>
       </p:sp>
       <p:sp>
         <p:nvSpPr>
@@ -7201,7 +9749,7 @@
                   <a:schemeClr val="tx1"/>
                 </a:solidFill>
               </a:rPr>
-              <a:t>Slides 10–13</a:t>
+              <a:t>Slides 11–17</a:t>
             </a:r>
           </a:p>
           <a:p>
@@ -7259,6 +9807,13 @@
             <a:prstDash val="solid"/>
           </a:ln>
         </p:spPr>
+        <p:txBody>
+          <a:bodyPr/>
+          <a:lstStyle/>
+          <a:p>
+            <a:endParaRPr lang="en-US"/>
+          </a:p>
+        </p:txBody>
       </p:sp>
       <p:sp>
         <p:nvSpPr>
@@ -7329,7 +9884,7 @@
                   <a:schemeClr val="tx1"/>
                 </a:solidFill>
               </a:rPr>
-              <a:t>Slide 15</a:t>
+              <a:t>Slide 19</a:t>
             </a:r>
           </a:p>
           <a:p>
@@ -7378,7 +9933,7 @@
                   <a:schemeClr val="tx2"/>
                 </a:solidFill>
               </a:rPr>
-              <a:t>Each block is one speaker, so there are only three handovers. The demo follows the same split: Mohammed brings the platform up and places an order, Nourhan shows security and load, Doaa breaks payment and shows the deployment and Bonus B2.</a:t>
+              <a:t>Each block is one speaker, so there are only three handovers. The demo follows the same split: Mohamed brings the platform up and places an order, Nourhan shows security and load, Doaa breaks payment and shows the deployment and Bonus B2.</a:t>
             </a:r>
             <a:endParaRPr lang="en-US" sz="1600" dirty="0"/>
           </a:p>
@@ -7440,7 +9995,7 @@
           </a:prstGeom>
           <a:extLst>
             <a:ext uri="{C572A759-6A51-4108-AA02-DFA0A04FC94B}">
-              <ma14:wrappingTextBoxFlag xmlns:ma14="http://schemas.microsoft.com/office/mac/drawingml/2011/main" xmlns="" val="0"/>
+              <ma14:wrappingTextBoxFlag xmlns="" xmlns:ma14="http://schemas.microsoft.com/office/mac/drawingml/2011/main" val="0"/>
             </a:ext>
           </a:extLst>
         </p:spPr>
@@ -7637,6 +10192,13 @@
             <a:prstDash val="solid"/>
           </a:ln>
         </p:spPr>
+        <p:txBody>
+          <a:bodyPr/>
+          <a:lstStyle/>
+          <a:p>
+            <a:endParaRPr lang="en-US"/>
+          </a:p>
+        </p:txBody>
       </p:sp>
       <p:sp>
         <p:nvSpPr>
@@ -7739,6 +10301,13 @@
             <a:prstDash val="solid"/>
           </a:ln>
         </p:spPr>
+        <p:txBody>
+          <a:bodyPr/>
+          <a:lstStyle/>
+          <a:p>
+            <a:endParaRPr lang="en-US"/>
+          </a:p>
+        </p:txBody>
       </p:sp>
       <p:sp>
         <p:nvSpPr>
@@ -7841,6 +10410,13 @@
             <a:prstDash val="solid"/>
           </a:ln>
         </p:spPr>
+        <p:txBody>
+          <a:bodyPr/>
+          <a:lstStyle/>
+          <a:p>
+            <a:endParaRPr lang="en-US"/>
+          </a:p>
+        </p:txBody>
       </p:sp>
       <p:sp>
         <p:nvSpPr>
@@ -7943,6 +10519,13 @@
             <a:prstDash val="solid"/>
           </a:ln>
         </p:spPr>
+        <p:txBody>
+          <a:bodyPr/>
+          <a:lstStyle/>
+          <a:p>
+            <a:endParaRPr lang="en-US"/>
+          </a:p>
+        </p:txBody>
       </p:sp>
       <p:sp>
         <p:nvSpPr>
@@ -8119,7 +10702,7 @@
           </a:prstGeom>
           <a:extLst>
             <a:ext uri="{C572A759-6A51-4108-AA02-DFA0A04FC94B}">
-              <ma14:wrappingTextBoxFlag xmlns:ma14="http://schemas.microsoft.com/office/mac/drawingml/2011/main" xmlns="" val="0"/>
+              <ma14:wrappingTextBoxFlag xmlns="" xmlns:ma14="http://schemas.microsoft.com/office/mac/drawingml/2011/main" val="0"/>
             </a:ext>
           </a:extLst>
         </p:spPr>
@@ -8311,6 +10894,13 @@
             <a:prstDash val="solid"/>
           </a:ln>
         </p:spPr>
+        <p:txBody>
+          <a:bodyPr/>
+          <a:lstStyle/>
+          <a:p>
+            <a:endParaRPr lang="en-US"/>
+          </a:p>
+        </p:txBody>
       </p:sp>
       <p:sp>
         <p:nvSpPr>
@@ -8410,6 +11000,13 @@
             <a:prstDash val="solid"/>
           </a:ln>
         </p:spPr>
+        <p:txBody>
+          <a:bodyPr/>
+          <a:lstStyle/>
+          <a:p>
+            <a:endParaRPr lang="en-US"/>
+          </a:p>
+        </p:txBody>
       </p:sp>
       <p:sp>
         <p:nvSpPr>
@@ -8509,6 +11106,13 @@
             <a:prstDash val="solid"/>
           </a:ln>
         </p:spPr>
+        <p:txBody>
+          <a:bodyPr/>
+          <a:lstStyle/>
+          <a:p>
+            <a:endParaRPr lang="en-US"/>
+          </a:p>
+        </p:txBody>
       </p:sp>
       <p:sp>
         <p:nvSpPr>
@@ -8608,6 +11212,13 @@
             <a:prstDash val="solid"/>
           </a:ln>
         </p:spPr>
+        <p:txBody>
+          <a:bodyPr/>
+          <a:lstStyle/>
+          <a:p>
+            <a:endParaRPr lang="en-US"/>
+          </a:p>
+        </p:txBody>
       </p:sp>
       <p:sp>
         <p:nvSpPr>
@@ -8704,6 +11315,13 @@
             <a:tailEnd type="triangle"/>
           </a:ln>
         </p:spPr>
+        <p:txBody>
+          <a:bodyPr/>
+          <a:lstStyle/>
+          <a:p>
+            <a:endParaRPr lang="en-US"/>
+          </a:p>
+        </p:txBody>
       </p:sp>
       <p:sp>
         <p:nvSpPr>
@@ -8731,6 +11349,13 @@
             <a:prstDash val="solid"/>
           </a:ln>
         </p:spPr>
+        <p:txBody>
+          <a:bodyPr/>
+          <a:lstStyle/>
+          <a:p>
+            <a:endParaRPr lang="en-US"/>
+          </a:p>
+        </p:txBody>
       </p:sp>
       <p:sp>
         <p:nvSpPr>
@@ -8830,6 +11455,13 @@
             <a:prstDash val="solid"/>
           </a:ln>
         </p:spPr>
+        <p:txBody>
+          <a:bodyPr/>
+          <a:lstStyle/>
+          <a:p>
+            <a:endParaRPr lang="en-US"/>
+          </a:p>
+        </p:txBody>
       </p:sp>
       <p:sp>
         <p:nvSpPr>
@@ -8929,6 +11561,13 @@
             <a:prstDash val="solid"/>
           </a:ln>
         </p:spPr>
+        <p:txBody>
+          <a:bodyPr/>
+          <a:lstStyle/>
+          <a:p>
+            <a:endParaRPr lang="en-US"/>
+          </a:p>
+        </p:txBody>
       </p:sp>
       <p:sp>
         <p:nvSpPr>
@@ -9028,6 +11667,13 @@
             <a:prstDash val="solid"/>
           </a:ln>
         </p:spPr>
+        <p:txBody>
+          <a:bodyPr/>
+          <a:lstStyle/>
+          <a:p>
+            <a:endParaRPr lang="en-US"/>
+          </a:p>
+        </p:txBody>
       </p:sp>
       <p:sp>
         <p:nvSpPr>
@@ -9127,6 +11773,13 @@
             <a:prstDash val="solid"/>
           </a:ln>
         </p:spPr>
+        <p:txBody>
+          <a:bodyPr/>
+          <a:lstStyle/>
+          <a:p>
+            <a:endParaRPr lang="en-US"/>
+          </a:p>
+        </p:txBody>
       </p:sp>
       <p:sp>
         <p:nvSpPr>
@@ -9223,6 +11876,13 @@
             <a:tailEnd type="triangle"/>
           </a:ln>
         </p:spPr>
+        <p:txBody>
+          <a:bodyPr/>
+          <a:lstStyle/>
+          <a:p>
+            <a:endParaRPr lang="en-US"/>
+          </a:p>
+        </p:txBody>
       </p:sp>
       <p:sp>
         <p:nvSpPr>
@@ -9250,6 +11910,13 @@
             <a:prstDash val="solid"/>
           </a:ln>
         </p:spPr>
+        <p:txBody>
+          <a:bodyPr/>
+          <a:lstStyle/>
+          <a:p>
+            <a:endParaRPr lang="en-US"/>
+          </a:p>
+        </p:txBody>
       </p:sp>
       <p:sp>
         <p:nvSpPr>
@@ -9367,7 +12034,7 @@
           </a:prstGeom>
           <a:extLst>
             <a:ext uri="{C572A759-6A51-4108-AA02-DFA0A04FC94B}">
-              <ma14:wrappingTextBoxFlag xmlns:ma14="http://schemas.microsoft.com/office/mac/drawingml/2011/main" xmlns="" val="0"/>
+              <ma14:wrappingTextBoxFlag xmlns="" xmlns:ma14="http://schemas.microsoft.com/office/mac/drawingml/2011/main" val="0"/>
             </a:ext>
           </a:extLst>
         </p:spPr>
@@ -9463,7 +12130,7 @@
                 </a:solidFill>
                 <a:latin typeface="Calibri" panose="020F0502020204030204" pitchFamily="34" charset="0"/>
               </a:rPr>
-              <a:t>Presenter: Mohammed (B)</a:t>
+              <a:t>Presenter: Mohamed (B)</a:t>
             </a:r>
           </a:p>
         </p:txBody>
@@ -9557,6 +12224,13 @@
             <a:prstDash val="solid"/>
           </a:ln>
         </p:spPr>
+        <p:txBody>
+          <a:bodyPr/>
+          <a:lstStyle/>
+          <a:p>
+            <a:endParaRPr lang="en-US"/>
+          </a:p>
+        </p:txBody>
       </p:sp>
       <p:sp>
         <p:nvSpPr>
@@ -9690,6 +12364,13 @@
             <a:prstDash val="solid"/>
           </a:ln>
         </p:spPr>
+        <p:txBody>
+          <a:bodyPr/>
+          <a:lstStyle/>
+          <a:p>
+            <a:endParaRPr lang="en-US"/>
+          </a:p>
+        </p:txBody>
       </p:sp>
       <p:sp>
         <p:nvSpPr>
@@ -9823,6 +12504,13 @@
             <a:prstDash val="solid"/>
           </a:ln>
         </p:spPr>
+        <p:txBody>
+          <a:bodyPr/>
+          <a:lstStyle/>
+          <a:p>
+            <a:endParaRPr lang="en-US"/>
+          </a:p>
+        </p:txBody>
       </p:sp>
       <p:sp>
         <p:nvSpPr>
@@ -9956,6 +12644,13 @@
             <a:prstDash val="solid"/>
           </a:ln>
         </p:spPr>
+        <p:txBody>
+          <a:bodyPr/>
+          <a:lstStyle/>
+          <a:p>
+            <a:endParaRPr lang="en-US"/>
+          </a:p>
+        </p:txBody>
       </p:sp>
       <p:sp>
         <p:nvSpPr>
@@ -10089,6 +12784,13 @@
             <a:prstDash val="solid"/>
           </a:ln>
         </p:spPr>
+        <p:txBody>
+          <a:bodyPr/>
+          <a:lstStyle/>
+          <a:p>
+            <a:endParaRPr lang="en-US"/>
+          </a:p>
+        </p:txBody>
       </p:sp>
       <p:sp>
         <p:nvSpPr>
@@ -10224,6 +12926,13 @@
             <a:prstDash val="solid"/>
           </a:ln>
         </p:spPr>
+        <p:txBody>
+          <a:bodyPr/>
+          <a:lstStyle/>
+          <a:p>
+            <a:endParaRPr lang="en-US"/>
+          </a:p>
+        </p:txBody>
       </p:sp>
       <p:sp>
         <p:nvSpPr>
@@ -10375,7 +13084,7 @@
           </a:prstGeom>
           <a:extLst>
             <a:ext uri="{C572A759-6A51-4108-AA02-DFA0A04FC94B}">
-              <ma14:wrappingTextBoxFlag xmlns:ma14="http://schemas.microsoft.com/office/mac/drawingml/2011/main" xmlns="" val="0"/>
+              <ma14:wrappingTextBoxFlag xmlns="" xmlns:ma14="http://schemas.microsoft.com/office/mac/drawingml/2011/main" val="0"/>
             </a:ext>
           </a:extLst>
         </p:spPr>
@@ -10471,7 +13180,7 @@
                 </a:solidFill>
                 <a:latin typeface="Calibri" panose="020F0502020204030204" pitchFamily="34" charset="0"/>
               </a:rPr>
-              <a:t>Presenter: Mohammed (B)</a:t>
+              <a:t>Presenter: Mohamed (B)</a:t>
             </a:r>
           </a:p>
         </p:txBody>
@@ -10567,6 +13276,13 @@
             <a:prstDash val="solid"/>
           </a:ln>
         </p:spPr>
+        <p:txBody>
+          <a:bodyPr/>
+          <a:lstStyle/>
+          <a:p>
+            <a:endParaRPr lang="en-US"/>
+          </a:p>
+        </p:txBody>
       </p:sp>
       <p:sp>
         <p:nvSpPr>
@@ -10592,6 +13308,13 @@
             <a:prstDash val="solid"/>
           </a:ln>
         </p:spPr>
+        <p:txBody>
+          <a:bodyPr/>
+          <a:lstStyle/>
+          <a:p>
+            <a:endParaRPr lang="en-US"/>
+          </a:p>
+        </p:txBody>
       </p:sp>
       <p:sp>
         <p:nvSpPr>
@@ -10727,6 +13450,13 @@
             <a:prstDash val="solid"/>
           </a:ln>
         </p:spPr>
+        <p:txBody>
+          <a:bodyPr/>
+          <a:lstStyle/>
+          <a:p>
+            <a:endParaRPr lang="en-US"/>
+          </a:p>
+        </p:txBody>
       </p:sp>
       <p:sp>
         <p:nvSpPr>
@@ -10752,6 +13482,13 @@
             <a:prstDash val="solid"/>
           </a:ln>
         </p:spPr>
+        <p:txBody>
+          <a:bodyPr/>
+          <a:lstStyle/>
+          <a:p>
+            <a:endParaRPr lang="en-US"/>
+          </a:p>
+        </p:txBody>
       </p:sp>
       <p:sp>
         <p:nvSpPr>
@@ -10887,6 +13624,13 @@
             <a:prstDash val="solid"/>
           </a:ln>
         </p:spPr>
+        <p:txBody>
+          <a:bodyPr/>
+          <a:lstStyle/>
+          <a:p>
+            <a:endParaRPr lang="en-US"/>
+          </a:p>
+        </p:txBody>
       </p:sp>
       <p:sp>
         <p:nvSpPr>
@@ -10912,6 +13656,13 @@
             <a:prstDash val="solid"/>
           </a:ln>
         </p:spPr>
+        <p:txBody>
+          <a:bodyPr/>
+          <a:lstStyle/>
+          <a:p>
+            <a:endParaRPr lang="en-US"/>
+          </a:p>
+        </p:txBody>
       </p:sp>
       <p:sp>
         <p:nvSpPr>
@@ -11047,6 +13798,13 @@
             <a:prstDash val="solid"/>
           </a:ln>
         </p:spPr>
+        <p:txBody>
+          <a:bodyPr/>
+          <a:lstStyle/>
+          <a:p>
+            <a:endParaRPr lang="en-US"/>
+          </a:p>
+        </p:txBody>
       </p:sp>
       <p:sp>
         <p:nvSpPr>
@@ -11072,6 +13830,13 @@
             <a:prstDash val="solid"/>
           </a:ln>
         </p:spPr>
+        <p:txBody>
+          <a:bodyPr/>
+          <a:lstStyle/>
+          <a:p>
+            <a:endParaRPr lang="en-US"/>
+          </a:p>
+        </p:txBody>
       </p:sp>
       <p:sp>
         <p:nvSpPr>
@@ -11207,6 +13972,13 @@
             <a:prstDash val="solid"/>
           </a:ln>
         </p:spPr>
+        <p:txBody>
+          <a:bodyPr/>
+          <a:lstStyle/>
+          <a:p>
+            <a:endParaRPr lang="en-US"/>
+          </a:p>
+        </p:txBody>
       </p:sp>
       <p:sp>
         <p:nvSpPr>
@@ -11232,6 +14004,13 @@
             <a:prstDash val="solid"/>
           </a:ln>
         </p:spPr>
+        <p:txBody>
+          <a:bodyPr/>
+          <a:lstStyle/>
+          <a:p>
+            <a:endParaRPr lang="en-US"/>
+          </a:p>
+        </p:txBody>
       </p:sp>
       <p:sp>
         <p:nvSpPr>
@@ -11367,6 +14146,13 @@
             <a:prstDash val="solid"/>
           </a:ln>
         </p:spPr>
+        <p:txBody>
+          <a:bodyPr/>
+          <a:lstStyle/>
+          <a:p>
+            <a:endParaRPr lang="en-US"/>
+          </a:p>
+        </p:txBody>
       </p:sp>
       <p:sp>
         <p:nvSpPr>
@@ -11392,6 +14178,13 @@
             <a:prstDash val="solid"/>
           </a:ln>
         </p:spPr>
+        <p:txBody>
+          <a:bodyPr/>
+          <a:lstStyle/>
+          <a:p>
+            <a:endParaRPr lang="en-US"/>
+          </a:p>
+        </p:txBody>
       </p:sp>
       <p:sp>
         <p:nvSpPr>
@@ -11521,7 +14314,7 @@
           </a:prstGeom>
           <a:extLst>
             <a:ext uri="{C572A759-6A51-4108-AA02-DFA0A04FC94B}">
-              <ma14:wrappingTextBoxFlag xmlns:ma14="http://schemas.microsoft.com/office/mac/drawingml/2011/main" xmlns="" val="0"/>
+              <ma14:wrappingTextBoxFlag xmlns="" xmlns:ma14="http://schemas.microsoft.com/office/mac/drawingml/2011/main" val="0"/>
             </a:ext>
           </a:extLst>
         </p:spPr>
@@ -11617,7 +14410,7 @@
                 </a:solidFill>
                 <a:latin typeface="Calibri" panose="020F0502020204030204" pitchFamily="34" charset="0"/>
               </a:rPr>
-              <a:t>Presenter: Mohammed (B)</a:t>
+              <a:t>Presenter: Mohamed (B)</a:t>
             </a:r>
           </a:p>
         </p:txBody>
@@ -13086,7 +15879,7 @@
           </a:prstGeom>
           <a:extLst>
             <a:ext uri="{C572A759-6A51-4108-AA02-DFA0A04FC94B}">
-              <ma14:wrappingTextBoxFlag xmlns:ma14="http://schemas.microsoft.com/office/mac/drawingml/2011/main" xmlns="" val="0"/>
+              <ma14:wrappingTextBoxFlag xmlns="" xmlns:ma14="http://schemas.microsoft.com/office/mac/drawingml/2011/main" val="0"/>
             </a:ext>
           </a:extLst>
         </p:spPr>
@@ -13182,7 +15975,7 @@
                 </a:solidFill>
                 <a:latin typeface="Calibri" panose="020F0502020204030204" pitchFamily="34" charset="0"/>
               </a:rPr>
-              <a:t>Presenter: Mohammed (B)</a:t>
+              <a:t>Presenter: Mohamed (B)</a:t>
             </a:r>
           </a:p>
         </p:txBody>
@@ -13196,6 +15989,448 @@
 </file>
 
 <file path=ppt/slides/slide8.xml><?xml version="1.0" encoding="utf-8"?>
+<p:sld xmlns:a="http://schemas.openxmlformats.org/drawingml/2006/main" xmlns:r="http://schemas.openxmlformats.org/officeDocument/2006/relationships" xmlns:p="http://schemas.openxmlformats.org/presentationml/2006/main">
+  <p:cSld>
+    <p:spTree>
+      <p:nvGrpSpPr>
+        <p:cNvPr id="1" name=""/>
+        <p:cNvGrpSpPr/>
+        <p:nvPr/>
+      </p:nvGrpSpPr>
+      <p:grpSpPr>
+        <a:xfrm>
+          <a:off x="0" y="0"/>
+          <a:ext cx="0" cy="0"/>
+          <a:chOff x="0" y="0"/>
+          <a:chExt cx="0" cy="0"/>
+        </a:xfrm>
+      </p:grpSpPr>
+      <p:sp>
+        <p:nvSpPr>
+          <p:cNvPr id="2" name="Text 0"/>
+          <p:cNvSpPr>
+            <a:spLocks noGrp="1"/>
+          </p:cNvSpPr>
+          <p:nvPr>
+            <p:ph type="title" idx="100" hasCustomPrompt="1"/>
+          </p:nvPr>
+        </p:nvSpPr>
+        <p:spPr>
+          <a:xfrm>
+            <a:off x="548640" y="320040"/>
+            <a:ext cx="11064240" cy="822960"/>
+          </a:xfrm>
+          <a:prstGeom prst="rect">
+            <a:avLst/>
+          </a:prstGeom>
+          <a:noFill/>
+          <a:ln/>
+        </p:spPr>
+        <p:txBody>
+          <a:bodyPr wrap="square" rtlCol="0" anchor="ctr"/>
+          <a:lstStyle/>
+          <a:p>
+            <a:pPr marL="0" indent="0">
+              <a:buNone/>
+            </a:pPr>
+            <a:r>
+              <a:rPr lang="en-US" sz="3200" b="1">
+                <a:solidFill>
+                  <a:schemeClr val="tx2"/>
+                </a:solidFill>
+              </a:rPr>
+              <a:t>One order, one trace across HTTP and Kafka</a:t>
+            </a:r>
+            <a:endParaRPr lang="en-US" sz="3200" dirty="0"/>
+          </a:p>
+        </p:txBody>
+      </p:sp>
+      <p:sp>
+        <p:nvSpPr>
+          <p:cNvPr id="25" name="Slide Number Placeholder 0"/>
+          <p:cNvSpPr>
+            <a:spLocks noGrp="1"/>
+          </p:cNvSpPr>
+          <p:nvPr>
+            <p:ph type="sldNum" sz="quarter" idx="4294967295"/>
+          </p:nvPr>
+        </p:nvSpPr>
+        <p:spPr>
+          <a:xfrm>
+            <a:off x="11155680" y="6400800"/>
+            <a:ext cx="548640" cy="274320"/>
+          </a:xfrm>
+          <a:prstGeom prst="rect">
+            <a:avLst/>
+          </a:prstGeom>
+          <a:extLst>
+            <a:ext uri="{C572A759-6A51-4108-AA02-DFA0A04FC94B}">
+              <ma14:wrappingTextBoxFlag xmlns="" xmlns:ma14="http://schemas.microsoft.com/office/mac/drawingml/2011/main" val="0"/>
+            </a:ext>
+          </a:extLst>
+        </p:spPr>
+        <p:txBody>
+          <a:bodyPr/>
+          <a:lstStyle>
+            <a:lvl1pPr>
+              <a:defRPr sz="1000">
+                <a:solidFill>
+                  <a:schemeClr val="accent4"/>
+                </a:solidFill>
+              </a:defRPr>
+            </a:lvl1pPr>
+          </a:lstStyle>
+          <a:p>
+            <a:pPr algn="r"/>
+            <a:fld id="{F7021451-1387-4CA6-816F-3879F97B5CBC}" type="slidenum">
+              <a:rPr lang="en-US" b="0"/>
+              <a:t>8</a:t>
+            </a:fld>
+            <a:endParaRPr lang="en-US"/>
+          </a:p>
+        </p:txBody>
+      </p:sp>
+      <p:sp>
+        <p:nvSpPr>
+          <p:cNvPr id="3" name="Presenter tag">
+            <a:extLst>
+              <a:ext uri="{FF2B5EF4-FFF2-40B4-BE49-F238E27FC236}">
+                <a16:creationId xmlns:a16="http://schemas.microsoft.com/office/drawing/2014/main" id="{836B296B-25B1-4AEE-B09F-8756939B8E08}"/>
+              </a:ext>
+            </a:extLst>
+          </p:cNvPr>
+          <p:cNvSpPr/>
+          <p:nvPr/>
+        </p:nvSpPr>
+        <p:spPr>
+          <a:xfrm>
+            <a:off x="8585200" y="6375400"/>
+            <a:ext cx="2413000" cy="304800"/>
+          </a:xfrm>
+          <a:prstGeom prst="roundRect">
+            <a:avLst/>
+          </a:prstGeom>
+          <a:solidFill>
+            <a:srgbClr val="F2A541"/>
+          </a:solidFill>
+          <a:ln w="12700" cap="flat" cmpd="sng" algn="ctr">
+            <a:noFill/>
+            <a:prstDash val="solid"/>
+            <a:miter lim="800000"/>
+          </a:ln>
+          <a:effectLst/>
+          <a:extLst>
+            <a:ext uri="{91240B29-F687-4F45-9708-019B960494DF}">
+              <a14:hiddenLine xmlns:a14="http://schemas.microsoft.com/office/drawing/2010/main" w="12700" cap="flat" cmpd="sng" algn="ctr">
+                <a:solidFill>
+                  <a:schemeClr val="accent1">
+                    <a:shade val="50000"/>
+                  </a:schemeClr>
+                </a:solidFill>
+                <a:prstDash val="solid"/>
+                <a:miter lim="800000"/>
+              </a14:hiddenLine>
+            </a:ext>
+          </a:extLst>
+        </p:spPr>
+        <p:style>
+          <a:lnRef idx="2">
+            <a:schemeClr val="accent1">
+              <a:shade val="50000"/>
+            </a:schemeClr>
+          </a:lnRef>
+          <a:fillRef idx="1">
+            <a:schemeClr val="accent1"/>
+          </a:fillRef>
+          <a:effectRef idx="0">
+            <a:schemeClr val="accent1"/>
+          </a:effectRef>
+          <a:fontRef idx="minor">
+            <a:schemeClr val="lt1"/>
+          </a:fontRef>
+        </p:style>
+        <p:txBody>
+          <a:bodyPr wrap="none" lIns="50800" tIns="0" rIns="50800" bIns="0" rtlCol="0" anchor="ctr"/>
+          <a:lstStyle/>
+          <a:p>
+            <a:pPr algn="ctr"/>
+            <a:r>
+              <a:rPr lang="en-US" sz="1100" b="1">
+                <a:solidFill>
+                  <a:srgbClr val="0D3B4A"/>
+                </a:solidFill>
+                <a:latin typeface="Calibri" panose="020F0502020204030204" pitchFamily="34" charset="0"/>
+              </a:rPr>
+              <a:t>Presenter: Mohamed (B)</a:t>
+            </a:r>
+          </a:p>
+        </p:txBody>
+      </p:sp>
+      <p:pic>
+        <p:nvPicPr>
+          <p:cNvPr id="5" name="Zipkin trace">
+            <a:extLst>
+              <a:ext uri="{FF2B5EF4-FFF2-40B4-BE49-F238E27FC236}">
+                <a16:creationId xmlns:a16="http://schemas.microsoft.com/office/drawing/2014/main" id="{CEC646B2-E772-4140-9C8A-03200330B738}"/>
+              </a:ext>
+            </a:extLst>
+          </p:cNvPr>
+          <p:cNvPicPr>
+            <a:picLocks/>
+          </p:cNvPicPr>
+          <p:nvPr/>
+        </p:nvPicPr>
+        <p:blipFill>
+          <a:blip r:embed="rId3"/>
+          <a:stretch>
+            <a:fillRect/>
+          </a:stretch>
+        </p:blipFill>
+        <p:spPr>
+          <a:xfrm>
+            <a:off x="546100" y="1320800"/>
+            <a:ext cx="7112000" cy="4000500"/>
+          </a:xfrm>
+          <a:prstGeom prst="rect">
+            <a:avLst/>
+          </a:prstGeom>
+          <a:ln w="9525">
+            <a:solidFill>
+              <a:srgbClr val="C9D6D3"/>
+            </a:solidFill>
+          </a:ln>
+        </p:spPr>
+      </p:pic>
+      <p:sp>
+        <p:nvSpPr>
+          <p:cNvPr id="6" name="Trace card">
+            <a:extLst>
+              <a:ext uri="{FF2B5EF4-FFF2-40B4-BE49-F238E27FC236}">
+                <a16:creationId xmlns:a16="http://schemas.microsoft.com/office/drawing/2014/main" id="{67B9428B-946F-48BB-A26F-8E8DBCF7160F}"/>
+              </a:ext>
+            </a:extLst>
+          </p:cNvPr>
+          <p:cNvSpPr/>
+          <p:nvPr/>
+        </p:nvSpPr>
+        <p:spPr>
+          <a:xfrm>
+            <a:off x="7874000" y="1320800"/>
+            <a:ext cx="3733800" cy="4000500"/>
+          </a:xfrm>
+          <a:prstGeom prst="roundRect">
+            <a:avLst>
+              <a:gd name="adj" fmla="val 6000"/>
+            </a:avLst>
+          </a:prstGeom>
+          <a:solidFill>
+            <a:srgbClr val="EDF4F2"/>
+          </a:solidFill>
+          <a:ln w="12700" cap="flat" cmpd="sng" algn="ctr">
+            <a:noFill/>
+            <a:prstDash val="solid"/>
+            <a:miter lim="800000"/>
+          </a:ln>
+          <a:effectLst/>
+          <a:extLst>
+            <a:ext uri="{91240B29-F687-4F45-9708-019B960494DF}">
+              <a14:hiddenLine xmlns:a14="http://schemas.microsoft.com/office/drawing/2010/main" w="12700" cap="flat" cmpd="sng" algn="ctr">
+                <a:solidFill>
+                  <a:schemeClr val="accent1">
+                    <a:shade val="50000"/>
+                  </a:schemeClr>
+                </a:solidFill>
+                <a:prstDash val="solid"/>
+                <a:miter lim="800000"/>
+              </a14:hiddenLine>
+            </a:ext>
+          </a:extLst>
+        </p:spPr>
+        <p:style>
+          <a:lnRef idx="2">
+            <a:schemeClr val="accent1">
+              <a:shade val="50000"/>
+            </a:schemeClr>
+          </a:lnRef>
+          <a:fillRef idx="1">
+            <a:schemeClr val="accent1"/>
+          </a:fillRef>
+          <a:effectRef idx="0">
+            <a:schemeClr val="accent1"/>
+          </a:effectRef>
+          <a:fontRef idx="minor">
+            <a:schemeClr val="lt1"/>
+          </a:fontRef>
+        </p:style>
+        <p:txBody>
+          <a:bodyPr rtlCol="0" anchor="ctr"/>
+          <a:lstStyle/>
+          <a:p>
+            <a:pPr algn="ctr"/>
+            <a:endParaRPr lang="en-US"/>
+          </a:p>
+        </p:txBody>
+      </p:sp>
+      <p:sp>
+        <p:nvSpPr>
+          <p:cNvPr id="8" name="Trace heading">
+            <a:extLst>
+              <a:ext uri="{FF2B5EF4-FFF2-40B4-BE49-F238E27FC236}">
+                <a16:creationId xmlns:a16="http://schemas.microsoft.com/office/drawing/2014/main" id="{F605930E-027C-418B-8998-B063ED062C76}"/>
+              </a:ext>
+            </a:extLst>
+          </p:cNvPr>
+          <p:cNvSpPr txBox="1"/>
+          <p:nvPr/>
+        </p:nvSpPr>
+        <p:spPr>
+          <a:xfrm>
+            <a:off x="8102600" y="1549400"/>
+            <a:ext cx="3276600" cy="369332"/>
+          </a:xfrm>
+          <a:prstGeom prst="rect">
+            <a:avLst/>
+          </a:prstGeom>
+          <a:noFill/>
+        </p:spPr>
+        <p:txBody>
+          <a:bodyPr vert="horz" wrap="square" lIns="0" tIns="0" rIns="0" bIns="0" rtlCol="0">
+            <a:noAutofit/>
+          </a:bodyPr>
+          <a:lstStyle/>
+          <a:p>
+            <a:pPr>
+              <a:spcAft>
+                <a:spcPts val="600"/>
+              </a:spcAft>
+            </a:pPr>
+            <a:r>
+              <a:rPr lang="en-US" sz="1600" b="1">
+                <a:solidFill>
+                  <a:srgbClr val="0D3B4A"/>
+                </a:solidFill>
+                <a:latin typeface="Calibri" panose="020F0502020204030204" pitchFamily="34" charset="0"/>
+              </a:rPr>
+              <a:t>Zipkin, live on the kind cluster</a:t>
+            </a:r>
+          </a:p>
+        </p:txBody>
+      </p:sp>
+      <p:sp>
+        <p:nvSpPr>
+          <p:cNvPr id="9" name="Trace body">
+            <a:extLst>
+              <a:ext uri="{FF2B5EF4-FFF2-40B4-BE49-F238E27FC236}">
+                <a16:creationId xmlns:a16="http://schemas.microsoft.com/office/drawing/2014/main" id="{B4757721-7AA1-4DEA-B6E4-9FFBC3E07E0B}"/>
+              </a:ext>
+            </a:extLst>
+          </p:cNvPr>
+          <p:cNvSpPr txBox="1"/>
+          <p:nvPr/>
+        </p:nvSpPr>
+        <p:spPr>
+          <a:xfrm>
+            <a:off x="8102600" y="2133600"/>
+            <a:ext cx="3276600" cy="369332"/>
+          </a:xfrm>
+          <a:prstGeom prst="rect">
+            <a:avLst/>
+          </a:prstGeom>
+          <a:noFill/>
+        </p:spPr>
+        <p:txBody>
+          <a:bodyPr vert="horz" wrap="square" lIns="0" tIns="0" rIns="0" bIns="0" rtlCol="0">
+            <a:noAutofit/>
+          </a:bodyPr>
+          <a:lstStyle/>
+          <a:p>
+            <a:pPr marL="177800" indent="-177800">
+              <a:spcAft>
+                <a:spcPts val="800"/>
+              </a:spcAft>
+              <a:buFont typeface="+mj-lt"/>
+              <a:buChar char="•"/>
+            </a:pPr>
+            <a:r>
+              <a:rPr lang="en-US" sz="1400">
+                <a:solidFill>
+                  <a:srgbClr val="0D3B4A"/>
+                </a:solidFill>
+                <a:latin typeface="Calibri" panose="020F0502020204030204" pitchFamily="34" charset="0"/>
+              </a:rPr>
+              <a:t>6 services, 30 spans, 1.06 s from POST to CONFIRMED</a:t>
+            </a:r>
+          </a:p>
+          <a:p>
+            <a:pPr marL="177800" indent="-177800">
+              <a:spcAft>
+                <a:spcPts val="800"/>
+              </a:spcAft>
+              <a:buFont typeface="+mj-lt"/>
+              <a:buChar char="•"/>
+            </a:pPr>
+            <a:r>
+              <a:rPr lang="en-US" sz="1400">
+                <a:solidFill>
+                  <a:srgbClr val="0D3B4A"/>
+                </a:solidFill>
+                <a:latin typeface="Calibri" panose="020F0502020204030204" pitchFamily="34" charset="0"/>
+              </a:rPr>
+              <a:t>gateway → order → outbox → Kafka → inventory → payment → order, notification</a:t>
+            </a:r>
+          </a:p>
+          <a:p>
+            <a:pPr marL="177800" indent="-177800">
+              <a:spcAft>
+                <a:spcPts val="800"/>
+              </a:spcAft>
+              <a:buFont typeface="+mj-lt"/>
+              <a:buChar char="•"/>
+            </a:pPr>
+            <a:r>
+              <a:rPr lang="en-US" sz="1400">
+                <a:solidFill>
+                  <a:srgbClr val="0D3B4A"/>
+                </a:solidFill>
+                <a:latin typeface="Calibri" panose="020F0502020204030204" pitchFamily="34" charset="0"/>
+              </a:rPr>
+              <a:t>The outbox carries the traceparent, so Kafka hops keep the same traceId (NFR-06)</a:t>
+            </a:r>
+          </a:p>
+          <a:p>
+            <a:pPr marL="177800" indent="-177800">
+              <a:spcAft>
+                <a:spcPts val="800"/>
+              </a:spcAft>
+              <a:buFont typeface="+mj-lt"/>
+              <a:buChar char="•"/>
+            </a:pPr>
+            <a:r>
+              <a:rPr lang="en-US" sz="1400">
+                <a:solidFill>
+                  <a:srgbClr val="0D3B4A"/>
+                </a:solidFill>
+                <a:latin typeface="Calibri" panose="020F0502020204030204" pitchFamily="34" charset="0"/>
+              </a:rPr>
+              <a:t>The same traceId is in every JSON log line</a:t>
+            </a:r>
+          </a:p>
+        </p:txBody>
+      </p:sp>
+    </p:spTree>
+    <p:extLst>
+      <p:ext uri="{BB962C8B-B14F-4D97-AF65-F5344CB8AC3E}">
+        <p14:creationId xmlns:p14="http://schemas.microsoft.com/office/powerpoint/2010/main" val="4199864611"/>
+      </p:ext>
+    </p:extLst>
+  </p:cSld>
+  <p:clrMapOvr>
+    <a:masterClrMapping/>
+  </p:clrMapOvr>
+</p:sld>
+</file>
+
+<file path=ppt/slides/slide9.xml><?xml version="1.0" encoding="utf-8"?>
 <p:sld xmlns:a="http://schemas.openxmlformats.org/drawingml/2006/main" xmlns:r="http://schemas.openxmlformats.org/officeDocument/2006/relationships" xmlns:p="http://schemas.openxmlformats.org/presentationml/2006/main">
   <p:cSld name="Slide 7">
     <p:spTree>
@@ -13278,6 +16513,13 @@
             <a:prstDash val="solid"/>
           </a:ln>
         </p:spPr>
+        <p:txBody>
+          <a:bodyPr/>
+          <a:lstStyle/>
+          <a:p>
+            <a:endParaRPr lang="en-US"/>
+          </a:p>
+        </p:txBody>
       </p:sp>
       <p:sp>
         <p:nvSpPr>
@@ -13377,6 +16619,13 @@
             <a:prstDash val="solid"/>
           </a:ln>
         </p:spPr>
+        <p:txBody>
+          <a:bodyPr/>
+          <a:lstStyle/>
+          <a:p>
+            <a:endParaRPr lang="en-US"/>
+          </a:p>
+        </p:txBody>
       </p:sp>
       <p:sp>
         <p:nvSpPr>
@@ -13476,6 +16725,13 @@
             <a:prstDash val="solid"/>
           </a:ln>
         </p:spPr>
+        <p:txBody>
+          <a:bodyPr/>
+          <a:lstStyle/>
+          <a:p>
+            <a:endParaRPr lang="en-US"/>
+          </a:p>
+        </p:txBody>
       </p:sp>
       <p:sp>
         <p:nvSpPr>
@@ -13575,6 +16831,13 @@
             <a:prstDash val="solid"/>
           </a:ln>
         </p:spPr>
+        <p:txBody>
+          <a:bodyPr/>
+          <a:lstStyle/>
+          <a:p>
+            <a:endParaRPr lang="en-US"/>
+          </a:p>
+        </p:txBody>
       </p:sp>
       <p:sp>
         <p:nvSpPr>
@@ -13668,609 +16931,7 @@
           </a:prstGeom>
           <a:extLst>
             <a:ext uri="{C572A759-6A51-4108-AA02-DFA0A04FC94B}">
-              <ma14:wrappingTextBoxFlag xmlns:ma14="http://schemas.microsoft.com/office/mac/drawingml/2011/main" xmlns="" val="0"/>
-            </a:ext>
-          </a:extLst>
-        </p:spPr>
-        <p:txBody>
-          <a:bodyPr/>
-          <a:lstStyle>
-            <a:lvl1pPr>
-              <a:defRPr sz="1000">
-                <a:solidFill>
-                  <a:schemeClr val="accent4"/>
-                </a:solidFill>
-              </a:defRPr>
-            </a:lvl1pPr>
-          </a:lstStyle>
-          <a:p>
-            <a:pPr algn="r"/>
-            <a:fld id="{F7021451-1387-4CA6-816F-3879F97B5CBC}" type="slidenum">
-              <a:rPr lang="en-US" b="0"/>
-              <a:t>8</a:t>
-            </a:fld>
-            <a:endParaRPr lang="en-US"/>
-          </a:p>
-        </p:txBody>
-      </p:sp>
-      <p:sp>
-        <p:nvSpPr>
-          <p:cNvPr id="15" name="Presenter tag">
-            <a:extLst>
-              <a:ext uri="{FF2B5EF4-FFF2-40B4-BE49-F238E27FC236}">
-                <a16:creationId xmlns:a16="http://schemas.microsoft.com/office/drawing/2014/main" id="{68BE7D18-03C9-4B8D-83D5-B337EB8B847C}"/>
-              </a:ext>
-            </a:extLst>
-          </p:cNvPr>
-          <p:cNvSpPr/>
-          <p:nvPr/>
-        </p:nvSpPr>
-        <p:spPr>
-          <a:xfrm>
-            <a:off x="8585200" y="6375400"/>
-            <a:ext cx="2413000" cy="304800"/>
-          </a:xfrm>
-          <a:prstGeom prst="roundRect">
-            <a:avLst/>
-          </a:prstGeom>
-          <a:solidFill>
-            <a:srgbClr val="2A9D8F"/>
-          </a:solidFill>
-          <a:ln w="12700" cap="flat" cmpd="sng" algn="ctr">
-            <a:noFill/>
-            <a:prstDash val="solid"/>
-            <a:miter lim="800000"/>
-          </a:ln>
-          <a:effectLst/>
-          <a:extLst>
-            <a:ext uri="{91240B29-F687-4F45-9708-019B960494DF}">
-              <a14:hiddenLine xmlns:a14="http://schemas.microsoft.com/office/drawing/2010/main" w="12700" cap="flat" cmpd="sng" algn="ctr">
-                <a:solidFill>
-                  <a:schemeClr val="accent1">
-                    <a:shade val="50000"/>
-                  </a:schemeClr>
-                </a:solidFill>
-                <a:prstDash val="solid"/>
-                <a:miter lim="800000"/>
-              </a14:hiddenLine>
-            </a:ext>
-          </a:extLst>
-        </p:spPr>
-        <p:style>
-          <a:lnRef idx="2">
-            <a:schemeClr val="accent1">
-              <a:shade val="50000"/>
-            </a:schemeClr>
-          </a:lnRef>
-          <a:fillRef idx="1">
-            <a:schemeClr val="accent1"/>
-          </a:fillRef>
-          <a:effectRef idx="0">
-            <a:schemeClr val="accent1"/>
-          </a:effectRef>
-          <a:fontRef idx="minor">
-            <a:schemeClr val="lt1"/>
-          </a:fontRef>
-        </p:style>
-        <p:txBody>
-          <a:bodyPr wrap="none" lIns="50800" tIns="0" rIns="50800" bIns="0" rtlCol="0" anchor="ctr"/>
-          <a:lstStyle/>
-          <a:p>
-            <a:pPr algn="ctr"/>
-            <a:r>
-              <a:rPr lang="en-US" sz="1100" b="1">
-                <a:solidFill>
-                  <a:srgbClr val="FFFFFF"/>
-                </a:solidFill>
-                <a:latin typeface="Calibri" panose="020F0502020204030204" pitchFamily="34" charset="0"/>
-              </a:rPr>
-              <a:t>Presenter: Nourhan (A)</a:t>
-            </a:r>
-          </a:p>
-        </p:txBody>
-      </p:sp>
-    </p:spTree>
-  </p:cSld>
-  <p:clrMapOvr>
-    <a:masterClrMapping/>
-  </p:clrMapOvr>
-</p:sld>
-</file>
-
-<file path=ppt/slides/slide9.xml><?xml version="1.0" encoding="utf-8"?>
-<p:sld xmlns:a="http://schemas.openxmlformats.org/drawingml/2006/main" xmlns:r="http://schemas.openxmlformats.org/officeDocument/2006/relationships" xmlns:p="http://schemas.openxmlformats.org/presentationml/2006/main">
-  <p:cSld name="Slide 9">
-    <p:spTree>
-      <p:nvGrpSpPr>
-        <p:cNvPr id="1" name=""/>
-        <p:cNvGrpSpPr/>
-        <p:nvPr/>
-      </p:nvGrpSpPr>
-      <p:grpSpPr>
-        <a:xfrm>
-          <a:off x="0" y="0"/>
-          <a:ext cx="0" cy="0"/>
-          <a:chOff x="0" y="0"/>
-          <a:chExt cx="0" cy="0"/>
-        </a:xfrm>
-      </p:grpSpPr>
-      <p:sp>
-        <p:nvSpPr>
-          <p:cNvPr id="2" name="Text 0"/>
-          <p:cNvSpPr>
-            <a:spLocks noGrp="1"/>
-          </p:cNvSpPr>
-          <p:nvPr>
-            <p:ph type="title" idx="100" hasCustomPrompt="1"/>
-          </p:nvPr>
-        </p:nvSpPr>
-        <p:spPr>
-          <a:xfrm>
-            <a:off x="548640" y="320040"/>
-            <a:ext cx="11064240" cy="822960"/>
-          </a:xfrm>
-          <a:prstGeom prst="rect">
-            <a:avLst/>
-          </a:prstGeom>
-          <a:noFill/>
-          <a:ln/>
-        </p:spPr>
-        <p:txBody>
-          <a:bodyPr wrap="square" rtlCol="0" anchor="ctr"/>
-          <a:lstStyle/>
-          <a:p>
-            <a:pPr marL="0" indent="0">
-              <a:buNone/>
-            </a:pPr>
-            <a:r>
-              <a:rPr lang="en-US" sz="3200" b="1" dirty="0">
-                <a:solidFill>
-                  <a:schemeClr val="tx2"/>
-                </a:solidFill>
-              </a:rPr>
-              <a:t>Performance: one bottleneck found and fixed</a:t>
-            </a:r>
-            <a:endParaRPr lang="en-US" sz="3200" dirty="0"/>
-          </a:p>
-        </p:txBody>
-      </p:sp>
-      <p:graphicFrame>
-        <p:nvGraphicFramePr>
-          <p:cNvPr id="3" name="Chart 0"/>
-          <p:cNvGraphicFramePr/>
-          <p:nvPr>
-            <p:extLst>
-              <p:ext uri="{D42A27DB-BD31-4B8C-83A1-F6EECF244321}">
-                <p14:modId xmlns:p14="http://schemas.microsoft.com/office/powerpoint/2010/main" val="2371585072"/>
-              </p:ext>
-            </p:extLst>
-          </p:nvPr>
-        </p:nvGraphicFramePr>
-        <p:xfrm>
-          <a:off x="548640" y="1325880"/>
-          <a:ext cx="6035040" cy="4206240"/>
-        </p:xfrm>
-        <a:graphic>
-          <a:graphicData uri="http://schemas.openxmlformats.org/drawingml/2006/chart">
-            <c:chart xmlns:c="http://schemas.openxmlformats.org/drawingml/2006/chart" xmlns:r="http://schemas.openxmlformats.org/officeDocument/2006/relationships" r:id="rId3"/>
-          </a:graphicData>
-        </a:graphic>
-      </p:graphicFrame>
-      <p:sp>
-        <p:nvSpPr>
-          <p:cNvPr id="4" name="Shape 1"/>
-          <p:cNvSpPr/>
-          <p:nvPr/>
-        </p:nvSpPr>
-        <p:spPr>
-          <a:xfrm>
-            <a:off x="6949440" y="1417320"/>
-            <a:ext cx="4663440" cy="914400"/>
-          </a:xfrm>
-          <a:prstGeom prst="roundRect">
-            <a:avLst>
-              <a:gd name="adj" fmla="val 8000"/>
-            </a:avLst>
-          </a:prstGeom>
-          <a:solidFill>
-            <a:schemeClr val="bg2"/>
-          </a:solidFill>
-          <a:ln w="12700">
-            <a:solidFill>
-              <a:schemeClr val="bg2"/>
-            </a:solidFill>
-            <a:prstDash val="solid"/>
-          </a:ln>
-        </p:spPr>
-        <p:txBody>
-          <a:bodyPr/>
-          <a:lstStyle/>
-          <a:p>
-            <a:endParaRPr lang="en-US"/>
-          </a:p>
-        </p:txBody>
-      </p:sp>
-      <p:sp>
-        <p:nvSpPr>
-          <p:cNvPr id="5" name="Text 2"/>
-          <p:cNvSpPr txBox="1"/>
-          <p:nvPr/>
-        </p:nvSpPr>
-        <p:spPr>
-          <a:xfrm>
-            <a:off x="7178040" y="1508760"/>
-            <a:ext cx="2103120" cy="731520"/>
-          </a:xfrm>
-          <a:prstGeom prst="rect">
-            <a:avLst/>
-          </a:prstGeom>
-          <a:noFill/>
-          <a:ln/>
-        </p:spPr>
-        <p:txBody>
-          <a:bodyPr wrap="square" lIns="0" tIns="0" rIns="0" bIns="0" rtlCol="0" anchor="ctr"/>
-          <a:lstStyle/>
-          <a:p>
-            <a:pPr marL="0" indent="0">
-              <a:buNone/>
-            </a:pPr>
-            <a:r>
-              <a:rPr lang="en-US" sz="2400" b="1" dirty="0">
-                <a:solidFill>
-                  <a:schemeClr val="tx2"/>
-                </a:solidFill>
-              </a:rPr>
-              <a:t>59 req/s</a:t>
-            </a:r>
-            <a:endParaRPr lang="en-US" sz="2400" dirty="0"/>
-          </a:p>
-        </p:txBody>
-      </p:sp>
-      <p:sp>
-        <p:nvSpPr>
-          <p:cNvPr id="6" name="Text 3"/>
-          <p:cNvSpPr txBox="1"/>
-          <p:nvPr/>
-        </p:nvSpPr>
-        <p:spPr>
-          <a:xfrm>
-            <a:off x="9326880" y="1508760"/>
-            <a:ext cx="2194560" cy="731520"/>
-          </a:xfrm>
-          <a:prstGeom prst="rect">
-            <a:avLst/>
-          </a:prstGeom>
-          <a:noFill/>
-          <a:ln/>
-        </p:spPr>
-        <p:txBody>
-          <a:bodyPr wrap="square" lIns="0" tIns="0" rIns="0" bIns="0" rtlCol="0" anchor="ctr"/>
-          <a:lstStyle/>
-          <a:p>
-            <a:pPr marL="0" indent="0">
-              <a:buNone/>
-            </a:pPr>
-            <a:r>
-              <a:rPr lang="en-US" sz="1400" dirty="0">
-                <a:solidFill>
-                  <a:schemeClr val="tx1"/>
-                </a:solidFill>
-              </a:rPr>
-              <a:t>catalogue reads (target ≥ 50)</a:t>
-            </a:r>
-            <a:endParaRPr lang="en-US" sz="1400" dirty="0"/>
-          </a:p>
-        </p:txBody>
-      </p:sp>
-      <p:sp>
-        <p:nvSpPr>
-          <p:cNvPr id="7" name="Shape 4"/>
-          <p:cNvSpPr/>
-          <p:nvPr/>
-        </p:nvSpPr>
-        <p:spPr>
-          <a:xfrm>
-            <a:off x="6949440" y="2514600"/>
-            <a:ext cx="4663440" cy="914400"/>
-          </a:xfrm>
-          <a:prstGeom prst="roundRect">
-            <a:avLst>
-              <a:gd name="adj" fmla="val 8000"/>
-            </a:avLst>
-          </a:prstGeom>
-          <a:solidFill>
-            <a:schemeClr val="bg2"/>
-          </a:solidFill>
-          <a:ln w="12700">
-            <a:solidFill>
-              <a:schemeClr val="bg2"/>
-            </a:solidFill>
-            <a:prstDash val="solid"/>
-          </a:ln>
-        </p:spPr>
-        <p:txBody>
-          <a:bodyPr/>
-          <a:lstStyle/>
-          <a:p>
-            <a:endParaRPr lang="en-US"/>
-          </a:p>
-        </p:txBody>
-      </p:sp>
-      <p:sp>
-        <p:nvSpPr>
-          <p:cNvPr id="8" name="Text 5"/>
-          <p:cNvSpPr txBox="1"/>
-          <p:nvPr/>
-        </p:nvSpPr>
-        <p:spPr>
-          <a:xfrm>
-            <a:off x="7178040" y="2606040"/>
-            <a:ext cx="2103120" cy="731520"/>
-          </a:xfrm>
-          <a:prstGeom prst="rect">
-            <a:avLst/>
-          </a:prstGeom>
-          <a:noFill/>
-          <a:ln/>
-        </p:spPr>
-        <p:txBody>
-          <a:bodyPr wrap="square" lIns="0" tIns="0" rIns="0" bIns="0" rtlCol="0" anchor="ctr"/>
-          <a:lstStyle/>
-          <a:p>
-            <a:pPr marL="0" indent="0">
-              <a:buNone/>
-            </a:pPr>
-            <a:r>
-              <a:rPr lang="en-US" sz="2400" b="1" dirty="0">
-                <a:solidFill>
-                  <a:schemeClr val="tx2"/>
-                </a:solidFill>
-              </a:rPr>
-              <a:t>0.00 %</a:t>
-            </a:r>
-            <a:endParaRPr lang="en-US" sz="2400" dirty="0"/>
-          </a:p>
-        </p:txBody>
-      </p:sp>
-      <p:sp>
-        <p:nvSpPr>
-          <p:cNvPr id="9" name="Text 6"/>
-          <p:cNvSpPr txBox="1"/>
-          <p:nvPr/>
-        </p:nvSpPr>
-        <p:spPr>
-          <a:xfrm>
-            <a:off x="9326880" y="2606040"/>
-            <a:ext cx="2194560" cy="731520"/>
-          </a:xfrm>
-          <a:prstGeom prst="rect">
-            <a:avLst/>
-          </a:prstGeom>
-          <a:noFill/>
-          <a:ln/>
-        </p:spPr>
-        <p:txBody>
-          <a:bodyPr wrap="square" lIns="0" tIns="0" rIns="0" bIns="0" rtlCol="0" anchor="ctr"/>
-          <a:lstStyle/>
-          <a:p>
-            <a:pPr marL="0" indent="0">
-              <a:buNone/>
-            </a:pPr>
-            <a:r>
-              <a:rPr lang="en-US" sz="1400" dirty="0">
-                <a:solidFill>
-                  <a:schemeClr val="tx1"/>
-                </a:solidFill>
-              </a:rPr>
-              <a:t>errors over 25,644 </a:t>
-            </a:r>
-            <a:r>
-              <a:rPr lang="en-US" sz="1400">
-                <a:solidFill>
-                  <a:schemeClr val="tx1"/>
-                </a:solidFill>
-              </a:rPr>
-              <a:t>requests (5 min load)</a:t>
-            </a:r>
-            <a:endParaRPr lang="en-US" sz="1400" dirty="0"/>
-          </a:p>
-        </p:txBody>
-      </p:sp>
-      <p:sp>
-        <p:nvSpPr>
-          <p:cNvPr id="10" name="Shape 7"/>
-          <p:cNvSpPr/>
-          <p:nvPr/>
-        </p:nvSpPr>
-        <p:spPr>
-          <a:xfrm>
-            <a:off x="6949440" y="3611880"/>
-            <a:ext cx="4663440" cy="914400"/>
-          </a:xfrm>
-          <a:prstGeom prst="roundRect">
-            <a:avLst>
-              <a:gd name="adj" fmla="val 8000"/>
-            </a:avLst>
-          </a:prstGeom>
-          <a:solidFill>
-            <a:schemeClr val="bg2"/>
-          </a:solidFill>
-          <a:ln w="12700">
-            <a:solidFill>
-              <a:schemeClr val="bg2"/>
-            </a:solidFill>
-            <a:prstDash val="solid"/>
-          </a:ln>
-        </p:spPr>
-        <p:txBody>
-          <a:bodyPr/>
-          <a:lstStyle/>
-          <a:p>
-            <a:endParaRPr lang="en-US"/>
-          </a:p>
-        </p:txBody>
-      </p:sp>
-      <p:sp>
-        <p:nvSpPr>
-          <p:cNvPr id="11" name="Text 8"/>
-          <p:cNvSpPr txBox="1"/>
-          <p:nvPr/>
-        </p:nvSpPr>
-        <p:spPr>
-          <a:xfrm>
-            <a:off x="7178040" y="3703320"/>
-            <a:ext cx="2103120" cy="731520"/>
-          </a:xfrm>
-          <a:prstGeom prst="rect">
-            <a:avLst/>
-          </a:prstGeom>
-          <a:noFill/>
-          <a:ln/>
-        </p:spPr>
-        <p:txBody>
-          <a:bodyPr wrap="square" lIns="0" tIns="0" rIns="0" bIns="0" rtlCol="0" anchor="ctr"/>
-          <a:lstStyle/>
-          <a:p>
-            <a:pPr marL="0" indent="0">
-              <a:buNone/>
-            </a:pPr>
-            <a:r>
-              <a:rPr lang="en-US" sz="2400" b="1" dirty="0">
-                <a:solidFill>
-                  <a:schemeClr val="tx2"/>
-                </a:solidFill>
-              </a:rPr>
-              <a:t>0.07 %</a:t>
-            </a:r>
-            <a:endParaRPr lang="en-US" sz="2400" dirty="0"/>
-          </a:p>
-        </p:txBody>
-      </p:sp>
-      <p:sp>
-        <p:nvSpPr>
-          <p:cNvPr id="12" name="Text 9"/>
-          <p:cNvSpPr txBox="1"/>
-          <p:nvPr/>
-        </p:nvSpPr>
-        <p:spPr>
-          <a:xfrm>
-            <a:off x="9326880" y="3703320"/>
-            <a:ext cx="2194560" cy="731520"/>
-          </a:xfrm>
-          <a:prstGeom prst="rect">
-            <a:avLst/>
-          </a:prstGeom>
-          <a:noFill/>
-          <a:ln/>
-        </p:spPr>
-        <p:txBody>
-          <a:bodyPr wrap="square" lIns="0" tIns="0" rIns="0" bIns="0" rtlCol="0" anchor="ctr"/>
-          <a:lstStyle/>
-          <a:p>
-            <a:pPr marL="0" indent="0">
-              <a:buNone/>
-            </a:pPr>
-            <a:r>
-              <a:rPr lang="en-US" sz="1400" dirty="0">
-                <a:solidFill>
-                  <a:schemeClr val="tx1"/>
-                </a:solidFill>
-              </a:rPr>
-              <a:t>errors over 64,159 requests at up to 150 VUs</a:t>
-            </a:r>
-            <a:endParaRPr lang="en-US" sz="1400" dirty="0"/>
-          </a:p>
-        </p:txBody>
-      </p:sp>
-      <p:sp>
-        <p:nvSpPr>
-          <p:cNvPr id="13" name="Text 10"/>
-          <p:cNvSpPr txBox="1"/>
-          <p:nvPr/>
-        </p:nvSpPr>
-        <p:spPr>
-          <a:xfrm>
-            <a:off x="6949440" y="4800600"/>
-            <a:ext cx="4663440" cy="1188720"/>
-          </a:xfrm>
-          <a:prstGeom prst="rect">
-            <a:avLst/>
-          </a:prstGeom>
-          <a:noFill/>
-          <a:ln/>
-        </p:spPr>
-        <p:txBody>
-          <a:bodyPr wrap="square" lIns="0" tIns="0" rIns="0" bIns="0" rtlCol="0" anchor="t"/>
-          <a:lstStyle/>
-          <a:p>
-            <a:pPr marL="0" indent="0">
-              <a:buNone/>
-            </a:pPr>
-            <a:r>
-              <a:rPr lang="en-US" sz="1400" b="1" dirty="0">
-                <a:solidFill>
-                  <a:schemeClr val="tx2"/>
-                </a:solidFill>
-              </a:rPr>
-              <a:t>Bottleneck found and fixed: </a:t>
-            </a:r>
-            <a:r>
-              <a:rPr lang="en-US" sz="1400" dirty="0">
-                <a:solidFill>
-                  <a:schemeClr val="tx1"/>
-                </a:solidFill>
-              </a:rPr>
-              <a:t>the gateway built a WebSession per request. Removing it took GET /products p95 </a:t>
-            </a:r>
-            <a:r>
-              <a:rPr lang="en-US" sz="1400">
-                <a:solidFill>
-                  <a:schemeClr val="tx1"/>
-                </a:solidFill>
-              </a:rPr>
-              <a:t>from 1.23 s to 475 ms </a:t>
-            </a:r>
-            <a:r>
-              <a:rPr lang="en-US" sz="1400" dirty="0">
-                <a:solidFill>
-                  <a:schemeClr val="tx1"/>
-                </a:solidFill>
-              </a:rPr>
-              <a:t>and POST /orders </a:t>
-            </a:r>
-            <a:r>
-              <a:rPr lang="en-US" sz="1400">
-                <a:solidFill>
-                  <a:schemeClr val="tx1"/>
-                </a:solidFill>
-              </a:rPr>
-              <a:t>to 487 ms.</a:t>
-            </a:r>
-            <a:endParaRPr lang="en-US" sz="1400" dirty="0"/>
-          </a:p>
-        </p:txBody>
-      </p:sp>
-      <p:sp>
-        <p:nvSpPr>
-          <p:cNvPr id="25" name="Slide Number Placeholder 0"/>
-          <p:cNvSpPr>
-            <a:spLocks noGrp="1"/>
-          </p:cNvSpPr>
-          <p:nvPr>
-            <p:ph type="sldNum" sz="quarter" idx="4294967295"/>
-          </p:nvPr>
-        </p:nvSpPr>
-        <p:spPr>
-          <a:xfrm>
-            <a:off x="11155680" y="6400800"/>
-            <a:ext cx="548640" cy="274320"/>
-          </a:xfrm>
-          <a:prstGeom prst="rect">
-            <a:avLst/>
-          </a:prstGeom>
-          <a:extLst>
-            <a:ext uri="{C572A759-6A51-4108-AA02-DFA0A04FC94B}">
-              <ma14:wrappingTextBoxFlag xmlns:ma14="http://schemas.microsoft.com/office/mac/drawingml/2011/main" xmlns="" val="0"/>
+              <ma14:wrappingTextBoxFlag xmlns="" xmlns:ma14="http://schemas.microsoft.com/office/mac/drawingml/2011/main" val="0"/>
             </a:ext>
           </a:extLst>
         </p:spPr>
@@ -14297,10 +16958,10 @@
       </p:sp>
       <p:sp>
         <p:nvSpPr>
-          <p:cNvPr id="14" name="Presenter tag">
+          <p:cNvPr id="15" name="Presenter tag">
             <a:extLst>
               <a:ext uri="{FF2B5EF4-FFF2-40B4-BE49-F238E27FC236}">
-                <a16:creationId xmlns:a16="http://schemas.microsoft.com/office/drawing/2014/main" id="{7D5B9634-E931-4696-B393-DB7845FAAD81}"/>
+                <a16:creationId xmlns:a16="http://schemas.microsoft.com/office/drawing/2014/main" id="{68BE7D18-03C9-4B8D-83D5-B337EB8B847C}"/>
               </a:ext>
             </a:extLst>
           </p:cNvPr>
